--- a/figures/teaser.pptx
+++ b/figures/teaser.pptx
@@ -5,10 +5,11 @@
     <p:sldMasterId id="2147483720" r:id="rId1"/>
   </p:sldMasterIdLst>
   <p:notesMasterIdLst>
-    <p:notesMasterId r:id="rId3"/>
+    <p:notesMasterId r:id="rId4"/>
   </p:notesMasterIdLst>
   <p:sldIdLst>
     <p:sldId id="281" r:id="rId2"/>
+    <p:sldId id="282" r:id="rId3"/>
   </p:sldIdLst>
   <p:sldSz cx="9612313" cy="5400675"/>
   <p:notesSz cx="6858000" cy="9144000"/>
@@ -197,7 +198,7 @@
           <a:p>
             <a:fld id="{DC326FB3-BDA4-439C-AD6C-7794CCFDC1F9}" type="datetimeFigureOut">
               <a:rPr lang="zh-CN" altLang="en-US" smtClean="0"/>
-              <a:t>2026/4/20</a:t>
+              <a:t>2026/4/26</a:t>
             </a:fld>
             <a:endParaRPr lang="zh-CN" altLang="en-US"/>
           </a:p>
@@ -553,6 +554,95 @@
 </p:notes>
 </file>
 
+<file path=ppt/notesSlides/notesSlide2.xml><?xml version="1.0" encoding="utf-8"?>
+<p:notes xmlns:a="http://schemas.openxmlformats.org/drawingml/2006/main" xmlns:r="http://schemas.openxmlformats.org/officeDocument/2006/relationships" xmlns:p="http://schemas.openxmlformats.org/presentationml/2006/main">
+  <p:cSld>
+    <p:spTree>
+      <p:nvGrpSpPr>
+        <p:cNvPr id="1" name=""/>
+        <p:cNvGrpSpPr/>
+        <p:nvPr/>
+      </p:nvGrpSpPr>
+      <p:grpSpPr>
+        <a:xfrm>
+          <a:off x="0" y="0"/>
+          <a:ext cx="0" cy="0"/>
+          <a:chOff x="0" y="0"/>
+          <a:chExt cx="0" cy="0"/>
+        </a:xfrm>
+      </p:grpSpPr>
+      <p:sp>
+        <p:nvSpPr>
+          <p:cNvPr id="2" name="幻灯片图像占位符 1"/>
+          <p:cNvSpPr>
+            <a:spLocks noGrp="1" noRot="1" noChangeAspect="1"/>
+          </p:cNvSpPr>
+          <p:nvPr>
+            <p:ph type="sldImg"/>
+          </p:nvPr>
+        </p:nvSpPr>
+        <p:spPr>
+          <a:xfrm>
+            <a:off x="682625" y="1143000"/>
+            <a:ext cx="5492750" cy="3086100"/>
+          </a:xfrm>
+        </p:spPr>
+      </p:sp>
+      <p:sp>
+        <p:nvSpPr>
+          <p:cNvPr id="3" name="备注占位符 2"/>
+          <p:cNvSpPr>
+            <a:spLocks noGrp="1"/>
+          </p:cNvSpPr>
+          <p:nvPr>
+            <p:ph type="body" idx="1"/>
+          </p:nvPr>
+        </p:nvSpPr>
+        <p:spPr/>
+        <p:txBody>
+          <a:bodyPr/>
+          <a:lstStyle/>
+          <a:p>
+            <a:endParaRPr lang="zh-CN" altLang="en-US" dirty="0"/>
+          </a:p>
+        </p:txBody>
+      </p:sp>
+      <p:sp>
+        <p:nvSpPr>
+          <p:cNvPr id="4" name="灯片编号占位符 3"/>
+          <p:cNvSpPr>
+            <a:spLocks noGrp="1"/>
+          </p:cNvSpPr>
+          <p:nvPr>
+            <p:ph type="sldNum" sz="quarter" idx="5"/>
+          </p:nvPr>
+        </p:nvSpPr>
+        <p:spPr/>
+        <p:txBody>
+          <a:bodyPr/>
+          <a:lstStyle/>
+          <a:p>
+            <a:fld id="{BA04740A-487F-4724-A2C6-67FF7A5AAA76}" type="slidenum">
+              <a:rPr lang="zh-CN" altLang="en-US" smtClean="0"/>
+              <a:t>2</a:t>
+            </a:fld>
+            <a:endParaRPr lang="zh-CN" altLang="en-US"/>
+          </a:p>
+        </p:txBody>
+      </p:sp>
+    </p:spTree>
+    <p:extLst>
+      <p:ext uri="{BB962C8B-B14F-4D97-AF65-F5344CB8AC3E}">
+        <p14:creationId xmlns:p14="http://schemas.microsoft.com/office/powerpoint/2010/main" val="1120506006"/>
+      </p:ext>
+    </p:extLst>
+  </p:cSld>
+  <p:clrMapOvr>
+    <a:masterClrMapping/>
+  </p:clrMapOvr>
+</p:notes>
+</file>
+
 <file path=ppt/slideLayouts/slideLayout1.xml><?xml version="1.0" encoding="utf-8"?>
 <p:sldLayout xmlns:a="http://schemas.openxmlformats.org/drawingml/2006/main" xmlns:r="http://schemas.openxmlformats.org/officeDocument/2006/relationships" xmlns:p="http://schemas.openxmlformats.org/presentationml/2006/main" type="title" preserve="1">
   <p:cSld name="标题幻灯片">
@@ -684,7 +774,7 @@
           <a:p>
             <a:fld id="{38403DB8-BCAA-C044-AB0C-911ED2AAA810}" type="datetimeFigureOut">
               <a:rPr kumimoji="1" lang="zh-CN" altLang="en-US" smtClean="0"/>
-              <a:t>2026/4/20</a:t>
+              <a:t>2026/4/26</a:t>
             </a:fld>
             <a:endParaRPr kumimoji="1" lang="zh-CN" altLang="en-US"/>
           </a:p>
@@ -854,7 +944,7 @@
           <a:p>
             <a:fld id="{38403DB8-BCAA-C044-AB0C-911ED2AAA810}" type="datetimeFigureOut">
               <a:rPr kumimoji="1" lang="zh-CN" altLang="en-US" smtClean="0"/>
-              <a:t>2026/4/20</a:t>
+              <a:t>2026/4/26</a:t>
             </a:fld>
             <a:endParaRPr kumimoji="1" lang="zh-CN" altLang="en-US"/>
           </a:p>
@@ -1034,7 +1124,7 @@
           <a:p>
             <a:fld id="{38403DB8-BCAA-C044-AB0C-911ED2AAA810}" type="datetimeFigureOut">
               <a:rPr kumimoji="1" lang="zh-CN" altLang="en-US" smtClean="0"/>
-              <a:t>2026/4/20</a:t>
+              <a:t>2026/4/26</a:t>
             </a:fld>
             <a:endParaRPr kumimoji="1" lang="zh-CN" altLang="en-US"/>
           </a:p>
@@ -1204,7 +1294,7 @@
           <a:p>
             <a:fld id="{38403DB8-BCAA-C044-AB0C-911ED2AAA810}" type="datetimeFigureOut">
               <a:rPr kumimoji="1" lang="zh-CN" altLang="en-US" smtClean="0"/>
-              <a:t>2026/4/20</a:t>
+              <a:t>2026/4/26</a:t>
             </a:fld>
             <a:endParaRPr kumimoji="1" lang="zh-CN" altLang="en-US"/>
           </a:p>
@@ -1450,7 +1540,7 @@
           <a:p>
             <a:fld id="{38403DB8-BCAA-C044-AB0C-911ED2AAA810}" type="datetimeFigureOut">
               <a:rPr kumimoji="1" lang="zh-CN" altLang="en-US" smtClean="0"/>
-              <a:t>2026/4/20</a:t>
+              <a:t>2026/4/26</a:t>
             </a:fld>
             <a:endParaRPr kumimoji="1" lang="zh-CN" altLang="en-US"/>
           </a:p>
@@ -1682,7 +1772,7 @@
           <a:p>
             <a:fld id="{38403DB8-BCAA-C044-AB0C-911ED2AAA810}" type="datetimeFigureOut">
               <a:rPr kumimoji="1" lang="zh-CN" altLang="en-US" smtClean="0"/>
-              <a:t>2026/4/20</a:t>
+              <a:t>2026/4/26</a:t>
             </a:fld>
             <a:endParaRPr kumimoji="1" lang="zh-CN" altLang="en-US"/>
           </a:p>
@@ -2049,7 +2139,7 @@
           <a:p>
             <a:fld id="{38403DB8-BCAA-C044-AB0C-911ED2AAA810}" type="datetimeFigureOut">
               <a:rPr kumimoji="1" lang="zh-CN" altLang="en-US" smtClean="0"/>
-              <a:t>2026/4/20</a:t>
+              <a:t>2026/4/26</a:t>
             </a:fld>
             <a:endParaRPr kumimoji="1" lang="zh-CN" altLang="en-US"/>
           </a:p>
@@ -2167,7 +2257,7 @@
           <a:p>
             <a:fld id="{38403DB8-BCAA-C044-AB0C-911ED2AAA810}" type="datetimeFigureOut">
               <a:rPr kumimoji="1" lang="zh-CN" altLang="en-US" smtClean="0"/>
-              <a:t>2026/4/20</a:t>
+              <a:t>2026/4/26</a:t>
             </a:fld>
             <a:endParaRPr kumimoji="1" lang="zh-CN" altLang="en-US"/>
           </a:p>
@@ -2262,7 +2352,7 @@
           <a:p>
             <a:fld id="{38403DB8-BCAA-C044-AB0C-911ED2AAA810}" type="datetimeFigureOut">
               <a:rPr kumimoji="1" lang="zh-CN" altLang="en-US" smtClean="0"/>
-              <a:t>2026/4/20</a:t>
+              <a:t>2026/4/26</a:t>
             </a:fld>
             <a:endParaRPr kumimoji="1" lang="zh-CN" altLang="en-US"/>
           </a:p>
@@ -2539,7 +2629,7 @@
           <a:p>
             <a:fld id="{38403DB8-BCAA-C044-AB0C-911ED2AAA810}" type="datetimeFigureOut">
               <a:rPr kumimoji="1" lang="zh-CN" altLang="en-US" smtClean="0"/>
-              <a:t>2026/4/20</a:t>
+              <a:t>2026/4/26</a:t>
             </a:fld>
             <a:endParaRPr kumimoji="1" lang="zh-CN" altLang="en-US"/>
           </a:p>
@@ -2796,7 +2886,7 @@
           <a:p>
             <a:fld id="{38403DB8-BCAA-C044-AB0C-911ED2AAA810}" type="datetimeFigureOut">
               <a:rPr kumimoji="1" lang="zh-CN" altLang="en-US" smtClean="0"/>
-              <a:t>2026/4/20</a:t>
+              <a:t>2026/4/26</a:t>
             </a:fld>
             <a:endParaRPr kumimoji="1" lang="zh-CN" altLang="en-US"/>
           </a:p>
@@ -3009,7 +3099,7 @@
           <a:p>
             <a:fld id="{38403DB8-BCAA-C044-AB0C-911ED2AAA810}" type="datetimeFigureOut">
               <a:rPr kumimoji="1" lang="zh-CN" altLang="en-US" smtClean="0"/>
-              <a:t>2026/4/20</a:t>
+              <a:t>2026/4/26</a:t>
             </a:fld>
             <a:endParaRPr kumimoji="1" lang="zh-CN" altLang="en-US"/>
           </a:p>
@@ -8950,10 +9040,10 @@
           </p:nvGrpSpPr>
           <p:grpSpPr>
             <a:xfrm rot="7563864">
-              <a:off x="5731934" y="3890380"/>
-              <a:ext cx="518313" cy="1545227"/>
-              <a:chOff x="1178666" y="4711890"/>
-              <a:chExt cx="525006" cy="841888"/>
+              <a:off x="5731931" y="3890379"/>
+              <a:ext cx="518312" cy="1545226"/>
+              <a:chOff x="1178667" y="4711890"/>
+              <a:chExt cx="525005" cy="841887"/>
             </a:xfrm>
           </p:grpSpPr>
           <p:sp>
@@ -10661,6 +10751,6751 @@
 </p:sld>
 </file>
 
+<file path=ppt/slides/slide2.xml><?xml version="1.0" encoding="utf-8"?>
+<p:sld xmlns:a="http://schemas.openxmlformats.org/drawingml/2006/main" xmlns:r="http://schemas.openxmlformats.org/officeDocument/2006/relationships" xmlns:p="http://schemas.openxmlformats.org/presentationml/2006/main">
+  <p:cSld>
+    <p:spTree>
+      <p:nvGrpSpPr>
+        <p:cNvPr id="1" name="">
+          <a:extLst>
+            <a:ext uri="{FF2B5EF4-FFF2-40B4-BE49-F238E27FC236}">
+              <a16:creationId xmlns:a16="http://schemas.microsoft.com/office/drawing/2014/main" id="{BD6C5136-03CA-002F-3520-2E01364DBD0E}"/>
+            </a:ext>
+          </a:extLst>
+        </p:cNvPr>
+        <p:cNvGrpSpPr/>
+        <p:nvPr/>
+      </p:nvGrpSpPr>
+      <p:grpSpPr>
+        <a:xfrm>
+          <a:off x="0" y="0"/>
+          <a:ext cx="0" cy="0"/>
+          <a:chOff x="0" y="0"/>
+          <a:chExt cx="0" cy="0"/>
+        </a:xfrm>
+      </p:grpSpPr>
+      <p:grpSp>
+        <p:nvGrpSpPr>
+          <p:cNvPr id="5" name="组合 4">
+            <a:extLst>
+              <a:ext uri="{FF2B5EF4-FFF2-40B4-BE49-F238E27FC236}">
+                <a16:creationId xmlns:a16="http://schemas.microsoft.com/office/drawing/2014/main" id="{B333E81D-5549-A829-E62C-2858AF9FFF4F}"/>
+              </a:ext>
+            </a:extLst>
+          </p:cNvPr>
+          <p:cNvGrpSpPr/>
+          <p:nvPr/>
+        </p:nvGrpSpPr>
+        <p:grpSpPr>
+          <a:xfrm>
+            <a:off x="25500" y="20803"/>
+            <a:ext cx="9561318" cy="5359076"/>
+            <a:chOff x="1312335" y="651935"/>
+            <a:chExt cx="9524999" cy="5338719"/>
+          </a:xfrm>
+        </p:grpSpPr>
+        <p:sp>
+          <p:nvSpPr>
+            <p:cNvPr id="22" name="矩形: 圆角 21">
+              <a:extLst>
+                <a:ext uri="{FF2B5EF4-FFF2-40B4-BE49-F238E27FC236}">
+                  <a16:creationId xmlns:a16="http://schemas.microsoft.com/office/drawing/2014/main" id="{31E622EB-C1BD-0CD5-B27E-F62AF1A3C185}"/>
+                </a:ext>
+              </a:extLst>
+            </p:cNvPr>
+            <p:cNvSpPr/>
+            <p:nvPr/>
+          </p:nvSpPr>
+          <p:spPr>
+            <a:xfrm>
+              <a:off x="1312335" y="651935"/>
+              <a:ext cx="9524999" cy="5338719"/>
+            </a:xfrm>
+            <a:prstGeom prst="roundRect">
+              <a:avLst>
+                <a:gd name="adj" fmla="val 3634"/>
+              </a:avLst>
+            </a:prstGeom>
+            <a:gradFill flip="none" rotWithShape="1">
+              <a:gsLst>
+                <a:gs pos="44000">
+                  <a:srgbClr val="F8F3E8"/>
+                </a:gs>
+                <a:gs pos="0">
+                  <a:srgbClr val="F9F0E6"/>
+                </a:gs>
+                <a:gs pos="88000">
+                  <a:srgbClr val="F7F7F3"/>
+                </a:gs>
+              </a:gsLst>
+              <a:lin ang="5400000" scaled="0"/>
+              <a:tileRect/>
+            </a:gradFill>
+            <a:ln>
+              <a:solidFill>
+                <a:schemeClr val="bg1"/>
+              </a:solidFill>
+            </a:ln>
+          </p:spPr>
+          <p:style>
+            <a:lnRef idx="2">
+              <a:schemeClr val="accent1">
+                <a:shade val="15000"/>
+              </a:schemeClr>
+            </a:lnRef>
+            <a:fillRef idx="1">
+              <a:schemeClr val="accent1"/>
+            </a:fillRef>
+            <a:effectRef idx="0">
+              <a:schemeClr val="accent1"/>
+            </a:effectRef>
+            <a:fontRef idx="minor">
+              <a:schemeClr val="lt1"/>
+            </a:fontRef>
+          </p:style>
+          <p:txBody>
+            <a:bodyPr rtlCol="0" anchor="ctr"/>
+            <a:lstStyle/>
+            <a:p>
+              <a:pPr algn="ctr"/>
+              <a:endParaRPr lang="zh-CN" altLang="en-US" sz="1807" dirty="0">
+                <a:solidFill>
+                  <a:schemeClr val="tx1"/>
+                </a:solidFill>
+                <a:latin typeface="思源宋体" panose="02020400000000000000" pitchFamily="18" charset="-122"/>
+                <a:ea typeface="思源宋体" panose="02020400000000000000" pitchFamily="18" charset="-122"/>
+              </a:endParaRPr>
+            </a:p>
+          </p:txBody>
+        </p:sp>
+        <p:sp>
+          <p:nvSpPr>
+            <p:cNvPr id="41" name="矩形 24">
+              <a:extLst>
+                <a:ext uri="{FF2B5EF4-FFF2-40B4-BE49-F238E27FC236}">
+                  <a16:creationId xmlns:a16="http://schemas.microsoft.com/office/drawing/2014/main" id="{4EB8CCB3-CFB6-1D57-FDD1-221D7FB7DCDD}"/>
+                </a:ext>
+              </a:extLst>
+            </p:cNvPr>
+            <p:cNvSpPr/>
+            <p:nvPr/>
+          </p:nvSpPr>
+          <p:spPr>
+            <a:xfrm>
+              <a:off x="2195868" y="1186366"/>
+              <a:ext cx="7367006" cy="4600877"/>
+            </a:xfrm>
+            <a:custGeom>
+              <a:avLst/>
+              <a:gdLst>
+                <a:gd name="csX0" fmla="*/ 0 w 6564429"/>
+                <a:gd name="csY0" fmla="*/ 0 h 3427487"/>
+                <a:gd name="csX1" fmla="*/ 6564429 w 6564429"/>
+                <a:gd name="csY1" fmla="*/ 0 h 3427487"/>
+                <a:gd name="csX2" fmla="*/ 6564429 w 6564429"/>
+                <a:gd name="csY2" fmla="*/ 3427487 h 3427487"/>
+                <a:gd name="csX3" fmla="*/ 0 w 6564429"/>
+                <a:gd name="csY3" fmla="*/ 3427487 h 3427487"/>
+                <a:gd name="csX4" fmla="*/ 0 w 6564429"/>
+                <a:gd name="csY4" fmla="*/ 0 h 3427487"/>
+                <a:gd name="csX0" fmla="*/ 0 w 7786837"/>
+                <a:gd name="csY0" fmla="*/ 9625 h 3427487"/>
+                <a:gd name="csX1" fmla="*/ 7786837 w 7786837"/>
+                <a:gd name="csY1" fmla="*/ 0 h 3427487"/>
+                <a:gd name="csX2" fmla="*/ 7786837 w 7786837"/>
+                <a:gd name="csY2" fmla="*/ 3427487 h 3427487"/>
+                <a:gd name="csX3" fmla="*/ 1222408 w 7786837"/>
+                <a:gd name="csY3" fmla="*/ 3427487 h 3427487"/>
+                <a:gd name="csX4" fmla="*/ 0 w 7786837"/>
+                <a:gd name="csY4" fmla="*/ 9625 h 3427487"/>
+                <a:gd name="csX0" fmla="*/ 3590223 w 11377060"/>
+                <a:gd name="csY0" fmla="*/ 9625 h 3427487"/>
+                <a:gd name="csX1" fmla="*/ 11377060 w 11377060"/>
+                <a:gd name="csY1" fmla="*/ 0 h 3427487"/>
+                <a:gd name="csX2" fmla="*/ 11377060 w 11377060"/>
+                <a:gd name="csY2" fmla="*/ 3427487 h 3427487"/>
+                <a:gd name="csX3" fmla="*/ 0 w 11377060"/>
+                <a:gd name="csY3" fmla="*/ 1213676 h 3427487"/>
+                <a:gd name="csX4" fmla="*/ 3590223 w 11377060"/>
+                <a:gd name="csY4" fmla="*/ 9625 h 3427487"/>
+                <a:gd name="csX0" fmla="*/ 3628724 w 11377060"/>
+                <a:gd name="csY0" fmla="*/ 0 h 4120507"/>
+                <a:gd name="csX1" fmla="*/ 11377060 w 11377060"/>
+                <a:gd name="csY1" fmla="*/ 693020 h 4120507"/>
+                <a:gd name="csX2" fmla="*/ 11377060 w 11377060"/>
+                <a:gd name="csY2" fmla="*/ 4120507 h 4120507"/>
+                <a:gd name="csX3" fmla="*/ 0 w 11377060"/>
+                <a:gd name="csY3" fmla="*/ 1906696 h 4120507"/>
+                <a:gd name="csX4" fmla="*/ 3628724 w 11377060"/>
+                <a:gd name="csY4" fmla="*/ 0 h 4120507"/>
+                <a:gd name="csX0" fmla="*/ 3667225 w 11415561"/>
+                <a:gd name="csY0" fmla="*/ 0 h 4120507"/>
+                <a:gd name="csX1" fmla="*/ 11415561 w 11415561"/>
+                <a:gd name="csY1" fmla="*/ 693020 h 4120507"/>
+                <a:gd name="csX2" fmla="*/ 11415561 w 11415561"/>
+                <a:gd name="csY2" fmla="*/ 4120507 h 4120507"/>
+                <a:gd name="csX3" fmla="*/ 0 w 11415561"/>
+                <a:gd name="csY3" fmla="*/ 1868195 h 4120507"/>
+                <a:gd name="csX4" fmla="*/ 3667225 w 11415561"/>
+                <a:gd name="csY4" fmla="*/ 0 h 4120507"/>
+                <a:gd name="csX0" fmla="*/ 3667226 w 11415562"/>
+                <a:gd name="csY0" fmla="*/ 0 h 2609341"/>
+                <a:gd name="csX1" fmla="*/ 11415562 w 11415562"/>
+                <a:gd name="csY1" fmla="*/ 693020 h 2609341"/>
+                <a:gd name="csX2" fmla="*/ 0 w 11415562"/>
+                <a:gd name="csY2" fmla="*/ 2609341 h 2609341"/>
+                <a:gd name="csX3" fmla="*/ 1 w 11415562"/>
+                <a:gd name="csY3" fmla="*/ 1868195 h 2609341"/>
+                <a:gd name="csX4" fmla="*/ 3667226 w 11415562"/>
+                <a:gd name="csY4" fmla="*/ 0 h 2609341"/>
+                <a:gd name="csX0" fmla="*/ 3667226 w 4148488"/>
+                <a:gd name="csY0" fmla="*/ 0 h 4600876"/>
+                <a:gd name="csX1" fmla="*/ 4148488 w 4148488"/>
+                <a:gd name="csY1" fmla="*/ 4600876 h 4600876"/>
+                <a:gd name="csX2" fmla="*/ 0 w 4148488"/>
+                <a:gd name="csY2" fmla="*/ 2609341 h 4600876"/>
+                <a:gd name="csX3" fmla="*/ 1 w 4148488"/>
+                <a:gd name="csY3" fmla="*/ 1868195 h 4600876"/>
+                <a:gd name="csX4" fmla="*/ 3667226 w 4148488"/>
+                <a:gd name="csY4" fmla="*/ 0 h 4600876"/>
+                <a:gd name="csX0" fmla="*/ 3667226 w 4152169"/>
+                <a:gd name="csY0" fmla="*/ 0 h 4649003"/>
+                <a:gd name="csX1" fmla="*/ 4148488 w 4152169"/>
+                <a:gd name="csY1" fmla="*/ 4600876 h 4649003"/>
+                <a:gd name="csX2" fmla="*/ 4152169 w 4152169"/>
+                <a:gd name="csY2" fmla="*/ 4649003 h 4649003"/>
+                <a:gd name="csX3" fmla="*/ 0 w 4152169"/>
+                <a:gd name="csY3" fmla="*/ 2609341 h 4649003"/>
+                <a:gd name="csX4" fmla="*/ 1 w 4152169"/>
+                <a:gd name="csY4" fmla="*/ 1868195 h 4649003"/>
+                <a:gd name="csX5" fmla="*/ 3667226 w 4152169"/>
+                <a:gd name="csY5" fmla="*/ 0 h 4649003"/>
+                <a:gd name="csX0" fmla="*/ 3667226 w 4148488"/>
+                <a:gd name="csY0" fmla="*/ 0 h 4677879"/>
+                <a:gd name="csX1" fmla="*/ 4148488 w 4148488"/>
+                <a:gd name="csY1" fmla="*/ 4600876 h 4677879"/>
+                <a:gd name="csX2" fmla="*/ 3767159 w 4148488"/>
+                <a:gd name="csY2" fmla="*/ 4677879 h 4677879"/>
+                <a:gd name="csX3" fmla="*/ 0 w 4148488"/>
+                <a:gd name="csY3" fmla="*/ 2609341 h 4677879"/>
+                <a:gd name="csX4" fmla="*/ 1 w 4148488"/>
+                <a:gd name="csY4" fmla="*/ 1868195 h 4677879"/>
+                <a:gd name="csX5" fmla="*/ 3667226 w 4148488"/>
+                <a:gd name="csY5" fmla="*/ 0 h 4677879"/>
+                <a:gd name="csX0" fmla="*/ 3667226 w 7353701"/>
+                <a:gd name="csY0" fmla="*/ 0 h 4677879"/>
+                <a:gd name="csX1" fmla="*/ 7353701 w 7353701"/>
+                <a:gd name="csY1" fmla="*/ 2723950 h 4677879"/>
+                <a:gd name="csX2" fmla="*/ 3767159 w 7353701"/>
+                <a:gd name="csY2" fmla="*/ 4677879 h 4677879"/>
+                <a:gd name="csX3" fmla="*/ 0 w 7353701"/>
+                <a:gd name="csY3" fmla="*/ 2609341 h 4677879"/>
+                <a:gd name="csX4" fmla="*/ 1 w 7353701"/>
+                <a:gd name="csY4" fmla="*/ 1868195 h 4677879"/>
+                <a:gd name="csX5" fmla="*/ 3667226 w 7353701"/>
+                <a:gd name="csY5" fmla="*/ 0 h 4677879"/>
+                <a:gd name="csX0" fmla="*/ 3667226 w 7353701"/>
+                <a:gd name="csY0" fmla="*/ 0 h 4600877"/>
+                <a:gd name="csX1" fmla="*/ 7353701 w 7353701"/>
+                <a:gd name="csY1" fmla="*/ 2723950 h 4600877"/>
+                <a:gd name="csX2" fmla="*/ 4132919 w 7353701"/>
+                <a:gd name="csY2" fmla="*/ 4600877 h 4600877"/>
+                <a:gd name="csX3" fmla="*/ 0 w 7353701"/>
+                <a:gd name="csY3" fmla="*/ 2609341 h 4600877"/>
+                <a:gd name="csX4" fmla="*/ 1 w 7353701"/>
+                <a:gd name="csY4" fmla="*/ 1868195 h 4600877"/>
+                <a:gd name="csX5" fmla="*/ 3667226 w 7353701"/>
+                <a:gd name="csY5" fmla="*/ 0 h 4600877"/>
+                <a:gd name="csX0" fmla="*/ 3667226 w 7353701"/>
+                <a:gd name="csY0" fmla="*/ 0 h 4600877"/>
+                <a:gd name="csX1" fmla="*/ 7353701 w 7353701"/>
+                <a:gd name="csY1" fmla="*/ 2723950 h 4600877"/>
+                <a:gd name="csX2" fmla="*/ 7290005 w 7353701"/>
+                <a:gd name="csY2" fmla="*/ 2714326 h 4600877"/>
+                <a:gd name="csX3" fmla="*/ 4132919 w 7353701"/>
+                <a:gd name="csY3" fmla="*/ 4600877 h 4600877"/>
+                <a:gd name="csX4" fmla="*/ 0 w 7353701"/>
+                <a:gd name="csY4" fmla="*/ 2609341 h 4600877"/>
+                <a:gd name="csX5" fmla="*/ 1 w 7353701"/>
+                <a:gd name="csY5" fmla="*/ 1868195 h 4600877"/>
+                <a:gd name="csX6" fmla="*/ 3667226 w 7353701"/>
+                <a:gd name="csY6" fmla="*/ 0 h 4600877"/>
+                <a:gd name="csX0" fmla="*/ 3667226 w 7353701"/>
+                <a:gd name="csY0" fmla="*/ 0 h 4600877"/>
+                <a:gd name="csX1" fmla="*/ 7353701 w 7353701"/>
+                <a:gd name="csY1" fmla="*/ 2723950 h 4600877"/>
+                <a:gd name="csX2" fmla="*/ 7270754 w 7353701"/>
+                <a:gd name="csY2" fmla="*/ 3003084 h 4600877"/>
+                <a:gd name="csX3" fmla="*/ 4132919 w 7353701"/>
+                <a:gd name="csY3" fmla="*/ 4600877 h 4600877"/>
+                <a:gd name="csX4" fmla="*/ 0 w 7353701"/>
+                <a:gd name="csY4" fmla="*/ 2609341 h 4600877"/>
+                <a:gd name="csX5" fmla="*/ 1 w 7353701"/>
+                <a:gd name="csY5" fmla="*/ 1868195 h 4600877"/>
+                <a:gd name="csX6" fmla="*/ 3667226 w 7353701"/>
+                <a:gd name="csY6" fmla="*/ 0 h 4600877"/>
+                <a:gd name="csX0" fmla="*/ 3667226 w 7344076"/>
+                <a:gd name="csY0" fmla="*/ 0 h 4600877"/>
+                <a:gd name="csX1" fmla="*/ 7344076 w 7344076"/>
+                <a:gd name="csY1" fmla="*/ 1886552 h 4600877"/>
+                <a:gd name="csX2" fmla="*/ 7270754 w 7344076"/>
+                <a:gd name="csY2" fmla="*/ 3003084 h 4600877"/>
+                <a:gd name="csX3" fmla="*/ 4132919 w 7344076"/>
+                <a:gd name="csY3" fmla="*/ 4600877 h 4600877"/>
+                <a:gd name="csX4" fmla="*/ 0 w 7344076"/>
+                <a:gd name="csY4" fmla="*/ 2609341 h 4600877"/>
+                <a:gd name="csX5" fmla="*/ 1 w 7344076"/>
+                <a:gd name="csY5" fmla="*/ 1868195 h 4600877"/>
+                <a:gd name="csX6" fmla="*/ 3667226 w 7344076"/>
+                <a:gd name="csY6" fmla="*/ 0 h 4600877"/>
+                <a:gd name="csX0" fmla="*/ 3667226 w 7357381"/>
+                <a:gd name="csY0" fmla="*/ 0 h 4600877"/>
+                <a:gd name="csX1" fmla="*/ 7344076 w 7357381"/>
+                <a:gd name="csY1" fmla="*/ 1886552 h 4600877"/>
+                <a:gd name="csX2" fmla="*/ 7357381 w 7357381"/>
+                <a:gd name="csY2" fmla="*/ 2666200 h 4600877"/>
+                <a:gd name="csX3" fmla="*/ 4132919 w 7357381"/>
+                <a:gd name="csY3" fmla="*/ 4600877 h 4600877"/>
+                <a:gd name="csX4" fmla="*/ 0 w 7357381"/>
+                <a:gd name="csY4" fmla="*/ 2609341 h 4600877"/>
+                <a:gd name="csX5" fmla="*/ 1 w 7357381"/>
+                <a:gd name="csY5" fmla="*/ 1868195 h 4600877"/>
+                <a:gd name="csX6" fmla="*/ 3667226 w 7357381"/>
+                <a:gd name="csY6" fmla="*/ 0 h 4600877"/>
+                <a:gd name="csX0" fmla="*/ 3667226 w 7367006"/>
+                <a:gd name="csY0" fmla="*/ 0 h 4600877"/>
+                <a:gd name="csX1" fmla="*/ 7344076 w 7367006"/>
+                <a:gd name="csY1" fmla="*/ 1886552 h 4600877"/>
+                <a:gd name="csX2" fmla="*/ 7367006 w 7367006"/>
+                <a:gd name="csY2" fmla="*/ 2704701 h 4600877"/>
+                <a:gd name="csX3" fmla="*/ 4132919 w 7367006"/>
+                <a:gd name="csY3" fmla="*/ 4600877 h 4600877"/>
+                <a:gd name="csX4" fmla="*/ 0 w 7367006"/>
+                <a:gd name="csY4" fmla="*/ 2609341 h 4600877"/>
+                <a:gd name="csX5" fmla="*/ 1 w 7367006"/>
+                <a:gd name="csY5" fmla="*/ 1868195 h 4600877"/>
+                <a:gd name="csX6" fmla="*/ 3667226 w 7367006"/>
+                <a:gd name="csY6" fmla="*/ 0 h 4600877"/>
+              </a:gdLst>
+              <a:ahLst/>
+              <a:cxnLst>
+                <a:cxn ang="0">
+                  <a:pos x="csX0" y="csY0"/>
+                </a:cxn>
+                <a:cxn ang="0">
+                  <a:pos x="csX1" y="csY1"/>
+                </a:cxn>
+                <a:cxn ang="0">
+                  <a:pos x="csX2" y="csY2"/>
+                </a:cxn>
+                <a:cxn ang="0">
+                  <a:pos x="csX3" y="csY3"/>
+                </a:cxn>
+                <a:cxn ang="0">
+                  <a:pos x="csX4" y="csY4"/>
+                </a:cxn>
+                <a:cxn ang="0">
+                  <a:pos x="csX5" y="csY5"/>
+                </a:cxn>
+                <a:cxn ang="0">
+                  <a:pos x="csX6" y="csY6"/>
+                </a:cxn>
+              </a:cxnLst>
+              <a:rect l="l" t="t" r="r" b="b"/>
+              <a:pathLst>
+                <a:path w="7367006" h="4600877">
+                  <a:moveTo>
+                    <a:pt x="3667226" y="0"/>
+                  </a:moveTo>
+                  <a:lnTo>
+                    <a:pt x="7344076" y="1886552"/>
+                  </a:lnTo>
+                  <a:lnTo>
+                    <a:pt x="7367006" y="2704701"/>
+                  </a:lnTo>
+                  <a:lnTo>
+                    <a:pt x="4132919" y="4600877"/>
+                  </a:lnTo>
+                  <a:lnTo>
+                    <a:pt x="0" y="2609341"/>
+                  </a:lnTo>
+                  <a:cubicBezTo>
+                    <a:pt x="0" y="2362292"/>
+                    <a:pt x="1" y="2115244"/>
+                    <a:pt x="1" y="1868195"/>
+                  </a:cubicBezTo>
+                  <a:lnTo>
+                    <a:pt x="3667226" y="0"/>
+                  </a:lnTo>
+                  <a:close/>
+                </a:path>
+              </a:pathLst>
+            </a:custGeom>
+            <a:solidFill>
+              <a:schemeClr val="bg1"/>
+            </a:solidFill>
+            <a:ln>
+              <a:noFill/>
+            </a:ln>
+          </p:spPr>
+          <p:style>
+            <a:lnRef idx="2">
+              <a:schemeClr val="accent1">
+                <a:shade val="15000"/>
+              </a:schemeClr>
+            </a:lnRef>
+            <a:fillRef idx="1">
+              <a:schemeClr val="accent1"/>
+            </a:fillRef>
+            <a:effectRef idx="0">
+              <a:schemeClr val="accent1"/>
+            </a:effectRef>
+            <a:fontRef idx="minor">
+              <a:schemeClr val="lt1"/>
+            </a:fontRef>
+          </p:style>
+          <p:txBody>
+            <a:bodyPr rtlCol="0" anchor="ctr"/>
+            <a:lstStyle/>
+            <a:p>
+              <a:pPr algn="ctr"/>
+              <a:endParaRPr lang="zh-CN" altLang="en-US" sz="1807" dirty="0">
+                <a:latin typeface="思源宋体" panose="02020400000000000000" pitchFamily="18" charset="-122"/>
+                <a:ea typeface="思源宋体" panose="02020400000000000000" pitchFamily="18" charset="-122"/>
+              </a:endParaRPr>
+            </a:p>
+          </p:txBody>
+        </p:sp>
+        <p:sp>
+          <p:nvSpPr>
+            <p:cNvPr id="50" name="任意多边形: 形状 49">
+              <a:extLst>
+                <a:ext uri="{FF2B5EF4-FFF2-40B4-BE49-F238E27FC236}">
+                  <a16:creationId xmlns:a16="http://schemas.microsoft.com/office/drawing/2014/main" id="{CC59DEB6-E17D-B7E0-2AF2-586E20B6256E}"/>
+                </a:ext>
+              </a:extLst>
+            </p:cNvPr>
+            <p:cNvSpPr/>
+            <p:nvPr/>
+          </p:nvSpPr>
+          <p:spPr>
+            <a:xfrm>
+              <a:off x="5355206" y="2435379"/>
+              <a:ext cx="1225216" cy="2777067"/>
+            </a:xfrm>
+            <a:custGeom>
+              <a:avLst/>
+              <a:gdLst>
+                <a:gd name="csX0" fmla="*/ 1338207 w 1343647"/>
+                <a:gd name="csY0" fmla="*/ 2809361 h 2809361"/>
+                <a:gd name="csX1" fmla="*/ 1194274 w 1343647"/>
+                <a:gd name="csY1" fmla="*/ 2733161 h 2809361"/>
+                <a:gd name="csX2" fmla="*/ 343374 w 1343647"/>
+                <a:gd name="csY2" fmla="*/ 2364861 h 2809361"/>
+                <a:gd name="csX3" fmla="*/ 233307 w 1343647"/>
+                <a:gd name="csY3" fmla="*/ 1552061 h 2809361"/>
+                <a:gd name="csX4" fmla="*/ 347607 w 1343647"/>
+                <a:gd name="csY4" fmla="*/ 1217627 h 2809361"/>
+                <a:gd name="csX5" fmla="*/ 474 w 1343647"/>
+                <a:gd name="csY5" fmla="*/ 984794 h 2809361"/>
+                <a:gd name="csX6" fmla="*/ 284107 w 1343647"/>
+                <a:gd name="csY6" fmla="*/ 485261 h 2809361"/>
+                <a:gd name="csX7" fmla="*/ 754007 w 1343647"/>
+                <a:gd name="csY7" fmla="*/ 298994 h 2809361"/>
+                <a:gd name="csX8" fmla="*/ 847141 w 1343647"/>
+                <a:gd name="csY8" fmla="*/ 61927 h 2809361"/>
+                <a:gd name="csX9" fmla="*/ 851374 w 1343647"/>
+                <a:gd name="csY9" fmla="*/ 6894 h 2809361"/>
+                <a:gd name="csX10" fmla="*/ 825974 w 1343647"/>
+                <a:gd name="csY10" fmla="*/ 2661 h 2809361"/>
+                <a:gd name="csX0" fmla="*/ 1338207 w 1343647"/>
+                <a:gd name="csY0" fmla="*/ 2802467 h 2802467"/>
+                <a:gd name="csX1" fmla="*/ 1194274 w 1343647"/>
+                <a:gd name="csY1" fmla="*/ 2726267 h 2802467"/>
+                <a:gd name="csX2" fmla="*/ 343374 w 1343647"/>
+                <a:gd name="csY2" fmla="*/ 2357967 h 2802467"/>
+                <a:gd name="csX3" fmla="*/ 233307 w 1343647"/>
+                <a:gd name="csY3" fmla="*/ 1545167 h 2802467"/>
+                <a:gd name="csX4" fmla="*/ 347607 w 1343647"/>
+                <a:gd name="csY4" fmla="*/ 1210733 h 2802467"/>
+                <a:gd name="csX5" fmla="*/ 474 w 1343647"/>
+                <a:gd name="csY5" fmla="*/ 977900 h 2802467"/>
+                <a:gd name="csX6" fmla="*/ 284107 w 1343647"/>
+                <a:gd name="csY6" fmla="*/ 478367 h 2802467"/>
+                <a:gd name="csX7" fmla="*/ 754007 w 1343647"/>
+                <a:gd name="csY7" fmla="*/ 292100 h 2802467"/>
+                <a:gd name="csX8" fmla="*/ 847141 w 1343647"/>
+                <a:gd name="csY8" fmla="*/ 55033 h 2802467"/>
+                <a:gd name="csX9" fmla="*/ 851374 w 1343647"/>
+                <a:gd name="csY9" fmla="*/ 0 h 2802467"/>
+                <a:gd name="connsiteX0" fmla="*/ 1341901 w 1347341"/>
+                <a:gd name="connsiteY0" fmla="*/ 2802467 h 2802467"/>
+                <a:gd name="connsiteX1" fmla="*/ 1197968 w 1347341"/>
+                <a:gd name="connsiteY1" fmla="*/ 2726267 h 2802467"/>
+                <a:gd name="connsiteX2" fmla="*/ 347068 w 1347341"/>
+                <a:gd name="connsiteY2" fmla="*/ 2357967 h 2802467"/>
+                <a:gd name="connsiteX3" fmla="*/ 237001 w 1347341"/>
+                <a:gd name="connsiteY3" fmla="*/ 1545167 h 2802467"/>
+                <a:gd name="connsiteX4" fmla="*/ 497659 w 1347341"/>
+                <a:gd name="connsiteY4" fmla="*/ 1197644 h 2802467"/>
+                <a:gd name="connsiteX5" fmla="*/ 4168 w 1347341"/>
+                <a:gd name="connsiteY5" fmla="*/ 977900 h 2802467"/>
+                <a:gd name="connsiteX6" fmla="*/ 287801 w 1347341"/>
+                <a:gd name="connsiteY6" fmla="*/ 478367 h 2802467"/>
+                <a:gd name="connsiteX7" fmla="*/ 757701 w 1347341"/>
+                <a:gd name="connsiteY7" fmla="*/ 292100 h 2802467"/>
+                <a:gd name="connsiteX8" fmla="*/ 850835 w 1347341"/>
+                <a:gd name="connsiteY8" fmla="*/ 55033 h 2802467"/>
+                <a:gd name="connsiteX9" fmla="*/ 855068 w 1347341"/>
+                <a:gd name="connsiteY9" fmla="*/ 0 h 2802467"/>
+                <a:gd name="connsiteX0" fmla="*/ 1341901 w 1347341"/>
+                <a:gd name="connsiteY0" fmla="*/ 2802467 h 2802467"/>
+                <a:gd name="connsiteX1" fmla="*/ 1197968 w 1347341"/>
+                <a:gd name="connsiteY1" fmla="*/ 2726267 h 2802467"/>
+                <a:gd name="connsiteX2" fmla="*/ 347068 w 1347341"/>
+                <a:gd name="connsiteY2" fmla="*/ 2357967 h 2802467"/>
+                <a:gd name="connsiteX3" fmla="*/ 370053 w 1347341"/>
+                <a:gd name="connsiteY3" fmla="*/ 1551712 h 2802467"/>
+                <a:gd name="connsiteX4" fmla="*/ 497659 w 1347341"/>
+                <a:gd name="connsiteY4" fmla="*/ 1197644 h 2802467"/>
+                <a:gd name="connsiteX5" fmla="*/ 4168 w 1347341"/>
+                <a:gd name="connsiteY5" fmla="*/ 977900 h 2802467"/>
+                <a:gd name="connsiteX6" fmla="*/ 287801 w 1347341"/>
+                <a:gd name="connsiteY6" fmla="*/ 478367 h 2802467"/>
+                <a:gd name="connsiteX7" fmla="*/ 757701 w 1347341"/>
+                <a:gd name="connsiteY7" fmla="*/ 292100 h 2802467"/>
+                <a:gd name="connsiteX8" fmla="*/ 850835 w 1347341"/>
+                <a:gd name="connsiteY8" fmla="*/ 55033 h 2802467"/>
+                <a:gd name="connsiteX9" fmla="*/ 855068 w 1347341"/>
+                <a:gd name="connsiteY9" fmla="*/ 0 h 2802467"/>
+                <a:gd name="connsiteX0" fmla="*/ 1341901 w 1347341"/>
+                <a:gd name="connsiteY0" fmla="*/ 2802467 h 2802467"/>
+                <a:gd name="connsiteX1" fmla="*/ 1197968 w 1347341"/>
+                <a:gd name="connsiteY1" fmla="*/ 2726267 h 2802467"/>
+                <a:gd name="connsiteX2" fmla="*/ 347068 w 1347341"/>
+                <a:gd name="connsiteY2" fmla="*/ 2357967 h 2802467"/>
+                <a:gd name="connsiteX3" fmla="*/ 449885 w 1347341"/>
+                <a:gd name="connsiteY3" fmla="*/ 1564800 h 2802467"/>
+                <a:gd name="connsiteX4" fmla="*/ 497659 w 1347341"/>
+                <a:gd name="connsiteY4" fmla="*/ 1197644 h 2802467"/>
+                <a:gd name="connsiteX5" fmla="*/ 4168 w 1347341"/>
+                <a:gd name="connsiteY5" fmla="*/ 977900 h 2802467"/>
+                <a:gd name="connsiteX6" fmla="*/ 287801 w 1347341"/>
+                <a:gd name="connsiteY6" fmla="*/ 478367 h 2802467"/>
+                <a:gd name="connsiteX7" fmla="*/ 757701 w 1347341"/>
+                <a:gd name="connsiteY7" fmla="*/ 292100 h 2802467"/>
+                <a:gd name="connsiteX8" fmla="*/ 850835 w 1347341"/>
+                <a:gd name="connsiteY8" fmla="*/ 55033 h 2802467"/>
+                <a:gd name="connsiteX9" fmla="*/ 855068 w 1347341"/>
+                <a:gd name="connsiteY9" fmla="*/ 0 h 2802467"/>
+                <a:gd name="connsiteX0" fmla="*/ 1341901 w 1347341"/>
+                <a:gd name="connsiteY0" fmla="*/ 2802467 h 2802467"/>
+                <a:gd name="connsiteX1" fmla="*/ 1197968 w 1347341"/>
+                <a:gd name="connsiteY1" fmla="*/ 2726267 h 2802467"/>
+                <a:gd name="connsiteX2" fmla="*/ 347068 w 1347341"/>
+                <a:gd name="connsiteY2" fmla="*/ 2357967 h 2802467"/>
+                <a:gd name="connsiteX3" fmla="*/ 449885 w 1347341"/>
+                <a:gd name="connsiteY3" fmla="*/ 1564800 h 2802467"/>
+                <a:gd name="connsiteX4" fmla="*/ 497659 w 1347341"/>
+                <a:gd name="connsiteY4" fmla="*/ 1197644 h 2802467"/>
+                <a:gd name="connsiteX5" fmla="*/ 4168 w 1347341"/>
+                <a:gd name="connsiteY5" fmla="*/ 977900 h 2802467"/>
+                <a:gd name="connsiteX6" fmla="*/ 287801 w 1347341"/>
+                <a:gd name="connsiteY6" fmla="*/ 478367 h 2802467"/>
+                <a:gd name="connsiteX7" fmla="*/ 757701 w 1347341"/>
+                <a:gd name="connsiteY7" fmla="*/ 292100 h 2802467"/>
+                <a:gd name="connsiteX8" fmla="*/ 850835 w 1347341"/>
+                <a:gd name="connsiteY8" fmla="*/ 55033 h 2802467"/>
+                <a:gd name="connsiteX9" fmla="*/ 855068 w 1347341"/>
+                <a:gd name="connsiteY9" fmla="*/ 0 h 2802467"/>
+                <a:gd name="connsiteX0" fmla="*/ 1341901 w 1347341"/>
+                <a:gd name="connsiteY0" fmla="*/ 2802467 h 2802467"/>
+                <a:gd name="connsiteX1" fmla="*/ 1197968 w 1347341"/>
+                <a:gd name="connsiteY1" fmla="*/ 2726267 h 2802467"/>
+                <a:gd name="connsiteX2" fmla="*/ 347068 w 1347341"/>
+                <a:gd name="connsiteY2" fmla="*/ 2357967 h 2802467"/>
+                <a:gd name="connsiteX3" fmla="*/ 449885 w 1347341"/>
+                <a:gd name="connsiteY3" fmla="*/ 1564800 h 2802467"/>
+                <a:gd name="connsiteX4" fmla="*/ 497659 w 1347341"/>
+                <a:gd name="connsiteY4" fmla="*/ 1197644 h 2802467"/>
+                <a:gd name="connsiteX5" fmla="*/ 4168 w 1347341"/>
+                <a:gd name="connsiteY5" fmla="*/ 977900 h 2802467"/>
+                <a:gd name="connsiteX6" fmla="*/ 287801 w 1347341"/>
+                <a:gd name="connsiteY6" fmla="*/ 478367 h 2802467"/>
+                <a:gd name="connsiteX7" fmla="*/ 757701 w 1347341"/>
+                <a:gd name="connsiteY7" fmla="*/ 292100 h 2802467"/>
+                <a:gd name="connsiteX8" fmla="*/ 850835 w 1347341"/>
+                <a:gd name="connsiteY8" fmla="*/ 55033 h 2802467"/>
+                <a:gd name="connsiteX9" fmla="*/ 855068 w 1347341"/>
+                <a:gd name="connsiteY9" fmla="*/ 0 h 2802467"/>
+                <a:gd name="connsiteX0" fmla="*/ 1337762 w 1343202"/>
+                <a:gd name="connsiteY0" fmla="*/ 2802467 h 2802467"/>
+                <a:gd name="connsiteX1" fmla="*/ 1193829 w 1343202"/>
+                <a:gd name="connsiteY1" fmla="*/ 2726267 h 2802467"/>
+                <a:gd name="connsiteX2" fmla="*/ 342929 w 1343202"/>
+                <a:gd name="connsiteY2" fmla="*/ 2357967 h 2802467"/>
+                <a:gd name="connsiteX3" fmla="*/ 445746 w 1343202"/>
+                <a:gd name="connsiteY3" fmla="*/ 1564800 h 2802467"/>
+                <a:gd name="connsiteX4" fmla="*/ 267331 w 1343202"/>
+                <a:gd name="connsiteY4" fmla="*/ 1184554 h 2802467"/>
+                <a:gd name="connsiteX5" fmla="*/ 29 w 1343202"/>
+                <a:gd name="connsiteY5" fmla="*/ 977900 h 2802467"/>
+                <a:gd name="connsiteX6" fmla="*/ 283662 w 1343202"/>
+                <a:gd name="connsiteY6" fmla="*/ 478367 h 2802467"/>
+                <a:gd name="connsiteX7" fmla="*/ 753562 w 1343202"/>
+                <a:gd name="connsiteY7" fmla="*/ 292100 h 2802467"/>
+                <a:gd name="connsiteX8" fmla="*/ 846696 w 1343202"/>
+                <a:gd name="connsiteY8" fmla="*/ 55033 h 2802467"/>
+                <a:gd name="connsiteX9" fmla="*/ 850929 w 1343202"/>
+                <a:gd name="connsiteY9" fmla="*/ 0 h 2802467"/>
+                <a:gd name="connsiteX0" fmla="*/ 1337763 w 1343203"/>
+                <a:gd name="connsiteY0" fmla="*/ 2802467 h 2802467"/>
+                <a:gd name="connsiteX1" fmla="*/ 1193830 w 1343203"/>
+                <a:gd name="connsiteY1" fmla="*/ 2726267 h 2802467"/>
+                <a:gd name="connsiteX2" fmla="*/ 342930 w 1343203"/>
+                <a:gd name="connsiteY2" fmla="*/ 2357967 h 2802467"/>
+                <a:gd name="connsiteX3" fmla="*/ 552188 w 1343203"/>
+                <a:gd name="connsiteY3" fmla="*/ 1715322 h 2802467"/>
+                <a:gd name="connsiteX4" fmla="*/ 267332 w 1343203"/>
+                <a:gd name="connsiteY4" fmla="*/ 1184554 h 2802467"/>
+                <a:gd name="connsiteX5" fmla="*/ 30 w 1343203"/>
+                <a:gd name="connsiteY5" fmla="*/ 977900 h 2802467"/>
+                <a:gd name="connsiteX6" fmla="*/ 283663 w 1343203"/>
+                <a:gd name="connsiteY6" fmla="*/ 478367 h 2802467"/>
+                <a:gd name="connsiteX7" fmla="*/ 753563 w 1343203"/>
+                <a:gd name="connsiteY7" fmla="*/ 292100 h 2802467"/>
+                <a:gd name="connsiteX8" fmla="*/ 846697 w 1343203"/>
+                <a:gd name="connsiteY8" fmla="*/ 55033 h 2802467"/>
+                <a:gd name="connsiteX9" fmla="*/ 850930 w 1343203"/>
+                <a:gd name="connsiteY9" fmla="*/ 0 h 2802467"/>
+                <a:gd name="connsiteX0" fmla="*/ 1337763 w 1343203"/>
+                <a:gd name="connsiteY0" fmla="*/ 2802467 h 2802467"/>
+                <a:gd name="connsiteX1" fmla="*/ 1193830 w 1343203"/>
+                <a:gd name="connsiteY1" fmla="*/ 2726267 h 2802467"/>
+                <a:gd name="connsiteX2" fmla="*/ 342930 w 1343203"/>
+                <a:gd name="connsiteY2" fmla="*/ 2357967 h 2802467"/>
+                <a:gd name="connsiteX3" fmla="*/ 505619 w 1343203"/>
+                <a:gd name="connsiteY3" fmla="*/ 1695688 h 2802467"/>
+                <a:gd name="connsiteX4" fmla="*/ 267332 w 1343203"/>
+                <a:gd name="connsiteY4" fmla="*/ 1184554 h 2802467"/>
+                <a:gd name="connsiteX5" fmla="*/ 30 w 1343203"/>
+                <a:gd name="connsiteY5" fmla="*/ 977900 h 2802467"/>
+                <a:gd name="connsiteX6" fmla="*/ 283663 w 1343203"/>
+                <a:gd name="connsiteY6" fmla="*/ 478367 h 2802467"/>
+                <a:gd name="connsiteX7" fmla="*/ 753563 w 1343203"/>
+                <a:gd name="connsiteY7" fmla="*/ 292100 h 2802467"/>
+                <a:gd name="connsiteX8" fmla="*/ 846697 w 1343203"/>
+                <a:gd name="connsiteY8" fmla="*/ 55033 h 2802467"/>
+                <a:gd name="connsiteX9" fmla="*/ 850930 w 1343203"/>
+                <a:gd name="connsiteY9" fmla="*/ 0 h 2802467"/>
+                <a:gd name="connsiteX0" fmla="*/ 1337764 w 1343204"/>
+                <a:gd name="connsiteY0" fmla="*/ 2802467 h 2802467"/>
+                <a:gd name="connsiteX1" fmla="*/ 1193831 w 1343204"/>
+                <a:gd name="connsiteY1" fmla="*/ 2726267 h 2802467"/>
+                <a:gd name="connsiteX2" fmla="*/ 342931 w 1343204"/>
+                <a:gd name="connsiteY2" fmla="*/ 2357967 h 2802467"/>
+                <a:gd name="connsiteX3" fmla="*/ 584085 w 1343204"/>
+                <a:gd name="connsiteY3" fmla="*/ 1723757 h 2802467"/>
+                <a:gd name="connsiteX4" fmla="*/ 267333 w 1343204"/>
+                <a:gd name="connsiteY4" fmla="*/ 1184554 h 2802467"/>
+                <a:gd name="connsiteX5" fmla="*/ 31 w 1343204"/>
+                <a:gd name="connsiteY5" fmla="*/ 977900 h 2802467"/>
+                <a:gd name="connsiteX6" fmla="*/ 283664 w 1343204"/>
+                <a:gd name="connsiteY6" fmla="*/ 478367 h 2802467"/>
+                <a:gd name="connsiteX7" fmla="*/ 753564 w 1343204"/>
+                <a:gd name="connsiteY7" fmla="*/ 292100 h 2802467"/>
+                <a:gd name="connsiteX8" fmla="*/ 846698 w 1343204"/>
+                <a:gd name="connsiteY8" fmla="*/ 55033 h 2802467"/>
+                <a:gd name="connsiteX9" fmla="*/ 850931 w 1343204"/>
+                <a:gd name="connsiteY9" fmla="*/ 0 h 2802467"/>
+                <a:gd name="connsiteX0" fmla="*/ 1337770 w 1343210"/>
+                <a:gd name="connsiteY0" fmla="*/ 2802467 h 2802467"/>
+                <a:gd name="connsiteX1" fmla="*/ 1193837 w 1343210"/>
+                <a:gd name="connsiteY1" fmla="*/ 2726267 h 2802467"/>
+                <a:gd name="connsiteX2" fmla="*/ 342937 w 1343210"/>
+                <a:gd name="connsiteY2" fmla="*/ 2357967 h 2802467"/>
+                <a:gd name="connsiteX3" fmla="*/ 584091 w 1343210"/>
+                <a:gd name="connsiteY3" fmla="*/ 1723757 h 2802467"/>
+                <a:gd name="connsiteX4" fmla="*/ 267339 w 1343210"/>
+                <a:gd name="connsiteY4" fmla="*/ 1184554 h 2802467"/>
+                <a:gd name="connsiteX5" fmla="*/ 37 w 1343210"/>
+                <a:gd name="connsiteY5" fmla="*/ 977900 h 2802467"/>
+                <a:gd name="connsiteX6" fmla="*/ 283670 w 1343210"/>
+                <a:gd name="connsiteY6" fmla="*/ 478367 h 2802467"/>
+                <a:gd name="connsiteX7" fmla="*/ 753570 w 1343210"/>
+                <a:gd name="connsiteY7" fmla="*/ 292100 h 2802467"/>
+                <a:gd name="connsiteX8" fmla="*/ 846704 w 1343210"/>
+                <a:gd name="connsiteY8" fmla="*/ 55033 h 2802467"/>
+                <a:gd name="connsiteX9" fmla="*/ 850937 w 1343210"/>
+                <a:gd name="connsiteY9" fmla="*/ 0 h 2802467"/>
+                <a:gd name="connsiteX0" fmla="*/ 1337875 w 1343315"/>
+                <a:gd name="connsiteY0" fmla="*/ 2802467 h 2802467"/>
+                <a:gd name="connsiteX1" fmla="*/ 1193942 w 1343315"/>
+                <a:gd name="connsiteY1" fmla="*/ 2726267 h 2802467"/>
+                <a:gd name="connsiteX2" fmla="*/ 343042 w 1343315"/>
+                <a:gd name="connsiteY2" fmla="*/ 2357967 h 2802467"/>
+                <a:gd name="connsiteX3" fmla="*/ 584196 w 1343315"/>
+                <a:gd name="connsiteY3" fmla="*/ 1723757 h 2802467"/>
+                <a:gd name="connsiteX4" fmla="*/ 253177 w 1343315"/>
+                <a:gd name="connsiteY4" fmla="*/ 1216131 h 2802467"/>
+                <a:gd name="connsiteX5" fmla="*/ 142 w 1343315"/>
+                <a:gd name="connsiteY5" fmla="*/ 977900 h 2802467"/>
+                <a:gd name="connsiteX6" fmla="*/ 283775 w 1343315"/>
+                <a:gd name="connsiteY6" fmla="*/ 478367 h 2802467"/>
+                <a:gd name="connsiteX7" fmla="*/ 753675 w 1343315"/>
+                <a:gd name="connsiteY7" fmla="*/ 292100 h 2802467"/>
+                <a:gd name="connsiteX8" fmla="*/ 846809 w 1343315"/>
+                <a:gd name="connsiteY8" fmla="*/ 55033 h 2802467"/>
+                <a:gd name="connsiteX9" fmla="*/ 851042 w 1343315"/>
+                <a:gd name="connsiteY9" fmla="*/ 0 h 2802467"/>
+                <a:gd name="csX0" fmla="*/ 1340096 w 1345536"/>
+                <a:gd name="csY0" fmla="*/ 2802467 h 2802467"/>
+                <a:gd name="csX1" fmla="*/ 1196163 w 1345536"/>
+                <a:gd name="csY1" fmla="*/ 2726267 h 2802467"/>
+                <a:gd name="csX2" fmla="*/ 345263 w 1345536"/>
+                <a:gd name="csY2" fmla="*/ 2357967 h 2802467"/>
+                <a:gd name="csX3" fmla="*/ 586417 w 1345536"/>
+                <a:gd name="csY3" fmla="*/ 1723757 h 2802467"/>
+                <a:gd name="csX4" fmla="*/ 437791 w 1345536"/>
+                <a:gd name="csY4" fmla="*/ 1116806 h 2802467"/>
+                <a:gd name="csX5" fmla="*/ 2363 w 1345536"/>
+                <a:gd name="csY5" fmla="*/ 977900 h 2802467"/>
+                <a:gd name="csX6" fmla="*/ 285996 w 1345536"/>
+                <a:gd name="csY6" fmla="*/ 478367 h 2802467"/>
+                <a:gd name="csX7" fmla="*/ 755896 w 1345536"/>
+                <a:gd name="csY7" fmla="*/ 292100 h 2802467"/>
+                <a:gd name="csX8" fmla="*/ 849030 w 1345536"/>
+                <a:gd name="csY8" fmla="*/ 55033 h 2802467"/>
+                <a:gd name="csX9" fmla="*/ 853263 w 1345536"/>
+                <a:gd name="csY9" fmla="*/ 0 h 2802467"/>
+                <a:gd name="csX0" fmla="*/ 1345360 w 1350800"/>
+                <a:gd name="csY0" fmla="*/ 2802467 h 2802467"/>
+                <a:gd name="csX1" fmla="*/ 1201427 w 1350800"/>
+                <a:gd name="csY1" fmla="*/ 2726267 h 2802467"/>
+                <a:gd name="csX2" fmla="*/ 350527 w 1350800"/>
+                <a:gd name="csY2" fmla="*/ 2357967 h 2802467"/>
+                <a:gd name="csX3" fmla="*/ 591681 w 1350800"/>
+                <a:gd name="csY3" fmla="*/ 1723757 h 2802467"/>
+                <a:gd name="csX4" fmla="*/ 7627 w 1350800"/>
+                <a:gd name="csY4" fmla="*/ 977900 h 2802467"/>
+                <a:gd name="csX5" fmla="*/ 291260 w 1350800"/>
+                <a:gd name="csY5" fmla="*/ 478367 h 2802467"/>
+                <a:gd name="csX6" fmla="*/ 761160 w 1350800"/>
+                <a:gd name="csY6" fmla="*/ 292100 h 2802467"/>
+                <a:gd name="csX7" fmla="*/ 854294 w 1350800"/>
+                <a:gd name="csY7" fmla="*/ 55033 h 2802467"/>
+                <a:gd name="csX8" fmla="*/ 858527 w 1350800"/>
+                <a:gd name="csY8" fmla="*/ 0 h 2802467"/>
+                <a:gd name="csX0" fmla="*/ 1338775 w 1344215"/>
+                <a:gd name="csY0" fmla="*/ 2802467 h 2802467"/>
+                <a:gd name="csX1" fmla="*/ 1194842 w 1344215"/>
+                <a:gd name="csY1" fmla="*/ 2726267 h 2802467"/>
+                <a:gd name="csX2" fmla="*/ 343942 w 1344215"/>
+                <a:gd name="csY2" fmla="*/ 2357967 h 2802467"/>
+                <a:gd name="csX3" fmla="*/ 585096 w 1344215"/>
+                <a:gd name="csY3" fmla="*/ 1723757 h 2802467"/>
+                <a:gd name="csX4" fmla="*/ 1042 w 1344215"/>
+                <a:gd name="csY4" fmla="*/ 977900 h 2802467"/>
+                <a:gd name="csX5" fmla="*/ 754575 w 1344215"/>
+                <a:gd name="csY5" fmla="*/ 292100 h 2802467"/>
+                <a:gd name="csX6" fmla="*/ 847709 w 1344215"/>
+                <a:gd name="csY6" fmla="*/ 55033 h 2802467"/>
+                <a:gd name="csX7" fmla="*/ 851942 w 1344215"/>
+                <a:gd name="csY7" fmla="*/ 0 h 2802467"/>
+                <a:gd name="csX0" fmla="*/ 1338775 w 1344215"/>
+                <a:gd name="csY0" fmla="*/ 2802467 h 2802467"/>
+                <a:gd name="csX1" fmla="*/ 1194842 w 1344215"/>
+                <a:gd name="csY1" fmla="*/ 2726267 h 2802467"/>
+                <a:gd name="csX2" fmla="*/ 343942 w 1344215"/>
+                <a:gd name="csY2" fmla="*/ 2357967 h 2802467"/>
+                <a:gd name="csX3" fmla="*/ 585096 w 1344215"/>
+                <a:gd name="csY3" fmla="*/ 1723757 h 2802467"/>
+                <a:gd name="csX4" fmla="*/ 1042 w 1344215"/>
+                <a:gd name="csY4" fmla="*/ 977900 h 2802467"/>
+                <a:gd name="csX5" fmla="*/ 754575 w 1344215"/>
+                <a:gd name="csY5" fmla="*/ 292100 h 2802467"/>
+                <a:gd name="csX6" fmla="*/ 851942 w 1344215"/>
+                <a:gd name="csY6" fmla="*/ 0 h 2802467"/>
+                <a:gd name="csX0" fmla="*/ 1338775 w 1344215"/>
+                <a:gd name="csY0" fmla="*/ 2802467 h 2802467"/>
+                <a:gd name="csX1" fmla="*/ 1194842 w 1344215"/>
+                <a:gd name="csY1" fmla="*/ 2726267 h 2802467"/>
+                <a:gd name="csX2" fmla="*/ 343942 w 1344215"/>
+                <a:gd name="csY2" fmla="*/ 2357967 h 2802467"/>
+                <a:gd name="csX3" fmla="*/ 585096 w 1344215"/>
+                <a:gd name="csY3" fmla="*/ 1723757 h 2802467"/>
+                <a:gd name="csX4" fmla="*/ 1042 w 1344215"/>
+                <a:gd name="csY4" fmla="*/ 977900 h 2802467"/>
+                <a:gd name="csX5" fmla="*/ 754575 w 1344215"/>
+                <a:gd name="csY5" fmla="*/ 292100 h 2802467"/>
+                <a:gd name="csX6" fmla="*/ 812858 w 1344215"/>
+                <a:gd name="csY6" fmla="*/ 0 h 2802467"/>
+                <a:gd name="csX0" fmla="*/ 1338775 w 1344215"/>
+                <a:gd name="csY0" fmla="*/ 2802467 h 2802467"/>
+                <a:gd name="csX1" fmla="*/ 1194842 w 1344215"/>
+                <a:gd name="csY1" fmla="*/ 2726267 h 2802467"/>
+                <a:gd name="csX2" fmla="*/ 343942 w 1344215"/>
+                <a:gd name="csY2" fmla="*/ 2357967 h 2802467"/>
+                <a:gd name="csX3" fmla="*/ 585096 w 1344215"/>
+                <a:gd name="csY3" fmla="*/ 1723757 h 2802467"/>
+                <a:gd name="csX4" fmla="*/ 1042 w 1344215"/>
+                <a:gd name="csY4" fmla="*/ 977900 h 2802467"/>
+                <a:gd name="csX5" fmla="*/ 754575 w 1344215"/>
+                <a:gd name="csY5" fmla="*/ 292100 h 2802467"/>
+                <a:gd name="csX6" fmla="*/ 812858 w 1344215"/>
+                <a:gd name="csY6" fmla="*/ 0 h 2802467"/>
+                <a:gd name="csX0" fmla="*/ 1338775 w 1344215"/>
+                <a:gd name="csY0" fmla="*/ 2802467 h 2802467"/>
+                <a:gd name="csX1" fmla="*/ 1194842 w 1344215"/>
+                <a:gd name="csY1" fmla="*/ 2726267 h 2802467"/>
+                <a:gd name="csX2" fmla="*/ 343942 w 1344215"/>
+                <a:gd name="csY2" fmla="*/ 2357967 h 2802467"/>
+                <a:gd name="csX3" fmla="*/ 585096 w 1344215"/>
+                <a:gd name="csY3" fmla="*/ 1723757 h 2802467"/>
+                <a:gd name="csX4" fmla="*/ 1042 w 1344215"/>
+                <a:gd name="csY4" fmla="*/ 977900 h 2802467"/>
+                <a:gd name="csX5" fmla="*/ 754575 w 1344215"/>
+                <a:gd name="csY5" fmla="*/ 292100 h 2802467"/>
+                <a:gd name="csX6" fmla="*/ 812858 w 1344215"/>
+                <a:gd name="csY6" fmla="*/ 0 h 2802467"/>
+                <a:gd name="csX0" fmla="*/ 1337803 w 1343243"/>
+                <a:gd name="csY0" fmla="*/ 2802467 h 2802467"/>
+                <a:gd name="csX1" fmla="*/ 1193870 w 1343243"/>
+                <a:gd name="csY1" fmla="*/ 2726267 h 2802467"/>
+                <a:gd name="csX2" fmla="*/ 342970 w 1343243"/>
+                <a:gd name="csY2" fmla="*/ 2357967 h 2802467"/>
+                <a:gd name="csX3" fmla="*/ 584124 w 1343243"/>
+                <a:gd name="csY3" fmla="*/ 1723757 h 2802467"/>
+                <a:gd name="csX4" fmla="*/ 70 w 1343243"/>
+                <a:gd name="csY4" fmla="*/ 977900 h 2802467"/>
+                <a:gd name="csX5" fmla="*/ 626579 w 1343243"/>
+                <a:gd name="csY5" fmla="*/ 337758 h 2802467"/>
+                <a:gd name="csX6" fmla="*/ 811886 w 1343243"/>
+                <a:gd name="csY6" fmla="*/ 0 h 2802467"/>
+                <a:gd name="csX0" fmla="*/ 1337803 w 1343243"/>
+                <a:gd name="csY0" fmla="*/ 2802467 h 2802467"/>
+                <a:gd name="csX1" fmla="*/ 1193870 w 1343243"/>
+                <a:gd name="csY1" fmla="*/ 2726267 h 2802467"/>
+                <a:gd name="csX2" fmla="*/ 342970 w 1343243"/>
+                <a:gd name="csY2" fmla="*/ 2357967 h 2802467"/>
+                <a:gd name="csX3" fmla="*/ 584124 w 1343243"/>
+                <a:gd name="csY3" fmla="*/ 1723757 h 2802467"/>
+                <a:gd name="csX4" fmla="*/ 70 w 1343243"/>
+                <a:gd name="csY4" fmla="*/ 977900 h 2802467"/>
+                <a:gd name="csX5" fmla="*/ 626579 w 1343243"/>
+                <a:gd name="csY5" fmla="*/ 337758 h 2802467"/>
+                <a:gd name="csX6" fmla="*/ 811886 w 1343243"/>
+                <a:gd name="csY6" fmla="*/ 0 h 2802467"/>
+                <a:gd name="csX0" fmla="*/ 1292617 w 1298057"/>
+                <a:gd name="csY0" fmla="*/ 2802467 h 2802467"/>
+                <a:gd name="csX1" fmla="*/ 1148684 w 1298057"/>
+                <a:gd name="csY1" fmla="*/ 2726267 h 2802467"/>
+                <a:gd name="csX2" fmla="*/ 297784 w 1298057"/>
+                <a:gd name="csY2" fmla="*/ 2357967 h 2802467"/>
+                <a:gd name="csX3" fmla="*/ 538938 w 1298057"/>
+                <a:gd name="csY3" fmla="*/ 1723757 h 2802467"/>
+                <a:gd name="csX4" fmla="*/ 75 w 1298057"/>
+                <a:gd name="csY4" fmla="*/ 969490 h 2802467"/>
+                <a:gd name="csX5" fmla="*/ 581393 w 1298057"/>
+                <a:gd name="csY5" fmla="*/ 337758 h 2802467"/>
+                <a:gd name="csX6" fmla="*/ 766700 w 1298057"/>
+                <a:gd name="csY6" fmla="*/ 0 h 2802467"/>
+                <a:gd name="csX0" fmla="*/ 1290176 w 1295616"/>
+                <a:gd name="csY0" fmla="*/ 2802467 h 2802467"/>
+                <a:gd name="csX1" fmla="*/ 1146243 w 1295616"/>
+                <a:gd name="csY1" fmla="*/ 2726267 h 2802467"/>
+                <a:gd name="csX2" fmla="*/ 295343 w 1295616"/>
+                <a:gd name="csY2" fmla="*/ 2357967 h 2802467"/>
+                <a:gd name="csX3" fmla="*/ 536497 w 1295616"/>
+                <a:gd name="csY3" fmla="*/ 1723757 h 2802467"/>
+                <a:gd name="csX4" fmla="*/ 76 w 1295616"/>
+                <a:gd name="csY4" fmla="*/ 956273 h 2802467"/>
+                <a:gd name="csX5" fmla="*/ 578952 w 1295616"/>
+                <a:gd name="csY5" fmla="*/ 337758 h 2802467"/>
+                <a:gd name="csX6" fmla="*/ 764259 w 1295616"/>
+                <a:gd name="csY6" fmla="*/ 0 h 2802467"/>
+                <a:gd name="csX0" fmla="*/ 1285291 w 1290731"/>
+                <a:gd name="csY0" fmla="*/ 2802467 h 2802467"/>
+                <a:gd name="csX1" fmla="*/ 1141358 w 1290731"/>
+                <a:gd name="csY1" fmla="*/ 2726267 h 2802467"/>
+                <a:gd name="csX2" fmla="*/ 290458 w 1290731"/>
+                <a:gd name="csY2" fmla="*/ 2357967 h 2802467"/>
+                <a:gd name="csX3" fmla="*/ 531612 w 1290731"/>
+                <a:gd name="csY3" fmla="*/ 1723757 h 2802467"/>
+                <a:gd name="csX4" fmla="*/ 76 w 1290731"/>
+                <a:gd name="csY4" fmla="*/ 931041 h 2802467"/>
+                <a:gd name="csX5" fmla="*/ 574067 w 1290731"/>
+                <a:gd name="csY5" fmla="*/ 337758 h 2802467"/>
+                <a:gd name="csX6" fmla="*/ 759374 w 1290731"/>
+                <a:gd name="csY6" fmla="*/ 0 h 2802467"/>
+                <a:gd name="csX0" fmla="*/ 1285291 w 1290731"/>
+                <a:gd name="csY0" fmla="*/ 2802467 h 2802467"/>
+                <a:gd name="csX1" fmla="*/ 1141358 w 1290731"/>
+                <a:gd name="csY1" fmla="*/ 2726267 h 2802467"/>
+                <a:gd name="csX2" fmla="*/ 290458 w 1290731"/>
+                <a:gd name="csY2" fmla="*/ 2357967 h 2802467"/>
+                <a:gd name="csX3" fmla="*/ 531612 w 1290731"/>
+                <a:gd name="csY3" fmla="*/ 1723757 h 2802467"/>
+                <a:gd name="csX4" fmla="*/ 76 w 1290731"/>
+                <a:gd name="csY4" fmla="*/ 931041 h 2802467"/>
+                <a:gd name="csX5" fmla="*/ 574067 w 1290731"/>
+                <a:gd name="csY5" fmla="*/ 337758 h 2802467"/>
+                <a:gd name="csX6" fmla="*/ 759374 w 1290731"/>
+                <a:gd name="csY6" fmla="*/ 0 h 2802467"/>
+                <a:gd name="csX0" fmla="*/ 1285556 w 1290996"/>
+                <a:gd name="csY0" fmla="*/ 2802467 h 2802467"/>
+                <a:gd name="csX1" fmla="*/ 1141623 w 1290996"/>
+                <a:gd name="csY1" fmla="*/ 2726267 h 2802467"/>
+                <a:gd name="csX2" fmla="*/ 290723 w 1290996"/>
+                <a:gd name="csY2" fmla="*/ 2357967 h 2802467"/>
+                <a:gd name="csX3" fmla="*/ 531877 w 1290996"/>
+                <a:gd name="csY3" fmla="*/ 1723757 h 2802467"/>
+                <a:gd name="csX4" fmla="*/ 341 w 1290996"/>
+                <a:gd name="csY4" fmla="*/ 931041 h 2802467"/>
+                <a:gd name="csX5" fmla="*/ 623187 w 1290996"/>
+                <a:gd name="csY5" fmla="*/ 325743 h 2802467"/>
+                <a:gd name="csX6" fmla="*/ 759639 w 1290996"/>
+                <a:gd name="csY6" fmla="*/ 0 h 2802467"/>
+                <a:gd name="csX0" fmla="*/ 1285556 w 1290996"/>
+                <a:gd name="csY0" fmla="*/ 2802467 h 2802467"/>
+                <a:gd name="csX1" fmla="*/ 1141623 w 1290996"/>
+                <a:gd name="csY1" fmla="*/ 2726267 h 2802467"/>
+                <a:gd name="csX2" fmla="*/ 290723 w 1290996"/>
+                <a:gd name="csY2" fmla="*/ 2357967 h 2802467"/>
+                <a:gd name="csX3" fmla="*/ 531877 w 1290996"/>
+                <a:gd name="csY3" fmla="*/ 1723757 h 2802467"/>
+                <a:gd name="csX4" fmla="*/ 341 w 1290996"/>
+                <a:gd name="csY4" fmla="*/ 931041 h 2802467"/>
+                <a:gd name="csX5" fmla="*/ 623187 w 1290996"/>
+                <a:gd name="csY5" fmla="*/ 325743 h 2802467"/>
+                <a:gd name="csX6" fmla="*/ 759639 w 1290996"/>
+                <a:gd name="csY6" fmla="*/ 0 h 2802467"/>
+                <a:gd name="csX0" fmla="*/ 1285556 w 1290996"/>
+                <a:gd name="csY0" fmla="*/ 2802467 h 2802467"/>
+                <a:gd name="csX1" fmla="*/ 1141623 w 1290996"/>
+                <a:gd name="csY1" fmla="*/ 2726267 h 2802467"/>
+                <a:gd name="csX2" fmla="*/ 290723 w 1290996"/>
+                <a:gd name="csY2" fmla="*/ 2357967 h 2802467"/>
+                <a:gd name="csX3" fmla="*/ 531877 w 1290996"/>
+                <a:gd name="csY3" fmla="*/ 1723757 h 2802467"/>
+                <a:gd name="csX4" fmla="*/ 341 w 1290996"/>
+                <a:gd name="csY4" fmla="*/ 931041 h 2802467"/>
+                <a:gd name="csX5" fmla="*/ 623187 w 1290996"/>
+                <a:gd name="csY5" fmla="*/ 325743 h 2802467"/>
+                <a:gd name="csX6" fmla="*/ 759639 w 1290996"/>
+                <a:gd name="csY6" fmla="*/ 0 h 2802467"/>
+                <a:gd name="csX0" fmla="*/ 1285778 w 1291218"/>
+                <a:gd name="csY0" fmla="*/ 2802467 h 2802467"/>
+                <a:gd name="csX1" fmla="*/ 1141845 w 1291218"/>
+                <a:gd name="csY1" fmla="*/ 2726267 h 2802467"/>
+                <a:gd name="csX2" fmla="*/ 290945 w 1291218"/>
+                <a:gd name="csY2" fmla="*/ 2357967 h 2802467"/>
+                <a:gd name="csX3" fmla="*/ 532099 w 1291218"/>
+                <a:gd name="csY3" fmla="*/ 1723757 h 2802467"/>
+                <a:gd name="csX4" fmla="*/ 563 w 1291218"/>
+                <a:gd name="csY4" fmla="*/ 931041 h 2802467"/>
+                <a:gd name="csX5" fmla="*/ 650280 w 1291218"/>
+                <a:gd name="csY5" fmla="*/ 335355 h 2802467"/>
+                <a:gd name="csX6" fmla="*/ 759861 w 1291218"/>
+                <a:gd name="csY6" fmla="*/ 0 h 2802467"/>
+                <a:gd name="csX0" fmla="*/ 1285463 w 1290903"/>
+                <a:gd name="csY0" fmla="*/ 2802467 h 2802467"/>
+                <a:gd name="csX1" fmla="*/ 1141530 w 1290903"/>
+                <a:gd name="csY1" fmla="*/ 2726267 h 2802467"/>
+                <a:gd name="csX2" fmla="*/ 290630 w 1290903"/>
+                <a:gd name="csY2" fmla="*/ 2357967 h 2802467"/>
+                <a:gd name="csX3" fmla="*/ 531784 w 1290903"/>
+                <a:gd name="csY3" fmla="*/ 1723757 h 2802467"/>
+                <a:gd name="csX4" fmla="*/ 248 w 1290903"/>
+                <a:gd name="csY4" fmla="*/ 931041 h 2802467"/>
+                <a:gd name="csX5" fmla="*/ 609252 w 1290903"/>
+                <a:gd name="csY5" fmla="*/ 344968 h 2802467"/>
+                <a:gd name="csX6" fmla="*/ 759546 w 1290903"/>
+                <a:gd name="csY6" fmla="*/ 0 h 2802467"/>
+                <a:gd name="csX0" fmla="*/ 1285463 w 1290903"/>
+                <a:gd name="csY0" fmla="*/ 2802467 h 2802467"/>
+                <a:gd name="csX1" fmla="*/ 1141530 w 1290903"/>
+                <a:gd name="csY1" fmla="*/ 2726267 h 2802467"/>
+                <a:gd name="csX2" fmla="*/ 290630 w 1290903"/>
+                <a:gd name="csY2" fmla="*/ 2357967 h 2802467"/>
+                <a:gd name="csX3" fmla="*/ 531784 w 1290903"/>
+                <a:gd name="csY3" fmla="*/ 1723757 h 2802467"/>
+                <a:gd name="csX4" fmla="*/ 248 w 1290903"/>
+                <a:gd name="csY4" fmla="*/ 931041 h 2802467"/>
+                <a:gd name="csX5" fmla="*/ 609252 w 1290903"/>
+                <a:gd name="csY5" fmla="*/ 344968 h 2802467"/>
+                <a:gd name="csX6" fmla="*/ 759546 w 1290903"/>
+                <a:gd name="csY6" fmla="*/ 0 h 2802467"/>
+                <a:gd name="csX0" fmla="*/ 1285446 w 1290886"/>
+                <a:gd name="csY0" fmla="*/ 2802467 h 2802467"/>
+                <a:gd name="csX1" fmla="*/ 1141513 w 1290886"/>
+                <a:gd name="csY1" fmla="*/ 2726267 h 2802467"/>
+                <a:gd name="csX2" fmla="*/ 290613 w 1290886"/>
+                <a:gd name="csY2" fmla="*/ 2357967 h 2802467"/>
+                <a:gd name="csX3" fmla="*/ 531767 w 1290886"/>
+                <a:gd name="csY3" fmla="*/ 1723757 h 2802467"/>
+                <a:gd name="csX4" fmla="*/ 231 w 1290886"/>
+                <a:gd name="csY4" fmla="*/ 931041 h 2802467"/>
+                <a:gd name="csX5" fmla="*/ 609235 w 1290886"/>
+                <a:gd name="csY5" fmla="*/ 344968 h 2802467"/>
+                <a:gd name="csX6" fmla="*/ 759529 w 1290886"/>
+                <a:gd name="csY6" fmla="*/ 0 h 2802467"/>
+                <a:gd name="csX0" fmla="*/ 1285341 w 1290781"/>
+                <a:gd name="csY0" fmla="*/ 2802467 h 2802467"/>
+                <a:gd name="csX1" fmla="*/ 1141408 w 1290781"/>
+                <a:gd name="csY1" fmla="*/ 2726267 h 2802467"/>
+                <a:gd name="csX2" fmla="*/ 290508 w 1290781"/>
+                <a:gd name="csY2" fmla="*/ 2357967 h 2802467"/>
+                <a:gd name="csX3" fmla="*/ 551204 w 1290781"/>
+                <a:gd name="csY3" fmla="*/ 1693319 h 2802467"/>
+                <a:gd name="csX4" fmla="*/ 126 w 1290781"/>
+                <a:gd name="csY4" fmla="*/ 931041 h 2802467"/>
+                <a:gd name="csX5" fmla="*/ 609130 w 1290781"/>
+                <a:gd name="csY5" fmla="*/ 344968 h 2802467"/>
+                <a:gd name="csX6" fmla="*/ 759424 w 1290781"/>
+                <a:gd name="csY6" fmla="*/ 0 h 2802467"/>
+                <a:gd name="csX0" fmla="*/ 1285336 w 1290776"/>
+                <a:gd name="csY0" fmla="*/ 2802467 h 2802467"/>
+                <a:gd name="csX1" fmla="*/ 1141403 w 1290776"/>
+                <a:gd name="csY1" fmla="*/ 2726267 h 2802467"/>
+                <a:gd name="csX2" fmla="*/ 290503 w 1290776"/>
+                <a:gd name="csY2" fmla="*/ 2357967 h 2802467"/>
+                <a:gd name="csX3" fmla="*/ 551199 w 1290776"/>
+                <a:gd name="csY3" fmla="*/ 1693319 h 2802467"/>
+                <a:gd name="csX4" fmla="*/ 121 w 1290776"/>
+                <a:gd name="csY4" fmla="*/ 931041 h 2802467"/>
+                <a:gd name="csX5" fmla="*/ 609125 w 1290776"/>
+                <a:gd name="csY5" fmla="*/ 344968 h 2802467"/>
+                <a:gd name="csX6" fmla="*/ 759419 w 1290776"/>
+                <a:gd name="csY6" fmla="*/ 0 h 2802467"/>
+                <a:gd name="csX0" fmla="*/ 1285338 w 1290778"/>
+                <a:gd name="csY0" fmla="*/ 2802467 h 2802467"/>
+                <a:gd name="csX1" fmla="*/ 1141405 w 1290778"/>
+                <a:gd name="csY1" fmla="*/ 2726267 h 2802467"/>
+                <a:gd name="csX2" fmla="*/ 290505 w 1290778"/>
+                <a:gd name="csY2" fmla="*/ 2357967 h 2802467"/>
+                <a:gd name="csX3" fmla="*/ 551201 w 1290778"/>
+                <a:gd name="csY3" fmla="*/ 1693319 h 2802467"/>
+                <a:gd name="csX4" fmla="*/ 123 w 1290778"/>
+                <a:gd name="csY4" fmla="*/ 931041 h 2802467"/>
+                <a:gd name="csX5" fmla="*/ 609127 w 1290778"/>
+                <a:gd name="csY5" fmla="*/ 344968 h 2802467"/>
+                <a:gd name="csX6" fmla="*/ 759421 w 1290778"/>
+                <a:gd name="csY6" fmla="*/ 0 h 2802467"/>
+                <a:gd name="csX0" fmla="*/ 1285452 w 1290892"/>
+                <a:gd name="csY0" fmla="*/ 2802467 h 2802467"/>
+                <a:gd name="csX1" fmla="*/ 1141519 w 1290892"/>
+                <a:gd name="csY1" fmla="*/ 2726267 h 2802467"/>
+                <a:gd name="csX2" fmla="*/ 290619 w 1290892"/>
+                <a:gd name="csY2" fmla="*/ 2357967 h 2802467"/>
+                <a:gd name="csX3" fmla="*/ 530144 w 1290892"/>
+                <a:gd name="csY3" fmla="*/ 1699727 h 2802467"/>
+                <a:gd name="csX4" fmla="*/ 237 w 1290892"/>
+                <a:gd name="csY4" fmla="*/ 931041 h 2802467"/>
+                <a:gd name="csX5" fmla="*/ 609241 w 1290892"/>
+                <a:gd name="csY5" fmla="*/ 344968 h 2802467"/>
+                <a:gd name="csX6" fmla="*/ 759535 w 1290892"/>
+                <a:gd name="csY6" fmla="*/ 0 h 2802467"/>
+                <a:gd name="csX0" fmla="*/ 1286121 w 1291561"/>
+                <a:gd name="csY0" fmla="*/ 2802467 h 2802467"/>
+                <a:gd name="csX1" fmla="*/ 1142188 w 1291561"/>
+                <a:gd name="csY1" fmla="*/ 2726267 h 2802467"/>
+                <a:gd name="csX2" fmla="*/ 291288 w 1291561"/>
+                <a:gd name="csY2" fmla="*/ 2357967 h 2802467"/>
+                <a:gd name="csX3" fmla="*/ 462415 w 1291561"/>
+                <a:gd name="csY3" fmla="*/ 1699727 h 2802467"/>
+                <a:gd name="csX4" fmla="*/ 906 w 1291561"/>
+                <a:gd name="csY4" fmla="*/ 931041 h 2802467"/>
+                <a:gd name="csX5" fmla="*/ 609910 w 1291561"/>
+                <a:gd name="csY5" fmla="*/ 344968 h 2802467"/>
+                <a:gd name="csX6" fmla="*/ 760204 w 1291561"/>
+                <a:gd name="csY6" fmla="*/ 0 h 2802467"/>
+                <a:gd name="csX0" fmla="*/ 1286033 w 1291473"/>
+                <a:gd name="csY0" fmla="*/ 2802467 h 2802467"/>
+                <a:gd name="csX1" fmla="*/ 1142100 w 1291473"/>
+                <a:gd name="csY1" fmla="*/ 2726267 h 2802467"/>
+                <a:gd name="csX2" fmla="*/ 291200 w 1291473"/>
+                <a:gd name="csY2" fmla="*/ 2357967 h 2802467"/>
+                <a:gd name="csX3" fmla="*/ 462327 w 1291473"/>
+                <a:gd name="csY3" fmla="*/ 1699727 h 2802467"/>
+                <a:gd name="csX4" fmla="*/ 818 w 1291473"/>
+                <a:gd name="csY4" fmla="*/ 931041 h 2802467"/>
+                <a:gd name="csX5" fmla="*/ 609822 w 1291473"/>
+                <a:gd name="csY5" fmla="*/ 344968 h 2802467"/>
+                <a:gd name="csX6" fmla="*/ 760116 w 1291473"/>
+                <a:gd name="csY6" fmla="*/ 0 h 2802467"/>
+                <a:gd name="csX0" fmla="*/ 1286732 w 1292172"/>
+                <a:gd name="csY0" fmla="*/ 2802467 h 2802467"/>
+                <a:gd name="csX1" fmla="*/ 1142799 w 1292172"/>
+                <a:gd name="csY1" fmla="*/ 2726267 h 2802467"/>
+                <a:gd name="csX2" fmla="*/ 291899 w 1292172"/>
+                <a:gd name="csY2" fmla="*/ 2357967 h 2802467"/>
+                <a:gd name="csX3" fmla="*/ 415800 w 1292172"/>
+                <a:gd name="csY3" fmla="*/ 1871143 h 2802467"/>
+                <a:gd name="csX4" fmla="*/ 1517 w 1292172"/>
+                <a:gd name="csY4" fmla="*/ 931041 h 2802467"/>
+                <a:gd name="csX5" fmla="*/ 610521 w 1292172"/>
+                <a:gd name="csY5" fmla="*/ 344968 h 2802467"/>
+                <a:gd name="csX6" fmla="*/ 760815 w 1292172"/>
+                <a:gd name="csY6" fmla="*/ 0 h 2802467"/>
+                <a:gd name="csX0" fmla="*/ 1286679 w 1292119"/>
+                <a:gd name="csY0" fmla="*/ 2802467 h 2802467"/>
+                <a:gd name="csX1" fmla="*/ 1142746 w 1292119"/>
+                <a:gd name="csY1" fmla="*/ 2726267 h 2802467"/>
+                <a:gd name="csX2" fmla="*/ 291846 w 1292119"/>
+                <a:gd name="csY2" fmla="*/ 2357967 h 2802467"/>
+                <a:gd name="csX3" fmla="*/ 415747 w 1292119"/>
+                <a:gd name="csY3" fmla="*/ 1871143 h 2802467"/>
+                <a:gd name="csX4" fmla="*/ 1464 w 1292119"/>
+                <a:gd name="csY4" fmla="*/ 931041 h 2802467"/>
+                <a:gd name="csX5" fmla="*/ 610468 w 1292119"/>
+                <a:gd name="csY5" fmla="*/ 344968 h 2802467"/>
+                <a:gd name="csX6" fmla="*/ 760762 w 1292119"/>
+                <a:gd name="csY6" fmla="*/ 0 h 2802467"/>
+                <a:gd name="csX0" fmla="*/ 1310936 w 1316376"/>
+                <a:gd name="csY0" fmla="*/ 2802467 h 2802467"/>
+                <a:gd name="csX1" fmla="*/ 1167003 w 1316376"/>
+                <a:gd name="csY1" fmla="*/ 2726267 h 2802467"/>
+                <a:gd name="csX2" fmla="*/ 316103 w 1316376"/>
+                <a:gd name="csY2" fmla="*/ 2357967 h 2802467"/>
+                <a:gd name="csX3" fmla="*/ 440004 w 1316376"/>
+                <a:gd name="csY3" fmla="*/ 1871143 h 2802467"/>
+                <a:gd name="csX4" fmla="*/ 145511 w 1316376"/>
+                <a:gd name="csY4" fmla="*/ 1252872 h 2802467"/>
+                <a:gd name="csX5" fmla="*/ 25721 w 1316376"/>
+                <a:gd name="csY5" fmla="*/ 931041 h 2802467"/>
+                <a:gd name="csX6" fmla="*/ 634725 w 1316376"/>
+                <a:gd name="csY6" fmla="*/ 344968 h 2802467"/>
+                <a:gd name="csX7" fmla="*/ 785019 w 1316376"/>
+                <a:gd name="csY7" fmla="*/ 0 h 2802467"/>
+                <a:gd name="csX0" fmla="*/ 1293725 w 1299165"/>
+                <a:gd name="csY0" fmla="*/ 2802467 h 2802467"/>
+                <a:gd name="csX1" fmla="*/ 1149792 w 1299165"/>
+                <a:gd name="csY1" fmla="*/ 2726267 h 2802467"/>
+                <a:gd name="csX2" fmla="*/ 298892 w 1299165"/>
+                <a:gd name="csY2" fmla="*/ 2357967 h 2802467"/>
+                <a:gd name="csX3" fmla="*/ 422793 w 1299165"/>
+                <a:gd name="csY3" fmla="*/ 1871143 h 2802467"/>
+                <a:gd name="csX4" fmla="*/ 271609 w 1299165"/>
+                <a:gd name="csY4" fmla="*/ 1248067 h 2802467"/>
+                <a:gd name="csX5" fmla="*/ 8510 w 1299165"/>
+                <a:gd name="csY5" fmla="*/ 931041 h 2802467"/>
+                <a:gd name="csX6" fmla="*/ 617514 w 1299165"/>
+                <a:gd name="csY6" fmla="*/ 344968 h 2802467"/>
+                <a:gd name="csX7" fmla="*/ 767808 w 1299165"/>
+                <a:gd name="csY7" fmla="*/ 0 h 2802467"/>
+                <a:gd name="csX0" fmla="*/ 1291780 w 1297220"/>
+                <a:gd name="csY0" fmla="*/ 2802467 h 2802467"/>
+                <a:gd name="csX1" fmla="*/ 1147847 w 1297220"/>
+                <a:gd name="csY1" fmla="*/ 2726267 h 2802467"/>
+                <a:gd name="csX2" fmla="*/ 296947 w 1297220"/>
+                <a:gd name="csY2" fmla="*/ 2357967 h 2802467"/>
+                <a:gd name="csX3" fmla="*/ 420848 w 1297220"/>
+                <a:gd name="csY3" fmla="*/ 1871143 h 2802467"/>
+                <a:gd name="csX4" fmla="*/ 300606 w 1297220"/>
+                <a:gd name="csY4" fmla="*/ 1243261 h 2802467"/>
+                <a:gd name="csX5" fmla="*/ 6565 w 1297220"/>
+                <a:gd name="csY5" fmla="*/ 931041 h 2802467"/>
+                <a:gd name="csX6" fmla="*/ 615569 w 1297220"/>
+                <a:gd name="csY6" fmla="*/ 344968 h 2802467"/>
+                <a:gd name="csX7" fmla="*/ 765863 w 1297220"/>
+                <a:gd name="csY7" fmla="*/ 0 h 2802467"/>
+                <a:gd name="csX0" fmla="*/ 1290528 w 1295968"/>
+                <a:gd name="csY0" fmla="*/ 2802467 h 2802467"/>
+                <a:gd name="csX1" fmla="*/ 1146595 w 1295968"/>
+                <a:gd name="csY1" fmla="*/ 2726267 h 2802467"/>
+                <a:gd name="csX2" fmla="*/ 295695 w 1295968"/>
+                <a:gd name="csY2" fmla="*/ 2357967 h 2802467"/>
+                <a:gd name="csX3" fmla="*/ 419596 w 1295968"/>
+                <a:gd name="csY3" fmla="*/ 1871143 h 2802467"/>
+                <a:gd name="csX4" fmla="*/ 299354 w 1295968"/>
+                <a:gd name="csY4" fmla="*/ 1243261 h 2802467"/>
+                <a:gd name="csX5" fmla="*/ 5313 w 1295968"/>
+                <a:gd name="csY5" fmla="*/ 931041 h 2802467"/>
+                <a:gd name="csX6" fmla="*/ 614317 w 1295968"/>
+                <a:gd name="csY6" fmla="*/ 344968 h 2802467"/>
+                <a:gd name="csX7" fmla="*/ 764611 w 1295968"/>
+                <a:gd name="csY7" fmla="*/ 0 h 2802467"/>
+                <a:gd name="csX0" fmla="*/ 1290528 w 1295968"/>
+                <a:gd name="csY0" fmla="*/ 2802467 h 2802467"/>
+                <a:gd name="csX1" fmla="*/ 1146595 w 1295968"/>
+                <a:gd name="csY1" fmla="*/ 2726267 h 2802467"/>
+                <a:gd name="csX2" fmla="*/ 295695 w 1295968"/>
+                <a:gd name="csY2" fmla="*/ 2357967 h 2802467"/>
+                <a:gd name="csX3" fmla="*/ 419596 w 1295968"/>
+                <a:gd name="csY3" fmla="*/ 1871143 h 2802467"/>
+                <a:gd name="csX4" fmla="*/ 299354 w 1295968"/>
+                <a:gd name="csY4" fmla="*/ 1243261 h 2802467"/>
+                <a:gd name="csX5" fmla="*/ 5313 w 1295968"/>
+                <a:gd name="csY5" fmla="*/ 931041 h 2802467"/>
+                <a:gd name="csX6" fmla="*/ 614317 w 1295968"/>
+                <a:gd name="csY6" fmla="*/ 344968 h 2802467"/>
+                <a:gd name="csX7" fmla="*/ 764611 w 1295968"/>
+                <a:gd name="csY7" fmla="*/ 0 h 2802467"/>
+                <a:gd name="csX0" fmla="*/ 1290528 w 1295968"/>
+                <a:gd name="csY0" fmla="*/ 2802467 h 2802467"/>
+                <a:gd name="csX1" fmla="*/ 1146595 w 1295968"/>
+                <a:gd name="csY1" fmla="*/ 2726267 h 2802467"/>
+                <a:gd name="csX2" fmla="*/ 295695 w 1295968"/>
+                <a:gd name="csY2" fmla="*/ 2357967 h 2802467"/>
+                <a:gd name="csX3" fmla="*/ 460309 w 1295968"/>
+                <a:gd name="csY3" fmla="*/ 1938428 h 2802467"/>
+                <a:gd name="csX4" fmla="*/ 299354 w 1295968"/>
+                <a:gd name="csY4" fmla="*/ 1243261 h 2802467"/>
+                <a:gd name="csX5" fmla="*/ 5313 w 1295968"/>
+                <a:gd name="csY5" fmla="*/ 931041 h 2802467"/>
+                <a:gd name="csX6" fmla="*/ 614317 w 1295968"/>
+                <a:gd name="csY6" fmla="*/ 344968 h 2802467"/>
+                <a:gd name="csX7" fmla="*/ 764611 w 1295968"/>
+                <a:gd name="csY7" fmla="*/ 0 h 2802467"/>
+                <a:gd name="csX0" fmla="*/ 1290528 w 1295968"/>
+                <a:gd name="csY0" fmla="*/ 2802467 h 2802467"/>
+                <a:gd name="csX1" fmla="*/ 1146595 w 1295968"/>
+                <a:gd name="csY1" fmla="*/ 2726267 h 2802467"/>
+                <a:gd name="csX2" fmla="*/ 295695 w 1295968"/>
+                <a:gd name="csY2" fmla="*/ 2357967 h 2802467"/>
+                <a:gd name="csX3" fmla="*/ 400054 w 1295968"/>
+                <a:gd name="csY3" fmla="*/ 1834297 h 2802467"/>
+                <a:gd name="csX4" fmla="*/ 299354 w 1295968"/>
+                <a:gd name="csY4" fmla="*/ 1243261 h 2802467"/>
+                <a:gd name="csX5" fmla="*/ 5313 w 1295968"/>
+                <a:gd name="csY5" fmla="*/ 931041 h 2802467"/>
+                <a:gd name="csX6" fmla="*/ 614317 w 1295968"/>
+                <a:gd name="csY6" fmla="*/ 344968 h 2802467"/>
+                <a:gd name="csX7" fmla="*/ 764611 w 1295968"/>
+                <a:gd name="csY7" fmla="*/ 0 h 2802467"/>
+                <a:gd name="csX0" fmla="*/ 1290528 w 1295968"/>
+                <a:gd name="csY0" fmla="*/ 2802467 h 2802467"/>
+                <a:gd name="csX1" fmla="*/ 1146595 w 1295968"/>
+                <a:gd name="csY1" fmla="*/ 2726267 h 2802467"/>
+                <a:gd name="csX2" fmla="*/ 295695 w 1295968"/>
+                <a:gd name="csY2" fmla="*/ 2357967 h 2802467"/>
+                <a:gd name="csX3" fmla="*/ 427739 w 1295968"/>
+                <a:gd name="csY3" fmla="*/ 1832696 h 2802467"/>
+                <a:gd name="csX4" fmla="*/ 299354 w 1295968"/>
+                <a:gd name="csY4" fmla="*/ 1243261 h 2802467"/>
+                <a:gd name="csX5" fmla="*/ 5313 w 1295968"/>
+                <a:gd name="csY5" fmla="*/ 931041 h 2802467"/>
+                <a:gd name="csX6" fmla="*/ 614317 w 1295968"/>
+                <a:gd name="csY6" fmla="*/ 344968 h 2802467"/>
+                <a:gd name="csX7" fmla="*/ 764611 w 1295968"/>
+                <a:gd name="csY7" fmla="*/ 0 h 2802467"/>
+                <a:gd name="csX0" fmla="*/ 1290528 w 1295968"/>
+                <a:gd name="csY0" fmla="*/ 2802467 h 2802467"/>
+                <a:gd name="csX1" fmla="*/ 1146595 w 1295968"/>
+                <a:gd name="csY1" fmla="*/ 2726267 h 2802467"/>
+                <a:gd name="csX2" fmla="*/ 295695 w 1295968"/>
+                <a:gd name="csY2" fmla="*/ 2357967 h 2802467"/>
+                <a:gd name="csX3" fmla="*/ 427739 w 1295968"/>
+                <a:gd name="csY3" fmla="*/ 1832696 h 2802467"/>
+                <a:gd name="csX4" fmla="*/ 299354 w 1295968"/>
+                <a:gd name="csY4" fmla="*/ 1243261 h 2802467"/>
+                <a:gd name="csX5" fmla="*/ 5313 w 1295968"/>
+                <a:gd name="csY5" fmla="*/ 931041 h 2802467"/>
+                <a:gd name="csX6" fmla="*/ 614317 w 1295968"/>
+                <a:gd name="csY6" fmla="*/ 344968 h 2802467"/>
+                <a:gd name="csX7" fmla="*/ 764611 w 1295968"/>
+                <a:gd name="csY7" fmla="*/ 0 h 2802467"/>
+                <a:gd name="csX0" fmla="*/ 1290528 w 1295968"/>
+                <a:gd name="csY0" fmla="*/ 2802467 h 2802467"/>
+                <a:gd name="csX1" fmla="*/ 1146595 w 1295968"/>
+                <a:gd name="csY1" fmla="*/ 2726267 h 2802467"/>
+                <a:gd name="csX2" fmla="*/ 295695 w 1295968"/>
+                <a:gd name="csY2" fmla="*/ 2357967 h 2802467"/>
+                <a:gd name="csX3" fmla="*/ 427739 w 1295968"/>
+                <a:gd name="csY3" fmla="*/ 1832696 h 2802467"/>
+                <a:gd name="csX4" fmla="*/ 299354 w 1295968"/>
+                <a:gd name="csY4" fmla="*/ 1340984 h 2802467"/>
+                <a:gd name="csX5" fmla="*/ 5313 w 1295968"/>
+                <a:gd name="csY5" fmla="*/ 931041 h 2802467"/>
+                <a:gd name="csX6" fmla="*/ 614317 w 1295968"/>
+                <a:gd name="csY6" fmla="*/ 344968 h 2802467"/>
+                <a:gd name="csX7" fmla="*/ 764611 w 1295968"/>
+                <a:gd name="csY7" fmla="*/ 0 h 2802467"/>
+                <a:gd name="csX0" fmla="*/ 1290528 w 1295968"/>
+                <a:gd name="csY0" fmla="*/ 2802467 h 2802467"/>
+                <a:gd name="csX1" fmla="*/ 1146595 w 1295968"/>
+                <a:gd name="csY1" fmla="*/ 2726267 h 2802467"/>
+                <a:gd name="csX2" fmla="*/ 295695 w 1295968"/>
+                <a:gd name="csY2" fmla="*/ 2357967 h 2802467"/>
+                <a:gd name="csX3" fmla="*/ 427739 w 1295968"/>
+                <a:gd name="csY3" fmla="*/ 1832696 h 2802467"/>
+                <a:gd name="csX4" fmla="*/ 299354 w 1295968"/>
+                <a:gd name="csY4" fmla="*/ 1340984 h 2802467"/>
+                <a:gd name="csX5" fmla="*/ 5313 w 1295968"/>
+                <a:gd name="csY5" fmla="*/ 931041 h 2802467"/>
+                <a:gd name="csX6" fmla="*/ 614317 w 1295968"/>
+                <a:gd name="csY6" fmla="*/ 344968 h 2802467"/>
+                <a:gd name="csX7" fmla="*/ 764611 w 1295968"/>
+                <a:gd name="csY7" fmla="*/ 0 h 2802467"/>
+                <a:gd name="csX0" fmla="*/ 1290528 w 1295968"/>
+                <a:gd name="csY0" fmla="*/ 2802467 h 2802467"/>
+                <a:gd name="csX1" fmla="*/ 1146595 w 1295968"/>
+                <a:gd name="csY1" fmla="*/ 2726267 h 2802467"/>
+                <a:gd name="csX2" fmla="*/ 295695 w 1295968"/>
+                <a:gd name="csY2" fmla="*/ 2357967 h 2802467"/>
+                <a:gd name="csX3" fmla="*/ 427739 w 1295968"/>
+                <a:gd name="csY3" fmla="*/ 1832696 h 2802467"/>
+                <a:gd name="csX4" fmla="*/ 299354 w 1295968"/>
+                <a:gd name="csY4" fmla="*/ 1340984 h 2802467"/>
+                <a:gd name="csX5" fmla="*/ 5313 w 1295968"/>
+                <a:gd name="csY5" fmla="*/ 931041 h 2802467"/>
+                <a:gd name="csX6" fmla="*/ 614317 w 1295968"/>
+                <a:gd name="csY6" fmla="*/ 344968 h 2802467"/>
+                <a:gd name="csX7" fmla="*/ 764611 w 1295968"/>
+                <a:gd name="csY7" fmla="*/ 0 h 2802467"/>
+                <a:gd name="csX0" fmla="*/ 1290528 w 1295968"/>
+                <a:gd name="csY0" fmla="*/ 2802467 h 2802467"/>
+                <a:gd name="csX1" fmla="*/ 1146595 w 1295968"/>
+                <a:gd name="csY1" fmla="*/ 2726267 h 2802467"/>
+                <a:gd name="csX2" fmla="*/ 295695 w 1295968"/>
+                <a:gd name="csY2" fmla="*/ 2357967 h 2802467"/>
+                <a:gd name="csX3" fmla="*/ 427739 w 1295968"/>
+                <a:gd name="csY3" fmla="*/ 1832696 h 2802467"/>
+                <a:gd name="csX4" fmla="*/ 299354 w 1295968"/>
+                <a:gd name="csY4" fmla="*/ 1340984 h 2802467"/>
+                <a:gd name="csX5" fmla="*/ 5313 w 1295968"/>
+                <a:gd name="csY5" fmla="*/ 931041 h 2802467"/>
+                <a:gd name="csX6" fmla="*/ 614317 w 1295968"/>
+                <a:gd name="csY6" fmla="*/ 344968 h 2802467"/>
+                <a:gd name="csX7" fmla="*/ 764611 w 1295968"/>
+                <a:gd name="csY7" fmla="*/ 0 h 2802467"/>
+                <a:gd name="csX0" fmla="*/ 1290528 w 1295968"/>
+                <a:gd name="csY0" fmla="*/ 2802467 h 2802467"/>
+                <a:gd name="csX1" fmla="*/ 1146595 w 1295968"/>
+                <a:gd name="csY1" fmla="*/ 2726267 h 2802467"/>
+                <a:gd name="csX2" fmla="*/ 295695 w 1295968"/>
+                <a:gd name="csY2" fmla="*/ 2357967 h 2802467"/>
+                <a:gd name="csX3" fmla="*/ 427739 w 1295968"/>
+                <a:gd name="csY3" fmla="*/ 1832696 h 2802467"/>
+                <a:gd name="csX4" fmla="*/ 299354 w 1295968"/>
+                <a:gd name="csY4" fmla="*/ 1340984 h 2802467"/>
+                <a:gd name="csX5" fmla="*/ 5313 w 1295968"/>
+                <a:gd name="csY5" fmla="*/ 931041 h 2802467"/>
+                <a:gd name="csX6" fmla="*/ 614317 w 1295968"/>
+                <a:gd name="csY6" fmla="*/ 344968 h 2802467"/>
+                <a:gd name="csX7" fmla="*/ 764611 w 1295968"/>
+                <a:gd name="csY7" fmla="*/ 0 h 2802467"/>
+                <a:gd name="csX0" fmla="*/ 1291129 w 1296569"/>
+                <a:gd name="csY0" fmla="*/ 2802467 h 2802467"/>
+                <a:gd name="csX1" fmla="*/ 1147196 w 1296569"/>
+                <a:gd name="csY1" fmla="*/ 2726267 h 2802467"/>
+                <a:gd name="csX2" fmla="*/ 296296 w 1296569"/>
+                <a:gd name="csY2" fmla="*/ 2357967 h 2802467"/>
+                <a:gd name="csX3" fmla="*/ 428340 w 1296569"/>
+                <a:gd name="csY3" fmla="*/ 1832696 h 2802467"/>
+                <a:gd name="csX4" fmla="*/ 299955 w 1296569"/>
+                <a:gd name="csY4" fmla="*/ 1340984 h 2802467"/>
+                <a:gd name="csX5" fmla="*/ 5914 w 1296569"/>
+                <a:gd name="csY5" fmla="*/ 931041 h 2802467"/>
+                <a:gd name="csX6" fmla="*/ 614918 w 1296569"/>
+                <a:gd name="csY6" fmla="*/ 344968 h 2802467"/>
+                <a:gd name="csX7" fmla="*/ 765212 w 1296569"/>
+                <a:gd name="csY7" fmla="*/ 0 h 2802467"/>
+                <a:gd name="csX0" fmla="*/ 1291630 w 1297070"/>
+                <a:gd name="csY0" fmla="*/ 2802467 h 2802467"/>
+                <a:gd name="csX1" fmla="*/ 1147697 w 1297070"/>
+                <a:gd name="csY1" fmla="*/ 2726267 h 2802467"/>
+                <a:gd name="csX2" fmla="*/ 296797 w 1297070"/>
+                <a:gd name="csY2" fmla="*/ 2357967 h 2802467"/>
+                <a:gd name="csX3" fmla="*/ 428841 w 1297070"/>
+                <a:gd name="csY3" fmla="*/ 1832696 h 2802467"/>
+                <a:gd name="csX4" fmla="*/ 290685 w 1297070"/>
+                <a:gd name="csY4" fmla="*/ 1252872 h 2802467"/>
+                <a:gd name="csX5" fmla="*/ 6415 w 1297070"/>
+                <a:gd name="csY5" fmla="*/ 931041 h 2802467"/>
+                <a:gd name="csX6" fmla="*/ 615419 w 1297070"/>
+                <a:gd name="csY6" fmla="*/ 344968 h 2802467"/>
+                <a:gd name="csX7" fmla="*/ 765713 w 1297070"/>
+                <a:gd name="csY7" fmla="*/ 0 h 2802467"/>
+                <a:gd name="csX0" fmla="*/ 1291630 w 1297070"/>
+                <a:gd name="csY0" fmla="*/ 2802467 h 2802467"/>
+                <a:gd name="csX1" fmla="*/ 1147697 w 1297070"/>
+                <a:gd name="csY1" fmla="*/ 2726267 h 2802467"/>
+                <a:gd name="csX2" fmla="*/ 296797 w 1297070"/>
+                <a:gd name="csY2" fmla="*/ 2357967 h 2802467"/>
+                <a:gd name="csX3" fmla="*/ 428841 w 1297070"/>
+                <a:gd name="csY3" fmla="*/ 1832696 h 2802467"/>
+                <a:gd name="csX4" fmla="*/ 290685 w 1297070"/>
+                <a:gd name="csY4" fmla="*/ 1252872 h 2802467"/>
+                <a:gd name="csX5" fmla="*/ 6415 w 1297070"/>
+                <a:gd name="csY5" fmla="*/ 931041 h 2802467"/>
+                <a:gd name="csX6" fmla="*/ 615419 w 1297070"/>
+                <a:gd name="csY6" fmla="*/ 344968 h 2802467"/>
+                <a:gd name="csX7" fmla="*/ 765713 w 1297070"/>
+                <a:gd name="csY7" fmla="*/ 0 h 2802467"/>
+                <a:gd name="csX0" fmla="*/ 1291630 w 1297070"/>
+                <a:gd name="csY0" fmla="*/ 2802467 h 2802467"/>
+                <a:gd name="csX1" fmla="*/ 1147697 w 1297070"/>
+                <a:gd name="csY1" fmla="*/ 2726267 h 2802467"/>
+                <a:gd name="csX2" fmla="*/ 296797 w 1297070"/>
+                <a:gd name="csY2" fmla="*/ 2357967 h 2802467"/>
+                <a:gd name="csX3" fmla="*/ 428841 w 1297070"/>
+                <a:gd name="csY3" fmla="*/ 1832696 h 2802467"/>
+                <a:gd name="csX4" fmla="*/ 290685 w 1297070"/>
+                <a:gd name="csY4" fmla="*/ 1252872 h 2802467"/>
+                <a:gd name="csX5" fmla="*/ 6415 w 1297070"/>
+                <a:gd name="csY5" fmla="*/ 931041 h 2802467"/>
+                <a:gd name="csX6" fmla="*/ 615419 w 1297070"/>
+                <a:gd name="csY6" fmla="*/ 344968 h 2802467"/>
+                <a:gd name="csX7" fmla="*/ 765713 w 1297070"/>
+                <a:gd name="csY7" fmla="*/ 0 h 2802467"/>
+                <a:gd name="csX0" fmla="*/ 1291630 w 1297070"/>
+                <a:gd name="csY0" fmla="*/ 2802467 h 2802467"/>
+                <a:gd name="csX1" fmla="*/ 1147697 w 1297070"/>
+                <a:gd name="csY1" fmla="*/ 2726267 h 2802467"/>
+                <a:gd name="csX2" fmla="*/ 296797 w 1297070"/>
+                <a:gd name="csY2" fmla="*/ 2357967 h 2802467"/>
+                <a:gd name="csX3" fmla="*/ 428841 w 1297070"/>
+                <a:gd name="csY3" fmla="*/ 1832696 h 2802467"/>
+                <a:gd name="csX4" fmla="*/ 290685 w 1297070"/>
+                <a:gd name="csY4" fmla="*/ 1252872 h 2802467"/>
+                <a:gd name="csX5" fmla="*/ 6415 w 1297070"/>
+                <a:gd name="csY5" fmla="*/ 931041 h 2802467"/>
+                <a:gd name="csX6" fmla="*/ 615419 w 1297070"/>
+                <a:gd name="csY6" fmla="*/ 344968 h 2802467"/>
+                <a:gd name="csX7" fmla="*/ 765713 w 1297070"/>
+                <a:gd name="csY7" fmla="*/ 0 h 2802467"/>
+                <a:gd name="csX0" fmla="*/ 1291630 w 1297070"/>
+                <a:gd name="csY0" fmla="*/ 2802467 h 2802467"/>
+                <a:gd name="csX1" fmla="*/ 1147697 w 1297070"/>
+                <a:gd name="csY1" fmla="*/ 2726267 h 2802467"/>
+                <a:gd name="csX2" fmla="*/ 296797 w 1297070"/>
+                <a:gd name="csY2" fmla="*/ 2357967 h 2802467"/>
+                <a:gd name="csX3" fmla="*/ 428841 w 1297070"/>
+                <a:gd name="csY3" fmla="*/ 1832696 h 2802467"/>
+                <a:gd name="csX4" fmla="*/ 290685 w 1297070"/>
+                <a:gd name="csY4" fmla="*/ 1252872 h 2802467"/>
+                <a:gd name="csX5" fmla="*/ 6415 w 1297070"/>
+                <a:gd name="csY5" fmla="*/ 931041 h 2802467"/>
+                <a:gd name="csX6" fmla="*/ 615419 w 1297070"/>
+                <a:gd name="csY6" fmla="*/ 344968 h 2802467"/>
+                <a:gd name="csX7" fmla="*/ 765713 w 1297070"/>
+                <a:gd name="csY7" fmla="*/ 0 h 2802467"/>
+                <a:gd name="csX0" fmla="*/ 1292459 w 1297899"/>
+                <a:gd name="csY0" fmla="*/ 2802467 h 2802467"/>
+                <a:gd name="csX1" fmla="*/ 1148526 w 1297899"/>
+                <a:gd name="csY1" fmla="*/ 2726267 h 2802467"/>
+                <a:gd name="csX2" fmla="*/ 297626 w 1297899"/>
+                <a:gd name="csY2" fmla="*/ 2357967 h 2802467"/>
+                <a:gd name="csX3" fmla="*/ 429670 w 1297899"/>
+                <a:gd name="csY3" fmla="*/ 1832696 h 2802467"/>
+                <a:gd name="csX4" fmla="*/ 291514 w 1297899"/>
+                <a:gd name="csY4" fmla="*/ 1252872 h 2802467"/>
+                <a:gd name="csX5" fmla="*/ 7244 w 1297899"/>
+                <a:gd name="csY5" fmla="*/ 931041 h 2802467"/>
+                <a:gd name="csX6" fmla="*/ 616248 w 1297899"/>
+                <a:gd name="csY6" fmla="*/ 344968 h 2802467"/>
+                <a:gd name="csX7" fmla="*/ 766542 w 1297899"/>
+                <a:gd name="csY7" fmla="*/ 0 h 2802467"/>
+                <a:gd name="csX0" fmla="*/ 1293106 w 1298546"/>
+                <a:gd name="csY0" fmla="*/ 2802467 h 2802467"/>
+                <a:gd name="csX1" fmla="*/ 1149173 w 1298546"/>
+                <a:gd name="csY1" fmla="*/ 2726267 h 2802467"/>
+                <a:gd name="csX2" fmla="*/ 298273 w 1298546"/>
+                <a:gd name="csY2" fmla="*/ 2357967 h 2802467"/>
+                <a:gd name="csX3" fmla="*/ 430317 w 1298546"/>
+                <a:gd name="csY3" fmla="*/ 1832696 h 2802467"/>
+                <a:gd name="csX4" fmla="*/ 292161 w 1298546"/>
+                <a:gd name="csY4" fmla="*/ 1252872 h 2802467"/>
+                <a:gd name="csX5" fmla="*/ 7891 w 1298546"/>
+                <a:gd name="csY5" fmla="*/ 931041 h 2802467"/>
+                <a:gd name="csX6" fmla="*/ 616895 w 1298546"/>
+                <a:gd name="csY6" fmla="*/ 344968 h 2802467"/>
+                <a:gd name="csX7" fmla="*/ 767189 w 1298546"/>
+                <a:gd name="csY7" fmla="*/ 0 h 2802467"/>
+                <a:gd name="csX0" fmla="*/ 1292243 w 1297683"/>
+                <a:gd name="csY0" fmla="*/ 2802467 h 2802467"/>
+                <a:gd name="csX1" fmla="*/ 1148310 w 1297683"/>
+                <a:gd name="csY1" fmla="*/ 2726267 h 2802467"/>
+                <a:gd name="csX2" fmla="*/ 297410 w 1297683"/>
+                <a:gd name="csY2" fmla="*/ 2357967 h 2802467"/>
+                <a:gd name="csX3" fmla="*/ 429454 w 1297683"/>
+                <a:gd name="csY3" fmla="*/ 1832696 h 2802467"/>
+                <a:gd name="csX4" fmla="*/ 291298 w 1297683"/>
+                <a:gd name="csY4" fmla="*/ 1252872 h 2802467"/>
+                <a:gd name="csX5" fmla="*/ 7028 w 1297683"/>
+                <a:gd name="csY5" fmla="*/ 931041 h 2802467"/>
+                <a:gd name="csX6" fmla="*/ 616032 w 1297683"/>
+                <a:gd name="csY6" fmla="*/ 344968 h 2802467"/>
+                <a:gd name="csX7" fmla="*/ 766326 w 1297683"/>
+                <a:gd name="csY7" fmla="*/ 0 h 2802467"/>
+                <a:gd name="csX0" fmla="*/ 1290566 w 1296006"/>
+                <a:gd name="csY0" fmla="*/ 2802467 h 2802467"/>
+                <a:gd name="csX1" fmla="*/ 1146633 w 1296006"/>
+                <a:gd name="csY1" fmla="*/ 2726267 h 2802467"/>
+                <a:gd name="csX2" fmla="*/ 295733 w 1296006"/>
+                <a:gd name="csY2" fmla="*/ 2357967 h 2802467"/>
+                <a:gd name="csX3" fmla="*/ 427777 w 1296006"/>
+                <a:gd name="csY3" fmla="*/ 1832696 h 2802467"/>
+                <a:gd name="csX4" fmla="*/ 289621 w 1296006"/>
+                <a:gd name="csY4" fmla="*/ 1252872 h 2802467"/>
+                <a:gd name="csX5" fmla="*/ 5351 w 1296006"/>
+                <a:gd name="csY5" fmla="*/ 931041 h 2802467"/>
+                <a:gd name="csX6" fmla="*/ 614355 w 1296006"/>
+                <a:gd name="csY6" fmla="*/ 344968 h 2802467"/>
+                <a:gd name="csX7" fmla="*/ 764649 w 1296006"/>
+                <a:gd name="csY7" fmla="*/ 0 h 2802467"/>
+                <a:gd name="csX0" fmla="*/ 1290566 w 1296006"/>
+                <a:gd name="csY0" fmla="*/ 2802467 h 2802467"/>
+                <a:gd name="csX1" fmla="*/ 1146633 w 1296006"/>
+                <a:gd name="csY1" fmla="*/ 2726267 h 2802467"/>
+                <a:gd name="csX2" fmla="*/ 295733 w 1296006"/>
+                <a:gd name="csY2" fmla="*/ 2357967 h 2802467"/>
+                <a:gd name="csX3" fmla="*/ 466862 w 1296006"/>
+                <a:gd name="csY3" fmla="*/ 1864737 h 2802467"/>
+                <a:gd name="csX4" fmla="*/ 289621 w 1296006"/>
+                <a:gd name="csY4" fmla="*/ 1252872 h 2802467"/>
+                <a:gd name="csX5" fmla="*/ 5351 w 1296006"/>
+                <a:gd name="csY5" fmla="*/ 931041 h 2802467"/>
+                <a:gd name="csX6" fmla="*/ 614355 w 1296006"/>
+                <a:gd name="csY6" fmla="*/ 344968 h 2802467"/>
+                <a:gd name="csX7" fmla="*/ 764649 w 1296006"/>
+                <a:gd name="csY7" fmla="*/ 0 h 2802467"/>
+                <a:gd name="csX0" fmla="*/ 1290566 w 1296006"/>
+                <a:gd name="csY0" fmla="*/ 2802467 h 2802467"/>
+                <a:gd name="csX1" fmla="*/ 1146633 w 1296006"/>
+                <a:gd name="csY1" fmla="*/ 2726267 h 2802467"/>
+                <a:gd name="csX2" fmla="*/ 295733 w 1296006"/>
+                <a:gd name="csY2" fmla="*/ 2357967 h 2802467"/>
+                <a:gd name="csX3" fmla="*/ 505946 w 1296006"/>
+                <a:gd name="csY3" fmla="*/ 1861533 h 2802467"/>
+                <a:gd name="csX4" fmla="*/ 289621 w 1296006"/>
+                <a:gd name="csY4" fmla="*/ 1252872 h 2802467"/>
+                <a:gd name="csX5" fmla="*/ 5351 w 1296006"/>
+                <a:gd name="csY5" fmla="*/ 931041 h 2802467"/>
+                <a:gd name="csX6" fmla="*/ 614355 w 1296006"/>
+                <a:gd name="csY6" fmla="*/ 344968 h 2802467"/>
+                <a:gd name="csX7" fmla="*/ 764649 w 1296006"/>
+                <a:gd name="csY7" fmla="*/ 0 h 2802467"/>
+                <a:gd name="csX0" fmla="*/ 1290566 w 1296006"/>
+                <a:gd name="csY0" fmla="*/ 2802467 h 2802467"/>
+                <a:gd name="csX1" fmla="*/ 1146633 w 1296006"/>
+                <a:gd name="csY1" fmla="*/ 2726267 h 2802467"/>
+                <a:gd name="csX2" fmla="*/ 295733 w 1296006"/>
+                <a:gd name="csY2" fmla="*/ 2357967 h 2802467"/>
+                <a:gd name="csX3" fmla="*/ 440805 w 1296006"/>
+                <a:gd name="csY3" fmla="*/ 1874349 h 2802467"/>
+                <a:gd name="csX4" fmla="*/ 289621 w 1296006"/>
+                <a:gd name="csY4" fmla="*/ 1252872 h 2802467"/>
+                <a:gd name="csX5" fmla="*/ 5351 w 1296006"/>
+                <a:gd name="csY5" fmla="*/ 931041 h 2802467"/>
+                <a:gd name="csX6" fmla="*/ 614355 w 1296006"/>
+                <a:gd name="csY6" fmla="*/ 344968 h 2802467"/>
+                <a:gd name="csX7" fmla="*/ 764649 w 1296006"/>
+                <a:gd name="csY7" fmla="*/ 0 h 2802467"/>
+                <a:gd name="csX0" fmla="*/ 1290566 w 1296006"/>
+                <a:gd name="csY0" fmla="*/ 2802467 h 2802467"/>
+                <a:gd name="csX1" fmla="*/ 1146633 w 1296006"/>
+                <a:gd name="csY1" fmla="*/ 2726267 h 2802467"/>
+                <a:gd name="csX2" fmla="*/ 295733 w 1296006"/>
+                <a:gd name="csY2" fmla="*/ 2357967 h 2802467"/>
+                <a:gd name="csX3" fmla="*/ 470119 w 1296006"/>
+                <a:gd name="csY3" fmla="*/ 1845513 h 2802467"/>
+                <a:gd name="csX4" fmla="*/ 289621 w 1296006"/>
+                <a:gd name="csY4" fmla="*/ 1252872 h 2802467"/>
+                <a:gd name="csX5" fmla="*/ 5351 w 1296006"/>
+                <a:gd name="csY5" fmla="*/ 931041 h 2802467"/>
+                <a:gd name="csX6" fmla="*/ 614355 w 1296006"/>
+                <a:gd name="csY6" fmla="*/ 344968 h 2802467"/>
+                <a:gd name="csX7" fmla="*/ 764649 w 1296006"/>
+                <a:gd name="csY7" fmla="*/ 0 h 2802467"/>
+                <a:gd name="csX0" fmla="*/ 1290566 w 1296006"/>
+                <a:gd name="csY0" fmla="*/ 2802467 h 2802467"/>
+                <a:gd name="csX1" fmla="*/ 1146633 w 1296006"/>
+                <a:gd name="csY1" fmla="*/ 2726267 h 2802467"/>
+                <a:gd name="csX2" fmla="*/ 295733 w 1296006"/>
+                <a:gd name="csY2" fmla="*/ 2357967 h 2802467"/>
+                <a:gd name="csX3" fmla="*/ 427777 w 1296006"/>
+                <a:gd name="csY3" fmla="*/ 1855125 h 2802467"/>
+                <a:gd name="csX4" fmla="*/ 289621 w 1296006"/>
+                <a:gd name="csY4" fmla="*/ 1252872 h 2802467"/>
+                <a:gd name="csX5" fmla="*/ 5351 w 1296006"/>
+                <a:gd name="csY5" fmla="*/ 931041 h 2802467"/>
+                <a:gd name="csX6" fmla="*/ 614355 w 1296006"/>
+                <a:gd name="csY6" fmla="*/ 344968 h 2802467"/>
+                <a:gd name="csX7" fmla="*/ 764649 w 1296006"/>
+                <a:gd name="csY7" fmla="*/ 0 h 2802467"/>
+                <a:gd name="csX0" fmla="*/ 1290566 w 1296006"/>
+                <a:gd name="csY0" fmla="*/ 2802467 h 2802467"/>
+                <a:gd name="csX1" fmla="*/ 1146633 w 1296006"/>
+                <a:gd name="csY1" fmla="*/ 2726267 h 2802467"/>
+                <a:gd name="csX2" fmla="*/ 295733 w 1296006"/>
+                <a:gd name="csY2" fmla="*/ 2357967 h 2802467"/>
+                <a:gd name="csX3" fmla="*/ 427777 w 1296006"/>
+                <a:gd name="csY3" fmla="*/ 1855125 h 2802467"/>
+                <a:gd name="csX4" fmla="*/ 384074 w 1296006"/>
+                <a:gd name="csY4" fmla="*/ 1642163 h 2802467"/>
+                <a:gd name="csX5" fmla="*/ 289621 w 1296006"/>
+                <a:gd name="csY5" fmla="*/ 1252872 h 2802467"/>
+                <a:gd name="csX6" fmla="*/ 5351 w 1296006"/>
+                <a:gd name="csY6" fmla="*/ 931041 h 2802467"/>
+                <a:gd name="csX7" fmla="*/ 614355 w 1296006"/>
+                <a:gd name="csY7" fmla="*/ 344968 h 2802467"/>
+                <a:gd name="csX8" fmla="*/ 764649 w 1296006"/>
+                <a:gd name="csY8" fmla="*/ 0 h 2802467"/>
+                <a:gd name="csX0" fmla="*/ 1290566 w 1296006"/>
+                <a:gd name="csY0" fmla="*/ 2802467 h 2802467"/>
+                <a:gd name="csX1" fmla="*/ 1146633 w 1296006"/>
+                <a:gd name="csY1" fmla="*/ 2726267 h 2802467"/>
+                <a:gd name="csX2" fmla="*/ 295733 w 1296006"/>
+                <a:gd name="csY2" fmla="*/ 2357967 h 2802467"/>
+                <a:gd name="csX3" fmla="*/ 427777 w 1296006"/>
+                <a:gd name="csY3" fmla="*/ 1855125 h 2802467"/>
+                <a:gd name="csX4" fmla="*/ 384074 w 1296006"/>
+                <a:gd name="csY4" fmla="*/ 1642163 h 2802467"/>
+                <a:gd name="csX5" fmla="*/ 289621 w 1296006"/>
+                <a:gd name="csY5" fmla="*/ 1252872 h 2802467"/>
+                <a:gd name="csX6" fmla="*/ 5351 w 1296006"/>
+                <a:gd name="csY6" fmla="*/ 931041 h 2802467"/>
+                <a:gd name="csX7" fmla="*/ 614355 w 1296006"/>
+                <a:gd name="csY7" fmla="*/ 344968 h 2802467"/>
+                <a:gd name="csX8" fmla="*/ 764649 w 1296006"/>
+                <a:gd name="csY8" fmla="*/ 0 h 2802467"/>
+                <a:gd name="csX0" fmla="*/ 1291759 w 1297199"/>
+                <a:gd name="csY0" fmla="*/ 2802467 h 2802467"/>
+                <a:gd name="csX1" fmla="*/ 1147826 w 1297199"/>
+                <a:gd name="csY1" fmla="*/ 2726267 h 2802467"/>
+                <a:gd name="csX2" fmla="*/ 296926 w 1297199"/>
+                <a:gd name="csY2" fmla="*/ 2357967 h 2802467"/>
+                <a:gd name="csX3" fmla="*/ 428970 w 1297199"/>
+                <a:gd name="csY3" fmla="*/ 1855125 h 2802467"/>
+                <a:gd name="csX4" fmla="*/ 385267 w 1297199"/>
+                <a:gd name="csY4" fmla="*/ 1642163 h 2802467"/>
+                <a:gd name="csX5" fmla="*/ 264757 w 1297199"/>
+                <a:gd name="csY5" fmla="*/ 1179179 h 2802467"/>
+                <a:gd name="csX6" fmla="*/ 6544 w 1297199"/>
+                <a:gd name="csY6" fmla="*/ 931041 h 2802467"/>
+                <a:gd name="csX7" fmla="*/ 615548 w 1297199"/>
+                <a:gd name="csY7" fmla="*/ 344968 h 2802467"/>
+                <a:gd name="csX8" fmla="*/ 765842 w 1297199"/>
+                <a:gd name="csY8" fmla="*/ 0 h 2802467"/>
+                <a:gd name="csX0" fmla="*/ 1294621 w 1300061"/>
+                <a:gd name="csY0" fmla="*/ 2802467 h 2802467"/>
+                <a:gd name="csX1" fmla="*/ 1150688 w 1300061"/>
+                <a:gd name="csY1" fmla="*/ 2726267 h 2802467"/>
+                <a:gd name="csX2" fmla="*/ 299788 w 1300061"/>
+                <a:gd name="csY2" fmla="*/ 2357967 h 2802467"/>
+                <a:gd name="csX3" fmla="*/ 431832 w 1300061"/>
+                <a:gd name="csY3" fmla="*/ 1855125 h 2802467"/>
+                <a:gd name="csX4" fmla="*/ 388129 w 1300061"/>
+                <a:gd name="csY4" fmla="*/ 1642163 h 2802467"/>
+                <a:gd name="csX5" fmla="*/ 267619 w 1300061"/>
+                <a:gd name="csY5" fmla="*/ 1179179 h 2802467"/>
+                <a:gd name="csX6" fmla="*/ 9406 w 1300061"/>
+                <a:gd name="csY6" fmla="*/ 931041 h 2802467"/>
+                <a:gd name="csX7" fmla="*/ 618410 w 1300061"/>
+                <a:gd name="csY7" fmla="*/ 344968 h 2802467"/>
+                <a:gd name="csX8" fmla="*/ 768704 w 1300061"/>
+                <a:gd name="csY8" fmla="*/ 0 h 2802467"/>
+                <a:gd name="csX0" fmla="*/ 1294621 w 1300061"/>
+                <a:gd name="csY0" fmla="*/ 2802467 h 2802467"/>
+                <a:gd name="csX1" fmla="*/ 1150688 w 1300061"/>
+                <a:gd name="csY1" fmla="*/ 2726267 h 2802467"/>
+                <a:gd name="csX2" fmla="*/ 299788 w 1300061"/>
+                <a:gd name="csY2" fmla="*/ 2357967 h 2802467"/>
+                <a:gd name="csX3" fmla="*/ 399262 w 1300061"/>
+                <a:gd name="csY3" fmla="*/ 2002511 h 2802467"/>
+                <a:gd name="csX4" fmla="*/ 388129 w 1300061"/>
+                <a:gd name="csY4" fmla="*/ 1642163 h 2802467"/>
+                <a:gd name="csX5" fmla="*/ 267619 w 1300061"/>
+                <a:gd name="csY5" fmla="*/ 1179179 h 2802467"/>
+                <a:gd name="csX6" fmla="*/ 9406 w 1300061"/>
+                <a:gd name="csY6" fmla="*/ 931041 h 2802467"/>
+                <a:gd name="csX7" fmla="*/ 618410 w 1300061"/>
+                <a:gd name="csY7" fmla="*/ 344968 h 2802467"/>
+                <a:gd name="csX8" fmla="*/ 768704 w 1300061"/>
+                <a:gd name="csY8" fmla="*/ 0 h 2802467"/>
+                <a:gd name="csX0" fmla="*/ 1294621 w 1300061"/>
+                <a:gd name="csY0" fmla="*/ 2802467 h 2802467"/>
+                <a:gd name="csX1" fmla="*/ 1150688 w 1300061"/>
+                <a:gd name="csY1" fmla="*/ 2726267 h 2802467"/>
+                <a:gd name="csX2" fmla="*/ 299788 w 1300061"/>
+                <a:gd name="csY2" fmla="*/ 2357967 h 2802467"/>
+                <a:gd name="csX3" fmla="*/ 399262 w 1300061"/>
+                <a:gd name="csY3" fmla="*/ 2002511 h 2802467"/>
+                <a:gd name="csX4" fmla="*/ 388129 w 1300061"/>
+                <a:gd name="csY4" fmla="*/ 1642163 h 2802467"/>
+                <a:gd name="csX5" fmla="*/ 267619 w 1300061"/>
+                <a:gd name="csY5" fmla="*/ 1179179 h 2802467"/>
+                <a:gd name="csX6" fmla="*/ 9406 w 1300061"/>
+                <a:gd name="csY6" fmla="*/ 931041 h 2802467"/>
+                <a:gd name="csX7" fmla="*/ 618410 w 1300061"/>
+                <a:gd name="csY7" fmla="*/ 344968 h 2802467"/>
+                <a:gd name="csX8" fmla="*/ 768704 w 1300061"/>
+                <a:gd name="csY8" fmla="*/ 0 h 2802467"/>
+                <a:gd name="csX0" fmla="*/ 1294621 w 1300061"/>
+                <a:gd name="csY0" fmla="*/ 2802467 h 2802467"/>
+                <a:gd name="csX1" fmla="*/ 1150688 w 1300061"/>
+                <a:gd name="csY1" fmla="*/ 2726267 h 2802467"/>
+                <a:gd name="csX2" fmla="*/ 299788 w 1300061"/>
+                <a:gd name="csY2" fmla="*/ 2357967 h 2802467"/>
+                <a:gd name="csX3" fmla="*/ 399262 w 1300061"/>
+                <a:gd name="csY3" fmla="*/ 2002511 h 2802467"/>
+                <a:gd name="csX4" fmla="*/ 388129 w 1300061"/>
+                <a:gd name="csY4" fmla="*/ 1642163 h 2802467"/>
+                <a:gd name="csX5" fmla="*/ 267619 w 1300061"/>
+                <a:gd name="csY5" fmla="*/ 1179179 h 2802467"/>
+                <a:gd name="csX6" fmla="*/ 9406 w 1300061"/>
+                <a:gd name="csY6" fmla="*/ 931041 h 2802467"/>
+                <a:gd name="csX7" fmla="*/ 618410 w 1300061"/>
+                <a:gd name="csY7" fmla="*/ 344968 h 2802467"/>
+                <a:gd name="csX8" fmla="*/ 768704 w 1300061"/>
+                <a:gd name="csY8" fmla="*/ 0 h 2802467"/>
+                <a:gd name="csX0" fmla="*/ 1294621 w 1300061"/>
+                <a:gd name="csY0" fmla="*/ 2802467 h 2802467"/>
+                <a:gd name="csX1" fmla="*/ 1150688 w 1300061"/>
+                <a:gd name="csY1" fmla="*/ 2726267 h 2802467"/>
+                <a:gd name="csX2" fmla="*/ 299788 w 1300061"/>
+                <a:gd name="csY2" fmla="*/ 2357967 h 2802467"/>
+                <a:gd name="csX3" fmla="*/ 399262 w 1300061"/>
+                <a:gd name="csY3" fmla="*/ 2002511 h 2802467"/>
+                <a:gd name="csX4" fmla="*/ 388129 w 1300061"/>
+                <a:gd name="csY4" fmla="*/ 1642163 h 2802467"/>
+                <a:gd name="csX5" fmla="*/ 267619 w 1300061"/>
+                <a:gd name="csY5" fmla="*/ 1179179 h 2802467"/>
+                <a:gd name="csX6" fmla="*/ 9406 w 1300061"/>
+                <a:gd name="csY6" fmla="*/ 931041 h 2802467"/>
+                <a:gd name="csX7" fmla="*/ 618410 w 1300061"/>
+                <a:gd name="csY7" fmla="*/ 344968 h 2802467"/>
+                <a:gd name="csX8" fmla="*/ 768704 w 1300061"/>
+                <a:gd name="csY8" fmla="*/ 0 h 2802467"/>
+                <a:gd name="csX0" fmla="*/ 1294621 w 1300061"/>
+                <a:gd name="csY0" fmla="*/ 2802467 h 2802467"/>
+                <a:gd name="csX1" fmla="*/ 1150688 w 1300061"/>
+                <a:gd name="csY1" fmla="*/ 2726267 h 2802467"/>
+                <a:gd name="csX2" fmla="*/ 299788 w 1300061"/>
+                <a:gd name="csY2" fmla="*/ 2357967 h 2802467"/>
+                <a:gd name="csX3" fmla="*/ 399262 w 1300061"/>
+                <a:gd name="csY3" fmla="*/ 2002511 h 2802467"/>
+                <a:gd name="csX4" fmla="*/ 388129 w 1300061"/>
+                <a:gd name="csY4" fmla="*/ 1642163 h 2802467"/>
+                <a:gd name="csX5" fmla="*/ 267619 w 1300061"/>
+                <a:gd name="csY5" fmla="*/ 1179179 h 2802467"/>
+                <a:gd name="csX6" fmla="*/ 9406 w 1300061"/>
+                <a:gd name="csY6" fmla="*/ 931041 h 2802467"/>
+                <a:gd name="csX7" fmla="*/ 618410 w 1300061"/>
+                <a:gd name="csY7" fmla="*/ 344968 h 2802467"/>
+                <a:gd name="csX8" fmla="*/ 768704 w 1300061"/>
+                <a:gd name="csY8" fmla="*/ 0 h 2802467"/>
+                <a:gd name="csX0" fmla="*/ 1295407 w 1300847"/>
+                <a:gd name="csY0" fmla="*/ 2802467 h 2802467"/>
+                <a:gd name="csX1" fmla="*/ 1151474 w 1300847"/>
+                <a:gd name="csY1" fmla="*/ 2726267 h 2802467"/>
+                <a:gd name="csX2" fmla="*/ 300574 w 1300847"/>
+                <a:gd name="csY2" fmla="*/ 2357967 h 2802467"/>
+                <a:gd name="csX3" fmla="*/ 400048 w 1300847"/>
+                <a:gd name="csY3" fmla="*/ 2002511 h 2802467"/>
+                <a:gd name="csX4" fmla="*/ 388915 w 1300847"/>
+                <a:gd name="csY4" fmla="*/ 1642163 h 2802467"/>
+                <a:gd name="csX5" fmla="*/ 258634 w 1300847"/>
+                <a:gd name="csY5" fmla="*/ 1185588 h 2802467"/>
+                <a:gd name="csX6" fmla="*/ 10192 w 1300847"/>
+                <a:gd name="csY6" fmla="*/ 931041 h 2802467"/>
+                <a:gd name="csX7" fmla="*/ 619196 w 1300847"/>
+                <a:gd name="csY7" fmla="*/ 344968 h 2802467"/>
+                <a:gd name="csX8" fmla="*/ 769490 w 1300847"/>
+                <a:gd name="csY8" fmla="*/ 0 h 2802467"/>
+                <a:gd name="csX0" fmla="*/ 1293721 w 1299161"/>
+                <a:gd name="csY0" fmla="*/ 2802467 h 2802467"/>
+                <a:gd name="csX1" fmla="*/ 1149788 w 1299161"/>
+                <a:gd name="csY1" fmla="*/ 2726267 h 2802467"/>
+                <a:gd name="csX2" fmla="*/ 298888 w 1299161"/>
+                <a:gd name="csY2" fmla="*/ 2357967 h 2802467"/>
+                <a:gd name="csX3" fmla="*/ 398362 w 1299161"/>
+                <a:gd name="csY3" fmla="*/ 2002511 h 2802467"/>
+                <a:gd name="csX4" fmla="*/ 387229 w 1299161"/>
+                <a:gd name="csY4" fmla="*/ 1642163 h 2802467"/>
+                <a:gd name="csX5" fmla="*/ 256948 w 1299161"/>
+                <a:gd name="csY5" fmla="*/ 1185588 h 2802467"/>
+                <a:gd name="csX6" fmla="*/ 8506 w 1299161"/>
+                <a:gd name="csY6" fmla="*/ 931041 h 2802467"/>
+                <a:gd name="csX7" fmla="*/ 617510 w 1299161"/>
+                <a:gd name="csY7" fmla="*/ 344968 h 2802467"/>
+                <a:gd name="csX8" fmla="*/ 767804 w 1299161"/>
+                <a:gd name="csY8" fmla="*/ 0 h 2802467"/>
+                <a:gd name="csX0" fmla="*/ 1288131 w 1293571"/>
+                <a:gd name="csY0" fmla="*/ 2802467 h 2802467"/>
+                <a:gd name="csX1" fmla="*/ 1144198 w 1293571"/>
+                <a:gd name="csY1" fmla="*/ 2726267 h 2802467"/>
+                <a:gd name="csX2" fmla="*/ 293298 w 1293571"/>
+                <a:gd name="csY2" fmla="*/ 2357967 h 2802467"/>
+                <a:gd name="csX3" fmla="*/ 392772 w 1293571"/>
+                <a:gd name="csY3" fmla="*/ 2002511 h 2802467"/>
+                <a:gd name="csX4" fmla="*/ 381639 w 1293571"/>
+                <a:gd name="csY4" fmla="*/ 1642163 h 2802467"/>
+                <a:gd name="csX5" fmla="*/ 2916 w 1293571"/>
+                <a:gd name="csY5" fmla="*/ 931041 h 2802467"/>
+                <a:gd name="csX6" fmla="*/ 611920 w 1293571"/>
+                <a:gd name="csY6" fmla="*/ 344968 h 2802467"/>
+                <a:gd name="csX7" fmla="*/ 762214 w 1293571"/>
+                <a:gd name="csY7" fmla="*/ 0 h 2802467"/>
+                <a:gd name="csX0" fmla="*/ 1288131 w 1293571"/>
+                <a:gd name="csY0" fmla="*/ 2802467 h 2802467"/>
+                <a:gd name="csX1" fmla="*/ 1144198 w 1293571"/>
+                <a:gd name="csY1" fmla="*/ 2726267 h 2802467"/>
+                <a:gd name="csX2" fmla="*/ 293298 w 1293571"/>
+                <a:gd name="csY2" fmla="*/ 2357967 h 2802467"/>
+                <a:gd name="csX3" fmla="*/ 373229 w 1293571"/>
+                <a:gd name="csY3" fmla="*/ 2090942 h 2802467"/>
+                <a:gd name="csX4" fmla="*/ 381639 w 1293571"/>
+                <a:gd name="csY4" fmla="*/ 1642163 h 2802467"/>
+                <a:gd name="csX5" fmla="*/ 2916 w 1293571"/>
+                <a:gd name="csY5" fmla="*/ 931041 h 2802467"/>
+                <a:gd name="csX6" fmla="*/ 611920 w 1293571"/>
+                <a:gd name="csY6" fmla="*/ 344968 h 2802467"/>
+                <a:gd name="csX7" fmla="*/ 762214 w 1293571"/>
+                <a:gd name="csY7" fmla="*/ 0 h 2802467"/>
+                <a:gd name="csX0" fmla="*/ 1288131 w 1293571"/>
+                <a:gd name="csY0" fmla="*/ 2802467 h 2802467"/>
+                <a:gd name="csX1" fmla="*/ 1144198 w 1293571"/>
+                <a:gd name="csY1" fmla="*/ 2726267 h 2802467"/>
+                <a:gd name="csX2" fmla="*/ 293298 w 1293571"/>
+                <a:gd name="csY2" fmla="*/ 2357967 h 2802467"/>
+                <a:gd name="csX3" fmla="*/ 373229 w 1293571"/>
+                <a:gd name="csY3" fmla="*/ 2040959 h 2802467"/>
+                <a:gd name="csX4" fmla="*/ 381639 w 1293571"/>
+                <a:gd name="csY4" fmla="*/ 1642163 h 2802467"/>
+                <a:gd name="csX5" fmla="*/ 2916 w 1293571"/>
+                <a:gd name="csY5" fmla="*/ 931041 h 2802467"/>
+                <a:gd name="csX6" fmla="*/ 611920 w 1293571"/>
+                <a:gd name="csY6" fmla="*/ 344968 h 2802467"/>
+                <a:gd name="csX7" fmla="*/ 762214 w 1293571"/>
+                <a:gd name="csY7" fmla="*/ 0 h 2802467"/>
+                <a:gd name="csX0" fmla="*/ 1288131 w 1293571"/>
+                <a:gd name="csY0" fmla="*/ 2802467 h 2802467"/>
+                <a:gd name="csX1" fmla="*/ 1144198 w 1293571"/>
+                <a:gd name="csY1" fmla="*/ 2726267 h 2802467"/>
+                <a:gd name="csX2" fmla="*/ 293298 w 1293571"/>
+                <a:gd name="csY2" fmla="*/ 2357967 h 2802467"/>
+                <a:gd name="csX3" fmla="*/ 322420 w 1293571"/>
+                <a:gd name="csY3" fmla="*/ 2002511 h 2802467"/>
+                <a:gd name="csX4" fmla="*/ 381639 w 1293571"/>
+                <a:gd name="csY4" fmla="*/ 1642163 h 2802467"/>
+                <a:gd name="csX5" fmla="*/ 2916 w 1293571"/>
+                <a:gd name="csY5" fmla="*/ 931041 h 2802467"/>
+                <a:gd name="csX6" fmla="*/ 611920 w 1293571"/>
+                <a:gd name="csY6" fmla="*/ 344968 h 2802467"/>
+                <a:gd name="csX7" fmla="*/ 762214 w 1293571"/>
+                <a:gd name="csY7" fmla="*/ 0 h 2802467"/>
+                <a:gd name="csX0" fmla="*/ 1288471 w 1293911"/>
+                <a:gd name="csY0" fmla="*/ 2802467 h 2802467"/>
+                <a:gd name="csX1" fmla="*/ 1144538 w 1293911"/>
+                <a:gd name="csY1" fmla="*/ 2726267 h 2802467"/>
+                <a:gd name="csX2" fmla="*/ 293638 w 1293911"/>
+                <a:gd name="csY2" fmla="*/ 2357967 h 2802467"/>
+                <a:gd name="csX3" fmla="*/ 322760 w 1293911"/>
+                <a:gd name="csY3" fmla="*/ 2002511 h 2802467"/>
+                <a:gd name="csX4" fmla="*/ 381979 w 1293911"/>
+                <a:gd name="csY4" fmla="*/ 1642163 h 2802467"/>
+                <a:gd name="csX5" fmla="*/ 3256 w 1293911"/>
+                <a:gd name="csY5" fmla="*/ 931041 h 2802467"/>
+                <a:gd name="csX6" fmla="*/ 612260 w 1293911"/>
+                <a:gd name="csY6" fmla="*/ 344968 h 2802467"/>
+                <a:gd name="csX7" fmla="*/ 762554 w 1293911"/>
+                <a:gd name="csY7" fmla="*/ 0 h 2802467"/>
+                <a:gd name="csX0" fmla="*/ 1288471 w 1293911"/>
+                <a:gd name="csY0" fmla="*/ 2802467 h 2802467"/>
+                <a:gd name="csX1" fmla="*/ 1144538 w 1293911"/>
+                <a:gd name="csY1" fmla="*/ 2726267 h 2802467"/>
+                <a:gd name="csX2" fmla="*/ 293638 w 1293911"/>
+                <a:gd name="csY2" fmla="*/ 2357967 h 2802467"/>
+                <a:gd name="csX3" fmla="*/ 322760 w 1293911"/>
+                <a:gd name="csY3" fmla="*/ 2002511 h 2802467"/>
+                <a:gd name="csX4" fmla="*/ 381979 w 1293911"/>
+                <a:gd name="csY4" fmla="*/ 1642163 h 2802467"/>
+                <a:gd name="csX5" fmla="*/ 3256 w 1293911"/>
+                <a:gd name="csY5" fmla="*/ 931041 h 2802467"/>
+                <a:gd name="csX6" fmla="*/ 612260 w 1293911"/>
+                <a:gd name="csY6" fmla="*/ 344968 h 2802467"/>
+                <a:gd name="csX7" fmla="*/ 762554 w 1293911"/>
+                <a:gd name="csY7" fmla="*/ 0 h 2802467"/>
+                <a:gd name="csX0" fmla="*/ 1288471 w 1293911"/>
+                <a:gd name="csY0" fmla="*/ 2802467 h 2802467"/>
+                <a:gd name="csX1" fmla="*/ 1144538 w 1293911"/>
+                <a:gd name="csY1" fmla="*/ 2726267 h 2802467"/>
+                <a:gd name="csX2" fmla="*/ 293638 w 1293911"/>
+                <a:gd name="csY2" fmla="*/ 2357967 h 2802467"/>
+                <a:gd name="csX3" fmla="*/ 399300 w 1293911"/>
+                <a:gd name="csY3" fmla="*/ 2097030 h 2802467"/>
+                <a:gd name="csX4" fmla="*/ 381979 w 1293911"/>
+                <a:gd name="csY4" fmla="*/ 1642163 h 2802467"/>
+                <a:gd name="csX5" fmla="*/ 3256 w 1293911"/>
+                <a:gd name="csY5" fmla="*/ 931041 h 2802467"/>
+                <a:gd name="csX6" fmla="*/ 612260 w 1293911"/>
+                <a:gd name="csY6" fmla="*/ 344968 h 2802467"/>
+                <a:gd name="csX7" fmla="*/ 762554 w 1293911"/>
+                <a:gd name="csY7" fmla="*/ 0 h 2802467"/>
+                <a:gd name="csX0" fmla="*/ 1288471 w 1293911"/>
+                <a:gd name="csY0" fmla="*/ 2802467 h 2802467"/>
+                <a:gd name="csX1" fmla="*/ 1144538 w 1293911"/>
+                <a:gd name="csY1" fmla="*/ 2726267 h 2802467"/>
+                <a:gd name="csX2" fmla="*/ 293638 w 1293911"/>
+                <a:gd name="csY2" fmla="*/ 2357967 h 2802467"/>
+                <a:gd name="csX3" fmla="*/ 373244 w 1293911"/>
+                <a:gd name="csY3" fmla="*/ 2071398 h 2802467"/>
+                <a:gd name="csX4" fmla="*/ 381979 w 1293911"/>
+                <a:gd name="csY4" fmla="*/ 1642163 h 2802467"/>
+                <a:gd name="csX5" fmla="*/ 3256 w 1293911"/>
+                <a:gd name="csY5" fmla="*/ 931041 h 2802467"/>
+                <a:gd name="csX6" fmla="*/ 612260 w 1293911"/>
+                <a:gd name="csY6" fmla="*/ 344968 h 2802467"/>
+                <a:gd name="csX7" fmla="*/ 762554 w 1293911"/>
+                <a:gd name="csY7" fmla="*/ 0 h 2802467"/>
+                <a:gd name="csX0" fmla="*/ 1285374 w 1290814"/>
+                <a:gd name="csY0" fmla="*/ 2802467 h 2802467"/>
+                <a:gd name="csX1" fmla="*/ 1141441 w 1290814"/>
+                <a:gd name="csY1" fmla="*/ 2726267 h 2802467"/>
+                <a:gd name="csX2" fmla="*/ 290541 w 1290814"/>
+                <a:gd name="csY2" fmla="*/ 2357967 h 2802467"/>
+                <a:gd name="csX3" fmla="*/ 370147 w 1290814"/>
+                <a:gd name="csY3" fmla="*/ 2071398 h 2802467"/>
+                <a:gd name="csX4" fmla="*/ 549876 w 1290814"/>
+                <a:gd name="csY4" fmla="*/ 1672602 h 2802467"/>
+                <a:gd name="csX5" fmla="*/ 159 w 1290814"/>
+                <a:gd name="csY5" fmla="*/ 931041 h 2802467"/>
+                <a:gd name="csX6" fmla="*/ 609163 w 1290814"/>
+                <a:gd name="csY6" fmla="*/ 344968 h 2802467"/>
+                <a:gd name="csX7" fmla="*/ 759457 w 1290814"/>
+                <a:gd name="csY7" fmla="*/ 0 h 2802467"/>
+                <a:gd name="csX0" fmla="*/ 1285374 w 1290814"/>
+                <a:gd name="csY0" fmla="*/ 2802467 h 2802467"/>
+                <a:gd name="csX1" fmla="*/ 1141441 w 1290814"/>
+                <a:gd name="csY1" fmla="*/ 2726267 h 2802467"/>
+                <a:gd name="csX2" fmla="*/ 290541 w 1290814"/>
+                <a:gd name="csY2" fmla="*/ 2357967 h 2802467"/>
+                <a:gd name="csX3" fmla="*/ 370147 w 1290814"/>
+                <a:gd name="csY3" fmla="*/ 2076205 h 2802467"/>
+                <a:gd name="csX4" fmla="*/ 549876 w 1290814"/>
+                <a:gd name="csY4" fmla="*/ 1672602 h 2802467"/>
+                <a:gd name="csX5" fmla="*/ 159 w 1290814"/>
+                <a:gd name="csY5" fmla="*/ 931041 h 2802467"/>
+                <a:gd name="csX6" fmla="*/ 609163 w 1290814"/>
+                <a:gd name="csY6" fmla="*/ 344968 h 2802467"/>
+                <a:gd name="csX7" fmla="*/ 759457 w 1290814"/>
+                <a:gd name="csY7" fmla="*/ 0 h 2802467"/>
+                <a:gd name="csX0" fmla="*/ 1285374 w 1290814"/>
+                <a:gd name="csY0" fmla="*/ 2802467 h 2802467"/>
+                <a:gd name="csX1" fmla="*/ 1141441 w 1290814"/>
+                <a:gd name="csY1" fmla="*/ 2726267 h 2802467"/>
+                <a:gd name="csX2" fmla="*/ 290541 w 1290814"/>
+                <a:gd name="csY2" fmla="*/ 2357967 h 2802467"/>
+                <a:gd name="csX3" fmla="*/ 370147 w 1290814"/>
+                <a:gd name="csY3" fmla="*/ 2076205 h 2802467"/>
+                <a:gd name="csX4" fmla="*/ 549876 w 1290814"/>
+                <a:gd name="csY4" fmla="*/ 1672602 h 2802467"/>
+                <a:gd name="csX5" fmla="*/ 159 w 1290814"/>
+                <a:gd name="csY5" fmla="*/ 931041 h 2802467"/>
+                <a:gd name="csX6" fmla="*/ 609163 w 1290814"/>
+                <a:gd name="csY6" fmla="*/ 344968 h 2802467"/>
+                <a:gd name="csX7" fmla="*/ 759457 w 1290814"/>
+                <a:gd name="csY7" fmla="*/ 0 h 2802467"/>
+                <a:gd name="csX0" fmla="*/ 1285216 w 1290656"/>
+                <a:gd name="csY0" fmla="*/ 2802467 h 2802467"/>
+                <a:gd name="csX1" fmla="*/ 1141283 w 1290656"/>
+                <a:gd name="csY1" fmla="*/ 2726267 h 2802467"/>
+                <a:gd name="csX2" fmla="*/ 290383 w 1290656"/>
+                <a:gd name="csY2" fmla="*/ 2357967 h 2802467"/>
+                <a:gd name="csX3" fmla="*/ 369989 w 1290656"/>
+                <a:gd name="csY3" fmla="*/ 2076205 h 2802467"/>
+                <a:gd name="csX4" fmla="*/ 606715 w 1290656"/>
+                <a:gd name="csY4" fmla="*/ 1698235 h 2802467"/>
+                <a:gd name="csX5" fmla="*/ 1 w 1290656"/>
+                <a:gd name="csY5" fmla="*/ 931041 h 2802467"/>
+                <a:gd name="csX6" fmla="*/ 609005 w 1290656"/>
+                <a:gd name="csY6" fmla="*/ 344968 h 2802467"/>
+                <a:gd name="csX7" fmla="*/ 759299 w 1290656"/>
+                <a:gd name="csY7" fmla="*/ 0 h 2802467"/>
+                <a:gd name="csX0" fmla="*/ 1285216 w 1290656"/>
+                <a:gd name="csY0" fmla="*/ 2802467 h 2802467"/>
+                <a:gd name="csX1" fmla="*/ 1141283 w 1290656"/>
+                <a:gd name="csY1" fmla="*/ 2726267 h 2802467"/>
+                <a:gd name="csX2" fmla="*/ 290383 w 1290656"/>
+                <a:gd name="csY2" fmla="*/ 2357967 h 2802467"/>
+                <a:gd name="csX3" fmla="*/ 369989 w 1290656"/>
+                <a:gd name="csY3" fmla="*/ 2076205 h 2802467"/>
+                <a:gd name="csX4" fmla="*/ 606715 w 1290656"/>
+                <a:gd name="csY4" fmla="*/ 1698235 h 2802467"/>
+                <a:gd name="csX5" fmla="*/ 1 w 1290656"/>
+                <a:gd name="csY5" fmla="*/ 931041 h 2802467"/>
+                <a:gd name="csX6" fmla="*/ 609005 w 1290656"/>
+                <a:gd name="csY6" fmla="*/ 344968 h 2802467"/>
+                <a:gd name="csX7" fmla="*/ 759299 w 1290656"/>
+                <a:gd name="csY7" fmla="*/ 0 h 2802467"/>
+                <a:gd name="csX0" fmla="*/ 1296688 w 1302128"/>
+                <a:gd name="csY0" fmla="*/ 2802467 h 2802467"/>
+                <a:gd name="csX1" fmla="*/ 1152755 w 1302128"/>
+                <a:gd name="csY1" fmla="*/ 2726267 h 2802467"/>
+                <a:gd name="csX2" fmla="*/ 301855 w 1302128"/>
+                <a:gd name="csY2" fmla="*/ 2357967 h 2802467"/>
+                <a:gd name="csX3" fmla="*/ 381461 w 1302128"/>
+                <a:gd name="csY3" fmla="*/ 2076205 h 2802467"/>
+                <a:gd name="csX4" fmla="*/ 618187 w 1302128"/>
+                <a:gd name="csY4" fmla="*/ 1698235 h 2802467"/>
+                <a:gd name="csX5" fmla="*/ 251771 w 1302128"/>
+                <a:gd name="csY5" fmla="*/ 1323361 h 2802467"/>
+                <a:gd name="csX6" fmla="*/ 11473 w 1302128"/>
+                <a:gd name="csY6" fmla="*/ 931041 h 2802467"/>
+                <a:gd name="csX7" fmla="*/ 620477 w 1302128"/>
+                <a:gd name="csY7" fmla="*/ 344968 h 2802467"/>
+                <a:gd name="csX8" fmla="*/ 770771 w 1302128"/>
+                <a:gd name="csY8" fmla="*/ 0 h 2802467"/>
+                <a:gd name="csX0" fmla="*/ 1296688 w 1302128"/>
+                <a:gd name="csY0" fmla="*/ 2802467 h 2802467"/>
+                <a:gd name="csX1" fmla="*/ 1152755 w 1302128"/>
+                <a:gd name="csY1" fmla="*/ 2726267 h 2802467"/>
+                <a:gd name="csX2" fmla="*/ 301855 w 1302128"/>
+                <a:gd name="csY2" fmla="*/ 2357967 h 2802467"/>
+                <a:gd name="csX3" fmla="*/ 381461 w 1302128"/>
+                <a:gd name="csY3" fmla="*/ 2076205 h 2802467"/>
+                <a:gd name="csX4" fmla="*/ 650758 w 1302128"/>
+                <a:gd name="csY4" fmla="*/ 1765520 h 2802467"/>
+                <a:gd name="csX5" fmla="*/ 251771 w 1302128"/>
+                <a:gd name="csY5" fmla="*/ 1323361 h 2802467"/>
+                <a:gd name="csX6" fmla="*/ 11473 w 1302128"/>
+                <a:gd name="csY6" fmla="*/ 931041 h 2802467"/>
+                <a:gd name="csX7" fmla="*/ 620477 w 1302128"/>
+                <a:gd name="csY7" fmla="*/ 344968 h 2802467"/>
+                <a:gd name="csX8" fmla="*/ 770771 w 1302128"/>
+                <a:gd name="csY8" fmla="*/ 0 h 2802467"/>
+                <a:gd name="csX0" fmla="*/ 1296688 w 1302128"/>
+                <a:gd name="csY0" fmla="*/ 2802467 h 2802467"/>
+                <a:gd name="csX1" fmla="*/ 1152755 w 1302128"/>
+                <a:gd name="csY1" fmla="*/ 2726267 h 2802467"/>
+                <a:gd name="csX2" fmla="*/ 301855 w 1302128"/>
+                <a:gd name="csY2" fmla="*/ 2357967 h 2802467"/>
+                <a:gd name="csX3" fmla="*/ 381461 w 1302128"/>
+                <a:gd name="csY3" fmla="*/ 2076205 h 2802467"/>
+                <a:gd name="csX4" fmla="*/ 684956 w 1302128"/>
+                <a:gd name="csY4" fmla="*/ 1781540 h 2802467"/>
+                <a:gd name="csX5" fmla="*/ 251771 w 1302128"/>
+                <a:gd name="csY5" fmla="*/ 1323361 h 2802467"/>
+                <a:gd name="csX6" fmla="*/ 11473 w 1302128"/>
+                <a:gd name="csY6" fmla="*/ 931041 h 2802467"/>
+                <a:gd name="csX7" fmla="*/ 620477 w 1302128"/>
+                <a:gd name="csY7" fmla="*/ 344968 h 2802467"/>
+                <a:gd name="csX8" fmla="*/ 770771 w 1302128"/>
+                <a:gd name="csY8" fmla="*/ 0 h 2802467"/>
+                <a:gd name="csX0" fmla="*/ 1296688 w 1302128"/>
+                <a:gd name="csY0" fmla="*/ 2802467 h 2802467"/>
+                <a:gd name="csX1" fmla="*/ 1152755 w 1302128"/>
+                <a:gd name="csY1" fmla="*/ 2726267 h 2802467"/>
+                <a:gd name="csX2" fmla="*/ 301855 w 1302128"/>
+                <a:gd name="csY2" fmla="*/ 2357967 h 2802467"/>
+                <a:gd name="csX3" fmla="*/ 381461 w 1302128"/>
+                <a:gd name="csY3" fmla="*/ 2076205 h 2802467"/>
+                <a:gd name="csX4" fmla="*/ 640987 w 1302128"/>
+                <a:gd name="csY4" fmla="*/ 1752704 h 2802467"/>
+                <a:gd name="csX5" fmla="*/ 251771 w 1302128"/>
+                <a:gd name="csY5" fmla="*/ 1323361 h 2802467"/>
+                <a:gd name="csX6" fmla="*/ 11473 w 1302128"/>
+                <a:gd name="csY6" fmla="*/ 931041 h 2802467"/>
+                <a:gd name="csX7" fmla="*/ 620477 w 1302128"/>
+                <a:gd name="csY7" fmla="*/ 344968 h 2802467"/>
+                <a:gd name="csX8" fmla="*/ 770771 w 1302128"/>
+                <a:gd name="csY8" fmla="*/ 0 h 2802467"/>
+                <a:gd name="csX0" fmla="*/ 1296688 w 1302128"/>
+                <a:gd name="csY0" fmla="*/ 2802467 h 2802467"/>
+                <a:gd name="csX1" fmla="*/ 1152755 w 1302128"/>
+                <a:gd name="csY1" fmla="*/ 2726267 h 2802467"/>
+                <a:gd name="csX2" fmla="*/ 301855 w 1302128"/>
+                <a:gd name="csY2" fmla="*/ 2357967 h 2802467"/>
+                <a:gd name="csX3" fmla="*/ 381461 w 1302128"/>
+                <a:gd name="csY3" fmla="*/ 2076205 h 2802467"/>
+                <a:gd name="csX4" fmla="*/ 650758 w 1302128"/>
+                <a:gd name="csY4" fmla="*/ 1767122 h 2802467"/>
+                <a:gd name="csX5" fmla="*/ 251771 w 1302128"/>
+                <a:gd name="csY5" fmla="*/ 1323361 h 2802467"/>
+                <a:gd name="csX6" fmla="*/ 11473 w 1302128"/>
+                <a:gd name="csY6" fmla="*/ 931041 h 2802467"/>
+                <a:gd name="csX7" fmla="*/ 620477 w 1302128"/>
+                <a:gd name="csY7" fmla="*/ 344968 h 2802467"/>
+                <a:gd name="csX8" fmla="*/ 770771 w 1302128"/>
+                <a:gd name="csY8" fmla="*/ 0 h 2802467"/>
+                <a:gd name="csX0" fmla="*/ 1296688 w 1302128"/>
+                <a:gd name="csY0" fmla="*/ 2802467 h 2802467"/>
+                <a:gd name="csX1" fmla="*/ 1152755 w 1302128"/>
+                <a:gd name="csY1" fmla="*/ 2726267 h 2802467"/>
+                <a:gd name="csX2" fmla="*/ 301855 w 1302128"/>
+                <a:gd name="csY2" fmla="*/ 2357967 h 2802467"/>
+                <a:gd name="csX3" fmla="*/ 381461 w 1302128"/>
+                <a:gd name="csY3" fmla="*/ 2076205 h 2802467"/>
+                <a:gd name="csX4" fmla="*/ 665415 w 1302128"/>
+                <a:gd name="csY4" fmla="*/ 1768724 h 2802467"/>
+                <a:gd name="csX5" fmla="*/ 251771 w 1302128"/>
+                <a:gd name="csY5" fmla="*/ 1323361 h 2802467"/>
+                <a:gd name="csX6" fmla="*/ 11473 w 1302128"/>
+                <a:gd name="csY6" fmla="*/ 931041 h 2802467"/>
+                <a:gd name="csX7" fmla="*/ 620477 w 1302128"/>
+                <a:gd name="csY7" fmla="*/ 344968 h 2802467"/>
+                <a:gd name="csX8" fmla="*/ 770771 w 1302128"/>
+                <a:gd name="csY8" fmla="*/ 0 h 2802467"/>
+                <a:gd name="csX0" fmla="*/ 1296688 w 1302128"/>
+                <a:gd name="csY0" fmla="*/ 2802467 h 2802467"/>
+                <a:gd name="csX1" fmla="*/ 1152755 w 1302128"/>
+                <a:gd name="csY1" fmla="*/ 2726267 h 2802467"/>
+                <a:gd name="csX2" fmla="*/ 301855 w 1302128"/>
+                <a:gd name="csY2" fmla="*/ 2357967 h 2802467"/>
+                <a:gd name="csX3" fmla="*/ 381461 w 1302128"/>
+                <a:gd name="csY3" fmla="*/ 2076205 h 2802467"/>
+                <a:gd name="csX4" fmla="*/ 636102 w 1302128"/>
+                <a:gd name="csY4" fmla="*/ 1637358 h 2802467"/>
+                <a:gd name="csX5" fmla="*/ 251771 w 1302128"/>
+                <a:gd name="csY5" fmla="*/ 1323361 h 2802467"/>
+                <a:gd name="csX6" fmla="*/ 11473 w 1302128"/>
+                <a:gd name="csY6" fmla="*/ 931041 h 2802467"/>
+                <a:gd name="csX7" fmla="*/ 620477 w 1302128"/>
+                <a:gd name="csY7" fmla="*/ 344968 h 2802467"/>
+                <a:gd name="csX8" fmla="*/ 770771 w 1302128"/>
+                <a:gd name="csY8" fmla="*/ 0 h 2802467"/>
+                <a:gd name="csX0" fmla="*/ 1302225 w 1307665"/>
+                <a:gd name="csY0" fmla="*/ 2802467 h 2802467"/>
+                <a:gd name="csX1" fmla="*/ 1158292 w 1307665"/>
+                <a:gd name="csY1" fmla="*/ 2726267 h 2802467"/>
+                <a:gd name="csX2" fmla="*/ 307392 w 1307665"/>
+                <a:gd name="csY2" fmla="*/ 2357967 h 2802467"/>
+                <a:gd name="csX3" fmla="*/ 386998 w 1307665"/>
+                <a:gd name="csY3" fmla="*/ 2076205 h 2802467"/>
+                <a:gd name="csX4" fmla="*/ 641639 w 1307665"/>
+                <a:gd name="csY4" fmla="*/ 1637358 h 2802467"/>
+                <a:gd name="csX5" fmla="*/ 208453 w 1307665"/>
+                <a:gd name="csY5" fmla="*/ 1347391 h 2802467"/>
+                <a:gd name="csX6" fmla="*/ 17010 w 1307665"/>
+                <a:gd name="csY6" fmla="*/ 931041 h 2802467"/>
+                <a:gd name="csX7" fmla="*/ 626014 w 1307665"/>
+                <a:gd name="csY7" fmla="*/ 344968 h 2802467"/>
+                <a:gd name="csX8" fmla="*/ 776308 w 1307665"/>
+                <a:gd name="csY8" fmla="*/ 0 h 2802467"/>
+                <a:gd name="csX0" fmla="*/ 1302225 w 1307665"/>
+                <a:gd name="csY0" fmla="*/ 2802467 h 2802467"/>
+                <a:gd name="csX1" fmla="*/ 1158292 w 1307665"/>
+                <a:gd name="csY1" fmla="*/ 2726267 h 2802467"/>
+                <a:gd name="csX2" fmla="*/ 307392 w 1307665"/>
+                <a:gd name="csY2" fmla="*/ 2357967 h 2802467"/>
+                <a:gd name="csX3" fmla="*/ 386998 w 1307665"/>
+                <a:gd name="csY3" fmla="*/ 2076205 h 2802467"/>
+                <a:gd name="csX4" fmla="*/ 674209 w 1307665"/>
+                <a:gd name="csY4" fmla="*/ 1706244 h 2802467"/>
+                <a:gd name="csX5" fmla="*/ 208453 w 1307665"/>
+                <a:gd name="csY5" fmla="*/ 1347391 h 2802467"/>
+                <a:gd name="csX6" fmla="*/ 17010 w 1307665"/>
+                <a:gd name="csY6" fmla="*/ 931041 h 2802467"/>
+                <a:gd name="csX7" fmla="*/ 626014 w 1307665"/>
+                <a:gd name="csY7" fmla="*/ 344968 h 2802467"/>
+                <a:gd name="csX8" fmla="*/ 776308 w 1307665"/>
+                <a:gd name="csY8" fmla="*/ 0 h 2802467"/>
+                <a:gd name="csX0" fmla="*/ 1307218 w 1312658"/>
+                <a:gd name="csY0" fmla="*/ 2802467 h 2802467"/>
+                <a:gd name="csX1" fmla="*/ 1163285 w 1312658"/>
+                <a:gd name="csY1" fmla="*/ 2726267 h 2802467"/>
+                <a:gd name="csX2" fmla="*/ 312385 w 1312658"/>
+                <a:gd name="csY2" fmla="*/ 2357967 h 2802467"/>
+                <a:gd name="csX3" fmla="*/ 391991 w 1312658"/>
+                <a:gd name="csY3" fmla="*/ 2076205 h 2802467"/>
+                <a:gd name="csX4" fmla="*/ 679202 w 1312658"/>
+                <a:gd name="csY4" fmla="*/ 1706244 h 2802467"/>
+                <a:gd name="csX5" fmla="*/ 180876 w 1312658"/>
+                <a:gd name="csY5" fmla="*/ 1368217 h 2802467"/>
+                <a:gd name="csX6" fmla="*/ 22003 w 1312658"/>
+                <a:gd name="csY6" fmla="*/ 931041 h 2802467"/>
+                <a:gd name="csX7" fmla="*/ 631007 w 1312658"/>
+                <a:gd name="csY7" fmla="*/ 344968 h 2802467"/>
+                <a:gd name="csX8" fmla="*/ 781301 w 1312658"/>
+                <a:gd name="csY8" fmla="*/ 0 h 2802467"/>
+                <a:gd name="csX0" fmla="*/ 1307218 w 1312658"/>
+                <a:gd name="csY0" fmla="*/ 2802467 h 2802467"/>
+                <a:gd name="csX1" fmla="*/ 1163285 w 1312658"/>
+                <a:gd name="csY1" fmla="*/ 2726267 h 2802467"/>
+                <a:gd name="csX2" fmla="*/ 312385 w 1312658"/>
+                <a:gd name="csY2" fmla="*/ 2357967 h 2802467"/>
+                <a:gd name="csX3" fmla="*/ 391991 w 1312658"/>
+                <a:gd name="csY3" fmla="*/ 2076205 h 2802467"/>
+                <a:gd name="csX4" fmla="*/ 698744 w 1312658"/>
+                <a:gd name="csY4" fmla="*/ 1690224 h 2802467"/>
+                <a:gd name="csX5" fmla="*/ 180876 w 1312658"/>
+                <a:gd name="csY5" fmla="*/ 1368217 h 2802467"/>
+                <a:gd name="csX6" fmla="*/ 22003 w 1312658"/>
+                <a:gd name="csY6" fmla="*/ 931041 h 2802467"/>
+                <a:gd name="csX7" fmla="*/ 631007 w 1312658"/>
+                <a:gd name="csY7" fmla="*/ 344968 h 2802467"/>
+                <a:gd name="csX8" fmla="*/ 781301 w 1312658"/>
+                <a:gd name="csY8" fmla="*/ 0 h 2802467"/>
+                <a:gd name="csX0" fmla="*/ 1307218 w 1312658"/>
+                <a:gd name="csY0" fmla="*/ 2802467 h 2802467"/>
+                <a:gd name="csX1" fmla="*/ 1163285 w 1312658"/>
+                <a:gd name="csY1" fmla="*/ 2726267 h 2802467"/>
+                <a:gd name="csX2" fmla="*/ 312385 w 1312658"/>
+                <a:gd name="csY2" fmla="*/ 2357967 h 2802467"/>
+                <a:gd name="csX3" fmla="*/ 391991 w 1312658"/>
+                <a:gd name="csY3" fmla="*/ 2076205 h 2802467"/>
+                <a:gd name="csX4" fmla="*/ 703630 w 1312658"/>
+                <a:gd name="csY4" fmla="*/ 1773529 h 2802467"/>
+                <a:gd name="csX5" fmla="*/ 180876 w 1312658"/>
+                <a:gd name="csY5" fmla="*/ 1368217 h 2802467"/>
+                <a:gd name="csX6" fmla="*/ 22003 w 1312658"/>
+                <a:gd name="csY6" fmla="*/ 931041 h 2802467"/>
+                <a:gd name="csX7" fmla="*/ 631007 w 1312658"/>
+                <a:gd name="csY7" fmla="*/ 344968 h 2802467"/>
+                <a:gd name="csX8" fmla="*/ 781301 w 1312658"/>
+                <a:gd name="csY8" fmla="*/ 0 h 2802467"/>
+                <a:gd name="csX0" fmla="*/ 1307218 w 1312658"/>
+                <a:gd name="csY0" fmla="*/ 2802467 h 2802467"/>
+                <a:gd name="csX1" fmla="*/ 1163285 w 1312658"/>
+                <a:gd name="csY1" fmla="*/ 2726267 h 2802467"/>
+                <a:gd name="csX2" fmla="*/ 312385 w 1312658"/>
+                <a:gd name="csY2" fmla="*/ 2357967 h 2802467"/>
+                <a:gd name="csX3" fmla="*/ 391991 w 1312658"/>
+                <a:gd name="csY3" fmla="*/ 2076205 h 2802467"/>
+                <a:gd name="csX4" fmla="*/ 767142 w 1312658"/>
+                <a:gd name="csY4" fmla="*/ 1771928 h 2802467"/>
+                <a:gd name="csX5" fmla="*/ 180876 w 1312658"/>
+                <a:gd name="csY5" fmla="*/ 1368217 h 2802467"/>
+                <a:gd name="csX6" fmla="*/ 22003 w 1312658"/>
+                <a:gd name="csY6" fmla="*/ 931041 h 2802467"/>
+                <a:gd name="csX7" fmla="*/ 631007 w 1312658"/>
+                <a:gd name="csY7" fmla="*/ 344968 h 2802467"/>
+                <a:gd name="csX8" fmla="*/ 781301 w 1312658"/>
+                <a:gd name="csY8" fmla="*/ 0 h 2802467"/>
+                <a:gd name="csX0" fmla="*/ 1307218 w 1312658"/>
+                <a:gd name="csY0" fmla="*/ 2802467 h 2802467"/>
+                <a:gd name="csX1" fmla="*/ 1163285 w 1312658"/>
+                <a:gd name="csY1" fmla="*/ 2726267 h 2802467"/>
+                <a:gd name="csX2" fmla="*/ 312385 w 1312658"/>
+                <a:gd name="csY2" fmla="*/ 2357967 h 2802467"/>
+                <a:gd name="csX3" fmla="*/ 391991 w 1312658"/>
+                <a:gd name="csY3" fmla="*/ 2076205 h 2802467"/>
+                <a:gd name="csX4" fmla="*/ 662917 w 1312658"/>
+                <a:gd name="csY4" fmla="*/ 1773530 h 2802467"/>
+                <a:gd name="csX5" fmla="*/ 180876 w 1312658"/>
+                <a:gd name="csY5" fmla="*/ 1368217 h 2802467"/>
+                <a:gd name="csX6" fmla="*/ 22003 w 1312658"/>
+                <a:gd name="csY6" fmla="*/ 931041 h 2802467"/>
+                <a:gd name="csX7" fmla="*/ 631007 w 1312658"/>
+                <a:gd name="csY7" fmla="*/ 344968 h 2802467"/>
+                <a:gd name="csX8" fmla="*/ 781301 w 1312658"/>
+                <a:gd name="csY8" fmla="*/ 0 h 2802467"/>
+                <a:gd name="csX0" fmla="*/ 1304076 w 1309516"/>
+                <a:gd name="csY0" fmla="*/ 2802467 h 2802467"/>
+                <a:gd name="csX1" fmla="*/ 1160143 w 1309516"/>
+                <a:gd name="csY1" fmla="*/ 2726267 h 2802467"/>
+                <a:gd name="csX2" fmla="*/ 309243 w 1309516"/>
+                <a:gd name="csY2" fmla="*/ 2357967 h 2802467"/>
+                <a:gd name="csX3" fmla="*/ 388849 w 1309516"/>
+                <a:gd name="csY3" fmla="*/ 2076205 h 2802467"/>
+                <a:gd name="csX4" fmla="*/ 659775 w 1309516"/>
+                <a:gd name="csY4" fmla="*/ 1773530 h 2802467"/>
+                <a:gd name="csX5" fmla="*/ 197276 w 1309516"/>
+                <a:gd name="csY5" fmla="*/ 1342584 h 2802467"/>
+                <a:gd name="csX6" fmla="*/ 18861 w 1309516"/>
+                <a:gd name="csY6" fmla="*/ 931041 h 2802467"/>
+                <a:gd name="csX7" fmla="*/ 627865 w 1309516"/>
+                <a:gd name="csY7" fmla="*/ 344968 h 2802467"/>
+                <a:gd name="csX8" fmla="*/ 778159 w 1309516"/>
+                <a:gd name="csY8" fmla="*/ 0 h 2802467"/>
+                <a:gd name="csX0" fmla="*/ 1304076 w 1309516"/>
+                <a:gd name="csY0" fmla="*/ 2802467 h 2802467"/>
+                <a:gd name="csX1" fmla="*/ 1160143 w 1309516"/>
+                <a:gd name="csY1" fmla="*/ 2726267 h 2802467"/>
+                <a:gd name="csX2" fmla="*/ 309243 w 1309516"/>
+                <a:gd name="csY2" fmla="*/ 2357967 h 2802467"/>
+                <a:gd name="csX3" fmla="*/ 349765 w 1309516"/>
+                <a:gd name="csY3" fmla="*/ 2048971 h 2802467"/>
+                <a:gd name="csX4" fmla="*/ 659775 w 1309516"/>
+                <a:gd name="csY4" fmla="*/ 1773530 h 2802467"/>
+                <a:gd name="csX5" fmla="*/ 197276 w 1309516"/>
+                <a:gd name="csY5" fmla="*/ 1342584 h 2802467"/>
+                <a:gd name="csX6" fmla="*/ 18861 w 1309516"/>
+                <a:gd name="csY6" fmla="*/ 931041 h 2802467"/>
+                <a:gd name="csX7" fmla="*/ 627865 w 1309516"/>
+                <a:gd name="csY7" fmla="*/ 344968 h 2802467"/>
+                <a:gd name="csX8" fmla="*/ 778159 w 1309516"/>
+                <a:gd name="csY8" fmla="*/ 0 h 2802467"/>
+                <a:gd name="csX0" fmla="*/ 1304076 w 1309516"/>
+                <a:gd name="csY0" fmla="*/ 2802467 h 2802467"/>
+                <a:gd name="csX1" fmla="*/ 1160143 w 1309516"/>
+                <a:gd name="csY1" fmla="*/ 2726267 h 2802467"/>
+                <a:gd name="csX2" fmla="*/ 309243 w 1309516"/>
+                <a:gd name="csY2" fmla="*/ 2357967 h 2802467"/>
+                <a:gd name="csX3" fmla="*/ 659775 w 1309516"/>
+                <a:gd name="csY3" fmla="*/ 1773530 h 2802467"/>
+                <a:gd name="csX4" fmla="*/ 197276 w 1309516"/>
+                <a:gd name="csY4" fmla="*/ 1342584 h 2802467"/>
+                <a:gd name="csX5" fmla="*/ 18861 w 1309516"/>
+                <a:gd name="csY5" fmla="*/ 931041 h 2802467"/>
+                <a:gd name="csX6" fmla="*/ 627865 w 1309516"/>
+                <a:gd name="csY6" fmla="*/ 344968 h 2802467"/>
+                <a:gd name="csX7" fmla="*/ 778159 w 1309516"/>
+                <a:gd name="csY7" fmla="*/ 0 h 2802467"/>
+                <a:gd name="csX0" fmla="*/ 1304076 w 1309516"/>
+                <a:gd name="csY0" fmla="*/ 2802467 h 2802467"/>
+                <a:gd name="csX1" fmla="*/ 1160143 w 1309516"/>
+                <a:gd name="csY1" fmla="*/ 2726267 h 2802467"/>
+                <a:gd name="csX2" fmla="*/ 309243 w 1309516"/>
+                <a:gd name="csY2" fmla="*/ 2357967 h 2802467"/>
+                <a:gd name="csX3" fmla="*/ 438297 w 1309516"/>
+                <a:gd name="csY3" fmla="*/ 2090728 h 2802467"/>
+                <a:gd name="csX4" fmla="*/ 659775 w 1309516"/>
+                <a:gd name="csY4" fmla="*/ 1773530 h 2802467"/>
+                <a:gd name="csX5" fmla="*/ 197276 w 1309516"/>
+                <a:gd name="csY5" fmla="*/ 1342584 h 2802467"/>
+                <a:gd name="csX6" fmla="*/ 18861 w 1309516"/>
+                <a:gd name="csY6" fmla="*/ 931041 h 2802467"/>
+                <a:gd name="csX7" fmla="*/ 627865 w 1309516"/>
+                <a:gd name="csY7" fmla="*/ 344968 h 2802467"/>
+                <a:gd name="csX8" fmla="*/ 778159 w 1309516"/>
+                <a:gd name="csY8" fmla="*/ 0 h 2802467"/>
+                <a:gd name="csX0" fmla="*/ 1304076 w 1309516"/>
+                <a:gd name="csY0" fmla="*/ 2802467 h 2802467"/>
+                <a:gd name="csX1" fmla="*/ 1160143 w 1309516"/>
+                <a:gd name="csY1" fmla="*/ 2726267 h 2802467"/>
+                <a:gd name="csX2" fmla="*/ 309243 w 1309516"/>
+                <a:gd name="csY2" fmla="*/ 2357967 h 2802467"/>
+                <a:gd name="csX3" fmla="*/ 395956 w 1309516"/>
+                <a:gd name="csY3" fmla="*/ 2076310 h 2802467"/>
+                <a:gd name="csX4" fmla="*/ 659775 w 1309516"/>
+                <a:gd name="csY4" fmla="*/ 1773530 h 2802467"/>
+                <a:gd name="csX5" fmla="*/ 197276 w 1309516"/>
+                <a:gd name="csY5" fmla="*/ 1342584 h 2802467"/>
+                <a:gd name="csX6" fmla="*/ 18861 w 1309516"/>
+                <a:gd name="csY6" fmla="*/ 931041 h 2802467"/>
+                <a:gd name="csX7" fmla="*/ 627865 w 1309516"/>
+                <a:gd name="csY7" fmla="*/ 344968 h 2802467"/>
+                <a:gd name="csX8" fmla="*/ 778159 w 1309516"/>
+                <a:gd name="csY8" fmla="*/ 0 h 2802467"/>
+                <a:gd name="csX0" fmla="*/ 1304076 w 1309516"/>
+                <a:gd name="csY0" fmla="*/ 2802467 h 2802467"/>
+                <a:gd name="csX1" fmla="*/ 1160143 w 1309516"/>
+                <a:gd name="csY1" fmla="*/ 2726267 h 2802467"/>
+                <a:gd name="csX2" fmla="*/ 309243 w 1309516"/>
+                <a:gd name="csY2" fmla="*/ 2357967 h 2802467"/>
+                <a:gd name="csX3" fmla="*/ 356872 w 1309516"/>
+                <a:gd name="csY3" fmla="*/ 2068300 h 2802467"/>
+                <a:gd name="csX4" fmla="*/ 659775 w 1309516"/>
+                <a:gd name="csY4" fmla="*/ 1773530 h 2802467"/>
+                <a:gd name="csX5" fmla="*/ 197276 w 1309516"/>
+                <a:gd name="csY5" fmla="*/ 1342584 h 2802467"/>
+                <a:gd name="csX6" fmla="*/ 18861 w 1309516"/>
+                <a:gd name="csY6" fmla="*/ 931041 h 2802467"/>
+                <a:gd name="csX7" fmla="*/ 627865 w 1309516"/>
+                <a:gd name="csY7" fmla="*/ 344968 h 2802467"/>
+                <a:gd name="csX8" fmla="*/ 778159 w 1309516"/>
+                <a:gd name="csY8" fmla="*/ 0 h 2802467"/>
+                <a:gd name="csX0" fmla="*/ 1304076 w 1309516"/>
+                <a:gd name="csY0" fmla="*/ 2802467 h 2802467"/>
+                <a:gd name="csX1" fmla="*/ 1160143 w 1309516"/>
+                <a:gd name="csY1" fmla="*/ 2726267 h 2802467"/>
+                <a:gd name="csX2" fmla="*/ 309243 w 1309516"/>
+                <a:gd name="csY2" fmla="*/ 2357967 h 2802467"/>
+                <a:gd name="csX3" fmla="*/ 356872 w 1309516"/>
+                <a:gd name="csY3" fmla="*/ 2068300 h 2802467"/>
+                <a:gd name="csX4" fmla="*/ 627205 w 1309516"/>
+                <a:gd name="csY4" fmla="*/ 1759113 h 2802467"/>
+                <a:gd name="csX5" fmla="*/ 197276 w 1309516"/>
+                <a:gd name="csY5" fmla="*/ 1342584 h 2802467"/>
+                <a:gd name="csX6" fmla="*/ 18861 w 1309516"/>
+                <a:gd name="csY6" fmla="*/ 931041 h 2802467"/>
+                <a:gd name="csX7" fmla="*/ 627865 w 1309516"/>
+                <a:gd name="csY7" fmla="*/ 344968 h 2802467"/>
+                <a:gd name="csX8" fmla="*/ 778159 w 1309516"/>
+                <a:gd name="csY8" fmla="*/ 0 h 2802467"/>
+                <a:gd name="csX0" fmla="*/ 1304076 w 1309516"/>
+                <a:gd name="csY0" fmla="*/ 2802467 h 2802467"/>
+                <a:gd name="csX1" fmla="*/ 1160143 w 1309516"/>
+                <a:gd name="csY1" fmla="*/ 2726267 h 2802467"/>
+                <a:gd name="csX2" fmla="*/ 309243 w 1309516"/>
+                <a:gd name="csY2" fmla="*/ 2357967 h 2802467"/>
+                <a:gd name="csX3" fmla="*/ 356872 w 1309516"/>
+                <a:gd name="csY3" fmla="*/ 2068300 h 2802467"/>
+                <a:gd name="csX4" fmla="*/ 659776 w 1309516"/>
+                <a:gd name="csY4" fmla="*/ 1759113 h 2802467"/>
+                <a:gd name="csX5" fmla="*/ 197276 w 1309516"/>
+                <a:gd name="csY5" fmla="*/ 1342584 h 2802467"/>
+                <a:gd name="csX6" fmla="*/ 18861 w 1309516"/>
+                <a:gd name="csY6" fmla="*/ 931041 h 2802467"/>
+                <a:gd name="csX7" fmla="*/ 627865 w 1309516"/>
+                <a:gd name="csY7" fmla="*/ 344968 h 2802467"/>
+                <a:gd name="csX8" fmla="*/ 778159 w 1309516"/>
+                <a:gd name="csY8" fmla="*/ 0 h 2802467"/>
+                <a:gd name="csX0" fmla="*/ 1307218 w 1312658"/>
+                <a:gd name="csY0" fmla="*/ 2802467 h 2802467"/>
+                <a:gd name="csX1" fmla="*/ 1163285 w 1312658"/>
+                <a:gd name="csY1" fmla="*/ 2726267 h 2802467"/>
+                <a:gd name="csX2" fmla="*/ 312385 w 1312658"/>
+                <a:gd name="csY2" fmla="*/ 2357967 h 2802467"/>
+                <a:gd name="csX3" fmla="*/ 360014 w 1312658"/>
+                <a:gd name="csY3" fmla="*/ 2068300 h 2802467"/>
+                <a:gd name="csX4" fmla="*/ 662918 w 1312658"/>
+                <a:gd name="csY4" fmla="*/ 1759113 h 2802467"/>
+                <a:gd name="csX5" fmla="*/ 180876 w 1312658"/>
+                <a:gd name="csY5" fmla="*/ 1373022 h 2802467"/>
+                <a:gd name="csX6" fmla="*/ 22003 w 1312658"/>
+                <a:gd name="csY6" fmla="*/ 931041 h 2802467"/>
+                <a:gd name="csX7" fmla="*/ 631007 w 1312658"/>
+                <a:gd name="csY7" fmla="*/ 344968 h 2802467"/>
+                <a:gd name="csX8" fmla="*/ 781301 w 1312658"/>
+                <a:gd name="csY8" fmla="*/ 0 h 2802467"/>
+                <a:gd name="csX0" fmla="*/ 1307218 w 1312658"/>
+                <a:gd name="csY0" fmla="*/ 2802467 h 2802467"/>
+                <a:gd name="csX1" fmla="*/ 1163285 w 1312658"/>
+                <a:gd name="csY1" fmla="*/ 2726267 h 2802467"/>
+                <a:gd name="csX2" fmla="*/ 312385 w 1312658"/>
+                <a:gd name="csY2" fmla="*/ 2357967 h 2802467"/>
+                <a:gd name="csX3" fmla="*/ 360014 w 1312658"/>
+                <a:gd name="csY3" fmla="*/ 2068300 h 2802467"/>
+                <a:gd name="csX4" fmla="*/ 695488 w 1312658"/>
+                <a:gd name="csY4" fmla="*/ 1744694 h 2802467"/>
+                <a:gd name="csX5" fmla="*/ 180876 w 1312658"/>
+                <a:gd name="csY5" fmla="*/ 1373022 h 2802467"/>
+                <a:gd name="csX6" fmla="*/ 22003 w 1312658"/>
+                <a:gd name="csY6" fmla="*/ 931041 h 2802467"/>
+                <a:gd name="csX7" fmla="*/ 631007 w 1312658"/>
+                <a:gd name="csY7" fmla="*/ 344968 h 2802467"/>
+                <a:gd name="csX8" fmla="*/ 781301 w 1312658"/>
+                <a:gd name="csY8" fmla="*/ 0 h 2802467"/>
+                <a:gd name="csX0" fmla="*/ 1307218 w 1312658"/>
+                <a:gd name="csY0" fmla="*/ 2802467 h 2802467"/>
+                <a:gd name="csX1" fmla="*/ 1163285 w 1312658"/>
+                <a:gd name="csY1" fmla="*/ 2726267 h 2802467"/>
+                <a:gd name="csX2" fmla="*/ 312385 w 1312658"/>
+                <a:gd name="csY2" fmla="*/ 2357967 h 2802467"/>
+                <a:gd name="csX3" fmla="*/ 360014 w 1312658"/>
+                <a:gd name="csY3" fmla="*/ 2068300 h 2802467"/>
+                <a:gd name="csX4" fmla="*/ 719916 w 1312658"/>
+                <a:gd name="csY4" fmla="*/ 1717459 h 2802467"/>
+                <a:gd name="csX5" fmla="*/ 180876 w 1312658"/>
+                <a:gd name="csY5" fmla="*/ 1373022 h 2802467"/>
+                <a:gd name="csX6" fmla="*/ 22003 w 1312658"/>
+                <a:gd name="csY6" fmla="*/ 931041 h 2802467"/>
+                <a:gd name="csX7" fmla="*/ 631007 w 1312658"/>
+                <a:gd name="csY7" fmla="*/ 344968 h 2802467"/>
+                <a:gd name="csX8" fmla="*/ 781301 w 1312658"/>
+                <a:gd name="csY8" fmla="*/ 0 h 2802467"/>
+                <a:gd name="csX0" fmla="*/ 1270558 w 1275998"/>
+                <a:gd name="csY0" fmla="*/ 2802467 h 2802467"/>
+                <a:gd name="csX1" fmla="*/ 1126625 w 1275998"/>
+                <a:gd name="csY1" fmla="*/ 2726267 h 2802467"/>
+                <a:gd name="csX2" fmla="*/ 275725 w 1275998"/>
+                <a:gd name="csY2" fmla="*/ 2357967 h 2802467"/>
+                <a:gd name="csX3" fmla="*/ 323354 w 1275998"/>
+                <a:gd name="csY3" fmla="*/ 2068300 h 2802467"/>
+                <a:gd name="csX4" fmla="*/ 683256 w 1275998"/>
+                <a:gd name="csY4" fmla="*/ 1717459 h 2802467"/>
+                <a:gd name="csX5" fmla="*/ 144216 w 1275998"/>
+                <a:gd name="csY5" fmla="*/ 1373022 h 2802467"/>
+                <a:gd name="csX6" fmla="*/ 27685 w 1275998"/>
+                <a:gd name="csY6" fmla="*/ 943858 h 2802467"/>
+                <a:gd name="csX7" fmla="*/ 594347 w 1275998"/>
+                <a:gd name="csY7" fmla="*/ 344968 h 2802467"/>
+                <a:gd name="csX8" fmla="*/ 744641 w 1275998"/>
+                <a:gd name="csY8" fmla="*/ 0 h 2802467"/>
+                <a:gd name="csX0" fmla="*/ 1258522 w 1263962"/>
+                <a:gd name="csY0" fmla="*/ 2802467 h 2802467"/>
+                <a:gd name="csX1" fmla="*/ 1114589 w 1263962"/>
+                <a:gd name="csY1" fmla="*/ 2726267 h 2802467"/>
+                <a:gd name="csX2" fmla="*/ 263689 w 1263962"/>
+                <a:gd name="csY2" fmla="*/ 2357967 h 2802467"/>
+                <a:gd name="csX3" fmla="*/ 311318 w 1263962"/>
+                <a:gd name="csY3" fmla="*/ 2068300 h 2802467"/>
+                <a:gd name="csX4" fmla="*/ 671220 w 1263962"/>
+                <a:gd name="csY4" fmla="*/ 1717459 h 2802467"/>
+                <a:gd name="csX5" fmla="*/ 132180 w 1263962"/>
+                <a:gd name="csY5" fmla="*/ 1373022 h 2802467"/>
+                <a:gd name="csX6" fmla="*/ 30306 w 1263962"/>
+                <a:gd name="csY6" fmla="*/ 942255 h 2802467"/>
+                <a:gd name="csX7" fmla="*/ 582311 w 1263962"/>
+                <a:gd name="csY7" fmla="*/ 344968 h 2802467"/>
+                <a:gd name="csX8" fmla="*/ 732605 w 1263962"/>
+                <a:gd name="csY8" fmla="*/ 0 h 2802467"/>
+                <a:gd name="csX0" fmla="*/ 1258522 w 1263962"/>
+                <a:gd name="csY0" fmla="*/ 2802467 h 2802467"/>
+                <a:gd name="csX1" fmla="*/ 1114589 w 1263962"/>
+                <a:gd name="csY1" fmla="*/ 2726267 h 2802467"/>
+                <a:gd name="csX2" fmla="*/ 263689 w 1263962"/>
+                <a:gd name="csY2" fmla="*/ 2357967 h 2802467"/>
+                <a:gd name="csX3" fmla="*/ 311318 w 1263962"/>
+                <a:gd name="csY3" fmla="*/ 2068300 h 2802467"/>
+                <a:gd name="csX4" fmla="*/ 684248 w 1263962"/>
+                <a:gd name="csY4" fmla="*/ 1638961 h 2802467"/>
+                <a:gd name="csX5" fmla="*/ 132180 w 1263962"/>
+                <a:gd name="csY5" fmla="*/ 1373022 h 2802467"/>
+                <a:gd name="csX6" fmla="*/ 30306 w 1263962"/>
+                <a:gd name="csY6" fmla="*/ 942255 h 2802467"/>
+                <a:gd name="csX7" fmla="*/ 582311 w 1263962"/>
+                <a:gd name="csY7" fmla="*/ 344968 h 2802467"/>
+                <a:gd name="csX8" fmla="*/ 732605 w 1263962"/>
+                <a:gd name="csY8" fmla="*/ 0 h 2802467"/>
+                <a:gd name="csX0" fmla="*/ 1254110 w 1259550"/>
+                <a:gd name="csY0" fmla="*/ 2802467 h 2802467"/>
+                <a:gd name="csX1" fmla="*/ 1110177 w 1259550"/>
+                <a:gd name="csY1" fmla="*/ 2726267 h 2802467"/>
+                <a:gd name="csX2" fmla="*/ 259277 w 1259550"/>
+                <a:gd name="csY2" fmla="*/ 2357967 h 2802467"/>
+                <a:gd name="csX3" fmla="*/ 306906 w 1259550"/>
+                <a:gd name="csY3" fmla="*/ 2068300 h 2802467"/>
+                <a:gd name="csX4" fmla="*/ 679836 w 1259550"/>
+                <a:gd name="csY4" fmla="*/ 1638961 h 2802467"/>
+                <a:gd name="csX5" fmla="*/ 145681 w 1259550"/>
+                <a:gd name="csY5" fmla="*/ 1345787 h 2802467"/>
+                <a:gd name="csX6" fmla="*/ 25894 w 1259550"/>
+                <a:gd name="csY6" fmla="*/ 942255 h 2802467"/>
+                <a:gd name="csX7" fmla="*/ 577899 w 1259550"/>
+                <a:gd name="csY7" fmla="*/ 344968 h 2802467"/>
+                <a:gd name="csX8" fmla="*/ 728193 w 1259550"/>
+                <a:gd name="csY8" fmla="*/ 0 h 2802467"/>
+                <a:gd name="csX0" fmla="*/ 1254110 w 1259550"/>
+                <a:gd name="csY0" fmla="*/ 2802467 h 2802467"/>
+                <a:gd name="csX1" fmla="*/ 1110177 w 1259550"/>
+                <a:gd name="csY1" fmla="*/ 2726267 h 2802467"/>
+                <a:gd name="csX2" fmla="*/ 259277 w 1259550"/>
+                <a:gd name="csY2" fmla="*/ 2357967 h 2802467"/>
+                <a:gd name="csX3" fmla="*/ 306906 w 1259550"/>
+                <a:gd name="csY3" fmla="*/ 2068300 h 2802467"/>
+                <a:gd name="csX4" fmla="*/ 697750 w 1259550"/>
+                <a:gd name="csY4" fmla="*/ 1679012 h 2802467"/>
+                <a:gd name="csX5" fmla="*/ 145681 w 1259550"/>
+                <a:gd name="csY5" fmla="*/ 1345787 h 2802467"/>
+                <a:gd name="csX6" fmla="*/ 25894 w 1259550"/>
+                <a:gd name="csY6" fmla="*/ 942255 h 2802467"/>
+                <a:gd name="csX7" fmla="*/ 577899 w 1259550"/>
+                <a:gd name="csY7" fmla="*/ 344968 h 2802467"/>
+                <a:gd name="csX8" fmla="*/ 728193 w 1259550"/>
+                <a:gd name="csY8" fmla="*/ 0 h 2802467"/>
+                <a:gd name="csX0" fmla="*/ 1254110 w 1259550"/>
+                <a:gd name="csY0" fmla="*/ 2802467 h 2802467"/>
+                <a:gd name="csX1" fmla="*/ 1110177 w 1259550"/>
+                <a:gd name="csY1" fmla="*/ 2726267 h 2802467"/>
+                <a:gd name="csX2" fmla="*/ 259277 w 1259550"/>
+                <a:gd name="csY2" fmla="*/ 2357967 h 2802467"/>
+                <a:gd name="csX3" fmla="*/ 306906 w 1259550"/>
+                <a:gd name="csY3" fmla="*/ 2068300 h 2802467"/>
+                <a:gd name="csX4" fmla="*/ 710778 w 1259550"/>
+                <a:gd name="csY4" fmla="*/ 1703042 h 2802467"/>
+                <a:gd name="csX5" fmla="*/ 145681 w 1259550"/>
+                <a:gd name="csY5" fmla="*/ 1345787 h 2802467"/>
+                <a:gd name="csX6" fmla="*/ 25894 w 1259550"/>
+                <a:gd name="csY6" fmla="*/ 942255 h 2802467"/>
+                <a:gd name="csX7" fmla="*/ 577899 w 1259550"/>
+                <a:gd name="csY7" fmla="*/ 344968 h 2802467"/>
+                <a:gd name="csX8" fmla="*/ 728193 w 1259550"/>
+                <a:gd name="csY8" fmla="*/ 0 h 2802467"/>
+                <a:gd name="csX0" fmla="*/ 1254110 w 1259550"/>
+                <a:gd name="csY0" fmla="*/ 2802467 h 2802467"/>
+                <a:gd name="csX1" fmla="*/ 1110177 w 1259550"/>
+                <a:gd name="csY1" fmla="*/ 2726267 h 2802467"/>
+                <a:gd name="csX2" fmla="*/ 259277 w 1259550"/>
+                <a:gd name="csY2" fmla="*/ 2357967 h 2802467"/>
+                <a:gd name="csX3" fmla="*/ 306906 w 1259550"/>
+                <a:gd name="csY3" fmla="*/ 2068300 h 2802467"/>
+                <a:gd name="csX4" fmla="*/ 738463 w 1259550"/>
+                <a:gd name="csY4" fmla="*/ 1711053 h 2802467"/>
+                <a:gd name="csX5" fmla="*/ 145681 w 1259550"/>
+                <a:gd name="csY5" fmla="*/ 1345787 h 2802467"/>
+                <a:gd name="csX6" fmla="*/ 25894 w 1259550"/>
+                <a:gd name="csY6" fmla="*/ 942255 h 2802467"/>
+                <a:gd name="csX7" fmla="*/ 577899 w 1259550"/>
+                <a:gd name="csY7" fmla="*/ 344968 h 2802467"/>
+                <a:gd name="csX8" fmla="*/ 728193 w 1259550"/>
+                <a:gd name="csY8" fmla="*/ 0 h 2802467"/>
+                <a:gd name="csX0" fmla="*/ 1257249 w 1262689"/>
+                <a:gd name="csY0" fmla="*/ 2802467 h 2802467"/>
+                <a:gd name="csX1" fmla="*/ 1113316 w 1262689"/>
+                <a:gd name="csY1" fmla="*/ 2726267 h 2802467"/>
+                <a:gd name="csX2" fmla="*/ 262416 w 1262689"/>
+                <a:gd name="csY2" fmla="*/ 2357967 h 2802467"/>
+                <a:gd name="csX3" fmla="*/ 310045 w 1262689"/>
+                <a:gd name="csY3" fmla="*/ 2068300 h 2802467"/>
+                <a:gd name="csX4" fmla="*/ 741602 w 1262689"/>
+                <a:gd name="csY4" fmla="*/ 1711053 h 2802467"/>
+                <a:gd name="csX5" fmla="*/ 135792 w 1262689"/>
+                <a:gd name="csY5" fmla="*/ 1353797 h 2802467"/>
+                <a:gd name="csX6" fmla="*/ 29033 w 1262689"/>
+                <a:gd name="csY6" fmla="*/ 942255 h 2802467"/>
+                <a:gd name="csX7" fmla="*/ 581038 w 1262689"/>
+                <a:gd name="csY7" fmla="*/ 344968 h 2802467"/>
+                <a:gd name="csX8" fmla="*/ 731332 w 1262689"/>
+                <a:gd name="csY8" fmla="*/ 0 h 2802467"/>
+                <a:gd name="csX0" fmla="*/ 1253439 w 1258879"/>
+                <a:gd name="csY0" fmla="*/ 2802467 h 2802467"/>
+                <a:gd name="csX1" fmla="*/ 1109506 w 1258879"/>
+                <a:gd name="csY1" fmla="*/ 2726267 h 2802467"/>
+                <a:gd name="csX2" fmla="*/ 258606 w 1258879"/>
+                <a:gd name="csY2" fmla="*/ 2357967 h 2802467"/>
+                <a:gd name="csX3" fmla="*/ 306235 w 1258879"/>
+                <a:gd name="csY3" fmla="*/ 2068300 h 2802467"/>
+                <a:gd name="csX4" fmla="*/ 737792 w 1258879"/>
+                <a:gd name="csY4" fmla="*/ 1711053 h 2802467"/>
+                <a:gd name="csX5" fmla="*/ 131982 w 1258879"/>
+                <a:gd name="csY5" fmla="*/ 1353797 h 2802467"/>
+                <a:gd name="csX6" fmla="*/ 25223 w 1258879"/>
+                <a:gd name="csY6" fmla="*/ 942255 h 2802467"/>
+                <a:gd name="csX7" fmla="*/ 577228 w 1258879"/>
+                <a:gd name="csY7" fmla="*/ 344968 h 2802467"/>
+                <a:gd name="csX8" fmla="*/ 727522 w 1258879"/>
+                <a:gd name="csY8" fmla="*/ 0 h 2802467"/>
+                <a:gd name="csX0" fmla="*/ 1251259 w 1256699"/>
+                <a:gd name="csY0" fmla="*/ 2802467 h 2802467"/>
+                <a:gd name="csX1" fmla="*/ 1107326 w 1256699"/>
+                <a:gd name="csY1" fmla="*/ 2726267 h 2802467"/>
+                <a:gd name="csX2" fmla="*/ 256426 w 1256699"/>
+                <a:gd name="csY2" fmla="*/ 2357967 h 2802467"/>
+                <a:gd name="csX3" fmla="*/ 304055 w 1256699"/>
+                <a:gd name="csY3" fmla="*/ 2068300 h 2802467"/>
+                <a:gd name="csX4" fmla="*/ 735612 w 1256699"/>
+                <a:gd name="csY4" fmla="*/ 1711053 h 2802467"/>
+                <a:gd name="csX5" fmla="*/ 129802 w 1256699"/>
+                <a:gd name="csY5" fmla="*/ 1353797 h 2802467"/>
+                <a:gd name="csX6" fmla="*/ 23043 w 1256699"/>
+                <a:gd name="csY6" fmla="*/ 942255 h 2802467"/>
+                <a:gd name="csX7" fmla="*/ 575048 w 1256699"/>
+                <a:gd name="csY7" fmla="*/ 344968 h 2802467"/>
+                <a:gd name="csX8" fmla="*/ 725342 w 1256699"/>
+                <a:gd name="csY8" fmla="*/ 0 h 2802467"/>
+                <a:gd name="csX0" fmla="*/ 1249189 w 1254629"/>
+                <a:gd name="csY0" fmla="*/ 2802467 h 2802467"/>
+                <a:gd name="csX1" fmla="*/ 1105256 w 1254629"/>
+                <a:gd name="csY1" fmla="*/ 2726267 h 2802467"/>
+                <a:gd name="csX2" fmla="*/ 254356 w 1254629"/>
+                <a:gd name="csY2" fmla="*/ 2357967 h 2802467"/>
+                <a:gd name="csX3" fmla="*/ 301985 w 1254629"/>
+                <a:gd name="csY3" fmla="*/ 2068300 h 2802467"/>
+                <a:gd name="csX4" fmla="*/ 733542 w 1254629"/>
+                <a:gd name="csY4" fmla="*/ 1711053 h 2802467"/>
+                <a:gd name="csX5" fmla="*/ 139133 w 1254629"/>
+                <a:gd name="csY5" fmla="*/ 1339378 h 2802467"/>
+                <a:gd name="csX6" fmla="*/ 20973 w 1254629"/>
+                <a:gd name="csY6" fmla="*/ 942255 h 2802467"/>
+                <a:gd name="csX7" fmla="*/ 572978 w 1254629"/>
+                <a:gd name="csY7" fmla="*/ 344968 h 2802467"/>
+                <a:gd name="csX8" fmla="*/ 723272 w 1254629"/>
+                <a:gd name="csY8" fmla="*/ 0 h 2802467"/>
+                <a:gd name="csX0" fmla="*/ 1249189 w 1254629"/>
+                <a:gd name="csY0" fmla="*/ 2802467 h 2802467"/>
+                <a:gd name="csX1" fmla="*/ 1105256 w 1254629"/>
+                <a:gd name="csY1" fmla="*/ 2726267 h 2802467"/>
+                <a:gd name="csX2" fmla="*/ 254356 w 1254629"/>
+                <a:gd name="csY2" fmla="*/ 2357967 h 2802467"/>
+                <a:gd name="csX3" fmla="*/ 301985 w 1254629"/>
+                <a:gd name="csY3" fmla="*/ 2068300 h 2802467"/>
+                <a:gd name="csX4" fmla="*/ 733542 w 1254629"/>
+                <a:gd name="csY4" fmla="*/ 1711053 h 2802467"/>
+                <a:gd name="csX5" fmla="*/ 139133 w 1254629"/>
+                <a:gd name="csY5" fmla="*/ 1339378 h 2802467"/>
+                <a:gd name="csX6" fmla="*/ 20973 w 1254629"/>
+                <a:gd name="csY6" fmla="*/ 942255 h 2802467"/>
+                <a:gd name="csX7" fmla="*/ 572978 w 1254629"/>
+                <a:gd name="csY7" fmla="*/ 344968 h 2802467"/>
+                <a:gd name="csX8" fmla="*/ 723272 w 1254629"/>
+                <a:gd name="csY8" fmla="*/ 0 h 2802467"/>
+                <a:gd name="csX0" fmla="*/ 1249189 w 1254629"/>
+                <a:gd name="csY0" fmla="*/ 2802467 h 2802467"/>
+                <a:gd name="csX1" fmla="*/ 1105256 w 1254629"/>
+                <a:gd name="csY1" fmla="*/ 2726267 h 2802467"/>
+                <a:gd name="csX2" fmla="*/ 254356 w 1254629"/>
+                <a:gd name="csY2" fmla="*/ 2357967 h 2802467"/>
+                <a:gd name="csX3" fmla="*/ 301985 w 1254629"/>
+                <a:gd name="csY3" fmla="*/ 2068300 h 2802467"/>
+                <a:gd name="csX4" fmla="*/ 621175 w 1254629"/>
+                <a:gd name="csY4" fmla="*/ 1752706 h 2802467"/>
+                <a:gd name="csX5" fmla="*/ 139133 w 1254629"/>
+                <a:gd name="csY5" fmla="*/ 1339378 h 2802467"/>
+                <a:gd name="csX6" fmla="*/ 20973 w 1254629"/>
+                <a:gd name="csY6" fmla="*/ 942255 h 2802467"/>
+                <a:gd name="csX7" fmla="*/ 572978 w 1254629"/>
+                <a:gd name="csY7" fmla="*/ 344968 h 2802467"/>
+                <a:gd name="csX8" fmla="*/ 723272 w 1254629"/>
+                <a:gd name="csY8" fmla="*/ 0 h 2802467"/>
+                <a:gd name="csX0" fmla="*/ 1249189 w 1254629"/>
+                <a:gd name="csY0" fmla="*/ 2802467 h 2802467"/>
+                <a:gd name="csX1" fmla="*/ 1105256 w 1254629"/>
+                <a:gd name="csY1" fmla="*/ 2726267 h 2802467"/>
+                <a:gd name="csX2" fmla="*/ 254356 w 1254629"/>
+                <a:gd name="csY2" fmla="*/ 2357967 h 2802467"/>
+                <a:gd name="csX3" fmla="*/ 301985 w 1254629"/>
+                <a:gd name="csY3" fmla="*/ 2068300 h 2802467"/>
+                <a:gd name="csX4" fmla="*/ 564176 w 1254629"/>
+                <a:gd name="csY4" fmla="*/ 1738288 h 2802467"/>
+                <a:gd name="csX5" fmla="*/ 139133 w 1254629"/>
+                <a:gd name="csY5" fmla="*/ 1339378 h 2802467"/>
+                <a:gd name="csX6" fmla="*/ 20973 w 1254629"/>
+                <a:gd name="csY6" fmla="*/ 942255 h 2802467"/>
+                <a:gd name="csX7" fmla="*/ 572978 w 1254629"/>
+                <a:gd name="csY7" fmla="*/ 344968 h 2802467"/>
+                <a:gd name="csX8" fmla="*/ 723272 w 1254629"/>
+                <a:gd name="csY8" fmla="*/ 0 h 2802467"/>
+                <a:gd name="csX0" fmla="*/ 1249189 w 1254629"/>
+                <a:gd name="csY0" fmla="*/ 2802467 h 2802467"/>
+                <a:gd name="csX1" fmla="*/ 1105256 w 1254629"/>
+                <a:gd name="csY1" fmla="*/ 2726267 h 2802467"/>
+                <a:gd name="csX2" fmla="*/ 254356 w 1254629"/>
+                <a:gd name="csY2" fmla="*/ 2357967 h 2802467"/>
+                <a:gd name="csX3" fmla="*/ 301985 w 1254629"/>
+                <a:gd name="csY3" fmla="*/ 2068300 h 2802467"/>
+                <a:gd name="csX4" fmla="*/ 520207 w 1254629"/>
+                <a:gd name="csY4" fmla="*/ 1717462 h 2802467"/>
+                <a:gd name="csX5" fmla="*/ 139133 w 1254629"/>
+                <a:gd name="csY5" fmla="*/ 1339378 h 2802467"/>
+                <a:gd name="csX6" fmla="*/ 20973 w 1254629"/>
+                <a:gd name="csY6" fmla="*/ 942255 h 2802467"/>
+                <a:gd name="csX7" fmla="*/ 572978 w 1254629"/>
+                <a:gd name="csY7" fmla="*/ 344968 h 2802467"/>
+                <a:gd name="csX8" fmla="*/ 723272 w 1254629"/>
+                <a:gd name="csY8" fmla="*/ 0 h 2802467"/>
+                <a:gd name="csX0" fmla="*/ 1249189 w 1254629"/>
+                <a:gd name="csY0" fmla="*/ 2802467 h 2802467"/>
+                <a:gd name="csX1" fmla="*/ 1105256 w 1254629"/>
+                <a:gd name="csY1" fmla="*/ 2726267 h 2802467"/>
+                <a:gd name="csX2" fmla="*/ 254356 w 1254629"/>
+                <a:gd name="csY2" fmla="*/ 2357967 h 2802467"/>
+                <a:gd name="csX3" fmla="*/ 301985 w 1254629"/>
+                <a:gd name="csY3" fmla="*/ 2068300 h 2802467"/>
+                <a:gd name="csX4" fmla="*/ 520207 w 1254629"/>
+                <a:gd name="csY4" fmla="*/ 1717462 h 2802467"/>
+                <a:gd name="csX5" fmla="*/ 139133 w 1254629"/>
+                <a:gd name="csY5" fmla="*/ 1339378 h 2802467"/>
+                <a:gd name="csX6" fmla="*/ 20973 w 1254629"/>
+                <a:gd name="csY6" fmla="*/ 942255 h 2802467"/>
+                <a:gd name="csX7" fmla="*/ 572978 w 1254629"/>
+                <a:gd name="csY7" fmla="*/ 344968 h 2802467"/>
+                <a:gd name="csX8" fmla="*/ 723272 w 1254629"/>
+                <a:gd name="csY8" fmla="*/ 0 h 2802467"/>
+                <a:gd name="csX0" fmla="*/ 1247111 w 1252551"/>
+                <a:gd name="csY0" fmla="*/ 2802467 h 2802467"/>
+                <a:gd name="csX1" fmla="*/ 1103178 w 1252551"/>
+                <a:gd name="csY1" fmla="*/ 2726267 h 2802467"/>
+                <a:gd name="csX2" fmla="*/ 252278 w 1252551"/>
+                <a:gd name="csY2" fmla="*/ 2357967 h 2802467"/>
+                <a:gd name="csX3" fmla="*/ 299907 w 1252551"/>
+                <a:gd name="csY3" fmla="*/ 2068300 h 2802467"/>
+                <a:gd name="csX4" fmla="*/ 518129 w 1252551"/>
+                <a:gd name="csY4" fmla="*/ 1717462 h 2802467"/>
+                <a:gd name="csX5" fmla="*/ 137055 w 1252551"/>
+                <a:gd name="csY5" fmla="*/ 1339378 h 2802467"/>
+                <a:gd name="csX6" fmla="*/ 18895 w 1252551"/>
+                <a:gd name="csY6" fmla="*/ 942255 h 2802467"/>
+                <a:gd name="csX7" fmla="*/ 570900 w 1252551"/>
+                <a:gd name="csY7" fmla="*/ 344968 h 2802467"/>
+                <a:gd name="csX8" fmla="*/ 721194 w 1252551"/>
+                <a:gd name="csY8" fmla="*/ 0 h 2802467"/>
+                <a:gd name="csX0" fmla="*/ 1247111 w 1252551"/>
+                <a:gd name="csY0" fmla="*/ 2802467 h 2802467"/>
+                <a:gd name="csX1" fmla="*/ 1103178 w 1252551"/>
+                <a:gd name="csY1" fmla="*/ 2726267 h 2802467"/>
+                <a:gd name="csX2" fmla="*/ 252278 w 1252551"/>
+                <a:gd name="csY2" fmla="*/ 2357967 h 2802467"/>
+                <a:gd name="csX3" fmla="*/ 299907 w 1252551"/>
+                <a:gd name="csY3" fmla="*/ 2068300 h 2802467"/>
+                <a:gd name="csX4" fmla="*/ 518129 w 1252551"/>
+                <a:gd name="csY4" fmla="*/ 1717462 h 2802467"/>
+                <a:gd name="csX5" fmla="*/ 137055 w 1252551"/>
+                <a:gd name="csY5" fmla="*/ 1339378 h 2802467"/>
+                <a:gd name="csX6" fmla="*/ 18895 w 1252551"/>
+                <a:gd name="csY6" fmla="*/ 942255 h 2802467"/>
+                <a:gd name="csX7" fmla="*/ 570900 w 1252551"/>
+                <a:gd name="csY7" fmla="*/ 344968 h 2802467"/>
+                <a:gd name="csX8" fmla="*/ 721194 w 1252551"/>
+                <a:gd name="csY8" fmla="*/ 0 h 2802467"/>
+                <a:gd name="csX0" fmla="*/ 1238809 w 1244249"/>
+                <a:gd name="csY0" fmla="*/ 2802467 h 2802467"/>
+                <a:gd name="csX1" fmla="*/ 1094876 w 1244249"/>
+                <a:gd name="csY1" fmla="*/ 2726267 h 2802467"/>
+                <a:gd name="csX2" fmla="*/ 243976 w 1244249"/>
+                <a:gd name="csY2" fmla="*/ 2357967 h 2802467"/>
+                <a:gd name="csX3" fmla="*/ 291605 w 1244249"/>
+                <a:gd name="csY3" fmla="*/ 2068300 h 2802467"/>
+                <a:gd name="csX4" fmla="*/ 509827 w 1244249"/>
+                <a:gd name="csY4" fmla="*/ 1717462 h 2802467"/>
+                <a:gd name="csX5" fmla="*/ 200408 w 1244249"/>
+                <a:gd name="csY5" fmla="*/ 1451520 h 2802467"/>
+                <a:gd name="csX6" fmla="*/ 10593 w 1244249"/>
+                <a:gd name="csY6" fmla="*/ 942255 h 2802467"/>
+                <a:gd name="csX7" fmla="*/ 562598 w 1244249"/>
+                <a:gd name="csY7" fmla="*/ 344968 h 2802467"/>
+                <a:gd name="csX8" fmla="*/ 712892 w 1244249"/>
+                <a:gd name="csY8" fmla="*/ 0 h 2802467"/>
+                <a:gd name="csX0" fmla="*/ 1239096 w 1244536"/>
+                <a:gd name="csY0" fmla="*/ 2802467 h 2802467"/>
+                <a:gd name="csX1" fmla="*/ 1095163 w 1244536"/>
+                <a:gd name="csY1" fmla="*/ 2726267 h 2802467"/>
+                <a:gd name="csX2" fmla="*/ 244263 w 1244536"/>
+                <a:gd name="csY2" fmla="*/ 2357967 h 2802467"/>
+                <a:gd name="csX3" fmla="*/ 291892 w 1244536"/>
+                <a:gd name="csY3" fmla="*/ 2068300 h 2802467"/>
+                <a:gd name="csX4" fmla="*/ 510114 w 1244536"/>
+                <a:gd name="csY4" fmla="*/ 1717462 h 2802467"/>
+                <a:gd name="csX5" fmla="*/ 197438 w 1244536"/>
+                <a:gd name="csY5" fmla="*/ 1427489 h 2802467"/>
+                <a:gd name="csX6" fmla="*/ 10880 w 1244536"/>
+                <a:gd name="csY6" fmla="*/ 942255 h 2802467"/>
+                <a:gd name="csX7" fmla="*/ 562885 w 1244536"/>
+                <a:gd name="csY7" fmla="*/ 344968 h 2802467"/>
+                <a:gd name="csX8" fmla="*/ 713179 w 1244536"/>
+                <a:gd name="csY8" fmla="*/ 0 h 2802467"/>
+                <a:gd name="csX0" fmla="*/ 1240814 w 1246254"/>
+                <a:gd name="csY0" fmla="*/ 2802467 h 2802467"/>
+                <a:gd name="csX1" fmla="*/ 1096881 w 1246254"/>
+                <a:gd name="csY1" fmla="*/ 2726267 h 2802467"/>
+                <a:gd name="csX2" fmla="*/ 245981 w 1246254"/>
+                <a:gd name="csY2" fmla="*/ 2357967 h 2802467"/>
+                <a:gd name="csX3" fmla="*/ 293610 w 1246254"/>
+                <a:gd name="csY3" fmla="*/ 2068300 h 2802467"/>
+                <a:gd name="csX4" fmla="*/ 511832 w 1246254"/>
+                <a:gd name="csY4" fmla="*/ 1717462 h 2802467"/>
+                <a:gd name="csX5" fmla="*/ 181242 w 1246254"/>
+                <a:gd name="csY5" fmla="*/ 1421081 h 2802467"/>
+                <a:gd name="csX6" fmla="*/ 12598 w 1246254"/>
+                <a:gd name="csY6" fmla="*/ 942255 h 2802467"/>
+                <a:gd name="csX7" fmla="*/ 564603 w 1246254"/>
+                <a:gd name="csY7" fmla="*/ 344968 h 2802467"/>
+                <a:gd name="csX8" fmla="*/ 714897 w 1246254"/>
+                <a:gd name="csY8" fmla="*/ 0 h 2802467"/>
+                <a:gd name="csX0" fmla="*/ 1240814 w 1246254"/>
+                <a:gd name="csY0" fmla="*/ 2802467 h 2802467"/>
+                <a:gd name="csX1" fmla="*/ 1096881 w 1246254"/>
+                <a:gd name="csY1" fmla="*/ 2726267 h 2802467"/>
+                <a:gd name="csX2" fmla="*/ 245981 w 1246254"/>
+                <a:gd name="csY2" fmla="*/ 2357967 h 2802467"/>
+                <a:gd name="csX3" fmla="*/ 293610 w 1246254"/>
+                <a:gd name="csY3" fmla="*/ 2068300 h 2802467"/>
+                <a:gd name="csX4" fmla="*/ 511832 w 1246254"/>
+                <a:gd name="csY4" fmla="*/ 1717462 h 2802467"/>
+                <a:gd name="csX5" fmla="*/ 181242 w 1246254"/>
+                <a:gd name="csY5" fmla="*/ 1421081 h 2802467"/>
+                <a:gd name="csX6" fmla="*/ 12598 w 1246254"/>
+                <a:gd name="csY6" fmla="*/ 942255 h 2802467"/>
+                <a:gd name="csX7" fmla="*/ 564603 w 1246254"/>
+                <a:gd name="csY7" fmla="*/ 344968 h 2802467"/>
+                <a:gd name="csX8" fmla="*/ 714897 w 1246254"/>
+                <a:gd name="csY8" fmla="*/ 0 h 2802467"/>
+                <a:gd name="csX0" fmla="*/ 1241746 w 1247186"/>
+                <a:gd name="csY0" fmla="*/ 2802467 h 2802467"/>
+                <a:gd name="csX1" fmla="*/ 1097813 w 1247186"/>
+                <a:gd name="csY1" fmla="*/ 2726267 h 2802467"/>
+                <a:gd name="csX2" fmla="*/ 246913 w 1247186"/>
+                <a:gd name="csY2" fmla="*/ 2357967 h 2802467"/>
+                <a:gd name="csX3" fmla="*/ 294542 w 1247186"/>
+                <a:gd name="csY3" fmla="*/ 2068300 h 2802467"/>
+                <a:gd name="csX4" fmla="*/ 512764 w 1247186"/>
+                <a:gd name="csY4" fmla="*/ 1717462 h 2802467"/>
+                <a:gd name="csX5" fmla="*/ 182174 w 1247186"/>
+                <a:gd name="csY5" fmla="*/ 1421081 h 2802467"/>
+                <a:gd name="csX6" fmla="*/ 13530 w 1247186"/>
+                <a:gd name="csY6" fmla="*/ 942255 h 2802467"/>
+                <a:gd name="csX7" fmla="*/ 565535 w 1247186"/>
+                <a:gd name="csY7" fmla="*/ 344968 h 2802467"/>
+                <a:gd name="csX8" fmla="*/ 715829 w 1247186"/>
+                <a:gd name="csY8" fmla="*/ 0 h 2802467"/>
+                <a:gd name="csX0" fmla="*/ 1240975 w 1246415"/>
+                <a:gd name="csY0" fmla="*/ 2802467 h 2802467"/>
+                <a:gd name="csX1" fmla="*/ 1097042 w 1246415"/>
+                <a:gd name="csY1" fmla="*/ 2726267 h 2802467"/>
+                <a:gd name="csX2" fmla="*/ 246142 w 1246415"/>
+                <a:gd name="csY2" fmla="*/ 2357967 h 2802467"/>
+                <a:gd name="csX3" fmla="*/ 293771 w 1246415"/>
+                <a:gd name="csY3" fmla="*/ 2068300 h 2802467"/>
+                <a:gd name="csX4" fmla="*/ 511993 w 1246415"/>
+                <a:gd name="csY4" fmla="*/ 1717462 h 2802467"/>
+                <a:gd name="csX5" fmla="*/ 181403 w 1246415"/>
+                <a:gd name="csY5" fmla="*/ 1421081 h 2802467"/>
+                <a:gd name="csX6" fmla="*/ 12759 w 1246415"/>
+                <a:gd name="csY6" fmla="*/ 942255 h 2802467"/>
+                <a:gd name="csX7" fmla="*/ 564764 w 1246415"/>
+                <a:gd name="csY7" fmla="*/ 344968 h 2802467"/>
+                <a:gd name="csX8" fmla="*/ 715058 w 1246415"/>
+                <a:gd name="csY8" fmla="*/ 0 h 2802467"/>
+                <a:gd name="csX0" fmla="*/ 1240975 w 1246415"/>
+                <a:gd name="csY0" fmla="*/ 2802467 h 2802467"/>
+                <a:gd name="csX1" fmla="*/ 1097042 w 1246415"/>
+                <a:gd name="csY1" fmla="*/ 2726267 h 2802467"/>
+                <a:gd name="csX2" fmla="*/ 246142 w 1246415"/>
+                <a:gd name="csY2" fmla="*/ 2357967 h 2802467"/>
+                <a:gd name="csX3" fmla="*/ 293771 w 1246415"/>
+                <a:gd name="csY3" fmla="*/ 2068300 h 2802467"/>
+                <a:gd name="csX4" fmla="*/ 489194 w 1246415"/>
+                <a:gd name="csY4" fmla="*/ 1739890 h 2802467"/>
+                <a:gd name="csX5" fmla="*/ 181403 w 1246415"/>
+                <a:gd name="csY5" fmla="*/ 1421081 h 2802467"/>
+                <a:gd name="csX6" fmla="*/ 12759 w 1246415"/>
+                <a:gd name="csY6" fmla="*/ 942255 h 2802467"/>
+                <a:gd name="csX7" fmla="*/ 564764 w 1246415"/>
+                <a:gd name="csY7" fmla="*/ 344968 h 2802467"/>
+                <a:gd name="csX8" fmla="*/ 715058 w 1246415"/>
+                <a:gd name="csY8" fmla="*/ 0 h 2802467"/>
+                <a:gd name="csX0" fmla="*/ 1240975 w 1246415"/>
+                <a:gd name="csY0" fmla="*/ 2802467 h 2802467"/>
+                <a:gd name="csX1" fmla="*/ 1097042 w 1246415"/>
+                <a:gd name="csY1" fmla="*/ 2726267 h 2802467"/>
+                <a:gd name="csX2" fmla="*/ 246142 w 1246415"/>
+                <a:gd name="csY2" fmla="*/ 2357967 h 2802467"/>
+                <a:gd name="csX3" fmla="*/ 293771 w 1246415"/>
+                <a:gd name="csY3" fmla="*/ 2068300 h 2802467"/>
+                <a:gd name="csX4" fmla="*/ 489194 w 1246415"/>
+                <a:gd name="csY4" fmla="*/ 1739890 h 2802467"/>
+                <a:gd name="csX5" fmla="*/ 181403 w 1246415"/>
+                <a:gd name="csY5" fmla="*/ 1421081 h 2802467"/>
+                <a:gd name="csX6" fmla="*/ 12759 w 1246415"/>
+                <a:gd name="csY6" fmla="*/ 942255 h 2802467"/>
+                <a:gd name="csX7" fmla="*/ 564764 w 1246415"/>
+                <a:gd name="csY7" fmla="*/ 344968 h 2802467"/>
+                <a:gd name="csX8" fmla="*/ 715058 w 1246415"/>
+                <a:gd name="csY8" fmla="*/ 0 h 2802467"/>
+                <a:gd name="csX0" fmla="*/ 1240975 w 1246415"/>
+                <a:gd name="csY0" fmla="*/ 2802467 h 2802467"/>
+                <a:gd name="csX1" fmla="*/ 1097042 w 1246415"/>
+                <a:gd name="csY1" fmla="*/ 2726267 h 2802467"/>
+                <a:gd name="csX2" fmla="*/ 246142 w 1246415"/>
+                <a:gd name="csY2" fmla="*/ 2357967 h 2802467"/>
+                <a:gd name="csX3" fmla="*/ 293771 w 1246415"/>
+                <a:gd name="csY3" fmla="*/ 2068300 h 2802467"/>
+                <a:gd name="csX4" fmla="*/ 489194 w 1246415"/>
+                <a:gd name="csY4" fmla="*/ 1739890 h 2802467"/>
+                <a:gd name="csX5" fmla="*/ 181403 w 1246415"/>
+                <a:gd name="csY5" fmla="*/ 1421081 h 2802467"/>
+                <a:gd name="csX6" fmla="*/ 12759 w 1246415"/>
+                <a:gd name="csY6" fmla="*/ 942255 h 2802467"/>
+                <a:gd name="csX7" fmla="*/ 564764 w 1246415"/>
+                <a:gd name="csY7" fmla="*/ 344968 h 2802467"/>
+                <a:gd name="csX8" fmla="*/ 715058 w 1246415"/>
+                <a:gd name="csY8" fmla="*/ 0 h 2802467"/>
+                <a:gd name="csX0" fmla="*/ 1239230 w 1244670"/>
+                <a:gd name="csY0" fmla="*/ 2802467 h 2802467"/>
+                <a:gd name="csX1" fmla="*/ 1095297 w 1244670"/>
+                <a:gd name="csY1" fmla="*/ 2726267 h 2802467"/>
+                <a:gd name="csX2" fmla="*/ 244397 w 1244670"/>
+                <a:gd name="csY2" fmla="*/ 2357967 h 2802467"/>
+                <a:gd name="csX3" fmla="*/ 292026 w 1244670"/>
+                <a:gd name="csY3" fmla="*/ 2068300 h 2802467"/>
+                <a:gd name="csX4" fmla="*/ 487449 w 1244670"/>
+                <a:gd name="csY4" fmla="*/ 1739890 h 2802467"/>
+                <a:gd name="csX5" fmla="*/ 197572 w 1244670"/>
+                <a:gd name="csY5" fmla="*/ 1409866 h 2802467"/>
+                <a:gd name="csX6" fmla="*/ 11014 w 1244670"/>
+                <a:gd name="csY6" fmla="*/ 942255 h 2802467"/>
+                <a:gd name="csX7" fmla="*/ 563019 w 1244670"/>
+                <a:gd name="csY7" fmla="*/ 344968 h 2802467"/>
+                <a:gd name="csX8" fmla="*/ 713313 w 1244670"/>
+                <a:gd name="csY8" fmla="*/ 0 h 2802467"/>
+                <a:gd name="csX0" fmla="*/ 1238656 w 1244096"/>
+                <a:gd name="csY0" fmla="*/ 2802467 h 2802467"/>
+                <a:gd name="csX1" fmla="*/ 1094723 w 1244096"/>
+                <a:gd name="csY1" fmla="*/ 2726267 h 2802467"/>
+                <a:gd name="csX2" fmla="*/ 243823 w 1244096"/>
+                <a:gd name="csY2" fmla="*/ 2357967 h 2802467"/>
+                <a:gd name="csX3" fmla="*/ 291452 w 1244096"/>
+                <a:gd name="csY3" fmla="*/ 2068300 h 2802467"/>
+                <a:gd name="csX4" fmla="*/ 486875 w 1244096"/>
+                <a:gd name="csY4" fmla="*/ 1739890 h 2802467"/>
+                <a:gd name="csX5" fmla="*/ 196998 w 1244096"/>
+                <a:gd name="csY5" fmla="*/ 1409866 h 2802467"/>
+                <a:gd name="csX6" fmla="*/ 10440 w 1244096"/>
+                <a:gd name="csY6" fmla="*/ 942255 h 2802467"/>
+                <a:gd name="csX7" fmla="*/ 562445 w 1244096"/>
+                <a:gd name="csY7" fmla="*/ 344968 h 2802467"/>
+                <a:gd name="csX8" fmla="*/ 712739 w 1244096"/>
+                <a:gd name="csY8" fmla="*/ 0 h 2802467"/>
+                <a:gd name="csX0" fmla="*/ 1240450 w 1245890"/>
+                <a:gd name="csY0" fmla="*/ 2802467 h 2802467"/>
+                <a:gd name="csX1" fmla="*/ 1096517 w 1245890"/>
+                <a:gd name="csY1" fmla="*/ 2726267 h 2802467"/>
+                <a:gd name="csX2" fmla="*/ 245617 w 1245890"/>
+                <a:gd name="csY2" fmla="*/ 2357967 h 2802467"/>
+                <a:gd name="csX3" fmla="*/ 293246 w 1245890"/>
+                <a:gd name="csY3" fmla="*/ 2068300 h 2802467"/>
+                <a:gd name="csX4" fmla="*/ 488669 w 1245890"/>
+                <a:gd name="csY4" fmla="*/ 1739890 h 2802467"/>
+                <a:gd name="csX5" fmla="*/ 198792 w 1245890"/>
+                <a:gd name="csY5" fmla="*/ 1409866 h 2802467"/>
+                <a:gd name="csX6" fmla="*/ 12234 w 1245890"/>
+                <a:gd name="csY6" fmla="*/ 942255 h 2802467"/>
+                <a:gd name="csX7" fmla="*/ 564239 w 1245890"/>
+                <a:gd name="csY7" fmla="*/ 344968 h 2802467"/>
+                <a:gd name="csX8" fmla="*/ 714533 w 1245890"/>
+                <a:gd name="csY8" fmla="*/ 0 h 2802467"/>
+                <a:gd name="csX0" fmla="*/ 1228479 w 1233919"/>
+                <a:gd name="csY0" fmla="*/ 2802467 h 2802467"/>
+                <a:gd name="csX1" fmla="*/ 1084546 w 1233919"/>
+                <a:gd name="csY1" fmla="*/ 2726267 h 2802467"/>
+                <a:gd name="csX2" fmla="*/ 233646 w 1233919"/>
+                <a:gd name="csY2" fmla="*/ 2357967 h 2802467"/>
+                <a:gd name="csX3" fmla="*/ 281275 w 1233919"/>
+                <a:gd name="csY3" fmla="*/ 2068300 h 2802467"/>
+                <a:gd name="csX4" fmla="*/ 476698 w 1233919"/>
+                <a:gd name="csY4" fmla="*/ 1739890 h 2802467"/>
+                <a:gd name="csX5" fmla="*/ 263 w 1233919"/>
+                <a:gd name="csY5" fmla="*/ 942255 h 2802467"/>
+                <a:gd name="csX6" fmla="*/ 552268 w 1233919"/>
+                <a:gd name="csY6" fmla="*/ 344968 h 2802467"/>
+                <a:gd name="csX7" fmla="*/ 702562 w 1233919"/>
+                <a:gd name="csY7" fmla="*/ 0 h 2802467"/>
+                <a:gd name="csX0" fmla="*/ 1228471 w 1233911"/>
+                <a:gd name="csY0" fmla="*/ 2802467 h 2802467"/>
+                <a:gd name="csX1" fmla="*/ 1084538 w 1233911"/>
+                <a:gd name="csY1" fmla="*/ 2726267 h 2802467"/>
+                <a:gd name="csX2" fmla="*/ 233638 w 1233911"/>
+                <a:gd name="csY2" fmla="*/ 2357967 h 2802467"/>
+                <a:gd name="csX3" fmla="*/ 281267 w 1233911"/>
+                <a:gd name="csY3" fmla="*/ 2068300 h 2802467"/>
+                <a:gd name="csX4" fmla="*/ 477911 w 1233911"/>
+                <a:gd name="csY4" fmla="*/ 1789152 h 2802467"/>
+                <a:gd name="csX5" fmla="*/ 255 w 1233911"/>
+                <a:gd name="csY5" fmla="*/ 942255 h 2802467"/>
+                <a:gd name="csX6" fmla="*/ 552260 w 1233911"/>
+                <a:gd name="csY6" fmla="*/ 344968 h 2802467"/>
+                <a:gd name="csX7" fmla="*/ 702554 w 1233911"/>
+                <a:gd name="csY7" fmla="*/ 0 h 2802467"/>
+                <a:gd name="csX0" fmla="*/ 1228467 w 1233907"/>
+                <a:gd name="csY0" fmla="*/ 2802467 h 2802467"/>
+                <a:gd name="csX1" fmla="*/ 1084534 w 1233907"/>
+                <a:gd name="csY1" fmla="*/ 2726267 h 2802467"/>
+                <a:gd name="csX2" fmla="*/ 233634 w 1233907"/>
+                <a:gd name="csY2" fmla="*/ 2357967 h 2802467"/>
+                <a:gd name="csX3" fmla="*/ 477907 w 1233907"/>
+                <a:gd name="csY3" fmla="*/ 1789152 h 2802467"/>
+                <a:gd name="csX4" fmla="*/ 251 w 1233907"/>
+                <a:gd name="csY4" fmla="*/ 942255 h 2802467"/>
+                <a:gd name="csX5" fmla="*/ 552256 w 1233907"/>
+                <a:gd name="csY5" fmla="*/ 344968 h 2802467"/>
+                <a:gd name="csX6" fmla="*/ 702550 w 1233907"/>
+                <a:gd name="csY6" fmla="*/ 0 h 2802467"/>
+                <a:gd name="csX0" fmla="*/ 1228458 w 1233898"/>
+                <a:gd name="csY0" fmla="*/ 2802467 h 2802467"/>
+                <a:gd name="csX1" fmla="*/ 1084525 w 1233898"/>
+                <a:gd name="csY1" fmla="*/ 2726267 h 2802467"/>
+                <a:gd name="csX2" fmla="*/ 233625 w 1233898"/>
+                <a:gd name="csY2" fmla="*/ 2357967 h 2802467"/>
+                <a:gd name="csX3" fmla="*/ 479120 w 1233898"/>
+                <a:gd name="csY3" fmla="*/ 1876863 h 2802467"/>
+                <a:gd name="csX4" fmla="*/ 242 w 1233898"/>
+                <a:gd name="csY4" fmla="*/ 942255 h 2802467"/>
+                <a:gd name="csX5" fmla="*/ 552247 w 1233898"/>
+                <a:gd name="csY5" fmla="*/ 344968 h 2802467"/>
+                <a:gd name="csX6" fmla="*/ 702541 w 1233898"/>
+                <a:gd name="csY6" fmla="*/ 0 h 2802467"/>
+                <a:gd name="csX0" fmla="*/ 1241948 w 1247388"/>
+                <a:gd name="csY0" fmla="*/ 2802467 h 2802467"/>
+                <a:gd name="csX1" fmla="*/ 1098015 w 1247388"/>
+                <a:gd name="csY1" fmla="*/ 2726267 h 2802467"/>
+                <a:gd name="csX2" fmla="*/ 247115 w 1247388"/>
+                <a:gd name="csY2" fmla="*/ 2357967 h 2802467"/>
+                <a:gd name="csX3" fmla="*/ 13732 w 1247388"/>
+                <a:gd name="csY3" fmla="*/ 942255 h 2802467"/>
+                <a:gd name="csX4" fmla="*/ 565737 w 1247388"/>
+                <a:gd name="csY4" fmla="*/ 344968 h 2802467"/>
+                <a:gd name="csX5" fmla="*/ 716031 w 1247388"/>
+                <a:gd name="csY5" fmla="*/ 0 h 2802467"/>
+                <a:gd name="csX0" fmla="*/ 1257771 w 1263211"/>
+                <a:gd name="csY0" fmla="*/ 2802467 h 2802467"/>
+                <a:gd name="csX1" fmla="*/ 1113838 w 1263211"/>
+                <a:gd name="csY1" fmla="*/ 2726267 h 2802467"/>
+                <a:gd name="csX2" fmla="*/ 262938 w 1263211"/>
+                <a:gd name="csY2" fmla="*/ 2357967 h 2802467"/>
+                <a:gd name="csX3" fmla="*/ 94785 w 1263211"/>
+                <a:gd name="csY3" fmla="*/ 1854030 h 2802467"/>
+                <a:gd name="csX4" fmla="*/ 29555 w 1263211"/>
+                <a:gd name="csY4" fmla="*/ 942255 h 2802467"/>
+                <a:gd name="csX5" fmla="*/ 581560 w 1263211"/>
+                <a:gd name="csY5" fmla="*/ 344968 h 2802467"/>
+                <a:gd name="csX6" fmla="*/ 731854 w 1263211"/>
+                <a:gd name="csY6" fmla="*/ 0 h 2802467"/>
+                <a:gd name="csX0" fmla="*/ 1229953 w 1235393"/>
+                <a:gd name="csY0" fmla="*/ 2802467 h 2802467"/>
+                <a:gd name="csX1" fmla="*/ 1086020 w 1235393"/>
+                <a:gd name="csY1" fmla="*/ 2726267 h 2802467"/>
+                <a:gd name="csX2" fmla="*/ 235120 w 1235393"/>
+                <a:gd name="csY2" fmla="*/ 2357967 h 2802467"/>
+                <a:gd name="csX3" fmla="*/ 374757 w 1235393"/>
+                <a:gd name="csY3" fmla="*/ 1798760 h 2802467"/>
+                <a:gd name="csX4" fmla="*/ 1737 w 1235393"/>
+                <a:gd name="csY4" fmla="*/ 942255 h 2802467"/>
+                <a:gd name="csX5" fmla="*/ 553742 w 1235393"/>
+                <a:gd name="csY5" fmla="*/ 344968 h 2802467"/>
+                <a:gd name="csX6" fmla="*/ 704036 w 1235393"/>
+                <a:gd name="csY6" fmla="*/ 0 h 2802467"/>
+                <a:gd name="csX0" fmla="*/ 1229953 w 1235393"/>
+                <a:gd name="csY0" fmla="*/ 2802467 h 2802467"/>
+                <a:gd name="csX1" fmla="*/ 1086020 w 1235393"/>
+                <a:gd name="csY1" fmla="*/ 2726267 h 2802467"/>
+                <a:gd name="csX2" fmla="*/ 235120 w 1235393"/>
+                <a:gd name="csY2" fmla="*/ 2357967 h 2802467"/>
+                <a:gd name="csX3" fmla="*/ 374757 w 1235393"/>
+                <a:gd name="csY3" fmla="*/ 1798760 h 2802467"/>
+                <a:gd name="csX4" fmla="*/ 1737 w 1235393"/>
+                <a:gd name="csY4" fmla="*/ 942255 h 2802467"/>
+                <a:gd name="csX5" fmla="*/ 553742 w 1235393"/>
+                <a:gd name="csY5" fmla="*/ 344968 h 2802467"/>
+                <a:gd name="csX6" fmla="*/ 704036 w 1235393"/>
+                <a:gd name="csY6" fmla="*/ 0 h 2802467"/>
+                <a:gd name="csX0" fmla="*/ 1229768 w 1235208"/>
+                <a:gd name="csY0" fmla="*/ 2802467 h 2802467"/>
+                <a:gd name="csX1" fmla="*/ 1085835 w 1235208"/>
+                <a:gd name="csY1" fmla="*/ 2726267 h 2802467"/>
+                <a:gd name="csX2" fmla="*/ 234935 w 1235208"/>
+                <a:gd name="csY2" fmla="*/ 2357967 h 2802467"/>
+                <a:gd name="csX3" fmla="*/ 374572 w 1235208"/>
+                <a:gd name="csY3" fmla="*/ 1798760 h 2802467"/>
+                <a:gd name="csX4" fmla="*/ 1552 w 1235208"/>
+                <a:gd name="csY4" fmla="*/ 942255 h 2802467"/>
+                <a:gd name="csX5" fmla="*/ 553557 w 1235208"/>
+                <a:gd name="csY5" fmla="*/ 344968 h 2802467"/>
+                <a:gd name="csX6" fmla="*/ 703851 w 1235208"/>
+                <a:gd name="csY6" fmla="*/ 0 h 2802467"/>
+                <a:gd name="csX0" fmla="*/ 1229636 w 1235076"/>
+                <a:gd name="csY0" fmla="*/ 2802467 h 2802467"/>
+                <a:gd name="csX1" fmla="*/ 1085703 w 1235076"/>
+                <a:gd name="csY1" fmla="*/ 2726267 h 2802467"/>
+                <a:gd name="csX2" fmla="*/ 234803 w 1235076"/>
+                <a:gd name="csY2" fmla="*/ 2357967 h 2802467"/>
+                <a:gd name="csX3" fmla="*/ 374440 w 1235076"/>
+                <a:gd name="csY3" fmla="*/ 1798760 h 2802467"/>
+                <a:gd name="csX4" fmla="*/ 1420 w 1235076"/>
+                <a:gd name="csY4" fmla="*/ 942255 h 2802467"/>
+                <a:gd name="csX5" fmla="*/ 553425 w 1235076"/>
+                <a:gd name="csY5" fmla="*/ 344968 h 2802467"/>
+                <a:gd name="csX6" fmla="*/ 703719 w 1235076"/>
+                <a:gd name="csY6" fmla="*/ 0 h 2802467"/>
+                <a:gd name="csX0" fmla="*/ 1245633 w 1251073"/>
+                <a:gd name="csY0" fmla="*/ 2802467 h 2802467"/>
+                <a:gd name="csX1" fmla="*/ 1101700 w 1251073"/>
+                <a:gd name="csY1" fmla="*/ 2726267 h 2802467"/>
+                <a:gd name="csX2" fmla="*/ 250800 w 1251073"/>
+                <a:gd name="csY2" fmla="*/ 2357967 h 2802467"/>
+                <a:gd name="csX3" fmla="*/ 390437 w 1251073"/>
+                <a:gd name="csY3" fmla="*/ 1798760 h 2802467"/>
+                <a:gd name="csX4" fmla="*/ 160815 w 1251073"/>
+                <a:gd name="csY4" fmla="*/ 1306139 h 2802467"/>
+                <a:gd name="csX5" fmla="*/ 17417 w 1251073"/>
+                <a:gd name="csY5" fmla="*/ 942255 h 2802467"/>
+                <a:gd name="csX6" fmla="*/ 569422 w 1251073"/>
+                <a:gd name="csY6" fmla="*/ 344968 h 2802467"/>
+                <a:gd name="csX7" fmla="*/ 719716 w 1251073"/>
+                <a:gd name="csY7" fmla="*/ 0 h 2802467"/>
+                <a:gd name="csX0" fmla="*/ 1245633 w 1251073"/>
+                <a:gd name="csY0" fmla="*/ 2802467 h 2802467"/>
+                <a:gd name="csX1" fmla="*/ 1101700 w 1251073"/>
+                <a:gd name="csY1" fmla="*/ 2726267 h 2802467"/>
+                <a:gd name="csX2" fmla="*/ 250800 w 1251073"/>
+                <a:gd name="csY2" fmla="*/ 2357967 h 2802467"/>
+                <a:gd name="csX3" fmla="*/ 390437 w 1251073"/>
+                <a:gd name="csY3" fmla="*/ 1798760 h 2802467"/>
+                <a:gd name="csX4" fmla="*/ 160815 w 1251073"/>
+                <a:gd name="csY4" fmla="*/ 1306139 h 2802467"/>
+                <a:gd name="csX5" fmla="*/ 17417 w 1251073"/>
+                <a:gd name="csY5" fmla="*/ 942255 h 2802467"/>
+                <a:gd name="csX6" fmla="*/ 569422 w 1251073"/>
+                <a:gd name="csY6" fmla="*/ 344968 h 2802467"/>
+                <a:gd name="csX7" fmla="*/ 719716 w 1251073"/>
+                <a:gd name="csY7" fmla="*/ 0 h 2802467"/>
+                <a:gd name="csX0" fmla="*/ 1245633 w 1251073"/>
+                <a:gd name="csY0" fmla="*/ 2802467 h 2802467"/>
+                <a:gd name="csX1" fmla="*/ 1101700 w 1251073"/>
+                <a:gd name="csY1" fmla="*/ 2726267 h 2802467"/>
+                <a:gd name="csX2" fmla="*/ 250800 w 1251073"/>
+                <a:gd name="csY2" fmla="*/ 2357967 h 2802467"/>
+                <a:gd name="csX3" fmla="*/ 390437 w 1251073"/>
+                <a:gd name="csY3" fmla="*/ 1798760 h 2802467"/>
+                <a:gd name="csX4" fmla="*/ 160815 w 1251073"/>
+                <a:gd name="csY4" fmla="*/ 1306139 h 2802467"/>
+                <a:gd name="csX5" fmla="*/ 17417 w 1251073"/>
+                <a:gd name="csY5" fmla="*/ 942255 h 2802467"/>
+                <a:gd name="csX6" fmla="*/ 569422 w 1251073"/>
+                <a:gd name="csY6" fmla="*/ 344968 h 2802467"/>
+                <a:gd name="csX7" fmla="*/ 719716 w 1251073"/>
+                <a:gd name="csY7" fmla="*/ 0 h 2802467"/>
+                <a:gd name="csX0" fmla="*/ 1241721 w 1247161"/>
+                <a:gd name="csY0" fmla="*/ 2802467 h 2802467"/>
+                <a:gd name="csX1" fmla="*/ 1097788 w 1247161"/>
+                <a:gd name="csY1" fmla="*/ 2726267 h 2802467"/>
+                <a:gd name="csX2" fmla="*/ 246888 w 1247161"/>
+                <a:gd name="csY2" fmla="*/ 2357967 h 2802467"/>
+                <a:gd name="csX3" fmla="*/ 386525 w 1247161"/>
+                <a:gd name="csY3" fmla="*/ 1798760 h 2802467"/>
+                <a:gd name="csX4" fmla="*/ 156903 w 1247161"/>
+                <a:gd name="csY4" fmla="*/ 1306139 h 2802467"/>
+                <a:gd name="csX5" fmla="*/ 13505 w 1247161"/>
+                <a:gd name="csY5" fmla="*/ 942255 h 2802467"/>
+                <a:gd name="csX6" fmla="*/ 565510 w 1247161"/>
+                <a:gd name="csY6" fmla="*/ 344968 h 2802467"/>
+                <a:gd name="csX7" fmla="*/ 715804 w 1247161"/>
+                <a:gd name="csY7" fmla="*/ 0 h 2802467"/>
+                <a:gd name="csX0" fmla="*/ 1241721 w 1247161"/>
+                <a:gd name="csY0" fmla="*/ 2802467 h 2802467"/>
+                <a:gd name="csX1" fmla="*/ 1097788 w 1247161"/>
+                <a:gd name="csY1" fmla="*/ 2726267 h 2802467"/>
+                <a:gd name="csX2" fmla="*/ 246888 w 1247161"/>
+                <a:gd name="csY2" fmla="*/ 2357967 h 2802467"/>
+                <a:gd name="csX3" fmla="*/ 386525 w 1247161"/>
+                <a:gd name="csY3" fmla="*/ 1798760 h 2802467"/>
+                <a:gd name="csX4" fmla="*/ 156903 w 1247161"/>
+                <a:gd name="csY4" fmla="*/ 1306139 h 2802467"/>
+                <a:gd name="csX5" fmla="*/ 13505 w 1247161"/>
+                <a:gd name="csY5" fmla="*/ 942255 h 2802467"/>
+                <a:gd name="csX6" fmla="*/ 565510 w 1247161"/>
+                <a:gd name="csY6" fmla="*/ 344968 h 2802467"/>
+                <a:gd name="csX7" fmla="*/ 715804 w 1247161"/>
+                <a:gd name="csY7" fmla="*/ 0 h 2802467"/>
+                <a:gd name="csX0" fmla="*/ 1251369 w 1256809"/>
+                <a:gd name="csY0" fmla="*/ 2802467 h 2802467"/>
+                <a:gd name="csX1" fmla="*/ 1107436 w 1256809"/>
+                <a:gd name="csY1" fmla="*/ 2726267 h 2802467"/>
+                <a:gd name="csX2" fmla="*/ 256536 w 1256809"/>
+                <a:gd name="csY2" fmla="*/ 2357967 h 2802467"/>
+                <a:gd name="csX3" fmla="*/ 396173 w 1256809"/>
+                <a:gd name="csY3" fmla="*/ 1798760 h 2802467"/>
+                <a:gd name="csX4" fmla="*/ 95710 w 1256809"/>
+                <a:gd name="csY4" fmla="*/ 1238854 h 2802467"/>
+                <a:gd name="csX5" fmla="*/ 23153 w 1256809"/>
+                <a:gd name="csY5" fmla="*/ 942255 h 2802467"/>
+                <a:gd name="csX6" fmla="*/ 575158 w 1256809"/>
+                <a:gd name="csY6" fmla="*/ 344968 h 2802467"/>
+                <a:gd name="csX7" fmla="*/ 725452 w 1256809"/>
+                <a:gd name="csY7" fmla="*/ 0 h 2802467"/>
+                <a:gd name="csX0" fmla="*/ 1238468 w 1243908"/>
+                <a:gd name="csY0" fmla="*/ 2802467 h 2802467"/>
+                <a:gd name="csX1" fmla="*/ 1094535 w 1243908"/>
+                <a:gd name="csY1" fmla="*/ 2726267 h 2802467"/>
+                <a:gd name="csX2" fmla="*/ 243635 w 1243908"/>
+                <a:gd name="csY2" fmla="*/ 2357967 h 2802467"/>
+                <a:gd name="csX3" fmla="*/ 383272 w 1243908"/>
+                <a:gd name="csY3" fmla="*/ 1798760 h 2802467"/>
+                <a:gd name="csX4" fmla="*/ 82809 w 1243908"/>
+                <a:gd name="csY4" fmla="*/ 1238854 h 2802467"/>
+                <a:gd name="csX5" fmla="*/ 24908 w 1243908"/>
+                <a:gd name="csY5" fmla="*/ 824507 h 2802467"/>
+                <a:gd name="csX6" fmla="*/ 562257 w 1243908"/>
+                <a:gd name="csY6" fmla="*/ 344968 h 2802467"/>
+                <a:gd name="csX7" fmla="*/ 712551 w 1243908"/>
+                <a:gd name="csY7" fmla="*/ 0 h 2802467"/>
+                <a:gd name="csX0" fmla="*/ 1238468 w 1243908"/>
+                <a:gd name="csY0" fmla="*/ 2802467 h 2802467"/>
+                <a:gd name="csX1" fmla="*/ 1094535 w 1243908"/>
+                <a:gd name="csY1" fmla="*/ 2726267 h 2802467"/>
+                <a:gd name="csX2" fmla="*/ 243635 w 1243908"/>
+                <a:gd name="csY2" fmla="*/ 2357967 h 2802467"/>
+                <a:gd name="csX3" fmla="*/ 424799 w 1243908"/>
+                <a:gd name="csY3" fmla="*/ 1805968 h 2802467"/>
+                <a:gd name="csX4" fmla="*/ 82809 w 1243908"/>
+                <a:gd name="csY4" fmla="*/ 1238854 h 2802467"/>
+                <a:gd name="csX5" fmla="*/ 24908 w 1243908"/>
+                <a:gd name="csY5" fmla="*/ 824507 h 2802467"/>
+                <a:gd name="csX6" fmla="*/ 562257 w 1243908"/>
+                <a:gd name="csY6" fmla="*/ 344968 h 2802467"/>
+                <a:gd name="csX7" fmla="*/ 712551 w 1243908"/>
+                <a:gd name="csY7" fmla="*/ 0 h 2802467"/>
+                <a:gd name="csX0" fmla="*/ 1250454 w 1255894"/>
+                <a:gd name="csY0" fmla="*/ 2802467 h 2802467"/>
+                <a:gd name="csX1" fmla="*/ 1106521 w 1255894"/>
+                <a:gd name="csY1" fmla="*/ 2726267 h 2802467"/>
+                <a:gd name="csX2" fmla="*/ 255621 w 1255894"/>
+                <a:gd name="csY2" fmla="*/ 2357967 h 2802467"/>
+                <a:gd name="csX3" fmla="*/ 436785 w 1255894"/>
+                <a:gd name="csY3" fmla="*/ 1805968 h 2802467"/>
+                <a:gd name="csX4" fmla="*/ 45939 w 1255894"/>
+                <a:gd name="csY4" fmla="*/ 1238854 h 2802467"/>
+                <a:gd name="csX5" fmla="*/ 36894 w 1255894"/>
+                <a:gd name="csY5" fmla="*/ 824507 h 2802467"/>
+                <a:gd name="csX6" fmla="*/ 574243 w 1255894"/>
+                <a:gd name="csY6" fmla="*/ 344968 h 2802467"/>
+                <a:gd name="csX7" fmla="*/ 724537 w 1255894"/>
+                <a:gd name="csY7" fmla="*/ 0 h 2802467"/>
+                <a:gd name="csX0" fmla="*/ 1250454 w 1255894"/>
+                <a:gd name="csY0" fmla="*/ 2802467 h 2802467"/>
+                <a:gd name="csX1" fmla="*/ 1106521 w 1255894"/>
+                <a:gd name="csY1" fmla="*/ 2726267 h 2802467"/>
+                <a:gd name="csX2" fmla="*/ 255621 w 1255894"/>
+                <a:gd name="csY2" fmla="*/ 2357967 h 2802467"/>
+                <a:gd name="csX3" fmla="*/ 436785 w 1255894"/>
+                <a:gd name="csY3" fmla="*/ 1805968 h 2802467"/>
+                <a:gd name="csX4" fmla="*/ 45939 w 1255894"/>
+                <a:gd name="csY4" fmla="*/ 1238854 h 2802467"/>
+                <a:gd name="csX5" fmla="*/ 36894 w 1255894"/>
+                <a:gd name="csY5" fmla="*/ 824507 h 2802467"/>
+                <a:gd name="csX6" fmla="*/ 574243 w 1255894"/>
+                <a:gd name="csY6" fmla="*/ 344968 h 2802467"/>
+                <a:gd name="csX7" fmla="*/ 724537 w 1255894"/>
+                <a:gd name="csY7" fmla="*/ 0 h 2802467"/>
+                <a:gd name="csX0" fmla="*/ 1250454 w 1255894"/>
+                <a:gd name="csY0" fmla="*/ 2802467 h 2802467"/>
+                <a:gd name="csX1" fmla="*/ 1106521 w 1255894"/>
+                <a:gd name="csY1" fmla="*/ 2726267 h 2802467"/>
+                <a:gd name="csX2" fmla="*/ 255621 w 1255894"/>
+                <a:gd name="csY2" fmla="*/ 2357967 h 2802467"/>
+                <a:gd name="csX3" fmla="*/ 436785 w 1255894"/>
+                <a:gd name="csY3" fmla="*/ 1805968 h 2802467"/>
+                <a:gd name="csX4" fmla="*/ 246247 w 1255894"/>
+                <a:gd name="csY4" fmla="*/ 1511598 h 2802467"/>
+                <a:gd name="csX5" fmla="*/ 45939 w 1255894"/>
+                <a:gd name="csY5" fmla="*/ 1238854 h 2802467"/>
+                <a:gd name="csX6" fmla="*/ 36894 w 1255894"/>
+                <a:gd name="csY6" fmla="*/ 824507 h 2802467"/>
+                <a:gd name="csX7" fmla="*/ 574243 w 1255894"/>
+                <a:gd name="csY7" fmla="*/ 344968 h 2802467"/>
+                <a:gd name="csX8" fmla="*/ 724537 w 1255894"/>
+                <a:gd name="csY8" fmla="*/ 0 h 2802467"/>
+                <a:gd name="csX0" fmla="*/ 1250454 w 1255894"/>
+                <a:gd name="csY0" fmla="*/ 2802467 h 2802467"/>
+                <a:gd name="csX1" fmla="*/ 1106521 w 1255894"/>
+                <a:gd name="csY1" fmla="*/ 2726267 h 2802467"/>
+                <a:gd name="csX2" fmla="*/ 255621 w 1255894"/>
+                <a:gd name="csY2" fmla="*/ 2357967 h 2802467"/>
+                <a:gd name="csX3" fmla="*/ 436785 w 1255894"/>
+                <a:gd name="csY3" fmla="*/ 1805968 h 2802467"/>
+                <a:gd name="csX4" fmla="*/ 236476 w 1255894"/>
+                <a:gd name="csY4" fmla="*/ 1523614 h 2802467"/>
+                <a:gd name="csX5" fmla="*/ 45939 w 1255894"/>
+                <a:gd name="csY5" fmla="*/ 1238854 h 2802467"/>
+                <a:gd name="csX6" fmla="*/ 36894 w 1255894"/>
+                <a:gd name="csY6" fmla="*/ 824507 h 2802467"/>
+                <a:gd name="csX7" fmla="*/ 574243 w 1255894"/>
+                <a:gd name="csY7" fmla="*/ 344968 h 2802467"/>
+                <a:gd name="csX8" fmla="*/ 724537 w 1255894"/>
+                <a:gd name="csY8" fmla="*/ 0 h 2802467"/>
+                <a:gd name="csX0" fmla="*/ 1241805 w 1247245"/>
+                <a:gd name="csY0" fmla="*/ 2802467 h 2802467"/>
+                <a:gd name="csX1" fmla="*/ 1097872 w 1247245"/>
+                <a:gd name="csY1" fmla="*/ 2726267 h 2802467"/>
+                <a:gd name="csX2" fmla="*/ 246972 w 1247245"/>
+                <a:gd name="csY2" fmla="*/ 2357967 h 2802467"/>
+                <a:gd name="csX3" fmla="*/ 428136 w 1247245"/>
+                <a:gd name="csY3" fmla="*/ 1805968 h 2802467"/>
+                <a:gd name="csX4" fmla="*/ 227827 w 1247245"/>
+                <a:gd name="csY4" fmla="*/ 1523614 h 2802467"/>
+                <a:gd name="csX5" fmla="*/ 70268 w 1247245"/>
+                <a:gd name="csY5" fmla="*/ 1224437 h 2802467"/>
+                <a:gd name="csX6" fmla="*/ 28245 w 1247245"/>
+                <a:gd name="csY6" fmla="*/ 824507 h 2802467"/>
+                <a:gd name="csX7" fmla="*/ 565594 w 1247245"/>
+                <a:gd name="csY7" fmla="*/ 344968 h 2802467"/>
+                <a:gd name="csX8" fmla="*/ 715888 w 1247245"/>
+                <a:gd name="csY8" fmla="*/ 0 h 2802467"/>
+                <a:gd name="csX0" fmla="*/ 1246225 w 1251665"/>
+                <a:gd name="csY0" fmla="*/ 2802467 h 2802467"/>
+                <a:gd name="csX1" fmla="*/ 1102292 w 1251665"/>
+                <a:gd name="csY1" fmla="*/ 2726267 h 2802467"/>
+                <a:gd name="csX2" fmla="*/ 251392 w 1251665"/>
+                <a:gd name="csY2" fmla="*/ 2357967 h 2802467"/>
+                <a:gd name="csX3" fmla="*/ 432556 w 1251665"/>
+                <a:gd name="csY3" fmla="*/ 1805968 h 2802467"/>
+                <a:gd name="csX4" fmla="*/ 232247 w 1251665"/>
+                <a:gd name="csY4" fmla="*/ 1523614 h 2802467"/>
+                <a:gd name="csX5" fmla="*/ 74688 w 1251665"/>
+                <a:gd name="csY5" fmla="*/ 1224437 h 2802467"/>
+                <a:gd name="csX6" fmla="*/ 32665 w 1251665"/>
+                <a:gd name="csY6" fmla="*/ 824507 h 2802467"/>
+                <a:gd name="csX7" fmla="*/ 570014 w 1251665"/>
+                <a:gd name="csY7" fmla="*/ 344968 h 2802467"/>
+                <a:gd name="csX8" fmla="*/ 720308 w 1251665"/>
+                <a:gd name="csY8" fmla="*/ 0 h 2802467"/>
+                <a:gd name="csX0" fmla="*/ 1246225 w 1251665"/>
+                <a:gd name="csY0" fmla="*/ 2802467 h 2802467"/>
+                <a:gd name="csX1" fmla="*/ 1102292 w 1251665"/>
+                <a:gd name="csY1" fmla="*/ 2726267 h 2802467"/>
+                <a:gd name="csX2" fmla="*/ 251392 w 1251665"/>
+                <a:gd name="csY2" fmla="*/ 2357967 h 2802467"/>
+                <a:gd name="csX3" fmla="*/ 432556 w 1251665"/>
+                <a:gd name="csY3" fmla="*/ 1805968 h 2802467"/>
+                <a:gd name="csX4" fmla="*/ 232247 w 1251665"/>
+                <a:gd name="csY4" fmla="*/ 1523614 h 2802467"/>
+                <a:gd name="csX5" fmla="*/ 74688 w 1251665"/>
+                <a:gd name="csY5" fmla="*/ 1224437 h 2802467"/>
+                <a:gd name="csX6" fmla="*/ 32665 w 1251665"/>
+                <a:gd name="csY6" fmla="*/ 824507 h 2802467"/>
+                <a:gd name="csX7" fmla="*/ 570014 w 1251665"/>
+                <a:gd name="csY7" fmla="*/ 344968 h 2802467"/>
+                <a:gd name="csX8" fmla="*/ 720308 w 1251665"/>
+                <a:gd name="csY8" fmla="*/ 0 h 2802467"/>
+                <a:gd name="csX0" fmla="*/ 1223883 w 1229323"/>
+                <a:gd name="csY0" fmla="*/ 2802467 h 2802467"/>
+                <a:gd name="csX1" fmla="*/ 1079950 w 1229323"/>
+                <a:gd name="csY1" fmla="*/ 2726267 h 2802467"/>
+                <a:gd name="csX2" fmla="*/ 229050 w 1229323"/>
+                <a:gd name="csY2" fmla="*/ 2357967 h 2802467"/>
+                <a:gd name="csX3" fmla="*/ 410214 w 1229323"/>
+                <a:gd name="csY3" fmla="*/ 1805968 h 2802467"/>
+                <a:gd name="csX4" fmla="*/ 209905 w 1229323"/>
+                <a:gd name="csY4" fmla="*/ 1523614 h 2802467"/>
+                <a:gd name="csX5" fmla="*/ 10323 w 1229323"/>
+                <a:gd name="csY5" fmla="*/ 824507 h 2802467"/>
+                <a:gd name="csX6" fmla="*/ 547672 w 1229323"/>
+                <a:gd name="csY6" fmla="*/ 344968 h 2802467"/>
+                <a:gd name="csX7" fmla="*/ 697966 w 1229323"/>
+                <a:gd name="csY7" fmla="*/ 0 h 2802467"/>
+                <a:gd name="csX0" fmla="*/ 1223883 w 1229323"/>
+                <a:gd name="csY0" fmla="*/ 2802467 h 2802467"/>
+                <a:gd name="csX1" fmla="*/ 1079950 w 1229323"/>
+                <a:gd name="csY1" fmla="*/ 2726267 h 2802467"/>
+                <a:gd name="csX2" fmla="*/ 229050 w 1229323"/>
+                <a:gd name="csY2" fmla="*/ 2357967 h 2802467"/>
+                <a:gd name="csX3" fmla="*/ 431385 w 1229323"/>
+                <a:gd name="csY3" fmla="*/ 1857233 h 2802467"/>
+                <a:gd name="csX4" fmla="*/ 209905 w 1229323"/>
+                <a:gd name="csY4" fmla="*/ 1523614 h 2802467"/>
+                <a:gd name="csX5" fmla="*/ 10323 w 1229323"/>
+                <a:gd name="csY5" fmla="*/ 824507 h 2802467"/>
+                <a:gd name="csX6" fmla="*/ 547672 w 1229323"/>
+                <a:gd name="csY6" fmla="*/ 344968 h 2802467"/>
+                <a:gd name="csX7" fmla="*/ 697966 w 1229323"/>
+                <a:gd name="csY7" fmla="*/ 0 h 2802467"/>
+                <a:gd name="csX0" fmla="*/ 1223883 w 1229323"/>
+                <a:gd name="csY0" fmla="*/ 2802467 h 2802467"/>
+                <a:gd name="csX1" fmla="*/ 1079950 w 1229323"/>
+                <a:gd name="csY1" fmla="*/ 2726267 h 2802467"/>
+                <a:gd name="csX2" fmla="*/ 229050 w 1229323"/>
+                <a:gd name="csY2" fmla="*/ 2357967 h 2802467"/>
+                <a:gd name="csX3" fmla="*/ 506297 w 1229323"/>
+                <a:gd name="csY3" fmla="*/ 1929324 h 2802467"/>
+                <a:gd name="csX4" fmla="*/ 209905 w 1229323"/>
+                <a:gd name="csY4" fmla="*/ 1523614 h 2802467"/>
+                <a:gd name="csX5" fmla="*/ 10323 w 1229323"/>
+                <a:gd name="csY5" fmla="*/ 824507 h 2802467"/>
+                <a:gd name="csX6" fmla="*/ 547672 w 1229323"/>
+                <a:gd name="csY6" fmla="*/ 344968 h 2802467"/>
+                <a:gd name="csX7" fmla="*/ 697966 w 1229323"/>
+                <a:gd name="csY7" fmla="*/ 0 h 2802467"/>
+                <a:gd name="csX0" fmla="*/ 1223883 w 1229323"/>
+                <a:gd name="csY0" fmla="*/ 2802467 h 2802467"/>
+                <a:gd name="csX1" fmla="*/ 1079950 w 1229323"/>
+                <a:gd name="csY1" fmla="*/ 2726267 h 2802467"/>
+                <a:gd name="csX2" fmla="*/ 229050 w 1229323"/>
+                <a:gd name="csY2" fmla="*/ 2357967 h 2802467"/>
+                <a:gd name="csX3" fmla="*/ 400444 w 1229323"/>
+                <a:gd name="csY3" fmla="*/ 1868448 h 2802467"/>
+                <a:gd name="csX4" fmla="*/ 209905 w 1229323"/>
+                <a:gd name="csY4" fmla="*/ 1523614 h 2802467"/>
+                <a:gd name="csX5" fmla="*/ 10323 w 1229323"/>
+                <a:gd name="csY5" fmla="*/ 824507 h 2802467"/>
+                <a:gd name="csX6" fmla="*/ 547672 w 1229323"/>
+                <a:gd name="csY6" fmla="*/ 344968 h 2802467"/>
+                <a:gd name="csX7" fmla="*/ 697966 w 1229323"/>
+                <a:gd name="csY7" fmla="*/ 0 h 2802467"/>
+                <a:gd name="csX0" fmla="*/ 1223883 w 1229323"/>
+                <a:gd name="csY0" fmla="*/ 2802467 h 2802467"/>
+                <a:gd name="csX1" fmla="*/ 1079950 w 1229323"/>
+                <a:gd name="csY1" fmla="*/ 2726267 h 2802467"/>
+                <a:gd name="csX2" fmla="*/ 229050 w 1229323"/>
+                <a:gd name="csY2" fmla="*/ 2357967 h 2802467"/>
+                <a:gd name="csX3" fmla="*/ 465585 w 1229323"/>
+                <a:gd name="csY3" fmla="*/ 1857233 h 2802467"/>
+                <a:gd name="csX4" fmla="*/ 209905 w 1229323"/>
+                <a:gd name="csY4" fmla="*/ 1523614 h 2802467"/>
+                <a:gd name="csX5" fmla="*/ 10323 w 1229323"/>
+                <a:gd name="csY5" fmla="*/ 824507 h 2802467"/>
+                <a:gd name="csX6" fmla="*/ 547672 w 1229323"/>
+                <a:gd name="csY6" fmla="*/ 344968 h 2802467"/>
+                <a:gd name="csX7" fmla="*/ 697966 w 1229323"/>
+                <a:gd name="csY7" fmla="*/ 0 h 2802467"/>
+                <a:gd name="csX0" fmla="*/ 1223883 w 1229323"/>
+                <a:gd name="csY0" fmla="*/ 2802467 h 2802467"/>
+                <a:gd name="csX1" fmla="*/ 1079950 w 1229323"/>
+                <a:gd name="csY1" fmla="*/ 2726267 h 2802467"/>
+                <a:gd name="csX2" fmla="*/ 229050 w 1229323"/>
+                <a:gd name="csY2" fmla="*/ 2357967 h 2802467"/>
+                <a:gd name="csX3" fmla="*/ 411843 w 1229323"/>
+                <a:gd name="csY3" fmla="*/ 1847621 h 2802467"/>
+                <a:gd name="csX4" fmla="*/ 209905 w 1229323"/>
+                <a:gd name="csY4" fmla="*/ 1523614 h 2802467"/>
+                <a:gd name="csX5" fmla="*/ 10323 w 1229323"/>
+                <a:gd name="csY5" fmla="*/ 824507 h 2802467"/>
+                <a:gd name="csX6" fmla="*/ 547672 w 1229323"/>
+                <a:gd name="csY6" fmla="*/ 344968 h 2802467"/>
+                <a:gd name="csX7" fmla="*/ 697966 w 1229323"/>
+                <a:gd name="csY7" fmla="*/ 0 h 2802467"/>
+                <a:gd name="csX0" fmla="*/ 1237381 w 1242821"/>
+                <a:gd name="csY0" fmla="*/ 2802467 h 2802467"/>
+                <a:gd name="csX1" fmla="*/ 1093448 w 1242821"/>
+                <a:gd name="csY1" fmla="*/ 2726267 h 2802467"/>
+                <a:gd name="csX2" fmla="*/ 242548 w 1242821"/>
+                <a:gd name="csY2" fmla="*/ 2357967 h 2802467"/>
+                <a:gd name="csX3" fmla="*/ 425341 w 1242821"/>
+                <a:gd name="csY3" fmla="*/ 1847621 h 2802467"/>
+                <a:gd name="csX4" fmla="*/ 127321 w 1242821"/>
+                <a:gd name="csY4" fmla="*/ 1358606 h 2802467"/>
+                <a:gd name="csX5" fmla="*/ 23821 w 1242821"/>
+                <a:gd name="csY5" fmla="*/ 824507 h 2802467"/>
+                <a:gd name="csX6" fmla="*/ 561170 w 1242821"/>
+                <a:gd name="csY6" fmla="*/ 344968 h 2802467"/>
+                <a:gd name="csX7" fmla="*/ 711464 w 1242821"/>
+                <a:gd name="csY7" fmla="*/ 0 h 2802467"/>
+                <a:gd name="csX0" fmla="*/ 1233269 w 1238709"/>
+                <a:gd name="csY0" fmla="*/ 2802467 h 2802467"/>
+                <a:gd name="csX1" fmla="*/ 1089336 w 1238709"/>
+                <a:gd name="csY1" fmla="*/ 2726267 h 2802467"/>
+                <a:gd name="csX2" fmla="*/ 238436 w 1238709"/>
+                <a:gd name="csY2" fmla="*/ 2357967 h 2802467"/>
+                <a:gd name="csX3" fmla="*/ 421229 w 1238709"/>
+                <a:gd name="csY3" fmla="*/ 1847621 h 2802467"/>
+                <a:gd name="csX4" fmla="*/ 145194 w 1238709"/>
+                <a:gd name="csY4" fmla="*/ 1324964 h 2802467"/>
+                <a:gd name="csX5" fmla="*/ 19709 w 1238709"/>
+                <a:gd name="csY5" fmla="*/ 824507 h 2802467"/>
+                <a:gd name="csX6" fmla="*/ 557058 w 1238709"/>
+                <a:gd name="csY6" fmla="*/ 344968 h 2802467"/>
+                <a:gd name="csX7" fmla="*/ 707352 w 1238709"/>
+                <a:gd name="csY7" fmla="*/ 0 h 2802467"/>
+                <a:gd name="csX0" fmla="*/ 1233269 w 1238709"/>
+                <a:gd name="csY0" fmla="*/ 2802467 h 2802467"/>
+                <a:gd name="csX1" fmla="*/ 1089336 w 1238709"/>
+                <a:gd name="csY1" fmla="*/ 2726267 h 2802467"/>
+                <a:gd name="csX2" fmla="*/ 238436 w 1238709"/>
+                <a:gd name="csY2" fmla="*/ 2357967 h 2802467"/>
+                <a:gd name="csX3" fmla="*/ 352832 w 1238709"/>
+                <a:gd name="csY3" fmla="*/ 1847621 h 2802467"/>
+                <a:gd name="csX4" fmla="*/ 145194 w 1238709"/>
+                <a:gd name="csY4" fmla="*/ 1324964 h 2802467"/>
+                <a:gd name="csX5" fmla="*/ 19709 w 1238709"/>
+                <a:gd name="csY5" fmla="*/ 824507 h 2802467"/>
+                <a:gd name="csX6" fmla="*/ 557058 w 1238709"/>
+                <a:gd name="csY6" fmla="*/ 344968 h 2802467"/>
+                <a:gd name="csX7" fmla="*/ 707352 w 1238709"/>
+                <a:gd name="csY7" fmla="*/ 0 h 2802467"/>
+                <a:gd name="csX0" fmla="*/ 1227029 w 1232469"/>
+                <a:gd name="csY0" fmla="*/ 2802467 h 2802467"/>
+                <a:gd name="csX1" fmla="*/ 1083096 w 1232469"/>
+                <a:gd name="csY1" fmla="*/ 2726267 h 2802467"/>
+                <a:gd name="csX2" fmla="*/ 232196 w 1232469"/>
+                <a:gd name="csY2" fmla="*/ 2357967 h 2802467"/>
+                <a:gd name="csX3" fmla="*/ 346592 w 1232469"/>
+                <a:gd name="csY3" fmla="*/ 1847621 h 2802467"/>
+                <a:gd name="csX4" fmla="*/ 182924 w 1232469"/>
+                <a:gd name="csY4" fmla="*/ 1310546 h 2802467"/>
+                <a:gd name="csX5" fmla="*/ 13469 w 1232469"/>
+                <a:gd name="csY5" fmla="*/ 824507 h 2802467"/>
+                <a:gd name="csX6" fmla="*/ 550818 w 1232469"/>
+                <a:gd name="csY6" fmla="*/ 344968 h 2802467"/>
+                <a:gd name="csX7" fmla="*/ 701112 w 1232469"/>
+                <a:gd name="csY7" fmla="*/ 0 h 2802467"/>
+                <a:gd name="csX0" fmla="*/ 1228860 w 1234300"/>
+                <a:gd name="csY0" fmla="*/ 2802467 h 2802467"/>
+                <a:gd name="csX1" fmla="*/ 1084927 w 1234300"/>
+                <a:gd name="csY1" fmla="*/ 2726267 h 2802467"/>
+                <a:gd name="csX2" fmla="*/ 234027 w 1234300"/>
+                <a:gd name="csY2" fmla="*/ 2357967 h 2802467"/>
+                <a:gd name="csX3" fmla="*/ 348423 w 1234300"/>
+                <a:gd name="csY3" fmla="*/ 1847621 h 2802467"/>
+                <a:gd name="csX4" fmla="*/ 170099 w 1234300"/>
+                <a:gd name="csY4" fmla="*/ 1310546 h 2802467"/>
+                <a:gd name="csX5" fmla="*/ 15300 w 1234300"/>
+                <a:gd name="csY5" fmla="*/ 824507 h 2802467"/>
+                <a:gd name="csX6" fmla="*/ 552649 w 1234300"/>
+                <a:gd name="csY6" fmla="*/ 344968 h 2802467"/>
+                <a:gd name="csX7" fmla="*/ 702943 w 1234300"/>
+                <a:gd name="csY7" fmla="*/ 0 h 2802467"/>
+                <a:gd name="csX0" fmla="*/ 1216014 w 1221454"/>
+                <a:gd name="csY0" fmla="*/ 2802467 h 2802467"/>
+                <a:gd name="csX1" fmla="*/ 1072081 w 1221454"/>
+                <a:gd name="csY1" fmla="*/ 2726267 h 2802467"/>
+                <a:gd name="csX2" fmla="*/ 221181 w 1221454"/>
+                <a:gd name="csY2" fmla="*/ 2357967 h 2802467"/>
+                <a:gd name="csX3" fmla="*/ 335577 w 1221454"/>
+                <a:gd name="csY3" fmla="*/ 1847621 h 2802467"/>
+                <a:gd name="csX4" fmla="*/ 2454 w 1221454"/>
+                <a:gd name="csY4" fmla="*/ 824507 h 2802467"/>
+                <a:gd name="csX5" fmla="*/ 539803 w 1221454"/>
+                <a:gd name="csY5" fmla="*/ 344968 h 2802467"/>
+                <a:gd name="csX6" fmla="*/ 690097 w 1221454"/>
+                <a:gd name="csY6" fmla="*/ 0 h 2802467"/>
+                <a:gd name="csX0" fmla="*/ 1215599 w 1221039"/>
+                <a:gd name="csY0" fmla="*/ 2802467 h 2802467"/>
+                <a:gd name="csX1" fmla="*/ 1071666 w 1221039"/>
+                <a:gd name="csY1" fmla="*/ 2726267 h 2802467"/>
+                <a:gd name="csX2" fmla="*/ 220766 w 1221039"/>
+                <a:gd name="csY2" fmla="*/ 2357967 h 2802467"/>
+                <a:gd name="csX3" fmla="*/ 335162 w 1221039"/>
+                <a:gd name="csY3" fmla="*/ 1847621 h 2802467"/>
+                <a:gd name="csX4" fmla="*/ 2039 w 1221039"/>
+                <a:gd name="csY4" fmla="*/ 824507 h 2802467"/>
+                <a:gd name="csX5" fmla="*/ 539388 w 1221039"/>
+                <a:gd name="csY5" fmla="*/ 344968 h 2802467"/>
+                <a:gd name="csX6" fmla="*/ 689682 w 1221039"/>
+                <a:gd name="csY6" fmla="*/ 0 h 2802467"/>
+                <a:gd name="csX0" fmla="*/ 1214896 w 1220336"/>
+                <a:gd name="csY0" fmla="*/ 2802467 h 2802467"/>
+                <a:gd name="csX1" fmla="*/ 1070963 w 1220336"/>
+                <a:gd name="csY1" fmla="*/ 2726267 h 2802467"/>
+                <a:gd name="csX2" fmla="*/ 220063 w 1220336"/>
+                <a:gd name="csY2" fmla="*/ 2357967 h 2802467"/>
+                <a:gd name="csX3" fmla="*/ 368657 w 1220336"/>
+                <a:gd name="csY3" fmla="*/ 1871651 h 2802467"/>
+                <a:gd name="csX4" fmla="*/ 1336 w 1220336"/>
+                <a:gd name="csY4" fmla="*/ 824507 h 2802467"/>
+                <a:gd name="csX5" fmla="*/ 538685 w 1220336"/>
+                <a:gd name="csY5" fmla="*/ 344968 h 2802467"/>
+                <a:gd name="csX6" fmla="*/ 688979 w 1220336"/>
+                <a:gd name="csY6" fmla="*/ 0 h 2802467"/>
+                <a:gd name="csX0" fmla="*/ 1214981 w 1220421"/>
+                <a:gd name="csY0" fmla="*/ 2802467 h 2802467"/>
+                <a:gd name="csX1" fmla="*/ 1071048 w 1220421"/>
+                <a:gd name="csY1" fmla="*/ 2726267 h 2802467"/>
+                <a:gd name="csX2" fmla="*/ 220148 w 1220421"/>
+                <a:gd name="csY2" fmla="*/ 2357967 h 2802467"/>
+                <a:gd name="csX3" fmla="*/ 368742 w 1220421"/>
+                <a:gd name="csY3" fmla="*/ 1871651 h 2802467"/>
+                <a:gd name="csX4" fmla="*/ 1421 w 1220421"/>
+                <a:gd name="csY4" fmla="*/ 824507 h 2802467"/>
+                <a:gd name="csX5" fmla="*/ 538770 w 1220421"/>
+                <a:gd name="csY5" fmla="*/ 344968 h 2802467"/>
+                <a:gd name="csX6" fmla="*/ 689064 w 1220421"/>
+                <a:gd name="csY6" fmla="*/ 0 h 2802467"/>
+                <a:gd name="csX0" fmla="*/ 1214981 w 1220421"/>
+                <a:gd name="csY0" fmla="*/ 2802467 h 2802467"/>
+                <a:gd name="csX1" fmla="*/ 1071048 w 1220421"/>
+                <a:gd name="csY1" fmla="*/ 2726267 h 2802467"/>
+                <a:gd name="csX2" fmla="*/ 220148 w 1220421"/>
+                <a:gd name="csY2" fmla="*/ 2357967 h 2802467"/>
+                <a:gd name="csX3" fmla="*/ 368742 w 1220421"/>
+                <a:gd name="csY3" fmla="*/ 1871651 h 2802467"/>
+                <a:gd name="csX4" fmla="*/ 1421 w 1220421"/>
+                <a:gd name="csY4" fmla="*/ 824507 h 2802467"/>
+                <a:gd name="csX5" fmla="*/ 538770 w 1220421"/>
+                <a:gd name="csY5" fmla="*/ 344968 h 2802467"/>
+                <a:gd name="csX6" fmla="*/ 689064 w 1220421"/>
+                <a:gd name="csY6" fmla="*/ 0 h 2802467"/>
+                <a:gd name="csX0" fmla="*/ 1214803 w 1220243"/>
+                <a:gd name="csY0" fmla="*/ 2802467 h 2802467"/>
+                <a:gd name="csX1" fmla="*/ 1070870 w 1220243"/>
+                <a:gd name="csY1" fmla="*/ 2726267 h 2802467"/>
+                <a:gd name="csX2" fmla="*/ 219970 w 1220243"/>
+                <a:gd name="csY2" fmla="*/ 2357967 h 2802467"/>
+                <a:gd name="csX3" fmla="*/ 378335 w 1220243"/>
+                <a:gd name="csY3" fmla="*/ 1818783 h 2802467"/>
+                <a:gd name="csX4" fmla="*/ 1243 w 1220243"/>
+                <a:gd name="csY4" fmla="*/ 824507 h 2802467"/>
+                <a:gd name="csX5" fmla="*/ 538592 w 1220243"/>
+                <a:gd name="csY5" fmla="*/ 344968 h 2802467"/>
+                <a:gd name="csX6" fmla="*/ 688886 w 1220243"/>
+                <a:gd name="csY6" fmla="*/ 0 h 2802467"/>
+                <a:gd name="csX0" fmla="*/ 1227876 w 1233316"/>
+                <a:gd name="csY0" fmla="*/ 2802467 h 2802467"/>
+                <a:gd name="csX1" fmla="*/ 1083943 w 1233316"/>
+                <a:gd name="csY1" fmla="*/ 2726267 h 2802467"/>
+                <a:gd name="csX2" fmla="*/ 233043 w 1233316"/>
+                <a:gd name="csY2" fmla="*/ 2357967 h 2802467"/>
+                <a:gd name="csX3" fmla="*/ 391408 w 1233316"/>
+                <a:gd name="csY3" fmla="*/ 1818783 h 2802467"/>
+                <a:gd name="csX4" fmla="*/ 174814 w 1233316"/>
+                <a:gd name="csY4" fmla="*/ 1276101 h 2802467"/>
+                <a:gd name="csX5" fmla="*/ 14316 w 1233316"/>
+                <a:gd name="csY5" fmla="*/ 824507 h 2802467"/>
+                <a:gd name="csX6" fmla="*/ 551665 w 1233316"/>
+                <a:gd name="csY6" fmla="*/ 344968 h 2802467"/>
+                <a:gd name="csX7" fmla="*/ 701959 w 1233316"/>
+                <a:gd name="csY7" fmla="*/ 0 h 2802467"/>
+                <a:gd name="csX0" fmla="*/ 1232769 w 1238209"/>
+                <a:gd name="csY0" fmla="*/ 2802467 h 2802467"/>
+                <a:gd name="csX1" fmla="*/ 1088836 w 1238209"/>
+                <a:gd name="csY1" fmla="*/ 2726267 h 2802467"/>
+                <a:gd name="csX2" fmla="*/ 237936 w 1238209"/>
+                <a:gd name="csY2" fmla="*/ 2357967 h 2802467"/>
+                <a:gd name="csX3" fmla="*/ 396301 w 1238209"/>
+                <a:gd name="csY3" fmla="*/ 1818783 h 2802467"/>
+                <a:gd name="csX4" fmla="*/ 145509 w 1238209"/>
+                <a:gd name="csY4" fmla="*/ 1283310 h 2802467"/>
+                <a:gd name="csX5" fmla="*/ 19209 w 1238209"/>
+                <a:gd name="csY5" fmla="*/ 824507 h 2802467"/>
+                <a:gd name="csX6" fmla="*/ 556558 w 1238209"/>
+                <a:gd name="csY6" fmla="*/ 344968 h 2802467"/>
+                <a:gd name="csX7" fmla="*/ 706852 w 1238209"/>
+                <a:gd name="csY7" fmla="*/ 0 h 2802467"/>
+                <a:gd name="csX0" fmla="*/ 1232769 w 1238209"/>
+                <a:gd name="csY0" fmla="*/ 2802467 h 2802467"/>
+                <a:gd name="csX1" fmla="*/ 1088836 w 1238209"/>
+                <a:gd name="csY1" fmla="*/ 2726267 h 2802467"/>
+                <a:gd name="csX2" fmla="*/ 237936 w 1238209"/>
+                <a:gd name="csY2" fmla="*/ 2357967 h 2802467"/>
+                <a:gd name="csX3" fmla="*/ 396301 w 1238209"/>
+                <a:gd name="csY3" fmla="*/ 1818783 h 2802467"/>
+                <a:gd name="csX4" fmla="*/ 145509 w 1238209"/>
+                <a:gd name="csY4" fmla="*/ 1283310 h 2802467"/>
+                <a:gd name="csX5" fmla="*/ 19209 w 1238209"/>
+                <a:gd name="csY5" fmla="*/ 824507 h 2802467"/>
+                <a:gd name="csX6" fmla="*/ 556558 w 1238209"/>
+                <a:gd name="csY6" fmla="*/ 344968 h 2802467"/>
+                <a:gd name="csX7" fmla="*/ 706852 w 1238209"/>
+                <a:gd name="csY7" fmla="*/ 0 h 2802467"/>
+                <a:gd name="csX0" fmla="*/ 1235028 w 1240468"/>
+                <a:gd name="csY0" fmla="*/ 2802467 h 2802467"/>
+                <a:gd name="csX1" fmla="*/ 1091095 w 1240468"/>
+                <a:gd name="csY1" fmla="*/ 2726267 h 2802467"/>
+                <a:gd name="csX2" fmla="*/ 240195 w 1240468"/>
+                <a:gd name="csY2" fmla="*/ 2357967 h 2802467"/>
+                <a:gd name="csX3" fmla="*/ 398560 w 1240468"/>
+                <a:gd name="csY3" fmla="*/ 1818783 h 2802467"/>
+                <a:gd name="csX4" fmla="*/ 147768 w 1240468"/>
+                <a:gd name="csY4" fmla="*/ 1283310 h 2802467"/>
+                <a:gd name="csX5" fmla="*/ 21468 w 1240468"/>
+                <a:gd name="csY5" fmla="*/ 824507 h 2802467"/>
+                <a:gd name="csX6" fmla="*/ 558817 w 1240468"/>
+                <a:gd name="csY6" fmla="*/ 344968 h 2802467"/>
+                <a:gd name="csX7" fmla="*/ 709111 w 1240468"/>
+                <a:gd name="csY7" fmla="*/ 0 h 2802467"/>
+                <a:gd name="csX0" fmla="*/ 1235028 w 1240468"/>
+                <a:gd name="csY0" fmla="*/ 2802467 h 2802467"/>
+                <a:gd name="csX1" fmla="*/ 1091095 w 1240468"/>
+                <a:gd name="csY1" fmla="*/ 2726267 h 2802467"/>
+                <a:gd name="csX2" fmla="*/ 240195 w 1240468"/>
+                <a:gd name="csY2" fmla="*/ 2357967 h 2802467"/>
+                <a:gd name="csX3" fmla="*/ 371690 w 1240468"/>
+                <a:gd name="csY3" fmla="*/ 1787543 h 2802467"/>
+                <a:gd name="csX4" fmla="*/ 147768 w 1240468"/>
+                <a:gd name="csY4" fmla="*/ 1283310 h 2802467"/>
+                <a:gd name="csX5" fmla="*/ 21468 w 1240468"/>
+                <a:gd name="csY5" fmla="*/ 824507 h 2802467"/>
+                <a:gd name="csX6" fmla="*/ 558817 w 1240468"/>
+                <a:gd name="csY6" fmla="*/ 344968 h 2802467"/>
+                <a:gd name="csX7" fmla="*/ 709111 w 1240468"/>
+                <a:gd name="csY7" fmla="*/ 0 h 2802467"/>
+                <a:gd name="csX0" fmla="*/ 1235028 w 1240468"/>
+                <a:gd name="csY0" fmla="*/ 2802467 h 2802467"/>
+                <a:gd name="csX1" fmla="*/ 1091095 w 1240468"/>
+                <a:gd name="csY1" fmla="*/ 2726267 h 2802467"/>
+                <a:gd name="csX2" fmla="*/ 240195 w 1240468"/>
+                <a:gd name="csY2" fmla="*/ 2357967 h 2802467"/>
+                <a:gd name="csX3" fmla="*/ 371690 w 1240468"/>
+                <a:gd name="csY3" fmla="*/ 1787543 h 2802467"/>
+                <a:gd name="csX4" fmla="*/ 147768 w 1240468"/>
+                <a:gd name="csY4" fmla="*/ 1283310 h 2802467"/>
+                <a:gd name="csX5" fmla="*/ 21468 w 1240468"/>
+                <a:gd name="csY5" fmla="*/ 824507 h 2802467"/>
+                <a:gd name="csX6" fmla="*/ 558817 w 1240468"/>
+                <a:gd name="csY6" fmla="*/ 344968 h 2802467"/>
+                <a:gd name="csX7" fmla="*/ 709111 w 1240468"/>
+                <a:gd name="csY7" fmla="*/ 0 h 2802467"/>
+                <a:gd name="csX0" fmla="*/ 1235028 w 1240468"/>
+                <a:gd name="csY0" fmla="*/ 2802467 h 2802467"/>
+                <a:gd name="csX1" fmla="*/ 1091095 w 1240468"/>
+                <a:gd name="csY1" fmla="*/ 2726267 h 2802467"/>
+                <a:gd name="csX2" fmla="*/ 240195 w 1240468"/>
+                <a:gd name="csY2" fmla="*/ 2357967 h 2802467"/>
+                <a:gd name="csX3" fmla="*/ 371690 w 1240468"/>
+                <a:gd name="csY3" fmla="*/ 1787543 h 2802467"/>
+                <a:gd name="csX4" fmla="*/ 147768 w 1240468"/>
+                <a:gd name="csY4" fmla="*/ 1283310 h 2802467"/>
+                <a:gd name="csX5" fmla="*/ 21468 w 1240468"/>
+                <a:gd name="csY5" fmla="*/ 824507 h 2802467"/>
+                <a:gd name="csX6" fmla="*/ 558817 w 1240468"/>
+                <a:gd name="csY6" fmla="*/ 344968 h 2802467"/>
+                <a:gd name="csX7" fmla="*/ 709111 w 1240468"/>
+                <a:gd name="csY7" fmla="*/ 0 h 2802467"/>
+                <a:gd name="csX0" fmla="*/ 1240214 w 1245654"/>
+                <a:gd name="csY0" fmla="*/ 2802467 h 2802467"/>
+                <a:gd name="csX1" fmla="*/ 1096281 w 1245654"/>
+                <a:gd name="csY1" fmla="*/ 2726267 h 2802467"/>
+                <a:gd name="csX2" fmla="*/ 245381 w 1245654"/>
+                <a:gd name="csY2" fmla="*/ 2357967 h 2802467"/>
+                <a:gd name="csX3" fmla="*/ 376876 w 1245654"/>
+                <a:gd name="csY3" fmla="*/ 1787543 h 2802467"/>
+                <a:gd name="csX4" fmla="*/ 128527 w 1245654"/>
+                <a:gd name="csY4" fmla="*/ 1292922 h 2802467"/>
+                <a:gd name="csX5" fmla="*/ 26654 w 1245654"/>
+                <a:gd name="csY5" fmla="*/ 824507 h 2802467"/>
+                <a:gd name="csX6" fmla="*/ 564003 w 1245654"/>
+                <a:gd name="csY6" fmla="*/ 344968 h 2802467"/>
+                <a:gd name="csX7" fmla="*/ 714297 w 1245654"/>
+                <a:gd name="csY7" fmla="*/ 0 h 2802467"/>
+                <a:gd name="csX0" fmla="*/ 1240214 w 1245654"/>
+                <a:gd name="csY0" fmla="*/ 2802467 h 2802467"/>
+                <a:gd name="csX1" fmla="*/ 1096281 w 1245654"/>
+                <a:gd name="csY1" fmla="*/ 2726267 h 2802467"/>
+                <a:gd name="csX2" fmla="*/ 245381 w 1245654"/>
+                <a:gd name="csY2" fmla="*/ 2357967 h 2802467"/>
+                <a:gd name="csX3" fmla="*/ 376876 w 1245654"/>
+                <a:gd name="csY3" fmla="*/ 1787543 h 2802467"/>
+                <a:gd name="csX4" fmla="*/ 128527 w 1245654"/>
+                <a:gd name="csY4" fmla="*/ 1292922 h 2802467"/>
+                <a:gd name="csX5" fmla="*/ 26654 w 1245654"/>
+                <a:gd name="csY5" fmla="*/ 824507 h 2802467"/>
+                <a:gd name="csX6" fmla="*/ 564003 w 1245654"/>
+                <a:gd name="csY6" fmla="*/ 344968 h 2802467"/>
+                <a:gd name="csX7" fmla="*/ 714297 w 1245654"/>
+                <a:gd name="csY7" fmla="*/ 0 h 2802467"/>
+                <a:gd name="csX0" fmla="*/ 1240214 w 1245654"/>
+                <a:gd name="csY0" fmla="*/ 2802467 h 2802467"/>
+                <a:gd name="csX1" fmla="*/ 1096281 w 1245654"/>
+                <a:gd name="csY1" fmla="*/ 2726267 h 2802467"/>
+                <a:gd name="csX2" fmla="*/ 245381 w 1245654"/>
+                <a:gd name="csY2" fmla="*/ 2357967 h 2802467"/>
+                <a:gd name="csX3" fmla="*/ 376876 w 1245654"/>
+                <a:gd name="csY3" fmla="*/ 1787543 h 2802467"/>
+                <a:gd name="csX4" fmla="*/ 128527 w 1245654"/>
+                <a:gd name="csY4" fmla="*/ 1292922 h 2802467"/>
+                <a:gd name="csX5" fmla="*/ 26654 w 1245654"/>
+                <a:gd name="csY5" fmla="*/ 824507 h 2802467"/>
+                <a:gd name="csX6" fmla="*/ 564003 w 1245654"/>
+                <a:gd name="csY6" fmla="*/ 344968 h 2802467"/>
+                <a:gd name="csX7" fmla="*/ 714297 w 1245654"/>
+                <a:gd name="csY7" fmla="*/ 0 h 2802467"/>
+                <a:gd name="csX0" fmla="*/ 1240214 w 1245654"/>
+                <a:gd name="csY0" fmla="*/ 2802467 h 2802467"/>
+                <a:gd name="csX1" fmla="*/ 1096281 w 1245654"/>
+                <a:gd name="csY1" fmla="*/ 2726267 h 2802467"/>
+                <a:gd name="csX2" fmla="*/ 245381 w 1245654"/>
+                <a:gd name="csY2" fmla="*/ 2357967 h 2802467"/>
+                <a:gd name="csX3" fmla="*/ 376876 w 1245654"/>
+                <a:gd name="csY3" fmla="*/ 1787543 h 2802467"/>
+                <a:gd name="csX4" fmla="*/ 128527 w 1245654"/>
+                <a:gd name="csY4" fmla="*/ 1292922 h 2802467"/>
+                <a:gd name="csX5" fmla="*/ 26654 w 1245654"/>
+                <a:gd name="csY5" fmla="*/ 824507 h 2802467"/>
+                <a:gd name="csX6" fmla="*/ 564003 w 1245654"/>
+                <a:gd name="csY6" fmla="*/ 344968 h 2802467"/>
+                <a:gd name="csX7" fmla="*/ 714297 w 1245654"/>
+                <a:gd name="csY7" fmla="*/ 0 h 2802467"/>
+                <a:gd name="csX0" fmla="*/ 1240214 w 1245654"/>
+                <a:gd name="csY0" fmla="*/ 2802467 h 2802467"/>
+                <a:gd name="csX1" fmla="*/ 1096281 w 1245654"/>
+                <a:gd name="csY1" fmla="*/ 2726267 h 2802467"/>
+                <a:gd name="csX2" fmla="*/ 245381 w 1245654"/>
+                <a:gd name="csY2" fmla="*/ 2357967 h 2802467"/>
+                <a:gd name="csX3" fmla="*/ 376876 w 1245654"/>
+                <a:gd name="csY3" fmla="*/ 1787543 h 2802467"/>
+                <a:gd name="csX4" fmla="*/ 128527 w 1245654"/>
+                <a:gd name="csY4" fmla="*/ 1292922 h 2802467"/>
+                <a:gd name="csX5" fmla="*/ 26654 w 1245654"/>
+                <a:gd name="csY5" fmla="*/ 824507 h 2802467"/>
+                <a:gd name="csX6" fmla="*/ 564003 w 1245654"/>
+                <a:gd name="csY6" fmla="*/ 344968 h 2802467"/>
+                <a:gd name="csX7" fmla="*/ 714297 w 1245654"/>
+                <a:gd name="csY7" fmla="*/ 0 h 2802467"/>
+                <a:gd name="csX0" fmla="*/ 1240214 w 1245654"/>
+                <a:gd name="csY0" fmla="*/ 2802467 h 2802467"/>
+                <a:gd name="csX1" fmla="*/ 1096281 w 1245654"/>
+                <a:gd name="csY1" fmla="*/ 2726267 h 2802467"/>
+                <a:gd name="csX2" fmla="*/ 245381 w 1245654"/>
+                <a:gd name="csY2" fmla="*/ 2357967 h 2802467"/>
+                <a:gd name="csX3" fmla="*/ 376876 w 1245654"/>
+                <a:gd name="csY3" fmla="*/ 1787543 h 2802467"/>
+                <a:gd name="csX4" fmla="*/ 128527 w 1245654"/>
+                <a:gd name="csY4" fmla="*/ 1292922 h 2802467"/>
+                <a:gd name="csX5" fmla="*/ 26654 w 1245654"/>
+                <a:gd name="csY5" fmla="*/ 824507 h 2802467"/>
+                <a:gd name="csX6" fmla="*/ 564003 w 1245654"/>
+                <a:gd name="csY6" fmla="*/ 344968 h 2802467"/>
+                <a:gd name="csX7" fmla="*/ 714297 w 1245654"/>
+                <a:gd name="csY7" fmla="*/ 0 h 2802467"/>
+                <a:gd name="csX0" fmla="*/ 1240214 w 1245654"/>
+                <a:gd name="csY0" fmla="*/ 2802467 h 2802467"/>
+                <a:gd name="csX1" fmla="*/ 1096281 w 1245654"/>
+                <a:gd name="csY1" fmla="*/ 2726267 h 2802467"/>
+                <a:gd name="csX2" fmla="*/ 245381 w 1245654"/>
+                <a:gd name="csY2" fmla="*/ 2357967 h 2802467"/>
+                <a:gd name="csX3" fmla="*/ 376876 w 1245654"/>
+                <a:gd name="csY3" fmla="*/ 1787543 h 2802467"/>
+                <a:gd name="csX4" fmla="*/ 128527 w 1245654"/>
+                <a:gd name="csY4" fmla="*/ 1292922 h 2802467"/>
+                <a:gd name="csX5" fmla="*/ 26654 w 1245654"/>
+                <a:gd name="csY5" fmla="*/ 824507 h 2802467"/>
+                <a:gd name="csX6" fmla="*/ 564003 w 1245654"/>
+                <a:gd name="csY6" fmla="*/ 344968 h 2802467"/>
+                <a:gd name="csX7" fmla="*/ 714297 w 1245654"/>
+                <a:gd name="csY7" fmla="*/ 0 h 2802467"/>
+                <a:gd name="csX0" fmla="*/ 1244182 w 1249622"/>
+                <a:gd name="csY0" fmla="*/ 2802467 h 2802467"/>
+                <a:gd name="csX1" fmla="*/ 1100249 w 1249622"/>
+                <a:gd name="csY1" fmla="*/ 2726267 h 2802467"/>
+                <a:gd name="csX2" fmla="*/ 249349 w 1249622"/>
+                <a:gd name="csY2" fmla="*/ 2357967 h 2802467"/>
+                <a:gd name="csX3" fmla="*/ 380844 w 1249622"/>
+                <a:gd name="csY3" fmla="*/ 1787543 h 2802467"/>
+                <a:gd name="csX4" fmla="*/ 116861 w 1249622"/>
+                <a:gd name="csY4" fmla="*/ 1333934 h 2802467"/>
+                <a:gd name="csX5" fmla="*/ 30622 w 1249622"/>
+                <a:gd name="csY5" fmla="*/ 824507 h 2802467"/>
+                <a:gd name="csX6" fmla="*/ 567971 w 1249622"/>
+                <a:gd name="csY6" fmla="*/ 344968 h 2802467"/>
+                <a:gd name="csX7" fmla="*/ 718265 w 1249622"/>
+                <a:gd name="csY7" fmla="*/ 0 h 2802467"/>
+                <a:gd name="csX0" fmla="*/ 1244182 w 1249622"/>
+                <a:gd name="csY0" fmla="*/ 2802467 h 2802467"/>
+                <a:gd name="csX1" fmla="*/ 1100249 w 1249622"/>
+                <a:gd name="csY1" fmla="*/ 2726267 h 2802467"/>
+                <a:gd name="csX2" fmla="*/ 249349 w 1249622"/>
+                <a:gd name="csY2" fmla="*/ 2357967 h 2802467"/>
+                <a:gd name="csX3" fmla="*/ 380844 w 1249622"/>
+                <a:gd name="csY3" fmla="*/ 1787543 h 2802467"/>
+                <a:gd name="csX4" fmla="*/ 116861 w 1249622"/>
+                <a:gd name="csY4" fmla="*/ 1333934 h 2802467"/>
+                <a:gd name="csX5" fmla="*/ 30622 w 1249622"/>
+                <a:gd name="csY5" fmla="*/ 824507 h 2802467"/>
+                <a:gd name="csX6" fmla="*/ 567971 w 1249622"/>
+                <a:gd name="csY6" fmla="*/ 344968 h 2802467"/>
+                <a:gd name="csX7" fmla="*/ 718265 w 1249622"/>
+                <a:gd name="csY7" fmla="*/ 0 h 2802467"/>
+                <a:gd name="csX0" fmla="*/ 1244182 w 1249622"/>
+                <a:gd name="csY0" fmla="*/ 2802467 h 2802467"/>
+                <a:gd name="csX1" fmla="*/ 1100249 w 1249622"/>
+                <a:gd name="csY1" fmla="*/ 2726267 h 2802467"/>
+                <a:gd name="csX2" fmla="*/ 249349 w 1249622"/>
+                <a:gd name="csY2" fmla="*/ 2357967 h 2802467"/>
+                <a:gd name="csX3" fmla="*/ 380844 w 1249622"/>
+                <a:gd name="csY3" fmla="*/ 1787543 h 2802467"/>
+                <a:gd name="csX4" fmla="*/ 116861 w 1249622"/>
+                <a:gd name="csY4" fmla="*/ 1333934 h 2802467"/>
+                <a:gd name="csX5" fmla="*/ 30622 w 1249622"/>
+                <a:gd name="csY5" fmla="*/ 824507 h 2802467"/>
+                <a:gd name="csX6" fmla="*/ 567971 w 1249622"/>
+                <a:gd name="csY6" fmla="*/ 344968 h 2802467"/>
+                <a:gd name="csX7" fmla="*/ 718265 w 1249622"/>
+                <a:gd name="csY7" fmla="*/ 0 h 2802467"/>
+                <a:gd name="csX0" fmla="*/ 1237309 w 1242749"/>
+                <a:gd name="csY0" fmla="*/ 2802467 h 2802467"/>
+                <a:gd name="csX1" fmla="*/ 1093376 w 1242749"/>
+                <a:gd name="csY1" fmla="*/ 2726267 h 2802467"/>
+                <a:gd name="csX2" fmla="*/ 242476 w 1242749"/>
+                <a:gd name="csY2" fmla="*/ 2357967 h 2802467"/>
+                <a:gd name="csX3" fmla="*/ 373971 w 1242749"/>
+                <a:gd name="csY3" fmla="*/ 1787543 h 2802467"/>
+                <a:gd name="csX4" fmla="*/ 138650 w 1242749"/>
+                <a:gd name="csY4" fmla="*/ 1392888 h 2802467"/>
+                <a:gd name="csX5" fmla="*/ 23749 w 1242749"/>
+                <a:gd name="csY5" fmla="*/ 824507 h 2802467"/>
+                <a:gd name="csX6" fmla="*/ 561098 w 1242749"/>
+                <a:gd name="csY6" fmla="*/ 344968 h 2802467"/>
+                <a:gd name="csX7" fmla="*/ 711392 w 1242749"/>
+                <a:gd name="csY7" fmla="*/ 0 h 2802467"/>
+                <a:gd name="csX0" fmla="*/ 1237309 w 1242749"/>
+                <a:gd name="csY0" fmla="*/ 2802467 h 2802467"/>
+                <a:gd name="csX1" fmla="*/ 1093376 w 1242749"/>
+                <a:gd name="csY1" fmla="*/ 2726267 h 2802467"/>
+                <a:gd name="csX2" fmla="*/ 242476 w 1242749"/>
+                <a:gd name="csY2" fmla="*/ 2357967 h 2802467"/>
+                <a:gd name="csX3" fmla="*/ 373971 w 1242749"/>
+                <a:gd name="csY3" fmla="*/ 1787543 h 2802467"/>
+                <a:gd name="csX4" fmla="*/ 138650 w 1242749"/>
+                <a:gd name="csY4" fmla="*/ 1392888 h 2802467"/>
+                <a:gd name="csX5" fmla="*/ 23749 w 1242749"/>
+                <a:gd name="csY5" fmla="*/ 824507 h 2802467"/>
+                <a:gd name="csX6" fmla="*/ 561098 w 1242749"/>
+                <a:gd name="csY6" fmla="*/ 344968 h 2802467"/>
+                <a:gd name="csX7" fmla="*/ 711392 w 1242749"/>
+                <a:gd name="csY7" fmla="*/ 0 h 2802467"/>
+                <a:gd name="csX0" fmla="*/ 1237309 w 1242749"/>
+                <a:gd name="csY0" fmla="*/ 2802467 h 2802467"/>
+                <a:gd name="csX1" fmla="*/ 1093376 w 1242749"/>
+                <a:gd name="csY1" fmla="*/ 2726267 h 2802467"/>
+                <a:gd name="csX2" fmla="*/ 242476 w 1242749"/>
+                <a:gd name="csY2" fmla="*/ 2357967 h 2802467"/>
+                <a:gd name="csX3" fmla="*/ 373971 w 1242749"/>
+                <a:gd name="csY3" fmla="*/ 1787543 h 2802467"/>
+                <a:gd name="csX4" fmla="*/ 138650 w 1242749"/>
+                <a:gd name="csY4" fmla="*/ 1392888 h 2802467"/>
+                <a:gd name="csX5" fmla="*/ 23749 w 1242749"/>
+                <a:gd name="csY5" fmla="*/ 824507 h 2802467"/>
+                <a:gd name="csX6" fmla="*/ 561098 w 1242749"/>
+                <a:gd name="csY6" fmla="*/ 344968 h 2802467"/>
+                <a:gd name="csX7" fmla="*/ 711392 w 1242749"/>
+                <a:gd name="csY7" fmla="*/ 0 h 2802467"/>
+                <a:gd name="csX0" fmla="*/ 1237309 w 1242749"/>
+                <a:gd name="csY0" fmla="*/ 2802467 h 2802467"/>
+                <a:gd name="csX1" fmla="*/ 1093376 w 1242749"/>
+                <a:gd name="csY1" fmla="*/ 2726267 h 2802467"/>
+                <a:gd name="csX2" fmla="*/ 242476 w 1242749"/>
+                <a:gd name="csY2" fmla="*/ 2357967 h 2802467"/>
+                <a:gd name="csX3" fmla="*/ 400027 w 1242749"/>
+                <a:gd name="csY3" fmla="*/ 1772164 h 2802467"/>
+                <a:gd name="csX4" fmla="*/ 138650 w 1242749"/>
+                <a:gd name="csY4" fmla="*/ 1392888 h 2802467"/>
+                <a:gd name="csX5" fmla="*/ 23749 w 1242749"/>
+                <a:gd name="csY5" fmla="*/ 824507 h 2802467"/>
+                <a:gd name="csX6" fmla="*/ 561098 w 1242749"/>
+                <a:gd name="csY6" fmla="*/ 344968 h 2802467"/>
+                <a:gd name="csX7" fmla="*/ 711392 w 1242749"/>
+                <a:gd name="csY7" fmla="*/ 0 h 2802467"/>
+                <a:gd name="csX0" fmla="*/ 1237309 w 1242749"/>
+                <a:gd name="csY0" fmla="*/ 2802467 h 2802467"/>
+                <a:gd name="csX1" fmla="*/ 1093376 w 1242749"/>
+                <a:gd name="csY1" fmla="*/ 2726267 h 2802467"/>
+                <a:gd name="csX2" fmla="*/ 242476 w 1242749"/>
+                <a:gd name="csY2" fmla="*/ 2357967 h 2802467"/>
+                <a:gd name="csX3" fmla="*/ 415661 w 1242749"/>
+                <a:gd name="csY3" fmla="*/ 1772164 h 2802467"/>
+                <a:gd name="csX4" fmla="*/ 138650 w 1242749"/>
+                <a:gd name="csY4" fmla="*/ 1392888 h 2802467"/>
+                <a:gd name="csX5" fmla="*/ 23749 w 1242749"/>
+                <a:gd name="csY5" fmla="*/ 824507 h 2802467"/>
+                <a:gd name="csX6" fmla="*/ 561098 w 1242749"/>
+                <a:gd name="csY6" fmla="*/ 344968 h 2802467"/>
+                <a:gd name="csX7" fmla="*/ 711392 w 1242749"/>
+                <a:gd name="csY7" fmla="*/ 0 h 2802467"/>
+                <a:gd name="csX0" fmla="*/ 1237309 w 1242749"/>
+                <a:gd name="csY0" fmla="*/ 2802467 h 2802467"/>
+                <a:gd name="csX1" fmla="*/ 1093376 w 1242749"/>
+                <a:gd name="csY1" fmla="*/ 2726267 h 2802467"/>
+                <a:gd name="csX2" fmla="*/ 242476 w 1242749"/>
+                <a:gd name="csY2" fmla="*/ 2357967 h 2802467"/>
+                <a:gd name="csX3" fmla="*/ 439112 w 1242749"/>
+                <a:gd name="csY3" fmla="*/ 1767037 h 2802467"/>
+                <a:gd name="csX4" fmla="*/ 138650 w 1242749"/>
+                <a:gd name="csY4" fmla="*/ 1392888 h 2802467"/>
+                <a:gd name="csX5" fmla="*/ 23749 w 1242749"/>
+                <a:gd name="csY5" fmla="*/ 824507 h 2802467"/>
+                <a:gd name="csX6" fmla="*/ 561098 w 1242749"/>
+                <a:gd name="csY6" fmla="*/ 344968 h 2802467"/>
+                <a:gd name="csX7" fmla="*/ 711392 w 1242749"/>
+                <a:gd name="csY7" fmla="*/ 0 h 2802467"/>
+                <a:gd name="csX0" fmla="*/ 1234863 w 1240303"/>
+                <a:gd name="csY0" fmla="*/ 2802467 h 2802467"/>
+                <a:gd name="csX1" fmla="*/ 1090930 w 1240303"/>
+                <a:gd name="csY1" fmla="*/ 2726267 h 2802467"/>
+                <a:gd name="csX2" fmla="*/ 240030 w 1240303"/>
+                <a:gd name="csY2" fmla="*/ 2357967 h 2802467"/>
+                <a:gd name="csX3" fmla="*/ 436666 w 1240303"/>
+                <a:gd name="csY3" fmla="*/ 1767037 h 2802467"/>
+                <a:gd name="csX4" fmla="*/ 136204 w 1240303"/>
+                <a:gd name="csY4" fmla="*/ 1392888 h 2802467"/>
+                <a:gd name="csX5" fmla="*/ 21303 w 1240303"/>
+                <a:gd name="csY5" fmla="*/ 824507 h 2802467"/>
+                <a:gd name="csX6" fmla="*/ 558652 w 1240303"/>
+                <a:gd name="csY6" fmla="*/ 344968 h 2802467"/>
+                <a:gd name="csX7" fmla="*/ 708946 w 1240303"/>
+                <a:gd name="csY7" fmla="*/ 0 h 2802467"/>
+                <a:gd name="csX0" fmla="*/ 1234863 w 1240303"/>
+                <a:gd name="csY0" fmla="*/ 2802467 h 2802467"/>
+                <a:gd name="csX1" fmla="*/ 1090930 w 1240303"/>
+                <a:gd name="csY1" fmla="*/ 2726267 h 2802467"/>
+                <a:gd name="csX2" fmla="*/ 240030 w 1240303"/>
+                <a:gd name="csY2" fmla="*/ 2357967 h 2802467"/>
+                <a:gd name="csX3" fmla="*/ 436666 w 1240303"/>
+                <a:gd name="csY3" fmla="*/ 1767037 h 2802467"/>
+                <a:gd name="csX4" fmla="*/ 136204 w 1240303"/>
+                <a:gd name="csY4" fmla="*/ 1392888 h 2802467"/>
+                <a:gd name="csX5" fmla="*/ 21303 w 1240303"/>
+                <a:gd name="csY5" fmla="*/ 824507 h 2802467"/>
+                <a:gd name="csX6" fmla="*/ 558652 w 1240303"/>
+                <a:gd name="csY6" fmla="*/ 344968 h 2802467"/>
+                <a:gd name="csX7" fmla="*/ 708946 w 1240303"/>
+                <a:gd name="csY7" fmla="*/ 0 h 2802467"/>
+                <a:gd name="csX0" fmla="*/ 1329201 w 1334641"/>
+                <a:gd name="csY0" fmla="*/ 2802467 h 2802467"/>
+                <a:gd name="csX1" fmla="*/ 1185268 w 1334641"/>
+                <a:gd name="csY1" fmla="*/ 2726267 h 2802467"/>
+                <a:gd name="csX2" fmla="*/ 334368 w 1334641"/>
+                <a:gd name="csY2" fmla="*/ 2357967 h 2802467"/>
+                <a:gd name="csX3" fmla="*/ 531004 w 1334641"/>
+                <a:gd name="csY3" fmla="*/ 1767037 h 2802467"/>
+                <a:gd name="csX4" fmla="*/ 29257 w 1334641"/>
+                <a:gd name="csY4" fmla="*/ 1331371 h 2802467"/>
+                <a:gd name="csX5" fmla="*/ 115641 w 1334641"/>
+                <a:gd name="csY5" fmla="*/ 824507 h 2802467"/>
+                <a:gd name="csX6" fmla="*/ 652990 w 1334641"/>
+                <a:gd name="csY6" fmla="*/ 344968 h 2802467"/>
+                <a:gd name="csX7" fmla="*/ 803284 w 1334641"/>
+                <a:gd name="csY7" fmla="*/ 0 h 2802467"/>
+                <a:gd name="csX0" fmla="*/ 1260103 w 1265543"/>
+                <a:gd name="csY0" fmla="*/ 2802467 h 2802467"/>
+                <a:gd name="csX1" fmla="*/ 1116170 w 1265543"/>
+                <a:gd name="csY1" fmla="*/ 2726267 h 2802467"/>
+                <a:gd name="csX2" fmla="*/ 265270 w 1265543"/>
+                <a:gd name="csY2" fmla="*/ 2357967 h 2802467"/>
+                <a:gd name="csX3" fmla="*/ 461906 w 1265543"/>
+                <a:gd name="csY3" fmla="*/ 1767037 h 2802467"/>
+                <a:gd name="csX4" fmla="*/ 71549 w 1265543"/>
+                <a:gd name="csY4" fmla="*/ 1346750 h 2802467"/>
+                <a:gd name="csX5" fmla="*/ 46543 w 1265543"/>
+                <a:gd name="csY5" fmla="*/ 824507 h 2802467"/>
+                <a:gd name="csX6" fmla="*/ 583892 w 1265543"/>
+                <a:gd name="csY6" fmla="*/ 344968 h 2802467"/>
+                <a:gd name="csX7" fmla="*/ 734186 w 1265543"/>
+                <a:gd name="csY7" fmla="*/ 0 h 2802467"/>
+                <a:gd name="csX0" fmla="*/ 1260103 w 1265543"/>
+                <a:gd name="csY0" fmla="*/ 2802467 h 2802467"/>
+                <a:gd name="csX1" fmla="*/ 1116170 w 1265543"/>
+                <a:gd name="csY1" fmla="*/ 2726267 h 2802467"/>
+                <a:gd name="csX2" fmla="*/ 265270 w 1265543"/>
+                <a:gd name="csY2" fmla="*/ 2357967 h 2802467"/>
+                <a:gd name="csX3" fmla="*/ 461906 w 1265543"/>
+                <a:gd name="csY3" fmla="*/ 1767037 h 2802467"/>
+                <a:gd name="csX4" fmla="*/ 71549 w 1265543"/>
+                <a:gd name="csY4" fmla="*/ 1346750 h 2802467"/>
+                <a:gd name="csX5" fmla="*/ 46543 w 1265543"/>
+                <a:gd name="csY5" fmla="*/ 824507 h 2802467"/>
+                <a:gd name="csX6" fmla="*/ 583892 w 1265543"/>
+                <a:gd name="csY6" fmla="*/ 344968 h 2802467"/>
+                <a:gd name="csX7" fmla="*/ 734186 w 1265543"/>
+                <a:gd name="csY7" fmla="*/ 0 h 2802467"/>
+                <a:gd name="csX0" fmla="*/ 1260103 w 1265543"/>
+                <a:gd name="csY0" fmla="*/ 2802467 h 2802467"/>
+                <a:gd name="csX1" fmla="*/ 1116170 w 1265543"/>
+                <a:gd name="csY1" fmla="*/ 2726267 h 2802467"/>
+                <a:gd name="csX2" fmla="*/ 265270 w 1265543"/>
+                <a:gd name="csY2" fmla="*/ 2357967 h 2802467"/>
+                <a:gd name="csX3" fmla="*/ 375920 w 1265543"/>
+                <a:gd name="csY3" fmla="*/ 1755503 h 2802467"/>
+                <a:gd name="csX4" fmla="*/ 71549 w 1265543"/>
+                <a:gd name="csY4" fmla="*/ 1346750 h 2802467"/>
+                <a:gd name="csX5" fmla="*/ 46543 w 1265543"/>
+                <a:gd name="csY5" fmla="*/ 824507 h 2802467"/>
+                <a:gd name="csX6" fmla="*/ 583892 w 1265543"/>
+                <a:gd name="csY6" fmla="*/ 344968 h 2802467"/>
+                <a:gd name="csX7" fmla="*/ 734186 w 1265543"/>
+                <a:gd name="csY7" fmla="*/ 0 h 2802467"/>
+                <a:gd name="csX0" fmla="*/ 1260103 w 1265543"/>
+                <a:gd name="csY0" fmla="*/ 2802467 h 2802467"/>
+                <a:gd name="csX1" fmla="*/ 1116170 w 1265543"/>
+                <a:gd name="csY1" fmla="*/ 2726267 h 2802467"/>
+                <a:gd name="csX2" fmla="*/ 265270 w 1265543"/>
+                <a:gd name="csY2" fmla="*/ 2357967 h 2802467"/>
+                <a:gd name="csX3" fmla="*/ 375920 w 1265543"/>
+                <a:gd name="csY3" fmla="*/ 1755503 h 2802467"/>
+                <a:gd name="csX4" fmla="*/ 71549 w 1265543"/>
+                <a:gd name="csY4" fmla="*/ 1346750 h 2802467"/>
+                <a:gd name="csX5" fmla="*/ 46543 w 1265543"/>
+                <a:gd name="csY5" fmla="*/ 824507 h 2802467"/>
+                <a:gd name="csX6" fmla="*/ 583892 w 1265543"/>
+                <a:gd name="csY6" fmla="*/ 344968 h 2802467"/>
+                <a:gd name="csX7" fmla="*/ 734186 w 1265543"/>
+                <a:gd name="csY7" fmla="*/ 0 h 2802467"/>
+                <a:gd name="csX0" fmla="*/ 1254121 w 1259561"/>
+                <a:gd name="csY0" fmla="*/ 2802467 h 2802467"/>
+                <a:gd name="csX1" fmla="*/ 1110188 w 1259561"/>
+                <a:gd name="csY1" fmla="*/ 2726267 h 2802467"/>
+                <a:gd name="csX2" fmla="*/ 259288 w 1259561"/>
+                <a:gd name="csY2" fmla="*/ 2357967 h 2802467"/>
+                <a:gd name="csX3" fmla="*/ 369938 w 1259561"/>
+                <a:gd name="csY3" fmla="*/ 1755503 h 2802467"/>
+                <a:gd name="csX4" fmla="*/ 81201 w 1259561"/>
+                <a:gd name="csY4" fmla="*/ 1319836 h 2802467"/>
+                <a:gd name="csX5" fmla="*/ 40561 w 1259561"/>
+                <a:gd name="csY5" fmla="*/ 824507 h 2802467"/>
+                <a:gd name="csX6" fmla="*/ 577910 w 1259561"/>
+                <a:gd name="csY6" fmla="*/ 344968 h 2802467"/>
+                <a:gd name="csX7" fmla="*/ 728204 w 1259561"/>
+                <a:gd name="csY7" fmla="*/ 0 h 2802467"/>
+                <a:gd name="csX0" fmla="*/ 1254121 w 1259561"/>
+                <a:gd name="csY0" fmla="*/ 2802467 h 2802467"/>
+                <a:gd name="csX1" fmla="*/ 1110188 w 1259561"/>
+                <a:gd name="csY1" fmla="*/ 2726267 h 2802467"/>
+                <a:gd name="csX2" fmla="*/ 259288 w 1259561"/>
+                <a:gd name="csY2" fmla="*/ 2357967 h 2802467"/>
+                <a:gd name="csX3" fmla="*/ 398600 w 1259561"/>
+                <a:gd name="csY3" fmla="*/ 1770882 h 2802467"/>
+                <a:gd name="csX4" fmla="*/ 81201 w 1259561"/>
+                <a:gd name="csY4" fmla="*/ 1319836 h 2802467"/>
+                <a:gd name="csX5" fmla="*/ 40561 w 1259561"/>
+                <a:gd name="csY5" fmla="*/ 824507 h 2802467"/>
+                <a:gd name="csX6" fmla="*/ 577910 w 1259561"/>
+                <a:gd name="csY6" fmla="*/ 344968 h 2802467"/>
+                <a:gd name="csX7" fmla="*/ 728204 w 1259561"/>
+                <a:gd name="csY7" fmla="*/ 0 h 2802467"/>
+                <a:gd name="csX0" fmla="*/ 1254121 w 1259561"/>
+                <a:gd name="csY0" fmla="*/ 2802467 h 2802467"/>
+                <a:gd name="csX1" fmla="*/ 1110188 w 1259561"/>
+                <a:gd name="csY1" fmla="*/ 2726267 h 2802467"/>
+                <a:gd name="csX2" fmla="*/ 259288 w 1259561"/>
+                <a:gd name="csY2" fmla="*/ 2357967 h 2802467"/>
+                <a:gd name="csX3" fmla="*/ 398600 w 1259561"/>
+                <a:gd name="csY3" fmla="*/ 1770882 h 2802467"/>
+                <a:gd name="csX4" fmla="*/ 81201 w 1259561"/>
+                <a:gd name="csY4" fmla="*/ 1319836 h 2802467"/>
+                <a:gd name="csX5" fmla="*/ 40561 w 1259561"/>
+                <a:gd name="csY5" fmla="*/ 824507 h 2802467"/>
+                <a:gd name="csX6" fmla="*/ 577910 w 1259561"/>
+                <a:gd name="csY6" fmla="*/ 344968 h 2802467"/>
+                <a:gd name="csX7" fmla="*/ 728204 w 1259561"/>
+                <a:gd name="csY7" fmla="*/ 0 h 2802467"/>
+                <a:gd name="csX0" fmla="*/ 1254121 w 1259561"/>
+                <a:gd name="csY0" fmla="*/ 2802467 h 2802467"/>
+                <a:gd name="csX1" fmla="*/ 1110188 w 1259561"/>
+                <a:gd name="csY1" fmla="*/ 2726267 h 2802467"/>
+                <a:gd name="csX2" fmla="*/ 259288 w 1259561"/>
+                <a:gd name="csY2" fmla="*/ 2357967 h 2802467"/>
+                <a:gd name="csX3" fmla="*/ 398600 w 1259561"/>
+                <a:gd name="csY3" fmla="*/ 1770882 h 2802467"/>
+                <a:gd name="csX4" fmla="*/ 81201 w 1259561"/>
+                <a:gd name="csY4" fmla="*/ 1319836 h 2802467"/>
+                <a:gd name="csX5" fmla="*/ 40561 w 1259561"/>
+                <a:gd name="csY5" fmla="*/ 824507 h 2802467"/>
+                <a:gd name="csX6" fmla="*/ 577910 w 1259561"/>
+                <a:gd name="csY6" fmla="*/ 344968 h 2802467"/>
+                <a:gd name="csX7" fmla="*/ 728204 w 1259561"/>
+                <a:gd name="csY7" fmla="*/ 0 h 2802467"/>
+                <a:gd name="csX0" fmla="*/ 1251432 w 1256872"/>
+                <a:gd name="csY0" fmla="*/ 2802467 h 2802467"/>
+                <a:gd name="csX1" fmla="*/ 1107499 w 1256872"/>
+                <a:gd name="csY1" fmla="*/ 2726267 h 2802467"/>
+                <a:gd name="csX2" fmla="*/ 256599 w 1256872"/>
+                <a:gd name="csY2" fmla="*/ 2357967 h 2802467"/>
+                <a:gd name="csX3" fmla="*/ 395911 w 1256872"/>
+                <a:gd name="csY3" fmla="*/ 1770882 h 2802467"/>
+                <a:gd name="csX4" fmla="*/ 86329 w 1256872"/>
+                <a:gd name="csY4" fmla="*/ 1355722 h 2802467"/>
+                <a:gd name="csX5" fmla="*/ 37872 w 1256872"/>
+                <a:gd name="csY5" fmla="*/ 824507 h 2802467"/>
+                <a:gd name="csX6" fmla="*/ 575221 w 1256872"/>
+                <a:gd name="csY6" fmla="*/ 344968 h 2802467"/>
+                <a:gd name="csX7" fmla="*/ 725515 w 1256872"/>
+                <a:gd name="csY7" fmla="*/ 0 h 2802467"/>
+              </a:gdLst>
+              <a:ahLst/>
+              <a:cxnLst>
+                <a:cxn ang="0">
+                  <a:pos x="csX0" y="csY0"/>
+                </a:cxn>
+                <a:cxn ang="0">
+                  <a:pos x="csX1" y="csY1"/>
+                </a:cxn>
+                <a:cxn ang="0">
+                  <a:pos x="csX2" y="csY2"/>
+                </a:cxn>
+                <a:cxn ang="0">
+                  <a:pos x="csX3" y="csY3"/>
+                </a:cxn>
+                <a:cxn ang="0">
+                  <a:pos x="csX4" y="csY4"/>
+                </a:cxn>
+                <a:cxn ang="0">
+                  <a:pos x="csX5" y="csY5"/>
+                </a:cxn>
+                <a:cxn ang="0">
+                  <a:pos x="csX6" y="csY6"/>
+                </a:cxn>
+                <a:cxn ang="0">
+                  <a:pos x="csX7" y="csY7"/>
+                </a:cxn>
+              </a:cxnLst>
+              <a:rect l="l" t="t" r="r" b="b"/>
+              <a:pathLst>
+                <a:path w="1256872" h="2802467">
+                  <a:moveTo>
+                    <a:pt x="1251432" y="2802467"/>
+                  </a:moveTo>
+                  <a:cubicBezTo>
+                    <a:pt x="1262368" y="2801408"/>
+                    <a:pt x="1273304" y="2800350"/>
+                    <a:pt x="1107499" y="2726267"/>
+                  </a:cubicBezTo>
+                  <a:cubicBezTo>
+                    <a:pt x="941694" y="2652184"/>
+                    <a:pt x="375197" y="2517198"/>
+                    <a:pt x="256599" y="2357967"/>
+                  </a:cubicBezTo>
+                  <a:cubicBezTo>
+                    <a:pt x="138001" y="2198736"/>
+                    <a:pt x="328098" y="1908259"/>
+                    <a:pt x="395911" y="1770882"/>
+                  </a:cubicBezTo>
+                  <a:cubicBezTo>
+                    <a:pt x="414054" y="1559813"/>
+                    <a:pt x="196895" y="1647834"/>
+                    <a:pt x="86329" y="1355722"/>
+                  </a:cubicBezTo>
+                  <a:cubicBezTo>
+                    <a:pt x="22340" y="1179596"/>
+                    <a:pt x="-43610" y="992966"/>
+                    <a:pt x="37872" y="824507"/>
+                  </a:cubicBezTo>
+                  <a:cubicBezTo>
+                    <a:pt x="119354" y="656048"/>
+                    <a:pt x="460614" y="482386"/>
+                    <a:pt x="575221" y="344968"/>
+                  </a:cubicBezTo>
+                  <a:cubicBezTo>
+                    <a:pt x="689828" y="207550"/>
+                    <a:pt x="747166" y="118525"/>
+                    <a:pt x="725515" y="0"/>
+                  </a:cubicBezTo>
+                </a:path>
+              </a:pathLst>
+            </a:custGeom>
+            <a:noFill/>
+            <a:ln w="38100">
+              <a:solidFill>
+                <a:schemeClr val="accent6">
+                  <a:lumMod val="75000"/>
+                </a:schemeClr>
+              </a:solidFill>
+              <a:headEnd w="lg" len="lg"/>
+              <a:tailEnd type="triangle"/>
+            </a:ln>
+          </p:spPr>
+          <p:style>
+            <a:lnRef idx="2">
+              <a:schemeClr val="accent1">
+                <a:shade val="15000"/>
+              </a:schemeClr>
+            </a:lnRef>
+            <a:fillRef idx="1">
+              <a:schemeClr val="accent1"/>
+            </a:fillRef>
+            <a:effectRef idx="0">
+              <a:schemeClr val="accent1"/>
+            </a:effectRef>
+            <a:fontRef idx="minor">
+              <a:schemeClr val="lt1"/>
+            </a:fontRef>
+          </p:style>
+          <p:txBody>
+            <a:bodyPr rtlCol="0" anchor="ctr"/>
+            <a:lstStyle/>
+            <a:p>
+              <a:pPr algn="ctr"/>
+              <a:endParaRPr lang="zh-CN" altLang="en-US" sz="1807" dirty="0">
+                <a:latin typeface="思源宋体" panose="02020400000000000000" pitchFamily="18" charset="-122"/>
+                <a:ea typeface="思源宋体" panose="02020400000000000000" pitchFamily="18" charset="-122"/>
+              </a:endParaRPr>
+            </a:p>
+          </p:txBody>
+        </p:sp>
+        <p:pic>
+          <p:nvPicPr>
+            <p:cNvPr id="43" name="图片 42" descr="图示, 工程绘图&#10;&#10;AI 生成的内容可能不正确。">
+              <a:extLst>
+                <a:ext uri="{FF2B5EF4-FFF2-40B4-BE49-F238E27FC236}">
+                  <a16:creationId xmlns:a16="http://schemas.microsoft.com/office/drawing/2014/main" id="{A38486DA-6E4B-D2F0-5DC9-025080ED2E61}"/>
+                </a:ext>
+              </a:extLst>
+            </p:cNvPr>
+            <p:cNvPicPr>
+              <a:picLocks noChangeAspect="1"/>
+            </p:cNvPicPr>
+            <p:nvPr/>
+          </p:nvPicPr>
+          <p:blipFill>
+            <a:blip r:embed="rId3" cstate="print">
+              <a:clrChange>
+                <a:clrFrom>
+                  <a:srgbClr val="FEFEFE"/>
+                </a:clrFrom>
+                <a:clrTo>
+                  <a:srgbClr val="FEFEFE">
+                    <a:alpha val="0"/>
+                  </a:srgbClr>
+                </a:clrTo>
+              </a:clrChange>
+              <a:alphaModFix amt="60000"/>
+              <a:extLst>
+                <a:ext uri="{28A0092B-C50C-407E-A947-70E740481C1C}">
+                  <a14:useLocalDpi xmlns:a14="http://schemas.microsoft.com/office/drawing/2010/main" val="0"/>
+                </a:ext>
+              </a:extLst>
+            </a:blip>
+            <a:stretch>
+              <a:fillRect/>
+            </a:stretch>
+          </p:blipFill>
+          <p:spPr>
+            <a:xfrm>
+              <a:off x="1943056" y="1034676"/>
+              <a:ext cx="8097294" cy="4860242"/>
+            </a:xfrm>
+            <a:prstGeom prst="rect">
+              <a:avLst/>
+            </a:prstGeom>
+          </p:spPr>
+        </p:pic>
+        <p:sp>
+          <p:nvSpPr>
+            <p:cNvPr id="11" name="箭头: 左 10">
+              <a:extLst>
+                <a:ext uri="{FF2B5EF4-FFF2-40B4-BE49-F238E27FC236}">
+                  <a16:creationId xmlns:a16="http://schemas.microsoft.com/office/drawing/2014/main" id="{8387362D-808B-B5BD-0E44-389E7C47D150}"/>
+                </a:ext>
+              </a:extLst>
+            </p:cNvPr>
+            <p:cNvSpPr/>
+            <p:nvPr/>
+          </p:nvSpPr>
+          <p:spPr>
+            <a:xfrm rot="8922232" flipH="1">
+              <a:off x="6607140" y="3117174"/>
+              <a:ext cx="190432" cy="127182"/>
+            </a:xfrm>
+            <a:prstGeom prst="leftArrow">
+              <a:avLst/>
+            </a:prstGeom>
+            <a:solidFill>
+              <a:srgbClr val="719BC4"/>
+            </a:solidFill>
+            <a:ln>
+              <a:solidFill>
+                <a:schemeClr val="accent1">
+                  <a:lumMod val="60000"/>
+                  <a:lumOff val="40000"/>
+                </a:schemeClr>
+              </a:solidFill>
+            </a:ln>
+            <a:effectLst/>
+          </p:spPr>
+          <p:style>
+            <a:lnRef idx="2">
+              <a:schemeClr val="accent1">
+                <a:shade val="15000"/>
+              </a:schemeClr>
+            </a:lnRef>
+            <a:fillRef idx="1">
+              <a:schemeClr val="accent1"/>
+            </a:fillRef>
+            <a:effectRef idx="0">
+              <a:schemeClr val="accent1"/>
+            </a:effectRef>
+            <a:fontRef idx="minor">
+              <a:schemeClr val="lt1"/>
+            </a:fontRef>
+          </p:style>
+          <p:txBody>
+            <a:bodyPr rtlCol="0" anchor="ctr"/>
+            <a:lstStyle/>
+            <a:p>
+              <a:pPr algn="ctr"/>
+              <a:endParaRPr lang="zh-CN" altLang="en-US" sz="1807">
+                <a:latin typeface="思源宋体" panose="02020400000000000000" pitchFamily="18" charset="-122"/>
+                <a:ea typeface="思源宋体" panose="02020400000000000000" pitchFamily="18" charset="-122"/>
+              </a:endParaRPr>
+            </a:p>
+          </p:txBody>
+        </p:sp>
+        <p:grpSp>
+          <p:nvGrpSpPr>
+            <p:cNvPr id="79" name="组合 78">
+              <a:extLst>
+                <a:ext uri="{FF2B5EF4-FFF2-40B4-BE49-F238E27FC236}">
+                  <a16:creationId xmlns:a16="http://schemas.microsoft.com/office/drawing/2014/main" id="{27FF1A18-8447-CC7E-3323-18A6651858AA}"/>
+                </a:ext>
+              </a:extLst>
+            </p:cNvPr>
+            <p:cNvGrpSpPr/>
+            <p:nvPr/>
+          </p:nvGrpSpPr>
+          <p:grpSpPr>
+            <a:xfrm>
+              <a:off x="6657335" y="5202460"/>
+              <a:ext cx="1400817" cy="640556"/>
+              <a:chOff x="8693668" y="1506190"/>
+              <a:chExt cx="1400817" cy="640556"/>
+            </a:xfrm>
+          </p:grpSpPr>
+          <p:pic>
+            <p:nvPicPr>
+              <p:cNvPr id="39" name="图片 38" descr="图标&#10;&#10;AI 生成的内容可能不正确。">
+                <a:extLst>
+                  <a:ext uri="{FF2B5EF4-FFF2-40B4-BE49-F238E27FC236}">
+                    <a16:creationId xmlns:a16="http://schemas.microsoft.com/office/drawing/2014/main" id="{D850F3D4-C4BD-7299-E7EC-250990DB7D1C}"/>
+                  </a:ext>
+                </a:extLst>
+              </p:cNvPr>
+              <p:cNvPicPr>
+                <a:picLocks noChangeAspect="1"/>
+              </p:cNvPicPr>
+              <p:nvPr/>
+            </p:nvPicPr>
+            <p:blipFill>
+              <a:blip r:embed="rId4" cstate="print">
+                <a:extLst>
+                  <a:ext uri="{28A0092B-C50C-407E-A947-70E740481C1C}">
+                    <a14:useLocalDpi xmlns:a14="http://schemas.microsoft.com/office/drawing/2010/main" val="0"/>
+                  </a:ext>
+                </a:extLst>
+              </a:blip>
+              <a:stretch>
+                <a:fillRect/>
+              </a:stretch>
+            </p:blipFill>
+            <p:spPr>
+              <a:xfrm>
+                <a:off x="9507725" y="1506190"/>
+                <a:ext cx="489561" cy="398653"/>
+              </a:xfrm>
+              <a:prstGeom prst="rect">
+                <a:avLst/>
+              </a:prstGeom>
+              <a:effectLst>
+                <a:outerShdw blurRad="50800" dist="38100" dir="2700000" algn="tl" rotWithShape="0">
+                  <a:schemeClr val="accent1">
+                    <a:lumMod val="75000"/>
+                    <a:alpha val="26000"/>
+                  </a:schemeClr>
+                </a:outerShdw>
+              </a:effectLst>
+            </p:spPr>
+          </p:pic>
+          <p:sp>
+            <p:nvSpPr>
+              <p:cNvPr id="70" name="文本框 69">
+                <a:extLst>
+                  <a:ext uri="{FF2B5EF4-FFF2-40B4-BE49-F238E27FC236}">
+                    <a16:creationId xmlns:a16="http://schemas.microsoft.com/office/drawing/2014/main" id="{9FD5B4C0-6F11-73A2-0AF0-ECC241B14F28}"/>
+                  </a:ext>
+                </a:extLst>
+              </p:cNvPr>
+              <p:cNvSpPr txBox="1"/>
+              <p:nvPr/>
+            </p:nvSpPr>
+            <p:spPr>
+              <a:xfrm>
+                <a:off x="8693668" y="1900822"/>
+                <a:ext cx="1400817" cy="245924"/>
+              </a:xfrm>
+              <a:prstGeom prst="rect">
+                <a:avLst/>
+              </a:prstGeom>
+              <a:noFill/>
+            </p:spPr>
+            <p:txBody>
+              <a:bodyPr wrap="square" rtlCol="0">
+                <a:spAutoFit/>
+              </a:bodyPr>
+              <a:lstStyle/>
+              <a:p>
+                <a:r>
+                  <a:rPr lang="en-US" altLang="zh-CN" sz="1004" b="1" dirty="0">
+                    <a:latin typeface="思源宋体" panose="02020400000000000000" pitchFamily="18" charset="-122"/>
+                    <a:ea typeface="思源宋体" panose="02020400000000000000" pitchFamily="18" charset="-122"/>
+                  </a:rPr>
+                  <a:t>Query</a:t>
+                </a:r>
+                <a:r>
+                  <a:rPr lang="en-US" altLang="zh-CN" sz="1004" dirty="0">
+                    <a:latin typeface="思源宋体" panose="02020400000000000000" pitchFamily="18" charset="-122"/>
+                    <a:ea typeface="思源宋体" panose="02020400000000000000" pitchFamily="18" charset="-122"/>
+                  </a:rPr>
+                  <a:t>:</a:t>
+                </a:r>
+                <a:r>
+                  <a:rPr lang="en-US" altLang="zh-CN" sz="1004" b="1" dirty="0">
+                    <a:latin typeface="思源宋体" panose="02020400000000000000" pitchFamily="18" charset="-122"/>
+                    <a:ea typeface="思源宋体" panose="02020400000000000000" pitchFamily="18" charset="-122"/>
+                  </a:rPr>
+                  <a:t> </a:t>
+                </a:r>
+                <a:r>
+                  <a:rPr lang="en-US" altLang="zh-CN" sz="1004" i="1" dirty="0">
+                    <a:latin typeface="思源宋体" panose="02020400000000000000" pitchFamily="18" charset="-122"/>
+                    <a:ea typeface="思源宋体" panose="02020400000000000000" pitchFamily="18" charset="-122"/>
+                  </a:rPr>
+                  <a:t>human call</a:t>
+                </a:r>
+                <a:endParaRPr lang="zh-CN" altLang="en-US" sz="1004" i="1" dirty="0">
+                  <a:latin typeface="思源宋体" panose="02020400000000000000" pitchFamily="18" charset="-122"/>
+                  <a:ea typeface="思源宋体" panose="02020400000000000000" pitchFamily="18" charset="-122"/>
+                  <a:cs typeface="Times New Roman" panose="02020603050405020304" pitchFamily="18" charset="0"/>
+                </a:endParaRPr>
+              </a:p>
+            </p:txBody>
+          </p:sp>
+        </p:grpSp>
+        <p:sp>
+          <p:nvSpPr>
+            <p:cNvPr id="124" name="箭头: 右 123">
+              <a:extLst>
+                <a:ext uri="{FF2B5EF4-FFF2-40B4-BE49-F238E27FC236}">
+                  <a16:creationId xmlns:a16="http://schemas.microsoft.com/office/drawing/2014/main" id="{CCFB2803-EC96-CF78-7EDB-3DA84E1E2DF8}"/>
+                </a:ext>
+              </a:extLst>
+            </p:cNvPr>
+            <p:cNvSpPr/>
+            <p:nvPr/>
+          </p:nvSpPr>
+          <p:spPr>
+            <a:xfrm rot="12819465">
+              <a:off x="6835321" y="5215922"/>
+              <a:ext cx="459361" cy="251569"/>
+            </a:xfrm>
+            <a:prstGeom prst="rightArrow">
+              <a:avLst>
+                <a:gd name="adj1" fmla="val 50000"/>
+                <a:gd name="adj2" fmla="val 67899"/>
+              </a:avLst>
+            </a:prstGeom>
+            <a:gradFill flip="none" rotWithShape="1">
+              <a:gsLst>
+                <a:gs pos="98000">
+                  <a:schemeClr val="bg1"/>
+                </a:gs>
+                <a:gs pos="0">
+                  <a:srgbClr val="466186"/>
+                </a:gs>
+              </a:gsLst>
+              <a:path path="circle">
+                <a:fillToRect l="100000" t="100000"/>
+              </a:path>
+              <a:tileRect r="-100000" b="-100000"/>
+            </a:gradFill>
+            <a:ln>
+              <a:noFill/>
+            </a:ln>
+          </p:spPr>
+          <p:style>
+            <a:lnRef idx="2">
+              <a:schemeClr val="accent1">
+                <a:shade val="15000"/>
+              </a:schemeClr>
+            </a:lnRef>
+            <a:fillRef idx="1">
+              <a:schemeClr val="accent1"/>
+            </a:fillRef>
+            <a:effectRef idx="0">
+              <a:schemeClr val="accent1"/>
+            </a:effectRef>
+            <a:fontRef idx="minor">
+              <a:schemeClr val="lt1"/>
+            </a:fontRef>
+          </p:style>
+          <p:txBody>
+            <a:bodyPr rtlCol="0" anchor="ctr"/>
+            <a:lstStyle/>
+            <a:p>
+              <a:pPr algn="ctr"/>
+              <a:endParaRPr lang="zh-CN" altLang="en-US" sz="1807" dirty="0">
+                <a:solidFill>
+                  <a:schemeClr val="tx1"/>
+                </a:solidFill>
+                <a:latin typeface="思源宋体" panose="02020400000000000000" pitchFamily="18" charset="-122"/>
+                <a:ea typeface="思源宋体" panose="02020400000000000000" pitchFamily="18" charset="-122"/>
+              </a:endParaRPr>
+            </a:p>
+          </p:txBody>
+        </p:sp>
+        <p:grpSp>
+          <p:nvGrpSpPr>
+            <p:cNvPr id="16" name="组合 15">
+              <a:extLst>
+                <a:ext uri="{FF2B5EF4-FFF2-40B4-BE49-F238E27FC236}">
+                  <a16:creationId xmlns:a16="http://schemas.microsoft.com/office/drawing/2014/main" id="{7811E6BE-DB9A-D90F-FD24-6C11754C6456}"/>
+                </a:ext>
+              </a:extLst>
+            </p:cNvPr>
+            <p:cNvGrpSpPr/>
+            <p:nvPr/>
+          </p:nvGrpSpPr>
+          <p:grpSpPr>
+            <a:xfrm>
+              <a:off x="7788168" y="4081573"/>
+              <a:ext cx="2759851" cy="792400"/>
+              <a:chOff x="1329329" y="7039203"/>
+              <a:chExt cx="2759851" cy="792400"/>
+            </a:xfrm>
+          </p:grpSpPr>
+          <p:sp>
+            <p:nvSpPr>
+              <p:cNvPr id="13" name="矩形: 圆角 12">
+                <a:extLst>
+                  <a:ext uri="{FF2B5EF4-FFF2-40B4-BE49-F238E27FC236}">
+                    <a16:creationId xmlns:a16="http://schemas.microsoft.com/office/drawing/2014/main" id="{4616CDD6-7674-1BBE-C10A-7712FA7840D2}"/>
+                  </a:ext>
+                </a:extLst>
+              </p:cNvPr>
+              <p:cNvSpPr/>
+              <p:nvPr/>
+            </p:nvSpPr>
+            <p:spPr>
+              <a:xfrm>
+                <a:off x="1329329" y="7039203"/>
+                <a:ext cx="2759851" cy="792400"/>
+              </a:xfrm>
+              <a:prstGeom prst="roundRect">
+                <a:avLst>
+                  <a:gd name="adj" fmla="val 9699"/>
+                </a:avLst>
+              </a:prstGeom>
+              <a:solidFill>
+                <a:schemeClr val="tx2">
+                  <a:lumMod val="40000"/>
+                  <a:lumOff val="60000"/>
+                  <a:alpha val="60000"/>
+                </a:schemeClr>
+              </a:solidFill>
+              <a:ln>
+                <a:solidFill>
+                  <a:schemeClr val="tx2">
+                    <a:lumMod val="60000"/>
+                    <a:lumOff val="40000"/>
+                  </a:schemeClr>
+                </a:solidFill>
+              </a:ln>
+            </p:spPr>
+            <p:style>
+              <a:lnRef idx="2">
+                <a:schemeClr val="accent1">
+                  <a:shade val="15000"/>
+                </a:schemeClr>
+              </a:lnRef>
+              <a:fillRef idx="1">
+                <a:schemeClr val="accent1"/>
+              </a:fillRef>
+              <a:effectRef idx="0">
+                <a:schemeClr val="accent1"/>
+              </a:effectRef>
+              <a:fontRef idx="minor">
+                <a:schemeClr val="lt1"/>
+              </a:fontRef>
+            </p:style>
+            <p:txBody>
+              <a:bodyPr rtlCol="0" anchor="b"/>
+              <a:lstStyle/>
+              <a:p>
+                <a:r>
+                  <a:rPr lang="en-US" altLang="zh-CN" sz="1004" dirty="0">
+                    <a:solidFill>
+                      <a:schemeClr val="tx1"/>
+                    </a:solidFill>
+                    <a:latin typeface="思源宋体" panose="02020400000000000000" pitchFamily="18" charset="-122"/>
+                    <a:ea typeface="思源宋体" panose="02020400000000000000" pitchFamily="18" charset="-122"/>
+                  </a:rPr>
+                  <a:t>The robot should yield during when it detects or hears a walking human.</a:t>
+                </a:r>
+              </a:p>
+            </p:txBody>
+          </p:sp>
+          <p:pic>
+            <p:nvPicPr>
+              <p:cNvPr id="12" name="图片 11">
+                <a:extLst>
+                  <a:ext uri="{FF2B5EF4-FFF2-40B4-BE49-F238E27FC236}">
+                    <a16:creationId xmlns:a16="http://schemas.microsoft.com/office/drawing/2014/main" id="{16B41347-D89B-4DDB-8241-CF72A08B128F}"/>
+                  </a:ext>
+                </a:extLst>
+              </p:cNvPr>
+              <p:cNvPicPr>
+                <a:picLocks noChangeAspect="1"/>
+              </p:cNvPicPr>
+              <p:nvPr/>
+            </p:nvPicPr>
+            <p:blipFill>
+              <a:blip r:embed="rId5" cstate="print">
+                <a:extLst>
+                  <a:ext uri="{28A0092B-C50C-407E-A947-70E740481C1C}">
+                    <a14:useLocalDpi xmlns:a14="http://schemas.microsoft.com/office/drawing/2010/main" val="0"/>
+                  </a:ext>
+                </a:extLst>
+              </a:blip>
+              <a:stretch>
+                <a:fillRect/>
+              </a:stretch>
+            </p:blipFill>
+            <p:spPr>
+              <a:xfrm>
+                <a:off x="1444739" y="7070965"/>
+                <a:ext cx="322744" cy="322744"/>
+              </a:xfrm>
+              <a:prstGeom prst="rect">
+                <a:avLst/>
+              </a:prstGeom>
+            </p:spPr>
+          </p:pic>
+          <p:sp>
+            <p:nvSpPr>
+              <p:cNvPr id="14" name="文本框 13">
+                <a:extLst>
+                  <a:ext uri="{FF2B5EF4-FFF2-40B4-BE49-F238E27FC236}">
+                    <a16:creationId xmlns:a16="http://schemas.microsoft.com/office/drawing/2014/main" id="{700EA1D7-0DFE-3B95-65CE-46F3CBE95DCC}"/>
+                  </a:ext>
+                </a:extLst>
+              </p:cNvPr>
+              <p:cNvSpPr txBox="1"/>
+              <p:nvPr/>
+            </p:nvSpPr>
+            <p:spPr>
+              <a:xfrm>
+                <a:off x="1767483" y="7076720"/>
+                <a:ext cx="1273380" cy="311234"/>
+              </a:xfrm>
+              <a:prstGeom prst="rect">
+                <a:avLst/>
+              </a:prstGeom>
+              <a:noFill/>
+            </p:spPr>
+            <p:txBody>
+              <a:bodyPr wrap="square" rtlCol="0">
+                <a:spAutoFit/>
+              </a:bodyPr>
+              <a:lstStyle/>
+              <a:p>
+                <a:r>
+                  <a:rPr lang="en-US" altLang="zh-CN" sz="1400" b="1" dirty="0">
+                    <a:solidFill>
+                      <a:schemeClr val="accent4">
+                        <a:lumMod val="50000"/>
+                      </a:schemeClr>
+                    </a:solidFill>
+                    <a:latin typeface="思源宋体" panose="02020400000000000000" pitchFamily="18" charset="-122"/>
+                    <a:ea typeface="思源宋体" panose="02020400000000000000" pitchFamily="18" charset="-122"/>
+                  </a:rPr>
+                  <a:t>footsteps</a:t>
+                </a:r>
+                <a:endParaRPr lang="zh-CN" altLang="en-US" sz="1400" b="1" dirty="0">
+                  <a:solidFill>
+                    <a:schemeClr val="accent4">
+                      <a:lumMod val="50000"/>
+                    </a:schemeClr>
+                  </a:solidFill>
+                  <a:latin typeface="思源宋体" panose="02020400000000000000" pitchFamily="18" charset="-122"/>
+                  <a:ea typeface="思源宋体" panose="02020400000000000000" pitchFamily="18" charset="-122"/>
+                </a:endParaRPr>
+              </a:p>
+            </p:txBody>
+          </p:sp>
+        </p:grpSp>
+        <p:grpSp>
+          <p:nvGrpSpPr>
+            <p:cNvPr id="18" name="组合 17">
+              <a:extLst>
+                <a:ext uri="{FF2B5EF4-FFF2-40B4-BE49-F238E27FC236}">
+                  <a16:creationId xmlns:a16="http://schemas.microsoft.com/office/drawing/2014/main" id="{A2CA2603-AFA3-B946-6075-3A5C67FE7FCF}"/>
+                </a:ext>
+              </a:extLst>
+            </p:cNvPr>
+            <p:cNvGrpSpPr/>
+            <p:nvPr/>
+          </p:nvGrpSpPr>
+          <p:grpSpPr>
+            <a:xfrm>
+              <a:off x="1943056" y="3520331"/>
+              <a:ext cx="2767996" cy="820829"/>
+              <a:chOff x="1543029" y="6003959"/>
+              <a:chExt cx="3119775" cy="820829"/>
+            </a:xfrm>
+          </p:grpSpPr>
+          <p:sp>
+            <p:nvSpPr>
+              <p:cNvPr id="19" name="矩形: 圆角 18">
+                <a:extLst>
+                  <a:ext uri="{FF2B5EF4-FFF2-40B4-BE49-F238E27FC236}">
+                    <a16:creationId xmlns:a16="http://schemas.microsoft.com/office/drawing/2014/main" id="{0711653C-68B4-6E82-AACF-040CD85CDDE1}"/>
+                  </a:ext>
+                </a:extLst>
+              </p:cNvPr>
+              <p:cNvSpPr/>
+              <p:nvPr/>
+            </p:nvSpPr>
+            <p:spPr>
+              <a:xfrm>
+                <a:off x="1543029" y="6003959"/>
+                <a:ext cx="3119775" cy="820829"/>
+              </a:xfrm>
+              <a:prstGeom prst="roundRect">
+                <a:avLst>
+                  <a:gd name="adj" fmla="val 9699"/>
+                </a:avLst>
+              </a:prstGeom>
+              <a:solidFill>
+                <a:schemeClr val="tx2">
+                  <a:lumMod val="40000"/>
+                  <a:lumOff val="60000"/>
+                  <a:alpha val="60000"/>
+                </a:schemeClr>
+              </a:solidFill>
+              <a:ln>
+                <a:solidFill>
+                  <a:schemeClr val="tx2">
+                    <a:lumMod val="60000"/>
+                    <a:lumOff val="40000"/>
+                  </a:schemeClr>
+                </a:solidFill>
+              </a:ln>
+            </p:spPr>
+            <p:style>
+              <a:lnRef idx="2">
+                <a:schemeClr val="accent1">
+                  <a:shade val="15000"/>
+                </a:schemeClr>
+              </a:lnRef>
+              <a:fillRef idx="1">
+                <a:schemeClr val="accent1"/>
+              </a:fillRef>
+              <a:effectRef idx="0">
+                <a:schemeClr val="accent1"/>
+              </a:effectRef>
+              <a:fontRef idx="minor">
+                <a:schemeClr val="lt1"/>
+              </a:fontRef>
+            </p:style>
+            <p:txBody>
+              <a:bodyPr rtlCol="0" anchor="b"/>
+              <a:lstStyle/>
+              <a:p>
+                <a:r>
+                  <a:rPr lang="en-US" altLang="zh-CN" sz="1004" dirty="0">
+                    <a:solidFill>
+                      <a:schemeClr val="tx1"/>
+                    </a:solidFill>
+                    <a:latin typeface="思源宋体" panose="02020400000000000000" pitchFamily="18" charset="-122"/>
+                    <a:ea typeface="思源宋体" panose="02020400000000000000" pitchFamily="18" charset="-122"/>
+                    <a:cs typeface="Calibri" panose="020F0502020204030204" pitchFamily="34" charset="0"/>
+                  </a:rPr>
+                  <a:t>The robot should politely yield when it detects human or hears conversation.</a:t>
+                </a:r>
+                <a:endParaRPr lang="zh-CN" altLang="en-US" sz="1004" dirty="0">
+                  <a:solidFill>
+                    <a:schemeClr val="tx1"/>
+                  </a:solidFill>
+                  <a:latin typeface="思源宋体" panose="02020400000000000000" pitchFamily="18" charset="-122"/>
+                  <a:ea typeface="思源宋体" panose="02020400000000000000" pitchFamily="18" charset="-122"/>
+                  <a:cs typeface="Calibri" panose="020F0502020204030204" pitchFamily="34" charset="0"/>
+                </a:endParaRPr>
+              </a:p>
+            </p:txBody>
+          </p:sp>
+          <p:pic>
+            <p:nvPicPr>
+              <p:cNvPr id="20" name="图片 19">
+                <a:extLst>
+                  <a:ext uri="{FF2B5EF4-FFF2-40B4-BE49-F238E27FC236}">
+                    <a16:creationId xmlns:a16="http://schemas.microsoft.com/office/drawing/2014/main" id="{029840AC-4B52-0CF7-A404-50DE83830CC9}"/>
+                  </a:ext>
+                </a:extLst>
+              </p:cNvPr>
+              <p:cNvPicPr>
+                <a:picLocks noChangeAspect="1"/>
+              </p:cNvPicPr>
+              <p:nvPr/>
+            </p:nvPicPr>
+            <p:blipFill>
+              <a:blip r:embed="rId6" cstate="print">
+                <a:extLst>
+                  <a:ext uri="{28A0092B-C50C-407E-A947-70E740481C1C}">
+                    <a14:useLocalDpi xmlns:a14="http://schemas.microsoft.com/office/drawing/2010/main" val="0"/>
+                  </a:ext>
+                </a:extLst>
+              </a:blip>
+              <a:stretch>
+                <a:fillRect/>
+              </a:stretch>
+            </p:blipFill>
+            <p:spPr>
+              <a:xfrm>
+                <a:off x="1630671" y="6043542"/>
+                <a:ext cx="322744" cy="322744"/>
+              </a:xfrm>
+              <a:prstGeom prst="rect">
+                <a:avLst/>
+              </a:prstGeom>
+            </p:spPr>
+          </p:pic>
+          <p:sp>
+            <p:nvSpPr>
+              <p:cNvPr id="21" name="文本框 20">
+                <a:extLst>
+                  <a:ext uri="{FF2B5EF4-FFF2-40B4-BE49-F238E27FC236}">
+                    <a16:creationId xmlns:a16="http://schemas.microsoft.com/office/drawing/2014/main" id="{EEC66217-AD23-7AA3-712C-FAEACA50E68F}"/>
+                  </a:ext>
+                </a:extLst>
+              </p:cNvPr>
+              <p:cNvSpPr txBox="1"/>
+              <p:nvPr/>
+            </p:nvSpPr>
+            <p:spPr>
+              <a:xfrm>
+                <a:off x="1953415" y="6049297"/>
+                <a:ext cx="1534851" cy="306608"/>
+              </a:xfrm>
+              <a:prstGeom prst="rect">
+                <a:avLst/>
+              </a:prstGeom>
+              <a:noFill/>
+            </p:spPr>
+            <p:txBody>
+              <a:bodyPr wrap="square" rtlCol="0">
+                <a:spAutoFit/>
+              </a:bodyPr>
+              <a:lstStyle/>
+              <a:p>
+                <a:r>
+                  <a:rPr lang="en-US" altLang="zh-CN" sz="1400" b="1" dirty="0">
+                    <a:solidFill>
+                      <a:schemeClr val="accent4">
+                        <a:lumMod val="50000"/>
+                      </a:schemeClr>
+                    </a:solidFill>
+                    <a:latin typeface="思源宋体" panose="02020400000000000000" pitchFamily="18" charset="-122"/>
+                    <a:ea typeface="思源宋体" panose="02020400000000000000" pitchFamily="18" charset="-122"/>
+                  </a:rPr>
+                  <a:t>conversation</a:t>
+                </a:r>
+                <a:endParaRPr lang="zh-CN" altLang="en-US" sz="1400" b="1" dirty="0">
+                  <a:solidFill>
+                    <a:schemeClr val="accent4">
+                      <a:lumMod val="50000"/>
+                    </a:schemeClr>
+                  </a:solidFill>
+                  <a:latin typeface="思源宋体" panose="02020400000000000000" pitchFamily="18" charset="-122"/>
+                  <a:ea typeface="思源宋体" panose="02020400000000000000" pitchFamily="18" charset="-122"/>
+                </a:endParaRPr>
+              </a:p>
+            </p:txBody>
+          </p:sp>
+        </p:grpSp>
+        <p:grpSp>
+          <p:nvGrpSpPr>
+            <p:cNvPr id="25" name="组合 24">
+              <a:extLst>
+                <a:ext uri="{FF2B5EF4-FFF2-40B4-BE49-F238E27FC236}">
+                  <a16:creationId xmlns:a16="http://schemas.microsoft.com/office/drawing/2014/main" id="{AA8533E1-318E-CC26-C7FC-8CF3F90F4BC3}"/>
+                </a:ext>
+              </a:extLst>
+            </p:cNvPr>
+            <p:cNvGrpSpPr/>
+            <p:nvPr/>
+          </p:nvGrpSpPr>
+          <p:grpSpPr>
+            <a:xfrm>
+              <a:off x="7195173" y="2533906"/>
+              <a:ext cx="3352846" cy="663700"/>
+              <a:chOff x="1062359" y="6522532"/>
+              <a:chExt cx="3352846" cy="663700"/>
+            </a:xfrm>
+          </p:grpSpPr>
+          <p:sp>
+            <p:nvSpPr>
+              <p:cNvPr id="26" name="矩形: 圆角 25">
+                <a:extLst>
+                  <a:ext uri="{FF2B5EF4-FFF2-40B4-BE49-F238E27FC236}">
+                    <a16:creationId xmlns:a16="http://schemas.microsoft.com/office/drawing/2014/main" id="{A5C9DE81-0204-4128-9EED-60A1335CD85E}"/>
+                  </a:ext>
+                </a:extLst>
+              </p:cNvPr>
+              <p:cNvSpPr/>
+              <p:nvPr/>
+            </p:nvSpPr>
+            <p:spPr>
+              <a:xfrm>
+                <a:off x="1062359" y="6522532"/>
+                <a:ext cx="3352846" cy="663700"/>
+              </a:xfrm>
+              <a:prstGeom prst="roundRect">
+                <a:avLst>
+                  <a:gd name="adj" fmla="val 9699"/>
+                </a:avLst>
+              </a:prstGeom>
+              <a:solidFill>
+                <a:schemeClr val="tx2">
+                  <a:lumMod val="40000"/>
+                  <a:lumOff val="60000"/>
+                  <a:alpha val="60000"/>
+                </a:schemeClr>
+              </a:solidFill>
+              <a:ln>
+                <a:solidFill>
+                  <a:schemeClr val="tx2">
+                    <a:lumMod val="60000"/>
+                    <a:lumOff val="40000"/>
+                  </a:schemeClr>
+                </a:solidFill>
+              </a:ln>
+            </p:spPr>
+            <p:style>
+              <a:lnRef idx="2">
+                <a:schemeClr val="accent1">
+                  <a:shade val="15000"/>
+                </a:schemeClr>
+              </a:lnRef>
+              <a:fillRef idx="1">
+                <a:schemeClr val="accent1"/>
+              </a:fillRef>
+              <a:effectRef idx="0">
+                <a:schemeClr val="accent1"/>
+              </a:effectRef>
+              <a:fontRef idx="minor">
+                <a:schemeClr val="lt1"/>
+              </a:fontRef>
+            </p:style>
+            <p:txBody>
+              <a:bodyPr rtlCol="0" anchor="b"/>
+              <a:lstStyle/>
+              <a:p>
+                <a:r>
+                  <a:rPr lang="en-US" altLang="zh-CN" sz="1004" dirty="0">
+                    <a:solidFill>
+                      <a:schemeClr val="tx1"/>
+                    </a:solidFill>
+                    <a:latin typeface="思源宋体" panose="02020400000000000000" pitchFamily="18" charset="-122"/>
+                    <a:ea typeface="思源宋体" panose="02020400000000000000" pitchFamily="18" charset="-122"/>
+                  </a:rPr>
+                  <a:t>The robot hears footsteps but does not see anyone.</a:t>
+                </a:r>
+              </a:p>
+            </p:txBody>
+          </p:sp>
+          <p:pic>
+            <p:nvPicPr>
+              <p:cNvPr id="27" name="图片 26">
+                <a:extLst>
+                  <a:ext uri="{FF2B5EF4-FFF2-40B4-BE49-F238E27FC236}">
+                    <a16:creationId xmlns:a16="http://schemas.microsoft.com/office/drawing/2014/main" id="{7DA9876D-C78C-2071-3CB7-D82E892E1E8E}"/>
+                  </a:ext>
+                </a:extLst>
+              </p:cNvPr>
+              <p:cNvPicPr>
+                <a:picLocks noChangeAspect="1"/>
+              </p:cNvPicPr>
+              <p:nvPr/>
+            </p:nvPicPr>
+            <p:blipFill>
+              <a:blip r:embed="rId5" cstate="print">
+                <a:extLst>
+                  <a:ext uri="{28A0092B-C50C-407E-A947-70E740481C1C}">
+                    <a14:useLocalDpi xmlns:a14="http://schemas.microsoft.com/office/drawing/2010/main" val="0"/>
+                  </a:ext>
+                </a:extLst>
+              </a:blip>
+              <a:stretch>
+                <a:fillRect/>
+              </a:stretch>
+            </p:blipFill>
+            <p:spPr>
+              <a:xfrm>
+                <a:off x="1177768" y="6553597"/>
+                <a:ext cx="322744" cy="322744"/>
+              </a:xfrm>
+              <a:prstGeom prst="rect">
+                <a:avLst/>
+              </a:prstGeom>
+            </p:spPr>
+          </p:pic>
+          <p:sp>
+            <p:nvSpPr>
+              <p:cNvPr id="28" name="文本框 27">
+                <a:extLst>
+                  <a:ext uri="{FF2B5EF4-FFF2-40B4-BE49-F238E27FC236}">
+                    <a16:creationId xmlns:a16="http://schemas.microsoft.com/office/drawing/2014/main" id="{7E220302-376E-E2D5-4AEC-629353E6850D}"/>
+                  </a:ext>
+                </a:extLst>
+              </p:cNvPr>
+              <p:cNvSpPr txBox="1"/>
+              <p:nvPr/>
+            </p:nvSpPr>
+            <p:spPr>
+              <a:xfrm>
+                <a:off x="1500512" y="6559352"/>
+                <a:ext cx="1273380" cy="311234"/>
+              </a:xfrm>
+              <a:prstGeom prst="rect">
+                <a:avLst/>
+              </a:prstGeom>
+              <a:noFill/>
+            </p:spPr>
+            <p:txBody>
+              <a:bodyPr wrap="square" rtlCol="0">
+                <a:spAutoFit/>
+              </a:bodyPr>
+              <a:lstStyle/>
+              <a:p>
+                <a:r>
+                  <a:rPr lang="en-US" altLang="zh-CN" sz="1400" b="1" dirty="0">
+                    <a:solidFill>
+                      <a:schemeClr val="accent4">
+                        <a:lumMod val="50000"/>
+                      </a:schemeClr>
+                    </a:solidFill>
+                    <a:latin typeface="思源宋体" panose="02020400000000000000" pitchFamily="18" charset="-122"/>
+                    <a:ea typeface="思源宋体" panose="02020400000000000000" pitchFamily="18" charset="-122"/>
+                  </a:rPr>
+                  <a:t>footsteps</a:t>
+                </a:r>
+                <a:endParaRPr lang="zh-CN" altLang="en-US" sz="1400" b="1" dirty="0">
+                  <a:solidFill>
+                    <a:schemeClr val="accent4">
+                      <a:lumMod val="50000"/>
+                    </a:schemeClr>
+                  </a:solidFill>
+                  <a:latin typeface="思源宋体" panose="02020400000000000000" pitchFamily="18" charset="-122"/>
+                  <a:ea typeface="思源宋体" panose="02020400000000000000" pitchFamily="18" charset="-122"/>
+                </a:endParaRPr>
+              </a:p>
+            </p:txBody>
+          </p:sp>
+        </p:grpSp>
+        <p:grpSp>
+          <p:nvGrpSpPr>
+            <p:cNvPr id="37" name="组合 36">
+              <a:extLst>
+                <a:ext uri="{FF2B5EF4-FFF2-40B4-BE49-F238E27FC236}">
+                  <a16:creationId xmlns:a16="http://schemas.microsoft.com/office/drawing/2014/main" id="{C6523CC0-FA2A-9927-7611-9896CA947F67}"/>
+                </a:ext>
+              </a:extLst>
+            </p:cNvPr>
+            <p:cNvGrpSpPr/>
+            <p:nvPr/>
+          </p:nvGrpSpPr>
+          <p:grpSpPr>
+            <a:xfrm>
+              <a:off x="1947592" y="1340222"/>
+              <a:ext cx="3658252" cy="941300"/>
+              <a:chOff x="1849391" y="1549768"/>
+              <a:chExt cx="3658252" cy="941300"/>
+            </a:xfrm>
+          </p:grpSpPr>
+          <p:grpSp>
+            <p:nvGrpSpPr>
+              <p:cNvPr id="31" name="组合 30">
+                <a:extLst>
+                  <a:ext uri="{FF2B5EF4-FFF2-40B4-BE49-F238E27FC236}">
+                    <a16:creationId xmlns:a16="http://schemas.microsoft.com/office/drawing/2014/main" id="{97A35B57-32A1-4965-6450-6628E66EB819}"/>
+                  </a:ext>
+                </a:extLst>
+              </p:cNvPr>
+              <p:cNvGrpSpPr/>
+              <p:nvPr/>
+            </p:nvGrpSpPr>
+            <p:grpSpPr>
+              <a:xfrm>
+                <a:off x="1849391" y="1549768"/>
+                <a:ext cx="3658252" cy="941300"/>
+                <a:chOff x="1164288" y="6444832"/>
+                <a:chExt cx="3658252" cy="941300"/>
+              </a:xfrm>
+            </p:grpSpPr>
+            <p:sp>
+              <p:nvSpPr>
+                <p:cNvPr id="32" name="矩形: 圆角 31">
+                  <a:extLst>
+                    <a:ext uri="{FF2B5EF4-FFF2-40B4-BE49-F238E27FC236}">
+                      <a16:creationId xmlns:a16="http://schemas.microsoft.com/office/drawing/2014/main" id="{4EEBECA1-F22E-81A9-D66F-3804C2B03480}"/>
+                    </a:ext>
+                  </a:extLst>
+                </p:cNvPr>
+                <p:cNvSpPr/>
+                <p:nvPr/>
+              </p:nvSpPr>
+              <p:spPr>
+                <a:xfrm>
+                  <a:off x="1164288" y="6444832"/>
+                  <a:ext cx="3658252" cy="941300"/>
+                </a:xfrm>
+                <a:prstGeom prst="roundRect">
+                  <a:avLst>
+                    <a:gd name="adj" fmla="val 9699"/>
+                  </a:avLst>
+                </a:prstGeom>
+                <a:solidFill>
+                  <a:schemeClr val="tx2">
+                    <a:lumMod val="40000"/>
+                    <a:lumOff val="60000"/>
+                    <a:alpha val="60000"/>
+                  </a:schemeClr>
+                </a:solidFill>
+                <a:ln>
+                  <a:solidFill>
+                    <a:schemeClr val="tx2">
+                      <a:lumMod val="60000"/>
+                      <a:lumOff val="40000"/>
+                    </a:schemeClr>
+                  </a:solidFill>
+                </a:ln>
+              </p:spPr>
+              <p:style>
+                <a:lnRef idx="2">
+                  <a:schemeClr val="accent1">
+                    <a:shade val="15000"/>
+                  </a:schemeClr>
+                </a:lnRef>
+                <a:fillRef idx="1">
+                  <a:schemeClr val="accent1"/>
+                </a:fillRef>
+                <a:effectRef idx="0">
+                  <a:schemeClr val="accent1"/>
+                </a:effectRef>
+                <a:fontRef idx="minor">
+                  <a:schemeClr val="lt1"/>
+                </a:fontRef>
+              </p:style>
+              <p:txBody>
+                <a:bodyPr rtlCol="0" anchor="b"/>
+                <a:lstStyle/>
+                <a:p>
+                  <a:r>
+                    <a:rPr lang="en-US" altLang="zh-CN" sz="1004" dirty="0">
+                      <a:solidFill>
+                        <a:schemeClr val="tx1"/>
+                      </a:solidFill>
+                      <a:latin typeface="思源宋体" panose="02020400000000000000" pitchFamily="18" charset="-122"/>
+                      <a:ea typeface="思源宋体" panose="02020400000000000000" pitchFamily="18" charset="-122"/>
+                      <a:cs typeface="Calibri" panose="020F0502020204030204" pitchFamily="34" charset="0"/>
+                    </a:rPr>
+                    <a:t>The robot hears someone calling but cannot see the human and should proceed to further exploration.</a:t>
+                  </a:r>
+                </a:p>
+              </p:txBody>
+            </p:sp>
+            <p:sp>
+              <p:nvSpPr>
+                <p:cNvPr id="34" name="文本框 33">
+                  <a:extLst>
+                    <a:ext uri="{FF2B5EF4-FFF2-40B4-BE49-F238E27FC236}">
+                      <a16:creationId xmlns:a16="http://schemas.microsoft.com/office/drawing/2014/main" id="{FB6C4C0B-401B-81C4-2D8E-691B8911EC45}"/>
+                    </a:ext>
+                  </a:extLst>
+                </p:cNvPr>
+                <p:cNvSpPr txBox="1"/>
+                <p:nvPr/>
+              </p:nvSpPr>
+              <p:spPr>
+                <a:xfrm>
+                  <a:off x="1586473" y="6512909"/>
+                  <a:ext cx="1683058" cy="311234"/>
+                </a:xfrm>
+                <a:prstGeom prst="rect">
+                  <a:avLst/>
+                </a:prstGeom>
+                <a:noFill/>
+              </p:spPr>
+              <p:txBody>
+                <a:bodyPr wrap="square" rtlCol="0">
+                  <a:spAutoFit/>
+                </a:bodyPr>
+                <a:lstStyle/>
+                <a:p>
+                  <a:r>
+                    <a:rPr lang="en-US" altLang="zh-CN" sz="1400" b="1" dirty="0">
+                      <a:solidFill>
+                        <a:schemeClr val="accent6">
+                          <a:lumMod val="50000"/>
+                        </a:schemeClr>
+                      </a:solidFill>
+                      <a:latin typeface="思源宋体" panose="02020400000000000000" pitchFamily="18" charset="-122"/>
+                      <a:ea typeface="思源宋体" panose="02020400000000000000" pitchFamily="18" charset="-122"/>
+                    </a:rPr>
+                    <a:t>human call</a:t>
+                  </a:r>
+                </a:p>
+              </p:txBody>
+            </p:sp>
+          </p:grpSp>
+          <p:pic>
+            <p:nvPicPr>
+              <p:cNvPr id="36" name="图片 35" descr="图标&#10;&#10;AI 生成的内容可能不正确。">
+                <a:extLst>
+                  <a:ext uri="{FF2B5EF4-FFF2-40B4-BE49-F238E27FC236}">
+                    <a16:creationId xmlns:a16="http://schemas.microsoft.com/office/drawing/2014/main" id="{FAFE3BD1-451F-0135-B841-FACF59E9E1BF}"/>
+                  </a:ext>
+                </a:extLst>
+              </p:cNvPr>
+              <p:cNvPicPr>
+                <a:picLocks noChangeAspect="1"/>
+              </p:cNvPicPr>
+              <p:nvPr/>
+            </p:nvPicPr>
+            <p:blipFill>
+              <a:blip r:embed="rId7" cstate="print">
+                <a:extLst>
+                  <a:ext uri="{28A0092B-C50C-407E-A947-70E740481C1C}">
+                    <a14:useLocalDpi xmlns:a14="http://schemas.microsoft.com/office/drawing/2010/main" val="0"/>
+                  </a:ext>
+                </a:extLst>
+              </a:blip>
+              <a:stretch>
+                <a:fillRect/>
+              </a:stretch>
+            </p:blipFill>
+            <p:spPr>
+              <a:xfrm>
+                <a:off x="1929694" y="1681584"/>
+                <a:ext cx="341881" cy="341881"/>
+              </a:xfrm>
+              <a:prstGeom prst="rect">
+                <a:avLst/>
+              </a:prstGeom>
+              <a:effectLst>
+                <a:outerShdw blurRad="50800" dist="38100" dir="2700000" algn="tl" rotWithShape="0">
+                  <a:schemeClr val="accent1">
+                    <a:lumMod val="75000"/>
+                    <a:alpha val="26000"/>
+                  </a:schemeClr>
+                </a:outerShdw>
+              </a:effectLst>
+            </p:spPr>
+          </p:pic>
+        </p:grpSp>
+        <p:sp>
+          <p:nvSpPr>
+            <p:cNvPr id="10" name="箭头: 左 9">
+              <a:extLst>
+                <a:ext uri="{FF2B5EF4-FFF2-40B4-BE49-F238E27FC236}">
+                  <a16:creationId xmlns:a16="http://schemas.microsoft.com/office/drawing/2014/main" id="{F68B94C3-FB92-9FDE-341E-8114948836A5}"/>
+                </a:ext>
+              </a:extLst>
+            </p:cNvPr>
+            <p:cNvSpPr/>
+            <p:nvPr/>
+          </p:nvSpPr>
+          <p:spPr>
+            <a:xfrm rot="11731060" flipH="1">
+              <a:off x="7231082" y="4624688"/>
+              <a:ext cx="190432" cy="127182"/>
+            </a:xfrm>
+            <a:prstGeom prst="leftArrow">
+              <a:avLst/>
+            </a:prstGeom>
+            <a:solidFill>
+              <a:srgbClr val="719BC4"/>
+            </a:solidFill>
+            <a:ln>
+              <a:solidFill>
+                <a:schemeClr val="accent1">
+                  <a:lumMod val="60000"/>
+                  <a:lumOff val="40000"/>
+                </a:schemeClr>
+              </a:solidFill>
+            </a:ln>
+            <a:effectLst/>
+          </p:spPr>
+          <p:style>
+            <a:lnRef idx="2">
+              <a:schemeClr val="accent1">
+                <a:shade val="15000"/>
+              </a:schemeClr>
+            </a:lnRef>
+            <a:fillRef idx="1">
+              <a:schemeClr val="accent1"/>
+            </a:fillRef>
+            <a:effectRef idx="0">
+              <a:schemeClr val="accent1"/>
+            </a:effectRef>
+            <a:fontRef idx="minor">
+              <a:schemeClr val="lt1"/>
+            </a:fontRef>
+          </p:style>
+          <p:txBody>
+            <a:bodyPr rtlCol="0" anchor="ctr"/>
+            <a:lstStyle/>
+            <a:p>
+              <a:pPr algn="ctr"/>
+              <a:endParaRPr lang="zh-CN" altLang="en-US" sz="1807">
+                <a:latin typeface="思源宋体" panose="02020400000000000000" pitchFamily="18" charset="-122"/>
+                <a:ea typeface="思源宋体" panose="02020400000000000000" pitchFamily="18" charset="-122"/>
+              </a:endParaRPr>
+            </a:p>
+          </p:txBody>
+        </p:sp>
+        <p:pic>
+          <p:nvPicPr>
+            <p:cNvPr id="9" name="图片 8" descr="卡通画&#10;&#10;AI 生成的内容可能不正确。">
+              <a:extLst>
+                <a:ext uri="{FF2B5EF4-FFF2-40B4-BE49-F238E27FC236}">
+                  <a16:creationId xmlns:a16="http://schemas.microsoft.com/office/drawing/2014/main" id="{798E77F3-61E5-AAE8-C43E-61822042D2E4}"/>
+                </a:ext>
+              </a:extLst>
+            </p:cNvPr>
+            <p:cNvPicPr>
+              <a:picLocks noChangeAspect="1"/>
+            </p:cNvPicPr>
+            <p:nvPr/>
+          </p:nvPicPr>
+          <p:blipFill>
+            <a:blip r:embed="rId8" cstate="print">
+              <a:clrChange>
+                <a:clrFrom>
+                  <a:srgbClr val="FDF6E4"/>
+                </a:clrFrom>
+                <a:clrTo>
+                  <a:srgbClr val="FDF6E4">
+                    <a:alpha val="0"/>
+                  </a:srgbClr>
+                </a:clrTo>
+              </a:clrChange>
+              <a:extLst>
+                <a:ext uri="{28A0092B-C50C-407E-A947-70E740481C1C}">
+                  <a14:useLocalDpi xmlns:a14="http://schemas.microsoft.com/office/drawing/2010/main" val="0"/>
+                </a:ext>
+              </a:extLst>
+            </a:blip>
+            <a:stretch>
+              <a:fillRect/>
+            </a:stretch>
+          </p:blipFill>
+          <p:spPr>
+            <a:xfrm>
+              <a:off x="6440726" y="4341161"/>
+              <a:ext cx="487704" cy="901660"/>
+            </a:xfrm>
+            <a:prstGeom prst="rect">
+              <a:avLst/>
+            </a:prstGeom>
+          </p:spPr>
+        </p:pic>
+        <p:cxnSp>
+          <p:nvCxnSpPr>
+            <p:cNvPr id="8" name="直线连接符 7">
+              <a:extLst>
+                <a:ext uri="{FF2B5EF4-FFF2-40B4-BE49-F238E27FC236}">
+                  <a16:creationId xmlns:a16="http://schemas.microsoft.com/office/drawing/2014/main" id="{939406BA-6636-0CE7-D79A-962DE39B6F1A}"/>
+                </a:ext>
+              </a:extLst>
+            </p:cNvPr>
+            <p:cNvCxnSpPr>
+              <a:cxnSpLocks/>
+              <a:stCxn id="11" idx="1"/>
+              <a:endCxn id="71" idx="2"/>
+            </p:cNvCxnSpPr>
+            <p:nvPr/>
+          </p:nvCxnSpPr>
+          <p:spPr>
+            <a:xfrm flipH="1">
+              <a:off x="5854082" y="3230226"/>
+              <a:ext cx="766913" cy="478783"/>
+            </a:xfrm>
+            <a:prstGeom prst="line">
+              <a:avLst/>
+            </a:prstGeom>
+            <a:ln w="38100">
+              <a:solidFill>
+                <a:schemeClr val="accent3">
+                  <a:lumMod val="75000"/>
+                </a:schemeClr>
+              </a:solidFill>
+              <a:prstDash val="sysDash"/>
+            </a:ln>
+          </p:spPr>
+          <p:style>
+            <a:lnRef idx="1">
+              <a:schemeClr val="accent1"/>
+            </a:lnRef>
+            <a:fillRef idx="0">
+              <a:schemeClr val="accent1"/>
+            </a:fillRef>
+            <a:effectRef idx="0">
+              <a:schemeClr val="accent1"/>
+            </a:effectRef>
+            <a:fontRef idx="minor">
+              <a:schemeClr val="tx1"/>
+            </a:fontRef>
+          </p:style>
+        </p:cxnSp>
+        <p:pic>
+          <p:nvPicPr>
+            <p:cNvPr id="56" name="图片 55">
+              <a:extLst>
+                <a:ext uri="{FF2B5EF4-FFF2-40B4-BE49-F238E27FC236}">
+                  <a16:creationId xmlns:a16="http://schemas.microsoft.com/office/drawing/2014/main" id="{93F591C6-32C0-7330-D777-9DE3A118F72E}"/>
+                </a:ext>
+              </a:extLst>
+            </p:cNvPr>
+            <p:cNvPicPr>
+              <a:picLocks noChangeAspect="1"/>
+            </p:cNvPicPr>
+            <p:nvPr/>
+          </p:nvPicPr>
+          <p:blipFill>
+            <a:blip r:embed="rId9" cstate="print">
+              <a:clrChange>
+                <a:clrFrom>
+                  <a:srgbClr val="FFFFFF"/>
+                </a:clrFrom>
+                <a:clrTo>
+                  <a:srgbClr val="FFFFFF">
+                    <a:alpha val="0"/>
+                  </a:srgbClr>
+                </a:clrTo>
+              </a:clrChange>
+              <a:extLst>
+                <a:ext uri="{28A0092B-C50C-407E-A947-70E740481C1C}">
+                  <a14:useLocalDpi xmlns:a14="http://schemas.microsoft.com/office/drawing/2010/main" val="0"/>
+                </a:ext>
+              </a:extLst>
+            </a:blip>
+            <a:srcRect l="73105" t="52930" r="4961" b="6477"/>
+            <a:stretch>
+              <a:fillRect/>
+            </a:stretch>
+          </p:blipFill>
+          <p:spPr>
+            <a:xfrm flipH="1">
+              <a:off x="7325146" y="4158565"/>
+              <a:ext cx="408191" cy="682286"/>
+            </a:xfrm>
+            <a:prstGeom prst="rect">
+              <a:avLst/>
+            </a:prstGeom>
+          </p:spPr>
+        </p:pic>
+        <p:pic>
+          <p:nvPicPr>
+            <p:cNvPr id="57" name="图片 56">
+              <a:extLst>
+                <a:ext uri="{FF2B5EF4-FFF2-40B4-BE49-F238E27FC236}">
+                  <a16:creationId xmlns:a16="http://schemas.microsoft.com/office/drawing/2014/main" id="{7C68ED34-44D4-E6B6-7418-D5678FA237C7}"/>
+                </a:ext>
+              </a:extLst>
+            </p:cNvPr>
+            <p:cNvPicPr>
+              <a:picLocks noChangeAspect="1"/>
+            </p:cNvPicPr>
+            <p:nvPr/>
+          </p:nvPicPr>
+          <p:blipFill>
+            <a:blip r:embed="rId10" cstate="print">
+              <a:clrChange>
+                <a:clrFrom>
+                  <a:srgbClr val="FFFFFF"/>
+                </a:clrFrom>
+                <a:clrTo>
+                  <a:srgbClr val="FFFFFF">
+                    <a:alpha val="0"/>
+                  </a:srgbClr>
+                </a:clrTo>
+              </a:clrChange>
+              <a:extLst>
+                <a:ext uri="{28A0092B-C50C-407E-A947-70E740481C1C}">
+                  <a14:useLocalDpi xmlns:a14="http://schemas.microsoft.com/office/drawing/2010/main" val="0"/>
+                </a:ext>
+              </a:extLst>
+            </a:blip>
+            <a:srcRect l="23826" t="21802" r="56075" b="37605"/>
+            <a:stretch>
+              <a:fillRect/>
+            </a:stretch>
+          </p:blipFill>
+          <p:spPr>
+            <a:xfrm>
+              <a:off x="6798133" y="2504602"/>
+              <a:ext cx="333757" cy="663700"/>
+            </a:xfrm>
+            <a:prstGeom prst="rect">
+              <a:avLst/>
+            </a:prstGeom>
+          </p:spPr>
+        </p:pic>
+        <p:pic>
+          <p:nvPicPr>
+            <p:cNvPr id="58" name="图片 57" descr="卡通人物&#10;&#10;AI 生成的内容可能不正确。">
+              <a:extLst>
+                <a:ext uri="{FF2B5EF4-FFF2-40B4-BE49-F238E27FC236}">
+                  <a16:creationId xmlns:a16="http://schemas.microsoft.com/office/drawing/2014/main" id="{51CC27F4-7E51-9C37-EF89-2E679858D645}"/>
+                </a:ext>
+              </a:extLst>
+            </p:cNvPr>
+            <p:cNvPicPr>
+              <a:picLocks noChangeAspect="1"/>
+            </p:cNvPicPr>
+            <p:nvPr/>
+          </p:nvPicPr>
+          <p:blipFill>
+            <a:blip r:embed="rId11" cstate="print">
+              <a:clrChange>
+                <a:clrFrom>
+                  <a:srgbClr val="FBFBFB"/>
+                </a:clrFrom>
+                <a:clrTo>
+                  <a:srgbClr val="FBFBFB">
+                    <a:alpha val="0"/>
+                  </a:srgbClr>
+                </a:clrTo>
+              </a:clrChange>
+              <a:extLst>
+                <a:ext uri="{28A0092B-C50C-407E-A947-70E740481C1C}">
+                  <a14:useLocalDpi xmlns:a14="http://schemas.microsoft.com/office/drawing/2010/main" val="0"/>
+                </a:ext>
+              </a:extLst>
+            </a:blip>
+            <a:srcRect l="43548" t="51869" r="39449" b="8501"/>
+            <a:stretch>
+              <a:fillRect/>
+            </a:stretch>
+          </p:blipFill>
+          <p:spPr>
+            <a:xfrm>
+              <a:off x="5921641" y="1720054"/>
+              <a:ext cx="341880" cy="784548"/>
+            </a:xfrm>
+            <a:prstGeom prst="rect">
+              <a:avLst/>
+            </a:prstGeom>
+          </p:spPr>
+        </p:pic>
+        <p:grpSp>
+          <p:nvGrpSpPr>
+            <p:cNvPr id="4" name="组合 3">
+              <a:extLst>
+                <a:ext uri="{FF2B5EF4-FFF2-40B4-BE49-F238E27FC236}">
+                  <a16:creationId xmlns:a16="http://schemas.microsoft.com/office/drawing/2014/main" id="{F40A53DF-CAB0-16F7-9FC9-E254E42CF0EC}"/>
+                </a:ext>
+              </a:extLst>
+            </p:cNvPr>
+            <p:cNvGrpSpPr/>
+            <p:nvPr/>
+          </p:nvGrpSpPr>
+          <p:grpSpPr>
+            <a:xfrm>
+              <a:off x="4727837" y="3577920"/>
+              <a:ext cx="744956" cy="788987"/>
+              <a:chOff x="4610038" y="3210877"/>
+              <a:chExt cx="869119" cy="1046888"/>
+            </a:xfrm>
+          </p:grpSpPr>
+          <p:pic>
+            <p:nvPicPr>
+              <p:cNvPr id="3" name="图片 2" descr="卡通人物&#10;&#10;AI 生成的内容可能不正确。">
+                <a:extLst>
+                  <a:ext uri="{FF2B5EF4-FFF2-40B4-BE49-F238E27FC236}">
+                    <a16:creationId xmlns:a16="http://schemas.microsoft.com/office/drawing/2014/main" id="{840C9DFA-E543-BDED-1596-94E30A08932D}"/>
+                  </a:ext>
+                </a:extLst>
+              </p:cNvPr>
+              <p:cNvPicPr>
+                <a:picLocks noChangeAspect="1"/>
+              </p:cNvPicPr>
+              <p:nvPr/>
+            </p:nvPicPr>
+            <p:blipFill rotWithShape="1">
+              <a:blip r:embed="rId12" cstate="print">
+                <a:clrChange>
+                  <a:clrFrom>
+                    <a:srgbClr val="FBFBFB"/>
+                  </a:clrFrom>
+                  <a:clrTo>
+                    <a:srgbClr val="FBFBFB">
+                      <a:alpha val="0"/>
+                    </a:srgbClr>
+                  </a:clrTo>
+                </a:clrChange>
+                <a:extLst>
+                  <a:ext uri="{28A0092B-C50C-407E-A947-70E740481C1C}">
+                    <a14:useLocalDpi xmlns:a14="http://schemas.microsoft.com/office/drawing/2010/main" val="0"/>
+                  </a:ext>
+                </a:extLst>
+              </a:blip>
+              <a:srcRect l="41315" t="2205" r="38523" b="53377"/>
+              <a:stretch/>
+            </p:blipFill>
+            <p:spPr>
+              <a:xfrm>
+                <a:off x="4610038" y="3210877"/>
+                <a:ext cx="466859" cy="1012726"/>
+              </a:xfrm>
+              <a:prstGeom prst="ellipse">
+                <a:avLst/>
+              </a:prstGeom>
+            </p:spPr>
+          </p:pic>
+          <p:pic>
+            <p:nvPicPr>
+              <p:cNvPr id="2" name="图片 1" descr="卡通人物&#10;&#10;AI 生成的内容可能不正确。">
+                <a:extLst>
+                  <a:ext uri="{FF2B5EF4-FFF2-40B4-BE49-F238E27FC236}">
+                    <a16:creationId xmlns:a16="http://schemas.microsoft.com/office/drawing/2014/main" id="{613350FC-E229-0559-5E89-2F4964DB9F86}"/>
+                  </a:ext>
+                </a:extLst>
+              </p:cNvPr>
+              <p:cNvPicPr>
+                <a:picLocks noChangeAspect="1"/>
+              </p:cNvPicPr>
+              <p:nvPr/>
+            </p:nvPicPr>
+            <p:blipFill rotWithShape="1">
+              <a:blip r:embed="rId12" cstate="print">
+                <a:clrChange>
+                  <a:clrFrom>
+                    <a:srgbClr val="FEFEFE"/>
+                  </a:clrFrom>
+                  <a:clrTo>
+                    <a:srgbClr val="FEFEFE">
+                      <a:alpha val="0"/>
+                    </a:srgbClr>
+                  </a:clrTo>
+                </a:clrChange>
+                <a:extLst>
+                  <a:ext uri="{28A0092B-C50C-407E-A947-70E740481C1C}">
+                    <a14:useLocalDpi xmlns:a14="http://schemas.microsoft.com/office/drawing/2010/main" val="0"/>
+                  </a:ext>
+                </a:extLst>
+              </a:blip>
+              <a:srcRect l="80707" t="14375" r="5957" b="47192"/>
+              <a:stretch/>
+            </p:blipFill>
+            <p:spPr>
+              <a:xfrm>
+                <a:off x="5136489" y="3285546"/>
+                <a:ext cx="342668" cy="972219"/>
+              </a:xfrm>
+              <a:prstGeom prst="ellipse">
+                <a:avLst/>
+              </a:prstGeom>
+            </p:spPr>
+          </p:pic>
+        </p:grpSp>
+        <p:sp>
+          <p:nvSpPr>
+            <p:cNvPr id="24" name="任意形状 23">
+              <a:extLst>
+                <a:ext uri="{FF2B5EF4-FFF2-40B4-BE49-F238E27FC236}">
+                  <a16:creationId xmlns:a16="http://schemas.microsoft.com/office/drawing/2014/main" id="{DAA9EDC1-D01B-297F-469D-0DC13F2630F0}"/>
+                </a:ext>
+              </a:extLst>
+            </p:cNvPr>
+            <p:cNvSpPr/>
+            <p:nvPr/>
+          </p:nvSpPr>
+          <p:spPr>
+            <a:xfrm>
+              <a:off x="5141499" y="3416805"/>
+              <a:ext cx="1417242" cy="1799303"/>
+            </a:xfrm>
+            <a:custGeom>
+              <a:avLst/>
+              <a:gdLst>
+                <a:gd name="connsiteX0" fmla="*/ 1417242 w 1417242"/>
+                <a:gd name="connsiteY0" fmla="*/ 1799303 h 1799303"/>
+                <a:gd name="connsiteX1" fmla="*/ 1279591 w 1417242"/>
+                <a:gd name="connsiteY1" fmla="*/ 1759974 h 1799303"/>
+                <a:gd name="connsiteX2" fmla="*/ 1240262 w 1417242"/>
+                <a:gd name="connsiteY2" fmla="*/ 1740309 h 1799303"/>
+                <a:gd name="connsiteX3" fmla="*/ 1181268 w 1417242"/>
+                <a:gd name="connsiteY3" fmla="*/ 1700980 h 1799303"/>
+                <a:gd name="connsiteX4" fmla="*/ 1102610 w 1417242"/>
+                <a:gd name="connsiteY4" fmla="*/ 1681316 h 1799303"/>
+                <a:gd name="connsiteX5" fmla="*/ 1043617 w 1417242"/>
+                <a:gd name="connsiteY5" fmla="*/ 1651819 h 1799303"/>
+                <a:gd name="connsiteX6" fmla="*/ 955126 w 1417242"/>
+                <a:gd name="connsiteY6" fmla="*/ 1612490 h 1799303"/>
+                <a:gd name="connsiteX7" fmla="*/ 915797 w 1417242"/>
+                <a:gd name="connsiteY7" fmla="*/ 1602658 h 1799303"/>
+                <a:gd name="connsiteX8" fmla="*/ 856804 w 1417242"/>
+                <a:gd name="connsiteY8" fmla="*/ 1592825 h 1799303"/>
+                <a:gd name="connsiteX9" fmla="*/ 778146 w 1417242"/>
+                <a:gd name="connsiteY9" fmla="*/ 1573161 h 1799303"/>
+                <a:gd name="connsiteX10" fmla="*/ 748649 w 1417242"/>
+                <a:gd name="connsiteY10" fmla="*/ 1563329 h 1799303"/>
+                <a:gd name="connsiteX11" fmla="*/ 699488 w 1417242"/>
+                <a:gd name="connsiteY11" fmla="*/ 1553496 h 1799303"/>
+                <a:gd name="connsiteX12" fmla="*/ 640494 w 1417242"/>
+                <a:gd name="connsiteY12" fmla="*/ 1533832 h 1799303"/>
+                <a:gd name="connsiteX13" fmla="*/ 610997 w 1417242"/>
+                <a:gd name="connsiteY13" fmla="*/ 1524000 h 1799303"/>
+                <a:gd name="connsiteX14" fmla="*/ 581500 w 1417242"/>
+                <a:gd name="connsiteY14" fmla="*/ 1514167 h 1799303"/>
+                <a:gd name="connsiteX15" fmla="*/ 552004 w 1417242"/>
+                <a:gd name="connsiteY15" fmla="*/ 1504335 h 1799303"/>
+                <a:gd name="connsiteX16" fmla="*/ 375023 w 1417242"/>
+                <a:gd name="connsiteY16" fmla="*/ 1386348 h 1799303"/>
+                <a:gd name="connsiteX17" fmla="*/ 316029 w 1417242"/>
+                <a:gd name="connsiteY17" fmla="*/ 1347019 h 1799303"/>
+                <a:gd name="connsiteX18" fmla="*/ 286533 w 1417242"/>
+                <a:gd name="connsiteY18" fmla="*/ 1327354 h 1799303"/>
+                <a:gd name="connsiteX19" fmla="*/ 257036 w 1417242"/>
+                <a:gd name="connsiteY19" fmla="*/ 1297858 h 1799303"/>
+                <a:gd name="connsiteX20" fmla="*/ 198042 w 1417242"/>
+                <a:gd name="connsiteY20" fmla="*/ 1258529 h 1799303"/>
+                <a:gd name="connsiteX21" fmla="*/ 168546 w 1417242"/>
+                <a:gd name="connsiteY21" fmla="*/ 1229032 h 1799303"/>
+                <a:gd name="connsiteX22" fmla="*/ 148881 w 1417242"/>
+                <a:gd name="connsiteY22" fmla="*/ 1199535 h 1799303"/>
+                <a:gd name="connsiteX23" fmla="*/ 119384 w 1417242"/>
+                <a:gd name="connsiteY23" fmla="*/ 1179871 h 1799303"/>
+                <a:gd name="connsiteX24" fmla="*/ 109552 w 1417242"/>
+                <a:gd name="connsiteY24" fmla="*/ 1150374 h 1799303"/>
+                <a:gd name="connsiteX25" fmla="*/ 89888 w 1417242"/>
+                <a:gd name="connsiteY25" fmla="*/ 1120877 h 1799303"/>
+                <a:gd name="connsiteX26" fmla="*/ 70223 w 1417242"/>
+                <a:gd name="connsiteY26" fmla="*/ 1042219 h 1799303"/>
+                <a:gd name="connsiteX27" fmla="*/ 50559 w 1417242"/>
+                <a:gd name="connsiteY27" fmla="*/ 983225 h 1799303"/>
+                <a:gd name="connsiteX28" fmla="*/ 40726 w 1417242"/>
+                <a:gd name="connsiteY28" fmla="*/ 953729 h 1799303"/>
+                <a:gd name="connsiteX29" fmla="*/ 21062 w 1417242"/>
+                <a:gd name="connsiteY29" fmla="*/ 865238 h 1799303"/>
+                <a:gd name="connsiteX30" fmla="*/ 11229 w 1417242"/>
+                <a:gd name="connsiteY30" fmla="*/ 835742 h 1799303"/>
+                <a:gd name="connsiteX31" fmla="*/ 1397 w 1417242"/>
+                <a:gd name="connsiteY31" fmla="*/ 737419 h 1799303"/>
+                <a:gd name="connsiteX32" fmla="*/ 21062 w 1417242"/>
+                <a:gd name="connsiteY32" fmla="*/ 442451 h 1799303"/>
+                <a:gd name="connsiteX33" fmla="*/ 50559 w 1417242"/>
+                <a:gd name="connsiteY33" fmla="*/ 304800 h 1799303"/>
+                <a:gd name="connsiteX34" fmla="*/ 80055 w 1417242"/>
+                <a:gd name="connsiteY34" fmla="*/ 285135 h 1799303"/>
+                <a:gd name="connsiteX35" fmla="*/ 89888 w 1417242"/>
+                <a:gd name="connsiteY35" fmla="*/ 255638 h 1799303"/>
+                <a:gd name="connsiteX36" fmla="*/ 148881 w 1417242"/>
+                <a:gd name="connsiteY36" fmla="*/ 216309 h 1799303"/>
+                <a:gd name="connsiteX37" fmla="*/ 168546 w 1417242"/>
+                <a:gd name="connsiteY37" fmla="*/ 186813 h 1799303"/>
+                <a:gd name="connsiteX38" fmla="*/ 198042 w 1417242"/>
+                <a:gd name="connsiteY38" fmla="*/ 88490 h 1799303"/>
+                <a:gd name="connsiteX39" fmla="*/ 217707 w 1417242"/>
+                <a:gd name="connsiteY39" fmla="*/ 19664 h 1799303"/>
+                <a:gd name="connsiteX40" fmla="*/ 217707 w 1417242"/>
+                <a:gd name="connsiteY40" fmla="*/ 0 h 1799303"/>
+              </a:gdLst>
+              <a:ahLst/>
+              <a:cxnLst>
+                <a:cxn ang="0">
+                  <a:pos x="connsiteX0" y="connsiteY0"/>
+                </a:cxn>
+                <a:cxn ang="0">
+                  <a:pos x="connsiteX1" y="connsiteY1"/>
+                </a:cxn>
+                <a:cxn ang="0">
+                  <a:pos x="connsiteX2" y="connsiteY2"/>
+                </a:cxn>
+                <a:cxn ang="0">
+                  <a:pos x="connsiteX3" y="connsiteY3"/>
+                </a:cxn>
+                <a:cxn ang="0">
+                  <a:pos x="connsiteX4" y="connsiteY4"/>
+                </a:cxn>
+                <a:cxn ang="0">
+                  <a:pos x="connsiteX5" y="connsiteY5"/>
+                </a:cxn>
+                <a:cxn ang="0">
+                  <a:pos x="connsiteX6" y="connsiteY6"/>
+                </a:cxn>
+                <a:cxn ang="0">
+                  <a:pos x="connsiteX7" y="connsiteY7"/>
+                </a:cxn>
+                <a:cxn ang="0">
+                  <a:pos x="connsiteX8" y="connsiteY8"/>
+                </a:cxn>
+                <a:cxn ang="0">
+                  <a:pos x="connsiteX9" y="connsiteY9"/>
+                </a:cxn>
+                <a:cxn ang="0">
+                  <a:pos x="connsiteX10" y="connsiteY10"/>
+                </a:cxn>
+                <a:cxn ang="0">
+                  <a:pos x="connsiteX11" y="connsiteY11"/>
+                </a:cxn>
+                <a:cxn ang="0">
+                  <a:pos x="connsiteX12" y="connsiteY12"/>
+                </a:cxn>
+                <a:cxn ang="0">
+                  <a:pos x="connsiteX13" y="connsiteY13"/>
+                </a:cxn>
+                <a:cxn ang="0">
+                  <a:pos x="connsiteX14" y="connsiteY14"/>
+                </a:cxn>
+                <a:cxn ang="0">
+                  <a:pos x="connsiteX15" y="connsiteY15"/>
+                </a:cxn>
+                <a:cxn ang="0">
+                  <a:pos x="connsiteX16" y="connsiteY16"/>
+                </a:cxn>
+                <a:cxn ang="0">
+                  <a:pos x="connsiteX17" y="connsiteY17"/>
+                </a:cxn>
+                <a:cxn ang="0">
+                  <a:pos x="connsiteX18" y="connsiteY18"/>
+                </a:cxn>
+                <a:cxn ang="0">
+                  <a:pos x="connsiteX19" y="connsiteY19"/>
+                </a:cxn>
+                <a:cxn ang="0">
+                  <a:pos x="connsiteX20" y="connsiteY20"/>
+                </a:cxn>
+                <a:cxn ang="0">
+                  <a:pos x="connsiteX21" y="connsiteY21"/>
+                </a:cxn>
+                <a:cxn ang="0">
+                  <a:pos x="connsiteX22" y="connsiteY22"/>
+                </a:cxn>
+                <a:cxn ang="0">
+                  <a:pos x="connsiteX23" y="connsiteY23"/>
+                </a:cxn>
+                <a:cxn ang="0">
+                  <a:pos x="connsiteX24" y="connsiteY24"/>
+                </a:cxn>
+                <a:cxn ang="0">
+                  <a:pos x="connsiteX25" y="connsiteY25"/>
+                </a:cxn>
+                <a:cxn ang="0">
+                  <a:pos x="connsiteX26" y="connsiteY26"/>
+                </a:cxn>
+                <a:cxn ang="0">
+                  <a:pos x="connsiteX27" y="connsiteY27"/>
+                </a:cxn>
+                <a:cxn ang="0">
+                  <a:pos x="connsiteX28" y="connsiteY28"/>
+                </a:cxn>
+                <a:cxn ang="0">
+                  <a:pos x="connsiteX29" y="connsiteY29"/>
+                </a:cxn>
+                <a:cxn ang="0">
+                  <a:pos x="connsiteX30" y="connsiteY30"/>
+                </a:cxn>
+                <a:cxn ang="0">
+                  <a:pos x="connsiteX31" y="connsiteY31"/>
+                </a:cxn>
+                <a:cxn ang="0">
+                  <a:pos x="connsiteX32" y="connsiteY32"/>
+                </a:cxn>
+                <a:cxn ang="0">
+                  <a:pos x="connsiteX33" y="connsiteY33"/>
+                </a:cxn>
+                <a:cxn ang="0">
+                  <a:pos x="connsiteX34" y="connsiteY34"/>
+                </a:cxn>
+                <a:cxn ang="0">
+                  <a:pos x="connsiteX35" y="connsiteY35"/>
+                </a:cxn>
+                <a:cxn ang="0">
+                  <a:pos x="connsiteX36" y="connsiteY36"/>
+                </a:cxn>
+                <a:cxn ang="0">
+                  <a:pos x="connsiteX37" y="connsiteY37"/>
+                </a:cxn>
+                <a:cxn ang="0">
+                  <a:pos x="connsiteX38" y="connsiteY38"/>
+                </a:cxn>
+                <a:cxn ang="0">
+                  <a:pos x="connsiteX39" y="connsiteY39"/>
+                </a:cxn>
+                <a:cxn ang="0">
+                  <a:pos x="connsiteX40" y="connsiteY40"/>
+                </a:cxn>
+              </a:cxnLst>
+              <a:rect l="l" t="t" r="r" b="b"/>
+              <a:pathLst>
+                <a:path w="1417242" h="1799303">
+                  <a:moveTo>
+                    <a:pt x="1417242" y="1799303"/>
+                  </a:moveTo>
+                  <a:cubicBezTo>
+                    <a:pt x="1371358" y="1786193"/>
+                    <a:pt x="1324862" y="1775064"/>
+                    <a:pt x="1279591" y="1759974"/>
+                  </a:cubicBezTo>
+                  <a:cubicBezTo>
+                    <a:pt x="1265686" y="1755339"/>
+                    <a:pt x="1252830" y="1747850"/>
+                    <a:pt x="1240262" y="1740309"/>
+                  </a:cubicBezTo>
+                  <a:cubicBezTo>
+                    <a:pt x="1219996" y="1728149"/>
+                    <a:pt x="1204196" y="1706712"/>
+                    <a:pt x="1181268" y="1700980"/>
+                  </a:cubicBezTo>
+                  <a:lnTo>
+                    <a:pt x="1102610" y="1681316"/>
+                  </a:lnTo>
+                  <a:cubicBezTo>
+                    <a:pt x="1018074" y="1624958"/>
+                    <a:pt x="1125032" y="1692527"/>
+                    <a:pt x="1043617" y="1651819"/>
+                  </a:cubicBezTo>
+                  <a:cubicBezTo>
+                    <a:pt x="979051" y="1619536"/>
+                    <a:pt x="1056592" y="1637856"/>
+                    <a:pt x="955126" y="1612490"/>
+                  </a:cubicBezTo>
+                  <a:cubicBezTo>
+                    <a:pt x="942016" y="1609213"/>
+                    <a:pt x="929048" y="1605308"/>
+                    <a:pt x="915797" y="1602658"/>
+                  </a:cubicBezTo>
+                  <a:cubicBezTo>
+                    <a:pt x="896249" y="1598748"/>
+                    <a:pt x="876297" y="1597002"/>
+                    <a:pt x="856804" y="1592825"/>
+                  </a:cubicBezTo>
+                  <a:cubicBezTo>
+                    <a:pt x="830378" y="1587162"/>
+                    <a:pt x="803785" y="1581707"/>
+                    <a:pt x="778146" y="1573161"/>
+                  </a:cubicBezTo>
+                  <a:cubicBezTo>
+                    <a:pt x="768314" y="1569884"/>
+                    <a:pt x="758704" y="1565843"/>
+                    <a:pt x="748649" y="1563329"/>
+                  </a:cubicBezTo>
+                  <a:cubicBezTo>
+                    <a:pt x="732436" y="1559276"/>
+                    <a:pt x="715611" y="1557893"/>
+                    <a:pt x="699488" y="1553496"/>
+                  </a:cubicBezTo>
+                  <a:cubicBezTo>
+                    <a:pt x="679490" y="1548042"/>
+                    <a:pt x="660159" y="1540387"/>
+                    <a:pt x="640494" y="1533832"/>
+                  </a:cubicBezTo>
+                  <a:lnTo>
+                    <a:pt x="610997" y="1524000"/>
+                  </a:lnTo>
+                  <a:lnTo>
+                    <a:pt x="581500" y="1514167"/>
+                  </a:lnTo>
+                  <a:cubicBezTo>
+                    <a:pt x="571668" y="1510890"/>
+                    <a:pt x="560627" y="1510084"/>
+                    <a:pt x="552004" y="1504335"/>
+                  </a:cubicBezTo>
+                  <a:lnTo>
+                    <a:pt x="375023" y="1386348"/>
+                  </a:lnTo>
+                  <a:lnTo>
+                    <a:pt x="316029" y="1347019"/>
+                  </a:lnTo>
+                  <a:cubicBezTo>
+                    <a:pt x="306197" y="1340464"/>
+                    <a:pt x="294889" y="1335710"/>
+                    <a:pt x="286533" y="1327354"/>
+                  </a:cubicBezTo>
+                  <a:cubicBezTo>
+                    <a:pt x="276701" y="1317522"/>
+                    <a:pt x="268012" y="1306395"/>
+                    <a:pt x="257036" y="1297858"/>
+                  </a:cubicBezTo>
+                  <a:cubicBezTo>
+                    <a:pt x="238380" y="1283348"/>
+                    <a:pt x="214753" y="1275241"/>
+                    <a:pt x="198042" y="1258529"/>
+                  </a:cubicBezTo>
+                  <a:cubicBezTo>
+                    <a:pt x="188210" y="1248697"/>
+                    <a:pt x="177448" y="1239714"/>
+                    <a:pt x="168546" y="1229032"/>
+                  </a:cubicBezTo>
+                  <a:cubicBezTo>
+                    <a:pt x="160981" y="1219954"/>
+                    <a:pt x="157237" y="1207891"/>
+                    <a:pt x="148881" y="1199535"/>
+                  </a:cubicBezTo>
+                  <a:cubicBezTo>
+                    <a:pt x="140525" y="1191179"/>
+                    <a:pt x="129216" y="1186426"/>
+                    <a:pt x="119384" y="1179871"/>
+                  </a:cubicBezTo>
+                  <a:cubicBezTo>
+                    <a:pt x="116107" y="1170039"/>
+                    <a:pt x="114187" y="1159644"/>
+                    <a:pt x="109552" y="1150374"/>
+                  </a:cubicBezTo>
+                  <a:cubicBezTo>
+                    <a:pt x="104267" y="1139805"/>
+                    <a:pt x="93926" y="1131982"/>
+                    <a:pt x="89888" y="1120877"/>
+                  </a:cubicBezTo>
+                  <a:cubicBezTo>
+                    <a:pt x="80652" y="1095478"/>
+                    <a:pt x="78769" y="1067858"/>
+                    <a:pt x="70223" y="1042219"/>
+                  </a:cubicBezTo>
+                  <a:lnTo>
+                    <a:pt x="50559" y="983225"/>
+                  </a:lnTo>
+                  <a:cubicBezTo>
+                    <a:pt x="47282" y="973393"/>
+                    <a:pt x="42758" y="963892"/>
+                    <a:pt x="40726" y="953729"/>
+                  </a:cubicBezTo>
+                  <a:cubicBezTo>
+                    <a:pt x="33969" y="919944"/>
+                    <a:pt x="30318" y="897632"/>
+                    <a:pt x="21062" y="865238"/>
+                  </a:cubicBezTo>
+                  <a:cubicBezTo>
+                    <a:pt x="18215" y="855273"/>
+                    <a:pt x="14507" y="845574"/>
+                    <a:pt x="11229" y="835742"/>
+                  </a:cubicBezTo>
+                  <a:cubicBezTo>
+                    <a:pt x="7952" y="802968"/>
+                    <a:pt x="1397" y="770357"/>
+                    <a:pt x="1397" y="737419"/>
+                  </a:cubicBezTo>
+                  <a:cubicBezTo>
+                    <a:pt x="1397" y="509679"/>
+                    <a:pt x="-7815" y="557949"/>
+                    <a:pt x="21062" y="442451"/>
+                  </a:cubicBezTo>
+                  <a:cubicBezTo>
+                    <a:pt x="22100" y="434144"/>
+                    <a:pt x="31453" y="317538"/>
+                    <a:pt x="50559" y="304800"/>
+                  </a:cubicBezTo>
+                  <a:lnTo>
+                    <a:pt x="80055" y="285135"/>
+                  </a:lnTo>
+                  <a:cubicBezTo>
+                    <a:pt x="83333" y="275303"/>
+                    <a:pt x="82559" y="262967"/>
+                    <a:pt x="89888" y="255638"/>
+                  </a:cubicBezTo>
+                  <a:cubicBezTo>
+                    <a:pt x="106600" y="238926"/>
+                    <a:pt x="148881" y="216309"/>
+                    <a:pt x="148881" y="216309"/>
+                  </a:cubicBezTo>
+                  <a:cubicBezTo>
+                    <a:pt x="155436" y="206477"/>
+                    <a:pt x="163747" y="197611"/>
+                    <a:pt x="168546" y="186813"/>
+                  </a:cubicBezTo>
+                  <a:cubicBezTo>
+                    <a:pt x="187239" y="144754"/>
+                    <a:pt x="186601" y="128531"/>
+                    <a:pt x="198042" y="88490"/>
+                  </a:cubicBezTo>
+                  <a:cubicBezTo>
+                    <a:pt x="207396" y="55753"/>
+                    <a:pt x="211558" y="56558"/>
+                    <a:pt x="217707" y="19664"/>
+                  </a:cubicBezTo>
+                  <a:cubicBezTo>
+                    <a:pt x="218785" y="13199"/>
+                    <a:pt x="217707" y="6555"/>
+                    <a:pt x="217707" y="0"/>
+                  </a:cubicBezTo>
+                </a:path>
+              </a:pathLst>
+            </a:custGeom>
+            <a:ln w="38100">
+              <a:solidFill>
+                <a:srgbClr val="00B0F0"/>
+              </a:solidFill>
+              <a:prstDash val="sysDash"/>
+            </a:ln>
+          </p:spPr>
+          <p:style>
+            <a:lnRef idx="1">
+              <a:schemeClr val="accent1"/>
+            </a:lnRef>
+            <a:fillRef idx="0">
+              <a:schemeClr val="accent1"/>
+            </a:fillRef>
+            <a:effectRef idx="0">
+              <a:schemeClr val="accent1"/>
+            </a:effectRef>
+            <a:fontRef idx="minor">
+              <a:schemeClr val="tx1"/>
+            </a:fontRef>
+          </p:style>
+          <p:txBody>
+            <a:bodyPr rtlCol="0" anchor="ctr"/>
+            <a:lstStyle/>
+            <a:p>
+              <a:pPr algn="ctr"/>
+              <a:endParaRPr kumimoji="1" lang="zh-CN" altLang="en-US" sz="1807" dirty="0">
+                <a:latin typeface="思源宋体" panose="02020400000000000000" pitchFamily="18" charset="-122"/>
+                <a:ea typeface="思源宋体" panose="02020400000000000000" pitchFamily="18" charset="-122"/>
+              </a:endParaRPr>
+            </a:p>
+          </p:txBody>
+        </p:sp>
+        <p:pic>
+          <p:nvPicPr>
+            <p:cNvPr id="33" name="图片 32" descr="卡通人物&#10;&#10;AI 生成的内容可能不正确。">
+              <a:extLst>
+                <a:ext uri="{FF2B5EF4-FFF2-40B4-BE49-F238E27FC236}">
+                  <a16:creationId xmlns:a16="http://schemas.microsoft.com/office/drawing/2014/main" id="{3E5F4B0C-0B40-1D6D-4A56-4FDF4F9244CA}"/>
+                </a:ext>
+              </a:extLst>
+            </p:cNvPr>
+            <p:cNvPicPr>
+              <a:picLocks noChangeAspect="1"/>
+            </p:cNvPicPr>
+            <p:nvPr/>
+          </p:nvPicPr>
+          <p:blipFill rotWithShape="1">
+            <a:blip r:embed="rId12" cstate="print">
+              <a:clrChange>
+                <a:clrFrom>
+                  <a:srgbClr val="FBFBFB"/>
+                </a:clrFrom>
+                <a:clrTo>
+                  <a:srgbClr val="FBFBFB">
+                    <a:alpha val="0"/>
+                  </a:srgbClr>
+                </a:clrTo>
+              </a:clrChange>
+              <a:extLst>
+                <a:ext uri="{28A0092B-C50C-407E-A947-70E740481C1C}">
+                  <a14:useLocalDpi xmlns:a14="http://schemas.microsoft.com/office/drawing/2010/main" val="0"/>
+                </a:ext>
+              </a:extLst>
+            </a:blip>
+            <a:srcRect l="78137" t="5152" r="9498" b="81457"/>
+            <a:stretch/>
+          </p:blipFill>
+          <p:spPr>
+            <a:xfrm>
+              <a:off x="4994540" y="3430227"/>
+              <a:ext cx="264939" cy="282542"/>
+            </a:xfrm>
+            <a:custGeom>
+              <a:avLst/>
+              <a:gdLst>
+                <a:gd name="connsiteX0" fmla="*/ 730251 w 1460502"/>
+                <a:gd name="connsiteY0" fmla="*/ 0 h 1557542"/>
+                <a:gd name="connsiteX1" fmla="*/ 1460502 w 1460502"/>
+                <a:gd name="connsiteY1" fmla="*/ 782592 h 1557542"/>
+                <a:gd name="connsiteX2" fmla="*/ 1403115 w 1460502"/>
+                <a:gd name="connsiteY2" fmla="*/ 1087212 h 1557542"/>
+                <a:gd name="connsiteX3" fmla="*/ 1381833 w 1460502"/>
+                <a:gd name="connsiteY3" fmla="*/ 1129233 h 1557542"/>
+                <a:gd name="connsiteX4" fmla="*/ 633566 w 1460502"/>
+                <a:gd name="connsiteY4" fmla="*/ 1129233 h 1557542"/>
+                <a:gd name="connsiteX5" fmla="*/ 633566 w 1460502"/>
+                <a:gd name="connsiteY5" fmla="*/ 1557542 h 1557542"/>
+                <a:gd name="connsiteX6" fmla="*/ 583080 w 1460502"/>
+                <a:gd name="connsiteY6" fmla="*/ 1549285 h 1557542"/>
+                <a:gd name="connsiteX7" fmla="*/ 0 w 1460502"/>
+                <a:gd name="connsiteY7" fmla="*/ 782592 h 1557542"/>
+                <a:gd name="connsiteX8" fmla="*/ 730251 w 1460502"/>
+                <a:gd name="connsiteY8" fmla="*/ 0 h 1557542"/>
+              </a:gdLst>
+              <a:ahLst/>
+              <a:cxnLst>
+                <a:cxn ang="0">
+                  <a:pos x="connsiteX0" y="connsiteY0"/>
+                </a:cxn>
+                <a:cxn ang="0">
+                  <a:pos x="connsiteX1" y="connsiteY1"/>
+                </a:cxn>
+                <a:cxn ang="0">
+                  <a:pos x="connsiteX2" y="connsiteY2"/>
+                </a:cxn>
+                <a:cxn ang="0">
+                  <a:pos x="connsiteX3" y="connsiteY3"/>
+                </a:cxn>
+                <a:cxn ang="0">
+                  <a:pos x="connsiteX4" y="connsiteY4"/>
+                </a:cxn>
+                <a:cxn ang="0">
+                  <a:pos x="connsiteX5" y="connsiteY5"/>
+                </a:cxn>
+                <a:cxn ang="0">
+                  <a:pos x="connsiteX6" y="connsiteY6"/>
+                </a:cxn>
+                <a:cxn ang="0">
+                  <a:pos x="connsiteX7" y="connsiteY7"/>
+                </a:cxn>
+                <a:cxn ang="0">
+                  <a:pos x="connsiteX8" y="connsiteY8"/>
+                </a:cxn>
+              </a:cxnLst>
+              <a:rect l="l" t="t" r="r" b="b"/>
+              <a:pathLst>
+                <a:path w="1460502" h="1557542">
+                  <a:moveTo>
+                    <a:pt x="730251" y="0"/>
+                  </a:moveTo>
+                  <a:cubicBezTo>
+                    <a:pt x="1133557" y="0"/>
+                    <a:pt x="1460502" y="350378"/>
+                    <a:pt x="1460502" y="782592"/>
+                  </a:cubicBezTo>
+                  <a:cubicBezTo>
+                    <a:pt x="1460502" y="890646"/>
+                    <a:pt x="1440068" y="993584"/>
+                    <a:pt x="1403115" y="1087212"/>
+                  </a:cubicBezTo>
+                  <a:lnTo>
+                    <a:pt x="1381833" y="1129233"/>
+                  </a:lnTo>
+                  <a:lnTo>
+                    <a:pt x="633566" y="1129233"/>
+                  </a:lnTo>
+                  <a:lnTo>
+                    <a:pt x="633566" y="1557542"/>
+                  </a:lnTo>
+                  <a:lnTo>
+                    <a:pt x="583080" y="1549285"/>
+                  </a:lnTo>
+                  <a:cubicBezTo>
+                    <a:pt x="250318" y="1476311"/>
+                    <a:pt x="0" y="1160779"/>
+                    <a:pt x="0" y="782592"/>
+                  </a:cubicBezTo>
+                  <a:cubicBezTo>
+                    <a:pt x="0" y="350378"/>
+                    <a:pt x="326945" y="0"/>
+                    <a:pt x="730251" y="0"/>
+                  </a:cubicBezTo>
+                  <a:close/>
+                </a:path>
+              </a:pathLst>
+            </a:custGeom>
+          </p:spPr>
+        </p:pic>
+        <p:pic>
+          <p:nvPicPr>
+            <p:cNvPr id="38" name="图片 37" descr="卡通人物&#10;&#10;AI 生成的内容可能不正确。">
+              <a:extLst>
+                <a:ext uri="{FF2B5EF4-FFF2-40B4-BE49-F238E27FC236}">
+                  <a16:creationId xmlns:a16="http://schemas.microsoft.com/office/drawing/2014/main" id="{98A2E21F-2203-5DEB-EAA8-FD653E12FE60}"/>
+                </a:ext>
+              </a:extLst>
+            </p:cNvPr>
+            <p:cNvPicPr>
+              <a:picLocks noChangeAspect="1"/>
+            </p:cNvPicPr>
+            <p:nvPr/>
+          </p:nvPicPr>
+          <p:blipFill rotWithShape="1">
+            <a:blip r:embed="rId12" cstate="print">
+              <a:clrChange>
+                <a:clrFrom>
+                  <a:srgbClr val="FBFBFB"/>
+                </a:clrFrom>
+                <a:clrTo>
+                  <a:srgbClr val="FBFBFB">
+                    <a:alpha val="0"/>
+                  </a:srgbClr>
+                </a:clrTo>
+              </a:clrChange>
+              <a:extLst>
+                <a:ext uri="{28A0092B-C50C-407E-A947-70E740481C1C}">
+                  <a14:useLocalDpi xmlns:a14="http://schemas.microsoft.com/office/drawing/2010/main" val="0"/>
+                </a:ext>
+              </a:extLst>
+            </a:blip>
+            <a:srcRect l="78137" t="5152" r="9498" b="81457"/>
+            <a:stretch/>
+          </p:blipFill>
+          <p:spPr>
+            <a:xfrm>
+              <a:off x="6164747" y="1531378"/>
+              <a:ext cx="264939" cy="282542"/>
+            </a:xfrm>
+            <a:custGeom>
+              <a:avLst/>
+              <a:gdLst>
+                <a:gd name="connsiteX0" fmla="*/ 730251 w 1460502"/>
+                <a:gd name="connsiteY0" fmla="*/ 0 h 1557542"/>
+                <a:gd name="connsiteX1" fmla="*/ 1460502 w 1460502"/>
+                <a:gd name="connsiteY1" fmla="*/ 782592 h 1557542"/>
+                <a:gd name="connsiteX2" fmla="*/ 1403115 w 1460502"/>
+                <a:gd name="connsiteY2" fmla="*/ 1087212 h 1557542"/>
+                <a:gd name="connsiteX3" fmla="*/ 1381833 w 1460502"/>
+                <a:gd name="connsiteY3" fmla="*/ 1129233 h 1557542"/>
+                <a:gd name="connsiteX4" fmla="*/ 633566 w 1460502"/>
+                <a:gd name="connsiteY4" fmla="*/ 1129233 h 1557542"/>
+                <a:gd name="connsiteX5" fmla="*/ 633566 w 1460502"/>
+                <a:gd name="connsiteY5" fmla="*/ 1557542 h 1557542"/>
+                <a:gd name="connsiteX6" fmla="*/ 583080 w 1460502"/>
+                <a:gd name="connsiteY6" fmla="*/ 1549285 h 1557542"/>
+                <a:gd name="connsiteX7" fmla="*/ 0 w 1460502"/>
+                <a:gd name="connsiteY7" fmla="*/ 782592 h 1557542"/>
+                <a:gd name="connsiteX8" fmla="*/ 730251 w 1460502"/>
+                <a:gd name="connsiteY8" fmla="*/ 0 h 1557542"/>
+              </a:gdLst>
+              <a:ahLst/>
+              <a:cxnLst>
+                <a:cxn ang="0">
+                  <a:pos x="connsiteX0" y="connsiteY0"/>
+                </a:cxn>
+                <a:cxn ang="0">
+                  <a:pos x="connsiteX1" y="connsiteY1"/>
+                </a:cxn>
+                <a:cxn ang="0">
+                  <a:pos x="connsiteX2" y="connsiteY2"/>
+                </a:cxn>
+                <a:cxn ang="0">
+                  <a:pos x="connsiteX3" y="connsiteY3"/>
+                </a:cxn>
+                <a:cxn ang="0">
+                  <a:pos x="connsiteX4" y="connsiteY4"/>
+                </a:cxn>
+                <a:cxn ang="0">
+                  <a:pos x="connsiteX5" y="connsiteY5"/>
+                </a:cxn>
+                <a:cxn ang="0">
+                  <a:pos x="connsiteX6" y="connsiteY6"/>
+                </a:cxn>
+                <a:cxn ang="0">
+                  <a:pos x="connsiteX7" y="connsiteY7"/>
+                </a:cxn>
+                <a:cxn ang="0">
+                  <a:pos x="connsiteX8" y="connsiteY8"/>
+                </a:cxn>
+              </a:cxnLst>
+              <a:rect l="l" t="t" r="r" b="b"/>
+              <a:pathLst>
+                <a:path w="1460502" h="1557542">
+                  <a:moveTo>
+                    <a:pt x="730251" y="0"/>
+                  </a:moveTo>
+                  <a:cubicBezTo>
+                    <a:pt x="1133557" y="0"/>
+                    <a:pt x="1460502" y="350378"/>
+                    <a:pt x="1460502" y="782592"/>
+                  </a:cubicBezTo>
+                  <a:cubicBezTo>
+                    <a:pt x="1460502" y="890646"/>
+                    <a:pt x="1440068" y="993584"/>
+                    <a:pt x="1403115" y="1087212"/>
+                  </a:cubicBezTo>
+                  <a:lnTo>
+                    <a:pt x="1381833" y="1129233"/>
+                  </a:lnTo>
+                  <a:lnTo>
+                    <a:pt x="633566" y="1129233"/>
+                  </a:lnTo>
+                  <a:lnTo>
+                    <a:pt x="633566" y="1557542"/>
+                  </a:lnTo>
+                  <a:lnTo>
+                    <a:pt x="583080" y="1549285"/>
+                  </a:lnTo>
+                  <a:cubicBezTo>
+                    <a:pt x="250318" y="1476311"/>
+                    <a:pt x="0" y="1160779"/>
+                    <a:pt x="0" y="782592"/>
+                  </a:cubicBezTo>
+                  <a:cubicBezTo>
+                    <a:pt x="0" y="350378"/>
+                    <a:pt x="326945" y="0"/>
+                    <a:pt x="730251" y="0"/>
+                  </a:cubicBezTo>
+                  <a:close/>
+                </a:path>
+              </a:pathLst>
+            </a:custGeom>
+          </p:spPr>
+        </p:pic>
+        <p:pic>
+          <p:nvPicPr>
+            <p:cNvPr id="68" name="图片 67">
+              <a:extLst>
+                <a:ext uri="{FF2B5EF4-FFF2-40B4-BE49-F238E27FC236}">
+                  <a16:creationId xmlns:a16="http://schemas.microsoft.com/office/drawing/2014/main" id="{C7B2CEBA-ADC4-7269-40F2-ECFBB50F7168}"/>
+                </a:ext>
+              </a:extLst>
+            </p:cNvPr>
+            <p:cNvPicPr>
+              <a:picLocks noChangeAspect="1"/>
+            </p:cNvPicPr>
+            <p:nvPr/>
+          </p:nvPicPr>
+          <p:blipFill>
+            <a:blip r:embed="rId13" cstate="print">
+              <a:extLst>
+                <a:ext uri="{28A0092B-C50C-407E-A947-70E740481C1C}">
+                  <a14:useLocalDpi xmlns:a14="http://schemas.microsoft.com/office/drawing/2010/main" val="0"/>
+                </a:ext>
+              </a:extLst>
+            </a:blip>
+            <a:stretch>
+              <a:fillRect/>
+            </a:stretch>
+          </p:blipFill>
+          <p:spPr>
+            <a:xfrm>
+              <a:off x="4980759" y="3961613"/>
+              <a:ext cx="292925" cy="315226"/>
+            </a:xfrm>
+            <a:prstGeom prst="rect">
+              <a:avLst/>
+            </a:prstGeom>
+          </p:spPr>
+        </p:pic>
+        <p:pic>
+          <p:nvPicPr>
+            <p:cNvPr id="71" name="图片 70">
+              <a:extLst>
+                <a:ext uri="{FF2B5EF4-FFF2-40B4-BE49-F238E27FC236}">
+                  <a16:creationId xmlns:a16="http://schemas.microsoft.com/office/drawing/2014/main" id="{20DE8EEF-BDC0-9D2F-CFF5-896C9116F33B}"/>
+                </a:ext>
+              </a:extLst>
+            </p:cNvPr>
+            <p:cNvPicPr>
+              <a:picLocks noChangeAspect="1"/>
+            </p:cNvPicPr>
+            <p:nvPr/>
+          </p:nvPicPr>
+          <p:blipFill>
+            <a:blip r:embed="rId13" cstate="print">
+              <a:extLst>
+                <a:ext uri="{28A0092B-C50C-407E-A947-70E740481C1C}">
+                  <a14:useLocalDpi xmlns:a14="http://schemas.microsoft.com/office/drawing/2010/main" val="0"/>
+                </a:ext>
+              </a:extLst>
+            </a:blip>
+            <a:stretch>
+              <a:fillRect/>
+            </a:stretch>
+          </p:blipFill>
+          <p:spPr>
+            <a:xfrm>
+              <a:off x="5707619" y="3393783"/>
+              <a:ext cx="292925" cy="315226"/>
+            </a:xfrm>
+            <a:prstGeom prst="rect">
+              <a:avLst/>
+            </a:prstGeom>
+          </p:spPr>
+        </p:pic>
+      </p:grpSp>
+      <p:sp>
+        <p:nvSpPr>
+          <p:cNvPr id="7" name="文本框 6">
+            <a:extLst>
+              <a:ext uri="{FF2B5EF4-FFF2-40B4-BE49-F238E27FC236}">
+                <a16:creationId xmlns:a16="http://schemas.microsoft.com/office/drawing/2014/main" id="{F7988535-8D77-479C-0192-2CB12E34A806}"/>
+              </a:ext>
+            </a:extLst>
+          </p:cNvPr>
+          <p:cNvSpPr txBox="1"/>
+          <p:nvPr/>
+        </p:nvSpPr>
+        <p:spPr>
+          <a:xfrm>
+            <a:off x="990682" y="1004244"/>
+            <a:ext cx="1785768" cy="246862"/>
+          </a:xfrm>
+          <a:prstGeom prst="rect">
+            <a:avLst/>
+          </a:prstGeom>
+          <a:noFill/>
+        </p:spPr>
+        <p:txBody>
+          <a:bodyPr wrap="square">
+            <a:spAutoFit/>
+          </a:bodyPr>
+          <a:lstStyle/>
+          <a:p>
+            <a:r>
+              <a:rPr lang="en-US" altLang="zh-CN" sz="1004" b="1" i="1" dirty="0">
+                <a:solidFill>
+                  <a:schemeClr val="accent6">
+                    <a:lumMod val="50000"/>
+                  </a:schemeClr>
+                </a:solidFill>
+                <a:latin typeface="思源宋体" panose="02020400000000000000" pitchFamily="18" charset="-122"/>
+                <a:ea typeface="思源宋体" panose="02020400000000000000" pitchFamily="18" charset="-122"/>
+                <a:cs typeface="Calibri" panose="020F0502020204030204" pitchFamily="34" charset="0"/>
+              </a:rPr>
+              <a:t>“</a:t>
+            </a:r>
+            <a:r>
+              <a:rPr lang="en-US" altLang="zh-CN" sz="1004" i="1" dirty="0">
+                <a:solidFill>
+                  <a:schemeClr val="accent6">
+                    <a:lumMod val="50000"/>
+                  </a:schemeClr>
+                </a:solidFill>
+                <a:latin typeface="思源宋体" panose="02020400000000000000" pitchFamily="18" charset="-122"/>
+                <a:ea typeface="思源宋体" panose="02020400000000000000" pitchFamily="18" charset="-122"/>
+                <a:cs typeface="Calibri" panose="020F0502020204030204" pitchFamily="34" charset="0"/>
+              </a:rPr>
+              <a:t>Hey robot, come here.”</a:t>
+            </a:r>
+            <a:endParaRPr lang="zh-CN" altLang="en-US" sz="1004" i="1" dirty="0">
+              <a:solidFill>
+                <a:schemeClr val="accent6">
+                  <a:lumMod val="50000"/>
+                </a:schemeClr>
+              </a:solidFill>
+              <a:latin typeface="思源宋体" panose="02020400000000000000" pitchFamily="18" charset="-122"/>
+              <a:ea typeface="思源宋体" panose="02020400000000000000" pitchFamily="18" charset="-122"/>
+              <a:cs typeface="Calibri" panose="020F0502020204030204" pitchFamily="34" charset="0"/>
+            </a:endParaRPr>
+          </a:p>
+        </p:txBody>
+      </p:sp>
+      <p:pic>
+        <p:nvPicPr>
+          <p:cNvPr id="30" name="图片 29">
+            <a:extLst>
+              <a:ext uri="{FF2B5EF4-FFF2-40B4-BE49-F238E27FC236}">
+                <a16:creationId xmlns:a16="http://schemas.microsoft.com/office/drawing/2014/main" id="{FF080DCB-7243-9335-1EEB-795196F8CCC1}"/>
+              </a:ext>
+            </a:extLst>
+          </p:cNvPr>
+          <p:cNvPicPr>
+            <a:picLocks noChangeAspect="1"/>
+          </p:cNvPicPr>
+          <p:nvPr/>
+        </p:nvPicPr>
+        <p:blipFill>
+          <a:blip r:embed="rId13" cstate="print">
+            <a:extLst>
+              <a:ext uri="{28A0092B-C50C-407E-A947-70E740481C1C}">
+                <a14:useLocalDpi xmlns:a14="http://schemas.microsoft.com/office/drawing/2010/main" val="0"/>
+              </a:ext>
+            </a:extLst>
+          </a:blip>
+          <a:stretch>
+            <a:fillRect/>
+          </a:stretch>
+        </p:blipFill>
+        <p:spPr>
+          <a:xfrm>
+            <a:off x="5677551" y="3766776"/>
+            <a:ext cx="294042" cy="316428"/>
+          </a:xfrm>
+          <a:prstGeom prst="rect">
+            <a:avLst/>
+          </a:prstGeom>
+        </p:spPr>
+      </p:pic>
+      <p:cxnSp>
+        <p:nvCxnSpPr>
+          <p:cNvPr id="17" name="直线连接符 7">
+            <a:extLst>
+              <a:ext uri="{FF2B5EF4-FFF2-40B4-BE49-F238E27FC236}">
+                <a16:creationId xmlns:a16="http://schemas.microsoft.com/office/drawing/2014/main" id="{8011C25B-62FA-BB5F-F851-B8B8132D753A}"/>
+              </a:ext>
+            </a:extLst>
+          </p:cNvPr>
+          <p:cNvCxnSpPr>
+            <a:cxnSpLocks/>
+            <a:endCxn id="71" idx="2"/>
+          </p:cNvCxnSpPr>
+          <p:nvPr/>
+        </p:nvCxnSpPr>
+        <p:spPr>
+          <a:xfrm rot="5400000" flipH="1">
+            <a:off x="4275655" y="3398440"/>
+            <a:ext cx="1355697" cy="737879"/>
+          </a:xfrm>
+          <a:prstGeom prst="curvedConnector3">
+            <a:avLst>
+              <a:gd name="adj1" fmla="val 56413"/>
+            </a:avLst>
+          </a:prstGeom>
+          <a:ln w="38100">
+            <a:solidFill>
+              <a:schemeClr val="accent2">
+                <a:lumMod val="75000"/>
+              </a:schemeClr>
+            </a:solidFill>
+            <a:prstDash val="sysDash"/>
+          </a:ln>
+        </p:spPr>
+        <p:style>
+          <a:lnRef idx="1">
+            <a:schemeClr val="accent1"/>
+          </a:lnRef>
+          <a:fillRef idx="0">
+            <a:schemeClr val="accent1"/>
+          </a:fillRef>
+          <a:effectRef idx="0">
+            <a:schemeClr val="accent1"/>
+          </a:effectRef>
+          <a:fontRef idx="minor">
+            <a:schemeClr val="tx1"/>
+          </a:fontRef>
+        </p:style>
+      </p:cxnSp>
+      <p:pic>
+        <p:nvPicPr>
+          <p:cNvPr id="29" name="图片 28">
+            <a:extLst>
+              <a:ext uri="{FF2B5EF4-FFF2-40B4-BE49-F238E27FC236}">
+                <a16:creationId xmlns:a16="http://schemas.microsoft.com/office/drawing/2014/main" id="{7EE374E0-AFE3-32E1-5770-580FBFAE17F4}"/>
+              </a:ext>
+            </a:extLst>
+          </p:cNvPr>
+          <p:cNvPicPr>
+            <a:picLocks noChangeAspect="1"/>
+          </p:cNvPicPr>
+          <p:nvPr/>
+        </p:nvPicPr>
+        <p:blipFill>
+          <a:blip r:embed="rId14"/>
+          <a:stretch>
+            <a:fillRect/>
+          </a:stretch>
+        </p:blipFill>
+        <p:spPr>
+          <a:xfrm>
+            <a:off x="3842908" y="717728"/>
+            <a:ext cx="481757" cy="481757"/>
+          </a:xfrm>
+          <a:prstGeom prst="rect">
+            <a:avLst/>
+          </a:prstGeom>
+        </p:spPr>
+      </p:pic>
+    </p:spTree>
+    <p:extLst>
+      <p:ext uri="{BB962C8B-B14F-4D97-AF65-F5344CB8AC3E}">
+        <p14:creationId xmlns:p14="http://schemas.microsoft.com/office/powerpoint/2010/main" val="461852881"/>
+      </p:ext>
+    </p:extLst>
+  </p:cSld>
+  <p:clrMapOvr>
+    <a:masterClrMapping/>
+  </p:clrMapOvr>
+</p:sld>
+</file>
+
 <file path=ppt/theme/theme1.xml><?xml version="1.0" encoding="utf-8"?>
 <a:theme xmlns:a="http://schemas.openxmlformats.org/drawingml/2006/main" name="Office 2013 - 2022 主题">
   <a:themeElements>

--- a/figures/teaser.pptx
+++ b/figures/teaser.pptx
@@ -198,7 +198,7 @@
           <a:p>
             <a:fld id="{DC326FB3-BDA4-439C-AD6C-7794CCFDC1F9}" type="datetimeFigureOut">
               <a:rPr lang="zh-CN" altLang="en-US" smtClean="0"/>
-              <a:t>2026/4/26</a:t>
+              <a:t>2026/4/27</a:t>
             </a:fld>
             <a:endParaRPr lang="zh-CN" altLang="en-US"/>
           </a:p>
@@ -774,7 +774,7 @@
           <a:p>
             <a:fld id="{38403DB8-BCAA-C044-AB0C-911ED2AAA810}" type="datetimeFigureOut">
               <a:rPr kumimoji="1" lang="zh-CN" altLang="en-US" smtClean="0"/>
-              <a:t>2026/4/26</a:t>
+              <a:t>2026/4/27</a:t>
             </a:fld>
             <a:endParaRPr kumimoji="1" lang="zh-CN" altLang="en-US"/>
           </a:p>
@@ -944,7 +944,7 @@
           <a:p>
             <a:fld id="{38403DB8-BCAA-C044-AB0C-911ED2AAA810}" type="datetimeFigureOut">
               <a:rPr kumimoji="1" lang="zh-CN" altLang="en-US" smtClean="0"/>
-              <a:t>2026/4/26</a:t>
+              <a:t>2026/4/27</a:t>
             </a:fld>
             <a:endParaRPr kumimoji="1" lang="zh-CN" altLang="en-US"/>
           </a:p>
@@ -1124,7 +1124,7 @@
           <a:p>
             <a:fld id="{38403DB8-BCAA-C044-AB0C-911ED2AAA810}" type="datetimeFigureOut">
               <a:rPr kumimoji="1" lang="zh-CN" altLang="en-US" smtClean="0"/>
-              <a:t>2026/4/26</a:t>
+              <a:t>2026/4/27</a:t>
             </a:fld>
             <a:endParaRPr kumimoji="1" lang="zh-CN" altLang="en-US"/>
           </a:p>
@@ -1294,7 +1294,7 @@
           <a:p>
             <a:fld id="{38403DB8-BCAA-C044-AB0C-911ED2AAA810}" type="datetimeFigureOut">
               <a:rPr kumimoji="1" lang="zh-CN" altLang="en-US" smtClean="0"/>
-              <a:t>2026/4/26</a:t>
+              <a:t>2026/4/27</a:t>
             </a:fld>
             <a:endParaRPr kumimoji="1" lang="zh-CN" altLang="en-US"/>
           </a:p>
@@ -1540,7 +1540,7 @@
           <a:p>
             <a:fld id="{38403DB8-BCAA-C044-AB0C-911ED2AAA810}" type="datetimeFigureOut">
               <a:rPr kumimoji="1" lang="zh-CN" altLang="en-US" smtClean="0"/>
-              <a:t>2026/4/26</a:t>
+              <a:t>2026/4/27</a:t>
             </a:fld>
             <a:endParaRPr kumimoji="1" lang="zh-CN" altLang="en-US"/>
           </a:p>
@@ -1772,7 +1772,7 @@
           <a:p>
             <a:fld id="{38403DB8-BCAA-C044-AB0C-911ED2AAA810}" type="datetimeFigureOut">
               <a:rPr kumimoji="1" lang="zh-CN" altLang="en-US" smtClean="0"/>
-              <a:t>2026/4/26</a:t>
+              <a:t>2026/4/27</a:t>
             </a:fld>
             <a:endParaRPr kumimoji="1" lang="zh-CN" altLang="en-US"/>
           </a:p>
@@ -2139,7 +2139,7 @@
           <a:p>
             <a:fld id="{38403DB8-BCAA-C044-AB0C-911ED2AAA810}" type="datetimeFigureOut">
               <a:rPr kumimoji="1" lang="zh-CN" altLang="en-US" smtClean="0"/>
-              <a:t>2026/4/26</a:t>
+              <a:t>2026/4/27</a:t>
             </a:fld>
             <a:endParaRPr kumimoji="1" lang="zh-CN" altLang="en-US"/>
           </a:p>
@@ -2257,7 +2257,7 @@
           <a:p>
             <a:fld id="{38403DB8-BCAA-C044-AB0C-911ED2AAA810}" type="datetimeFigureOut">
               <a:rPr kumimoji="1" lang="zh-CN" altLang="en-US" smtClean="0"/>
-              <a:t>2026/4/26</a:t>
+              <a:t>2026/4/27</a:t>
             </a:fld>
             <a:endParaRPr kumimoji="1" lang="zh-CN" altLang="en-US"/>
           </a:p>
@@ -2352,7 +2352,7 @@
           <a:p>
             <a:fld id="{38403DB8-BCAA-C044-AB0C-911ED2AAA810}" type="datetimeFigureOut">
               <a:rPr kumimoji="1" lang="zh-CN" altLang="en-US" smtClean="0"/>
-              <a:t>2026/4/26</a:t>
+              <a:t>2026/4/27</a:t>
             </a:fld>
             <a:endParaRPr kumimoji="1" lang="zh-CN" altLang="en-US"/>
           </a:p>
@@ -2629,7 +2629,7 @@
           <a:p>
             <a:fld id="{38403DB8-BCAA-C044-AB0C-911ED2AAA810}" type="datetimeFigureOut">
               <a:rPr kumimoji="1" lang="zh-CN" altLang="en-US" smtClean="0"/>
-              <a:t>2026/4/26</a:t>
+              <a:t>2026/4/27</a:t>
             </a:fld>
             <a:endParaRPr kumimoji="1" lang="zh-CN" altLang="en-US"/>
           </a:p>
@@ -2886,7 +2886,7 @@
           <a:p>
             <a:fld id="{38403DB8-BCAA-C044-AB0C-911ED2AAA810}" type="datetimeFigureOut">
               <a:rPr kumimoji="1" lang="zh-CN" altLang="en-US" smtClean="0"/>
-              <a:t>2026/4/26</a:t>
+              <a:t>2026/4/27</a:t>
             </a:fld>
             <a:endParaRPr kumimoji="1" lang="zh-CN" altLang="en-US"/>
           </a:p>
@@ -3099,7 +3099,7 @@
           <a:p>
             <a:fld id="{38403DB8-BCAA-C044-AB0C-911ED2AAA810}" type="datetimeFigureOut">
               <a:rPr kumimoji="1" lang="zh-CN" altLang="en-US" smtClean="0"/>
-              <a:t>2026/4/26</a:t>
+              <a:t>2026/4/27</a:t>
             </a:fld>
             <a:endParaRPr kumimoji="1" lang="zh-CN" altLang="en-US"/>
           </a:p>
@@ -15234,25 +15234,11 @@
               <a:lstStyle/>
               <a:p>
                 <a:r>
-                  <a:rPr lang="en-US" altLang="zh-CN" sz="1004" b="1" dirty="0">
-                    <a:latin typeface="思源宋体" panose="02020400000000000000" pitchFamily="18" charset="-122"/>
-                    <a:ea typeface="思源宋体" panose="02020400000000000000" pitchFamily="18" charset="-122"/>
-                  </a:rPr>
-                  <a:t>Query</a:t>
-                </a:r>
-                <a:r>
                   <a:rPr lang="en-US" altLang="zh-CN" sz="1004" dirty="0">
                     <a:latin typeface="思源宋体" panose="02020400000000000000" pitchFamily="18" charset="-122"/>
                     <a:ea typeface="思源宋体" panose="02020400000000000000" pitchFamily="18" charset="-122"/>
                   </a:rPr>
-                  <a:t>:</a:t>
-                </a:r>
-                <a:r>
-                  <a:rPr lang="en-US" altLang="zh-CN" sz="1004" b="1" dirty="0">
-                    <a:latin typeface="思源宋体" panose="02020400000000000000" pitchFamily="18" charset="-122"/>
-                    <a:ea typeface="思源宋体" panose="02020400000000000000" pitchFamily="18" charset="-122"/>
-                  </a:rPr>
-                  <a:t> </a:t>
+                  <a:t>Query: </a:t>
                 </a:r>
                 <a:r>
                   <a:rPr lang="en-US" altLang="zh-CN" sz="1004" i="1" dirty="0">
@@ -15498,7 +15484,7 @@
               <a:lstStyle/>
               <a:p>
                 <a:r>
-                  <a:rPr lang="en-US" altLang="zh-CN" sz="1400" b="1" dirty="0">
+                  <a:rPr lang="en-US" altLang="zh-CN" sz="1400" dirty="0">
                     <a:solidFill>
                       <a:schemeClr val="accent4">
                         <a:lumMod val="50000"/>
@@ -15509,7 +15495,7 @@
                   </a:rPr>
                   <a:t>footsteps</a:t>
                 </a:r>
-                <a:endParaRPr lang="zh-CN" altLang="en-US" sz="1400" b="1" dirty="0">
+                <a:endParaRPr lang="zh-CN" altLang="en-US" sz="1400" dirty="0">
                   <a:solidFill>
                     <a:schemeClr val="accent4">
                       <a:lumMod val="50000"/>
@@ -15687,7 +15673,7 @@
               <a:lstStyle/>
               <a:p>
                 <a:r>
-                  <a:rPr lang="en-US" altLang="zh-CN" sz="1400" b="1" dirty="0">
+                  <a:rPr lang="en-US" altLang="zh-CN" sz="1400" dirty="0">
                     <a:solidFill>
                       <a:schemeClr val="accent4">
                         <a:lumMod val="50000"/>
@@ -15698,7 +15684,7 @@
                   </a:rPr>
                   <a:t>conversation</a:t>
                 </a:r>
-                <a:endParaRPr lang="zh-CN" altLang="en-US" sz="1400" b="1" dirty="0">
+                <a:endParaRPr lang="zh-CN" altLang="en-US" sz="1400" dirty="0">
                   <a:solidFill>
                     <a:schemeClr val="accent4">
                       <a:lumMod val="50000"/>
@@ -15867,7 +15853,7 @@
               <a:lstStyle/>
               <a:p>
                 <a:r>
-                  <a:rPr lang="en-US" altLang="zh-CN" sz="1400" b="1" dirty="0">
+                  <a:rPr lang="en-US" altLang="zh-CN" sz="1400" dirty="0">
                     <a:solidFill>
                       <a:schemeClr val="accent4">
                         <a:lumMod val="50000"/>
@@ -15878,7 +15864,7 @@
                   </a:rPr>
                   <a:t>footsteps</a:t>
                 </a:r>
-                <a:endParaRPr lang="zh-CN" altLang="en-US" sz="1400" b="1" dirty="0">
+                <a:endParaRPr lang="zh-CN" altLang="en-US" sz="1400" dirty="0">
                   <a:solidFill>
                     <a:schemeClr val="accent4">
                       <a:lumMod val="50000"/>
@@ -16032,7 +16018,7 @@
                 <a:lstStyle/>
                 <a:p>
                   <a:r>
-                    <a:rPr lang="en-US" altLang="zh-CN" sz="1400" b="1" dirty="0">
+                    <a:rPr lang="en-US" altLang="zh-CN" sz="1400" dirty="0">
                       <a:solidFill>
                         <a:schemeClr val="accent6">
                           <a:lumMod val="50000"/>
@@ -17330,19 +17316,6 @@
           <a:lstStyle/>
           <a:p>
             <a:r>
-              <a:rPr lang="en-US" altLang="zh-CN" sz="1004" b="1" i="1" dirty="0">
-                <a:solidFill>
-                  <a:schemeClr val="accent6">
-                    <a:lumMod val="50000"/>
-                  </a:schemeClr>
-                </a:solidFill>
-                <a:latin typeface="思源宋体" panose="02020400000000000000" pitchFamily="18" charset="-122"/>
-                <a:ea typeface="思源宋体" panose="02020400000000000000" pitchFamily="18" charset="-122"/>
-                <a:cs typeface="Calibri" panose="020F0502020204030204" pitchFamily="34" charset="0"/>
-              </a:rPr>
-              <a:t>“</a:t>
-            </a:r>
-            <a:r>
               <a:rPr lang="en-US" altLang="zh-CN" sz="1004" i="1" dirty="0">
                 <a:solidFill>
                   <a:schemeClr val="accent6">
@@ -17353,7 +17326,7 @@
                 <a:ea typeface="思源宋体" panose="02020400000000000000" pitchFamily="18" charset="-122"/>
                 <a:cs typeface="Calibri" panose="020F0502020204030204" pitchFamily="34" charset="0"/>
               </a:rPr>
-              <a:t>Hey robot, come here.”</a:t>
+              <a:t>“Hey robot, come here.”</a:t>
             </a:r>
             <a:endParaRPr lang="zh-CN" altLang="en-US" sz="1004" i="1" dirty="0">
               <a:solidFill>
@@ -17455,7 +17428,7 @@
       </p:cxnSp>
       <p:pic>
         <p:nvPicPr>
-          <p:cNvPr id="29" name="图片 28">
+          <p:cNvPr id="29" name="图片 28" hidden="1">
             <a:extLst>
               <a:ext uri="{FF2B5EF4-FFF2-40B4-BE49-F238E27FC236}">
                 <a16:creationId xmlns:a16="http://schemas.microsoft.com/office/drawing/2014/main" id="{7EE374E0-AFE3-32E1-5770-580FBFAE17F4}"/>
@@ -17477,6 +17450,36 @@
           <a:xfrm>
             <a:off x="3842908" y="717728"/>
             <a:ext cx="481757" cy="481757"/>
+          </a:xfrm>
+          <a:prstGeom prst="rect">
+            <a:avLst/>
+          </a:prstGeom>
+        </p:spPr>
+      </p:pic>
+      <p:pic>
+        <p:nvPicPr>
+          <p:cNvPr id="6" name="图片 5">
+            <a:extLst>
+              <a:ext uri="{FF2B5EF4-FFF2-40B4-BE49-F238E27FC236}">
+                <a16:creationId xmlns:a16="http://schemas.microsoft.com/office/drawing/2014/main" id="{7F4D5E33-9AB1-A3CE-C846-1EE1BD493F00}"/>
+              </a:ext>
+            </a:extLst>
+          </p:cNvPr>
+          <p:cNvPicPr>
+            <a:picLocks noChangeAspect="1"/>
+          </p:cNvPicPr>
+          <p:nvPr/>
+        </p:nvPicPr>
+        <p:blipFill>
+          <a:blip r:embed="rId14"/>
+          <a:stretch>
+            <a:fillRect/>
+          </a:stretch>
+        </p:blipFill>
+        <p:spPr>
+          <a:xfrm>
+            <a:off x="4787231" y="1440829"/>
+            <a:ext cx="424235" cy="424235"/>
           </a:xfrm>
           <a:prstGeom prst="rect">
             <a:avLst/>

--- a/figures/teaser.pptx
+++ b/figures/teaser.pptx
@@ -198,7 +198,7 @@
           <a:p>
             <a:fld id="{DC326FB3-BDA4-439C-AD6C-7794CCFDC1F9}" type="datetimeFigureOut">
               <a:rPr lang="zh-CN" altLang="en-US" smtClean="0"/>
-              <a:t>2026/4/27</a:t>
+              <a:t>2026/7/15</a:t>
             </a:fld>
             <a:endParaRPr lang="zh-CN" altLang="en-US"/>
           </a:p>
@@ -774,7 +774,7 @@
           <a:p>
             <a:fld id="{38403DB8-BCAA-C044-AB0C-911ED2AAA810}" type="datetimeFigureOut">
               <a:rPr kumimoji="1" lang="zh-CN" altLang="en-US" smtClean="0"/>
-              <a:t>2026/4/27</a:t>
+              <a:t>2026/7/15</a:t>
             </a:fld>
             <a:endParaRPr kumimoji="1" lang="zh-CN" altLang="en-US"/>
           </a:p>
@@ -944,7 +944,7 @@
           <a:p>
             <a:fld id="{38403DB8-BCAA-C044-AB0C-911ED2AAA810}" type="datetimeFigureOut">
               <a:rPr kumimoji="1" lang="zh-CN" altLang="en-US" smtClean="0"/>
-              <a:t>2026/4/27</a:t>
+              <a:t>2026/7/15</a:t>
             </a:fld>
             <a:endParaRPr kumimoji="1" lang="zh-CN" altLang="en-US"/>
           </a:p>
@@ -1124,7 +1124,7 @@
           <a:p>
             <a:fld id="{38403DB8-BCAA-C044-AB0C-911ED2AAA810}" type="datetimeFigureOut">
               <a:rPr kumimoji="1" lang="zh-CN" altLang="en-US" smtClean="0"/>
-              <a:t>2026/4/27</a:t>
+              <a:t>2026/7/15</a:t>
             </a:fld>
             <a:endParaRPr kumimoji="1" lang="zh-CN" altLang="en-US"/>
           </a:p>
@@ -1294,7 +1294,7 @@
           <a:p>
             <a:fld id="{38403DB8-BCAA-C044-AB0C-911ED2AAA810}" type="datetimeFigureOut">
               <a:rPr kumimoji="1" lang="zh-CN" altLang="en-US" smtClean="0"/>
-              <a:t>2026/4/27</a:t>
+              <a:t>2026/7/15</a:t>
             </a:fld>
             <a:endParaRPr kumimoji="1" lang="zh-CN" altLang="en-US"/>
           </a:p>
@@ -1540,7 +1540,7 @@
           <a:p>
             <a:fld id="{38403DB8-BCAA-C044-AB0C-911ED2AAA810}" type="datetimeFigureOut">
               <a:rPr kumimoji="1" lang="zh-CN" altLang="en-US" smtClean="0"/>
-              <a:t>2026/4/27</a:t>
+              <a:t>2026/7/15</a:t>
             </a:fld>
             <a:endParaRPr kumimoji="1" lang="zh-CN" altLang="en-US"/>
           </a:p>
@@ -1772,7 +1772,7 @@
           <a:p>
             <a:fld id="{38403DB8-BCAA-C044-AB0C-911ED2AAA810}" type="datetimeFigureOut">
               <a:rPr kumimoji="1" lang="zh-CN" altLang="en-US" smtClean="0"/>
-              <a:t>2026/4/27</a:t>
+              <a:t>2026/7/15</a:t>
             </a:fld>
             <a:endParaRPr kumimoji="1" lang="zh-CN" altLang="en-US"/>
           </a:p>
@@ -2139,7 +2139,7 @@
           <a:p>
             <a:fld id="{38403DB8-BCAA-C044-AB0C-911ED2AAA810}" type="datetimeFigureOut">
               <a:rPr kumimoji="1" lang="zh-CN" altLang="en-US" smtClean="0"/>
-              <a:t>2026/4/27</a:t>
+              <a:t>2026/7/15</a:t>
             </a:fld>
             <a:endParaRPr kumimoji="1" lang="zh-CN" altLang="en-US"/>
           </a:p>
@@ -2257,7 +2257,7 @@
           <a:p>
             <a:fld id="{38403DB8-BCAA-C044-AB0C-911ED2AAA810}" type="datetimeFigureOut">
               <a:rPr kumimoji="1" lang="zh-CN" altLang="en-US" smtClean="0"/>
-              <a:t>2026/4/27</a:t>
+              <a:t>2026/7/15</a:t>
             </a:fld>
             <a:endParaRPr kumimoji="1" lang="zh-CN" altLang="en-US"/>
           </a:p>
@@ -2352,7 +2352,7 @@
           <a:p>
             <a:fld id="{38403DB8-BCAA-C044-AB0C-911ED2AAA810}" type="datetimeFigureOut">
               <a:rPr kumimoji="1" lang="zh-CN" altLang="en-US" smtClean="0"/>
-              <a:t>2026/4/27</a:t>
+              <a:t>2026/7/15</a:t>
             </a:fld>
             <a:endParaRPr kumimoji="1" lang="zh-CN" altLang="en-US"/>
           </a:p>
@@ -2629,7 +2629,7 @@
           <a:p>
             <a:fld id="{38403DB8-BCAA-C044-AB0C-911ED2AAA810}" type="datetimeFigureOut">
               <a:rPr kumimoji="1" lang="zh-CN" altLang="en-US" smtClean="0"/>
-              <a:t>2026/4/27</a:t>
+              <a:t>2026/7/15</a:t>
             </a:fld>
             <a:endParaRPr kumimoji="1" lang="zh-CN" altLang="en-US"/>
           </a:p>
@@ -2886,7 +2886,7 @@
           <a:p>
             <a:fld id="{38403DB8-BCAA-C044-AB0C-911ED2AAA810}" type="datetimeFigureOut">
               <a:rPr kumimoji="1" lang="zh-CN" altLang="en-US" smtClean="0"/>
-              <a:t>2026/4/27</a:t>
+              <a:t>2026/7/15</a:t>
             </a:fld>
             <a:endParaRPr kumimoji="1" lang="zh-CN" altLang="en-US"/>
           </a:p>
@@ -3099,7 +3099,7 @@
           <a:p>
             <a:fld id="{38403DB8-BCAA-C044-AB0C-911ED2AAA810}" type="datetimeFigureOut">
               <a:rPr kumimoji="1" lang="zh-CN" altLang="en-US" smtClean="0"/>
-              <a:t>2026/4/27</a:t>
+              <a:t>2026/7/15</a:t>
             </a:fld>
             <a:endParaRPr kumimoji="1" lang="zh-CN" altLang="en-US"/>
           </a:p>
@@ -15414,7 +15414,27 @@
                     <a:latin typeface="思源宋体" panose="02020400000000000000" pitchFamily="18" charset="-122"/>
                     <a:ea typeface="思源宋体" panose="02020400000000000000" pitchFamily="18" charset="-122"/>
                   </a:rPr>
-                  <a:t>The robot should yield during when it detects or hears a walking human.</a:t>
+                  <a:t>The robot should </a:t>
+                </a:r>
+                <a:r>
+                  <a:rPr lang="en-US" altLang="zh-CN" sz="1004">
+                    <a:solidFill>
+                      <a:schemeClr val="tx1"/>
+                    </a:solidFill>
+                    <a:latin typeface="思源宋体" panose="02020400000000000000" pitchFamily="18" charset="-122"/>
+                    <a:ea typeface="思源宋体" panose="02020400000000000000" pitchFamily="18" charset="-122"/>
+                  </a:rPr>
+                  <a:t>yield when </a:t>
+                </a:r>
+                <a:r>
+                  <a:rPr lang="en-US" altLang="zh-CN" sz="1004" dirty="0">
+                    <a:solidFill>
+                      <a:schemeClr val="tx1"/>
+                    </a:solidFill>
+                    <a:latin typeface="思源宋体" panose="02020400000000000000" pitchFamily="18" charset="-122"/>
+                    <a:ea typeface="思源宋体" panose="02020400000000000000" pitchFamily="18" charset="-122"/>
+                  </a:rPr>
+                  <a:t>it detects or hears a walking human.</a:t>
                 </a:r>
               </a:p>
             </p:txBody>
